--- a/ADG/09장/9장_ActiveDataGuard_실시간조회와DML리다이렉션.pptx
+++ b/ADG/09장/9장_ActiveDataGuard_실시간조회와DML리다이렉션.pptx
@@ -5687,7 +5687,73 @@
                 </a:solidFill>
                 <a:latin typeface="맑은 고딕"/>
               </a:rPr>
-              <a:t>•  `INSERT` 후 `COMMIT` 없이 `EXIT` → Standby 에서 **보였다**</a:t>
+              <a:t>•  </a:t>
+            </a:r>
+            <a:r>
+              <a:rPr sz="1700" b="0">
+                <a:solidFill>
+                  <a:srgbClr val="222222"/>
+                </a:solidFill>
+                <a:latin typeface="Consolas"/>
+                <a:cs typeface="Consolas"/>
+              </a:rPr>
+              <a:t>INSERT</a:t>
+            </a:r>
+            <a:r>
+              <a:rPr sz="1700" b="0">
+                <a:solidFill>
+                  <a:srgbClr val="222222"/>
+                </a:solidFill>
+                <a:latin typeface="맑은 고딕"/>
+              </a:rPr>
+              <a:t> 후 </a:t>
+            </a:r>
+            <a:r>
+              <a:rPr sz="1700" b="0">
+                <a:solidFill>
+                  <a:srgbClr val="222222"/>
+                </a:solidFill>
+                <a:latin typeface="Consolas"/>
+                <a:cs typeface="Consolas"/>
+              </a:rPr>
+              <a:t>COMMIT</a:t>
+            </a:r>
+            <a:r>
+              <a:rPr sz="1700" b="0">
+                <a:solidFill>
+                  <a:srgbClr val="222222"/>
+                </a:solidFill>
+                <a:latin typeface="맑은 고딕"/>
+              </a:rPr>
+              <a:t> 없이 </a:t>
+            </a:r>
+            <a:r>
+              <a:rPr sz="1700" b="0">
+                <a:solidFill>
+                  <a:srgbClr val="222222"/>
+                </a:solidFill>
+                <a:latin typeface="Consolas"/>
+                <a:cs typeface="Consolas"/>
+              </a:rPr>
+              <a:t>EXIT</a:t>
+            </a:r>
+            <a:r>
+              <a:rPr sz="1700" b="0">
+                <a:solidFill>
+                  <a:srgbClr val="222222"/>
+                </a:solidFill>
+                <a:latin typeface="맑은 고딕"/>
+              </a:rPr>
+              <a:t> → Standby 에서 </a:t>
+            </a:r>
+            <a:r>
+              <a:rPr sz="1700" b="1">
+                <a:solidFill>
+                  <a:srgbClr val="222222"/>
+                </a:solidFill>
+                <a:latin typeface="맑은 고딕"/>
+              </a:rPr>
+              <a:t>보였다</a:t>
             </a:r>
           </a:p>
           <a:p>
@@ -5703,7 +5769,16 @@
                 </a:solidFill>
                 <a:latin typeface="맑은 고딕"/>
               </a:rPr>
-              <a:t>•  원인은 Data Guard 가 아니라 **SQL*Plus**</a:t>
+              <a:t>•  원인은 Data Guard 가 아니라 </a:t>
+            </a:r>
+            <a:r>
+              <a:rPr sz="1700" b="1">
+                <a:solidFill>
+                  <a:srgbClr val="222222"/>
+                </a:solidFill>
+                <a:latin typeface="맑은 고딕"/>
+              </a:rPr>
+              <a:t>SQL*Plus</a:t>
             </a:r>
           </a:p>
           <a:p>
@@ -5735,7 +5810,16 @@
                 </a:solidFill>
                 <a:latin typeface="맑은 고딕"/>
               </a:rPr>
-              <a:t>•  **"제품이 이상하다"보다 "내 측정이 이상하다"를 먼저 의심한다**</a:t>
+              <a:t>•  </a:t>
+            </a:r>
+            <a:r>
+              <a:rPr sz="1700" b="1">
+                <a:solidFill>
+                  <a:srgbClr val="222222"/>
+                </a:solidFill>
+                <a:latin typeface="맑은 고딕"/>
+              </a:rPr>
+              <a:t>"제품이 이상하다"보다 "내 측정이 이상하다"를 먼저 의심한다</a:t>
             </a:r>
           </a:p>
         </p:txBody>
@@ -6169,7 +6253,26 @@
                 </a:solidFill>
                 <a:latin typeface="맑은 고딕"/>
               </a:rPr>
-              <a:t>•  `INSERT` → ORA-16000</a:t>
+              <a:t>•  </a:t>
+            </a:r>
+            <a:r>
+              <a:rPr sz="1700" b="0">
+                <a:solidFill>
+                  <a:srgbClr val="222222"/>
+                </a:solidFill>
+                <a:latin typeface="Consolas"/>
+                <a:cs typeface="Consolas"/>
+              </a:rPr>
+              <a:t>INSERT</a:t>
+            </a:r>
+            <a:r>
+              <a:rPr sz="1700" b="0">
+                <a:solidFill>
+                  <a:srgbClr val="222222"/>
+                </a:solidFill>
+                <a:latin typeface="맑은 고딕"/>
+              </a:rPr>
+              <a:t> → ORA-16000</a:t>
             </a:r>
           </a:p>
           <a:p>
@@ -6185,7 +6288,26 @@
                 </a:solidFill>
                 <a:latin typeface="맑은 고딕"/>
               </a:rPr>
-              <a:t>•  `UPDATE` → ORA-16000</a:t>
+              <a:t>•  </a:t>
+            </a:r>
+            <a:r>
+              <a:rPr sz="1700" b="0">
+                <a:solidFill>
+                  <a:srgbClr val="222222"/>
+                </a:solidFill>
+                <a:latin typeface="Consolas"/>
+                <a:cs typeface="Consolas"/>
+              </a:rPr>
+              <a:t>UPDATE</a:t>
+            </a:r>
+            <a:r>
+              <a:rPr sz="1700" b="0">
+                <a:solidFill>
+                  <a:srgbClr val="222222"/>
+                </a:solidFill>
+                <a:latin typeface="맑은 고딕"/>
+              </a:rPr>
+              <a:t> → ORA-16000</a:t>
             </a:r>
           </a:p>
           <a:p>
@@ -6201,7 +6323,26 @@
                 </a:solidFill>
                 <a:latin typeface="맑은 고딕"/>
               </a:rPr>
-              <a:t>•  `CREATE TABLE` → ORA-16000</a:t>
+              <a:t>•  </a:t>
+            </a:r>
+            <a:r>
+              <a:rPr sz="1700" b="0">
+                <a:solidFill>
+                  <a:srgbClr val="222222"/>
+                </a:solidFill>
+                <a:latin typeface="Consolas"/>
+                <a:cs typeface="Consolas"/>
+              </a:rPr>
+              <a:t>CREATE TABLE</a:t>
+            </a:r>
+            <a:r>
+              <a:rPr sz="1700" b="0">
+                <a:solidFill>
+                  <a:srgbClr val="222222"/>
+                </a:solidFill>
+                <a:latin typeface="맑은 고딕"/>
+              </a:rPr>
+              <a:t> → ORA-16000</a:t>
             </a:r>
           </a:p>
           <a:p>
@@ -6396,7 +6537,25 @@
                 </a:solidFill>
                 <a:latin typeface="맑은 고딕"/>
               </a:rPr>
-              <a:t>•  **정렬** — 7만 행 정렬 성공, TEMP 3MB씩 사용</a:t>
+              <a:t>•  </a:t>
+            </a:r>
+            <a:r>
+              <a:rPr sz="1700" b="1">
+                <a:solidFill>
+                  <a:srgbClr val="222222"/>
+                </a:solidFill>
+                <a:latin typeface="맑은 고딕"/>
+              </a:rPr>
+              <a:t>정렬</a:t>
+            </a:r>
+            <a:r>
+              <a:rPr sz="1700" b="0">
+                <a:solidFill>
+                  <a:srgbClr val="222222"/>
+                </a:solidFill>
+                <a:latin typeface="맑은 고딕"/>
+              </a:rPr>
+              <a:t> — 7만 행 정렬 성공, TEMP 3MB씩 사용</a:t>
             </a:r>
           </a:p>
           <a:p>
@@ -6412,7 +6571,45 @@
                 </a:solidFill>
                 <a:latin typeface="맑은 고딕"/>
               </a:rPr>
-              <a:t>•  **`EXPLAIN PLAN`** — `PLAN_TABLE` 이 GTT 다</a:t>
+              <a:t>•  </a:t>
+            </a:r>
+            <a:r>
+              <a:rPr sz="1700" b="1">
+                <a:solidFill>
+                  <a:srgbClr val="222222"/>
+                </a:solidFill>
+                <a:latin typeface="Consolas"/>
+                <a:cs typeface="Consolas"/>
+              </a:rPr>
+              <a:t>EXPLAIN PLAN</a:t>
+            </a:r>
+            <a:r>
+              <a:rPr sz="1700" b="0">
+                <a:solidFill>
+                  <a:srgbClr val="222222"/>
+                </a:solidFill>
+                <a:latin typeface="맑은 고딕"/>
+              </a:rPr>
+              <a:t> — </a:t>
+            </a:r>
+            <a:r>
+              <a:rPr sz="1700" b="0">
+                <a:solidFill>
+                  <a:srgbClr val="222222"/>
+                </a:solidFill>
+                <a:latin typeface="Consolas"/>
+                <a:cs typeface="Consolas"/>
+              </a:rPr>
+              <a:t>PLAN_TABLE</a:t>
+            </a:r>
+            <a:r>
+              <a:rPr sz="1700" b="0">
+                <a:solidFill>
+                  <a:srgbClr val="222222"/>
+                </a:solidFill>
+                <a:latin typeface="맑은 고딕"/>
+              </a:rPr>
+              <a:t> 이 GTT 다</a:t>
             </a:r>
           </a:p>
           <a:p>
@@ -6428,7 +6625,54 @@
                 </a:solidFill>
                 <a:latin typeface="맑은 고딕"/>
               </a:rPr>
-              <a:t>•  **GTT `INSERT`** — `TEMP_UNDO_ENABLED=FALSE` 인데도 동작</a:t>
+              <a:t>•  </a:t>
+            </a:r>
+            <a:r>
+              <a:rPr sz="1700" b="1">
+                <a:solidFill>
+                  <a:srgbClr val="222222"/>
+                </a:solidFill>
+                <a:latin typeface="맑은 고딕"/>
+              </a:rPr>
+              <a:t>GTT </a:t>
+            </a:r>
+            <a:r>
+              <a:rPr sz="1700" b="1">
+                <a:solidFill>
+                  <a:srgbClr val="222222"/>
+                </a:solidFill>
+                <a:latin typeface="Consolas"/>
+                <a:cs typeface="Consolas"/>
+              </a:rPr>
+              <a:t>INSERT</a:t>
+            </a:r>
+            <a:r>
+              <a:rPr sz="1700" b="0">
+                <a:solidFill>
+                  <a:srgbClr val="222222"/>
+                </a:solidFill>
+                <a:latin typeface="맑은 고딕"/>
+              </a:rPr>
+              <a:t> — </a:t>
+            </a:r>
+            <a:r>
+              <a:rPr sz="1700" b="0">
+                <a:solidFill>
+                  <a:srgbClr val="222222"/>
+                </a:solidFill>
+                <a:latin typeface="Consolas"/>
+                <a:cs typeface="Consolas"/>
+              </a:rPr>
+              <a:t>TEMP_UNDO_ENABLED=FALSE</a:t>
+            </a:r>
+            <a:r>
+              <a:rPr sz="1700" b="0">
+                <a:solidFill>
+                  <a:srgbClr val="222222"/>
+                </a:solidFill>
+                <a:latin typeface="맑은 고딕"/>
+              </a:rPr>
+              <a:t> 인데도 동작</a:t>
             </a:r>
           </a:p>
           <a:p>
@@ -6444,7 +6688,35 @@
                 </a:solidFill>
                 <a:latin typeface="맑은 고딕"/>
               </a:rPr>
-              <a:t>•  **시퀀스 `NEXTVAL`** — 되지만 값이 뛴다</a:t>
+              <a:t>•  </a:t>
+            </a:r>
+            <a:r>
+              <a:rPr sz="1700" b="1">
+                <a:solidFill>
+                  <a:srgbClr val="222222"/>
+                </a:solidFill>
+                <a:latin typeface="맑은 고딕"/>
+              </a:rPr>
+              <a:t>시퀀스 </a:t>
+            </a:r>
+            <a:r>
+              <a:rPr sz="1700" b="1">
+                <a:solidFill>
+                  <a:srgbClr val="222222"/>
+                </a:solidFill>
+                <a:latin typeface="Consolas"/>
+                <a:cs typeface="Consolas"/>
+              </a:rPr>
+              <a:t>NEXTVAL</a:t>
+            </a:r>
+            <a:r>
+              <a:rPr sz="1700" b="0">
+                <a:solidFill>
+                  <a:srgbClr val="222222"/>
+                </a:solidFill>
+                <a:latin typeface="맑은 고딕"/>
+              </a:rPr>
+              <a:t> — 되지만 값이 뛴다</a:t>
             </a:r>
           </a:p>
         </p:txBody>
@@ -6623,7 +6895,35 @@
                 </a:solidFill>
                 <a:latin typeface="맑은 고딕"/>
               </a:rPr>
-              <a:t>•  Primary 에서 `NEXTVAL` → **1**</a:t>
+              <a:t>•  Primary 에서 </a:t>
+            </a:r>
+            <a:r>
+              <a:rPr sz="1700" b="0">
+                <a:solidFill>
+                  <a:srgbClr val="222222"/>
+                </a:solidFill>
+                <a:latin typeface="Consolas"/>
+                <a:cs typeface="Consolas"/>
+              </a:rPr>
+              <a:t>NEXTVAL</a:t>
+            </a:r>
+            <a:r>
+              <a:rPr sz="1700" b="0">
+                <a:solidFill>
+                  <a:srgbClr val="222222"/>
+                </a:solidFill>
+                <a:latin typeface="맑은 고딕"/>
+              </a:rPr>
+              <a:t> → </a:t>
+            </a:r>
+            <a:r>
+              <a:rPr sz="1700" b="1">
+                <a:solidFill>
+                  <a:srgbClr val="222222"/>
+                </a:solidFill>
+                <a:latin typeface="맑은 고딕"/>
+              </a:rPr>
+              <a:t>1</a:t>
             </a:r>
           </a:p>
           <a:p>
@@ -6639,7 +6939,16 @@
                 </a:solidFill>
                 <a:latin typeface="맑은 고딕"/>
               </a:rPr>
-              <a:t>•  같은 시퀀스를 Standby 에서 → **21**</a:t>
+              <a:t>•  같은 시퀀스를 Standby 에서 → </a:t>
+            </a:r>
+            <a:r>
+              <a:rPr sz="1700" b="1">
+                <a:solidFill>
+                  <a:srgbClr val="222222"/>
+                </a:solidFill>
+                <a:latin typeface="맑은 고딕"/>
+              </a:rPr>
+              <a:t>21</a:t>
             </a:r>
           </a:p>
           <a:p>
@@ -6671,7 +6980,16 @@
                 </a:solidFill>
                 <a:latin typeface="맑은 고딕"/>
               </a:rPr>
-              <a:t>•  **연속성이 요건이면 Standby 에서 쓰지 않는다**</a:t>
+              <a:t>•  </a:t>
+            </a:r>
+            <a:r>
+              <a:rPr sz="1700" b="1">
+                <a:solidFill>
+                  <a:srgbClr val="222222"/>
+                </a:solidFill>
+                <a:latin typeface="맑은 고딕"/>
+              </a:rPr>
+              <a:t>연속성이 요건이면 Standby 에서 쓰지 않는다</a:t>
             </a:r>
           </a:p>
         </p:txBody>
@@ -6850,7 +7168,35 @@
                 </a:solidFill>
                 <a:latin typeface="맑은 고딕"/>
               </a:rPr>
-              <a:t>•  `DBMS_STATS` → 열 줄 넘는 스택, 안쪽에 **ORA-16000**</a:t>
+              <a:t>•  </a:t>
+            </a:r>
+            <a:r>
+              <a:rPr sz="1700" b="0">
+                <a:solidFill>
+                  <a:srgbClr val="222222"/>
+                </a:solidFill>
+                <a:latin typeface="Consolas"/>
+                <a:cs typeface="Consolas"/>
+              </a:rPr>
+              <a:t>DBMS_STATS</a:t>
+            </a:r>
+            <a:r>
+              <a:rPr sz="1700" b="0">
+                <a:solidFill>
+                  <a:srgbClr val="222222"/>
+                </a:solidFill>
+                <a:latin typeface="맑은 고딕"/>
+              </a:rPr>
+              <a:t> → 열 줄 넘는 스택, 안쪽에 </a:t>
+            </a:r>
+            <a:r>
+              <a:rPr sz="1700" b="1">
+                <a:solidFill>
+                  <a:srgbClr val="222222"/>
+                </a:solidFill>
+                <a:latin typeface="맑은 고딕"/>
+              </a:rPr>
+              <a:t>ORA-16000</a:t>
             </a:r>
           </a:p>
           <a:p>
@@ -6866,7 +7212,25 @@
                 </a:solidFill>
                 <a:latin typeface="맑은 고딕"/>
               </a:rPr>
-              <a:t>•  AWR 스냅샷 → 전용 오류 **ORA-13516**, 스택이 짧다</a:t>
+              <a:t>•  AWR 스냅샷 → 전용 오류 </a:t>
+            </a:r>
+            <a:r>
+              <a:rPr sz="1700" b="1">
+                <a:solidFill>
+                  <a:srgbClr val="222222"/>
+                </a:solidFill>
+                <a:latin typeface="맑은 고딕"/>
+              </a:rPr>
+              <a:t>ORA-13516</a:t>
+            </a:r>
+            <a:r>
+              <a:rPr sz="1700" b="0">
+                <a:solidFill>
+                  <a:srgbClr val="222222"/>
+                </a:solidFill>
+                <a:latin typeface="맑은 고딕"/>
+              </a:rPr>
+              <a:t>, 스택이 짧다</a:t>
             </a:r>
           </a:p>
           <a:p>
@@ -6882,7 +7246,26 @@
                 </a:solidFill>
                 <a:latin typeface="맑은 고딕"/>
               </a:rPr>
-              <a:t>•  `V$` 뷰 조회 → 문제없다</a:t>
+              <a:t>•  </a:t>
+            </a:r>
+            <a:r>
+              <a:rPr sz="1700" b="0">
+                <a:solidFill>
+                  <a:srgbClr val="222222"/>
+                </a:solidFill>
+                <a:latin typeface="Consolas"/>
+                <a:cs typeface="Consolas"/>
+              </a:rPr>
+              <a:t>V$</a:t>
+            </a:r>
+            <a:r>
+              <a:rPr sz="1700" b="0">
+                <a:solidFill>
+                  <a:srgbClr val="222222"/>
+                </a:solidFill>
+                <a:latin typeface="맑은 고딕"/>
+              </a:rPr>
+              <a:t> 뷰 조회 → 문제없다</a:t>
             </a:r>
           </a:p>
           <a:p>
@@ -6898,7 +7281,16 @@
                 </a:solidFill>
                 <a:latin typeface="맑은 고딕"/>
               </a:rPr>
-              <a:t>•  **"보는 것은 되고 남기는 것은 안 된다"**</a:t>
+              <a:t>•  </a:t>
+            </a:r>
+            <a:r>
+              <a:rPr sz="1700" b="1">
+                <a:solidFill>
+                  <a:srgbClr val="222222"/>
+                </a:solidFill>
+                <a:latin typeface="맑은 고딕"/>
+              </a:rPr>
+              <a:t>"보는 것은 되고 남기는 것은 안 된다"</a:t>
             </a:r>
           </a:p>
         </p:txBody>
@@ -7077,7 +7469,16 @@
                 </a:solidFill>
                 <a:latin typeface="맑은 고딕"/>
               </a:rPr>
-              <a:t>•  **영구 데이터 파일이나 딕셔너리를 바꾸는가**</a:t>
+              <a:t>•  </a:t>
+            </a:r>
+            <a:r>
+              <a:rPr sz="1700" b="1">
+                <a:solidFill>
+                  <a:srgbClr val="222222"/>
+                </a:solidFill>
+                <a:latin typeface="맑은 고딕"/>
+              </a:rPr>
+              <a:t>영구 데이터 파일이나 딕셔너리를 바꾸는가</a:t>
             </a:r>
           </a:p>
           <a:p>
@@ -7559,7 +7960,17 @@
                 </a:solidFill>
                 <a:latin typeface="맑은 고딕"/>
               </a:rPr>
-              <a:t>•  `ALTER SESSION ENABLE ADG_REDIRECT_DML`</a:t>
+              <a:t>•  </a:t>
+            </a:r>
+            <a:r>
+              <a:rPr sz="1700" b="0">
+                <a:solidFill>
+                  <a:srgbClr val="222222"/>
+                </a:solidFill>
+                <a:latin typeface="Consolas"/>
+                <a:cs typeface="Consolas"/>
+              </a:rPr>
+              <a:t>ALTER SESSION ENABLE ADG_REDIRECT_DML</a:t>
             </a:r>
           </a:p>
           <a:p>
@@ -7575,7 +7986,35 @@
                 </a:solidFill>
                 <a:latin typeface="맑은 고딕"/>
               </a:rPr>
-              <a:t>•  일반 사용자로 `INSERT` → **1 row created**</a:t>
+              <a:t>•  일반 사용자로 </a:t>
+            </a:r>
+            <a:r>
+              <a:rPr sz="1700" b="0">
+                <a:solidFill>
+                  <a:srgbClr val="222222"/>
+                </a:solidFill>
+                <a:latin typeface="Consolas"/>
+                <a:cs typeface="Consolas"/>
+              </a:rPr>
+              <a:t>INSERT</a:t>
+            </a:r>
+            <a:r>
+              <a:rPr sz="1700" b="0">
+                <a:solidFill>
+                  <a:srgbClr val="222222"/>
+                </a:solidFill>
+                <a:latin typeface="맑은 고딕"/>
+              </a:rPr>
+              <a:t> → </a:t>
+            </a:r>
+            <a:r>
+              <a:rPr sz="1700" b="1">
+                <a:solidFill>
+                  <a:srgbClr val="222222"/>
+                </a:solidFill>
+                <a:latin typeface="맑은 고딕"/>
+              </a:rPr>
+              <a:t>1 row created</a:t>
             </a:r>
           </a:p>
           <a:p>
@@ -7591,7 +8030,25 @@
                 </a:solidFill>
                 <a:latin typeface="맑은 고딕"/>
               </a:rPr>
-              <a:t>•  같은 행이 **Primary 에서도** 조회된다</a:t>
+              <a:t>•  같은 행이 </a:t>
+            </a:r>
+            <a:r>
+              <a:rPr sz="1700" b="1">
+                <a:solidFill>
+                  <a:srgbClr val="222222"/>
+                </a:solidFill>
+                <a:latin typeface="맑은 고딕"/>
+              </a:rPr>
+              <a:t>Primary 에서도</a:t>
+            </a:r>
+            <a:r>
+              <a:rPr sz="1700" b="0">
+                <a:solidFill>
+                  <a:srgbClr val="222222"/>
+                </a:solidFill>
+                <a:latin typeface="맑은 고딕"/>
+              </a:rPr>
+              <a:t> 조회된다</a:t>
             </a:r>
           </a:p>
           <a:p>
@@ -7607,7 +8064,45 @@
                 </a:solidFill>
                 <a:latin typeface="맑은 고딕"/>
               </a:rPr>
-              <a:t>•  `UPDATE`·`DELETE` 도 마찬가지</a:t>
+              <a:t>•  </a:t>
+            </a:r>
+            <a:r>
+              <a:rPr sz="1700" b="0">
+                <a:solidFill>
+                  <a:srgbClr val="222222"/>
+                </a:solidFill>
+                <a:latin typeface="Consolas"/>
+                <a:cs typeface="Consolas"/>
+              </a:rPr>
+              <a:t>UPDATE</a:t>
+            </a:r>
+            <a:r>
+              <a:rPr sz="1700" b="0">
+                <a:solidFill>
+                  <a:srgbClr val="222222"/>
+                </a:solidFill>
+                <a:latin typeface="맑은 고딕"/>
+              </a:rPr>
+              <a:t>·</a:t>
+            </a:r>
+            <a:r>
+              <a:rPr sz="1700" b="0">
+                <a:solidFill>
+                  <a:srgbClr val="222222"/>
+                </a:solidFill>
+                <a:latin typeface="Consolas"/>
+                <a:cs typeface="Consolas"/>
+              </a:rPr>
+              <a:t>DELETE</a:t>
+            </a:r>
+            <a:r>
+              <a:rPr sz="1700" b="0">
+                <a:solidFill>
+                  <a:srgbClr val="222222"/>
+                </a:solidFill>
+                <a:latin typeface="맑은 고딕"/>
+              </a:rPr>
+              <a:t> 도 마찬가지</a:t>
             </a:r>
           </a:p>
         </p:txBody>
@@ -7786,7 +8281,26 @@
                 </a:solidFill>
                 <a:latin typeface="맑은 고딕"/>
               </a:rPr>
-              <a:t>•  세션 설정은 성공 (`Session altered.`)</a:t>
+              <a:t>•  세션 설정은 성공 (</a:t>
+            </a:r>
+            <a:r>
+              <a:rPr sz="1700" b="0">
+                <a:solidFill>
+                  <a:srgbClr val="222222"/>
+                </a:solidFill>
+                <a:latin typeface="Consolas"/>
+                <a:cs typeface="Consolas"/>
+              </a:rPr>
+              <a:t>Session altered.</a:t>
+            </a:r>
+            <a:r>
+              <a:rPr sz="1700" b="0">
+                <a:solidFill>
+                  <a:srgbClr val="222222"/>
+                </a:solidFill>
+                <a:latin typeface="맑은 고딕"/>
+              </a:rPr>
+              <a:t>)</a:t>
             </a:r>
           </a:p>
           <a:p>
@@ -7802,7 +8316,16 @@
                 </a:solidFill>
                 <a:latin typeface="맑은 고딕"/>
               </a:rPr>
-              <a:t>•  실행에서 **ORA-16397**</a:t>
+              <a:t>•  실행에서 </a:t>
+            </a:r>
+            <a:r>
+              <a:rPr sz="1700" b="1">
+                <a:solidFill>
+                  <a:srgbClr val="222222"/>
+                </a:solidFill>
+                <a:latin typeface="맑은 고딕"/>
+              </a:rPr>
+              <a:t>ORA-16397</a:t>
             </a:r>
           </a:p>
           <a:p>
@@ -7834,7 +8357,16 @@
                 </a:solidFill>
                 <a:latin typeface="맑은 고딕"/>
               </a:rPr>
-              <a:t>•  **관리자 계정으로 시험하면 기능이 없다고 오판한다**</a:t>
+              <a:t>•  </a:t>
+            </a:r>
+            <a:r>
+              <a:rPr sz="1700" b="1">
+                <a:solidFill>
+                  <a:srgbClr val="222222"/>
+                </a:solidFill>
+                <a:latin typeface="맑은 고딕"/>
+              </a:rPr>
+              <a:t>관리자 계정으로 시험하면 기능이 없다고 오판한다</a:t>
             </a:r>
           </a:p>
         </p:txBody>
@@ -8038,7 +8570,26 @@
                 </a:solidFill>
                 <a:latin typeface="맑은 고딕"/>
               </a:rPr>
-              <a:t>•  `STANDBY_MAX_DATA_DELAY` 로 허용 지연을 정하고 ORA-03172 를 해석한다.</a:t>
+              <a:t>•  </a:t>
+            </a:r>
+            <a:r>
+              <a:rPr sz="1600" b="0">
+                <a:solidFill>
+                  <a:srgbClr val="222222"/>
+                </a:solidFill>
+                <a:latin typeface="Consolas"/>
+                <a:cs typeface="Consolas"/>
+              </a:rPr>
+              <a:t>STANDBY_MAX_DATA_DELAY</a:t>
+            </a:r>
+            <a:r>
+              <a:rPr sz="1600" b="0">
+                <a:solidFill>
+                  <a:srgbClr val="222222"/>
+                </a:solidFill>
+                <a:latin typeface="맑은 고딕"/>
+              </a:rPr>
+              <a:t> 로 허용 지연을 정하고 ORA-03172 를 해석한다.</a:t>
             </a:r>
           </a:p>
           <a:p>
@@ -8054,7 +8605,26 @@
                 </a:solidFill>
                 <a:latin typeface="맑은 고딕"/>
               </a:rPr>
-              <a:t>•  `SYNC WITH PRIMARY` 가 실패하는 이유를 보호 모드와 연결해 설명한다.</a:t>
+              <a:t>•  </a:t>
+            </a:r>
+            <a:r>
+              <a:rPr sz="1600" b="0">
+                <a:solidFill>
+                  <a:srgbClr val="222222"/>
+                </a:solidFill>
+                <a:latin typeface="Consolas"/>
+                <a:cs typeface="Consolas"/>
+              </a:rPr>
+              <a:t>SYNC WITH PRIMARY</a:t>
+            </a:r>
+            <a:r>
+              <a:rPr sz="1600" b="0">
+                <a:solidFill>
+                  <a:srgbClr val="222222"/>
+                </a:solidFill>
+                <a:latin typeface="맑은 고딕"/>
+              </a:rPr>
+              <a:t> 가 실패하는 이유를 보호 모드와 연결해 설명한다.</a:t>
             </a:r>
           </a:p>
           <a:p>
@@ -8070,7 +8640,26 @@
                 </a:solidFill>
                 <a:latin typeface="맑은 고딕"/>
               </a:rPr>
-              <a:t>•  `V$STANDBY_EVENT_HISTOGRAM` 으로 지연의 분포를 읽는다.</a:t>
+              <a:t>•  </a:t>
+            </a:r>
+            <a:r>
+              <a:rPr sz="1600" b="0">
+                <a:solidFill>
+                  <a:srgbClr val="222222"/>
+                </a:solidFill>
+                <a:latin typeface="Consolas"/>
+                <a:cs typeface="Consolas"/>
+              </a:rPr>
+              <a:t>V$STANDBY_EVENT_HISTOGRAM</a:t>
+            </a:r>
+            <a:r>
+              <a:rPr sz="1600" b="0">
+                <a:solidFill>
+                  <a:srgbClr val="222222"/>
+                </a:solidFill>
+                <a:latin typeface="맑은 고딕"/>
+              </a:rPr>
+              <a:t> 으로 지연의 분포를 읽는다.</a:t>
             </a:r>
           </a:p>
           <a:p>
@@ -8265,7 +8854,25 @@
                 </a:solidFill>
                 <a:latin typeface="맑은 고딕"/>
               </a:rPr>
-              <a:t>•  리다이렉션 꺼짐 + DML → **ORA-16000** (시도하지 않았다)</a:t>
+              <a:t>•  리다이렉션 꺼짐 + DML → </a:t>
+            </a:r>
+            <a:r>
+              <a:rPr sz="1700" b="1">
+                <a:solidFill>
+                  <a:srgbClr val="222222"/>
+                </a:solidFill>
+                <a:latin typeface="맑은 고딕"/>
+              </a:rPr>
+              <a:t>ORA-16000</a:t>
+            </a:r>
+            <a:r>
+              <a:rPr sz="1700" b="0">
+                <a:solidFill>
+                  <a:srgbClr val="222222"/>
+                </a:solidFill>
+                <a:latin typeface="맑은 고딕"/>
+              </a:rPr>
+              <a:t> (시도하지 않았다)</a:t>
             </a:r>
           </a:p>
           <a:p>
@@ -8281,7 +8888,25 @@
                 </a:solidFill>
                 <a:latin typeface="맑은 고딕"/>
               </a:rPr>
-              <a:t>•  리다이렉션 켜짐 + DDL → **ORA-16000** (대상이 아니다)</a:t>
+              <a:t>•  리다이렉션 켜짐 + DDL → </a:t>
+            </a:r>
+            <a:r>
+              <a:rPr sz="1700" b="1">
+                <a:solidFill>
+                  <a:srgbClr val="222222"/>
+                </a:solidFill>
+                <a:latin typeface="맑은 고딕"/>
+              </a:rPr>
+              <a:t>ORA-16000</a:t>
+            </a:r>
+            <a:r>
+              <a:rPr sz="1700" b="0">
+                <a:solidFill>
+                  <a:srgbClr val="222222"/>
+                </a:solidFill>
+                <a:latin typeface="맑은 고딕"/>
+              </a:rPr>
+              <a:t> (대상이 아니다)</a:t>
             </a:r>
           </a:p>
           <a:p>
@@ -8297,7 +8922,25 @@
                 </a:solidFill>
                 <a:latin typeface="맑은 고딕"/>
               </a:rPr>
-              <a:t>•  리다이렉션 켜짐 + DML + SYS → **ORA-16397** (시도했다가 실패)</a:t>
+              <a:t>•  리다이렉션 켜짐 + DML + SYS → </a:t>
+            </a:r>
+            <a:r>
+              <a:rPr sz="1700" b="1">
+                <a:solidFill>
+                  <a:srgbClr val="222222"/>
+                </a:solidFill>
+                <a:latin typeface="맑은 고딕"/>
+              </a:rPr>
+              <a:t>ORA-16397</a:t>
+            </a:r>
+            <a:r>
+              <a:rPr sz="1700" b="0">
+                <a:solidFill>
+                  <a:srgbClr val="222222"/>
+                </a:solidFill>
+                <a:latin typeface="맑은 고딕"/>
+              </a:rPr>
+              <a:t> (시도했다가 실패)</a:t>
             </a:r>
           </a:p>
           <a:p>
@@ -8492,7 +9135,16 @@
                 </a:solidFill>
                 <a:latin typeface="맑은 고딕"/>
               </a:rPr>
-              <a:t>•  문장 하나가 **두 번의 네트워크 왕복**</a:t>
+              <a:t>•  문장 하나가 </a:t>
+            </a:r>
+            <a:r>
+              <a:rPr sz="1700" b="1">
+                <a:solidFill>
+                  <a:srgbClr val="222222"/>
+                </a:solidFill>
+                <a:latin typeface="맑은 고딕"/>
+              </a:rPr>
+              <a:t>두 번의 네트워크 왕복</a:t>
             </a:r>
           </a:p>
           <a:p>
@@ -8508,7 +9160,25 @@
                 </a:solidFill>
                 <a:latin typeface="맑은 고딕"/>
               </a:rPr>
-              <a:t>•  실행은 결국 **Primary** 에서 일어난다 — Primary 부담은 줄지 않는다</a:t>
+              <a:t>•  실행은 결국 </a:t>
+            </a:r>
+            <a:r>
+              <a:rPr sz="1700" b="1">
+                <a:solidFill>
+                  <a:srgbClr val="222222"/>
+                </a:solidFill>
+                <a:latin typeface="맑은 고딕"/>
+              </a:rPr>
+              <a:t>Primary</a:t>
+            </a:r>
+            <a:r>
+              <a:rPr sz="1700" b="0">
+                <a:solidFill>
+                  <a:srgbClr val="222222"/>
+                </a:solidFill>
+                <a:latin typeface="맑은 고딕"/>
+              </a:rPr>
+              <a:t> 에서 일어난다 — Primary 부담은 줄지 않는다</a:t>
             </a:r>
           </a:p>
           <a:p>
@@ -8974,7 +9644,26 @@
                 </a:solidFill>
                 <a:latin typeface="맑은 고딕"/>
               </a:rPr>
-              <a:t>•  `ALTER SESSION SET standby_max_data_delay=1` (초 단위)</a:t>
+              <a:t>•  </a:t>
+            </a:r>
+            <a:r>
+              <a:rPr sz="1700" b="0">
+                <a:solidFill>
+                  <a:srgbClr val="222222"/>
+                </a:solidFill>
+                <a:latin typeface="Consolas"/>
+                <a:cs typeface="Consolas"/>
+              </a:rPr>
+              <a:t>ALTER SESSION SET standby_max_data_delay=1</a:t>
+            </a:r>
+            <a:r>
+              <a:rPr sz="1700" b="0">
+                <a:solidFill>
+                  <a:srgbClr val="222222"/>
+                </a:solidFill>
+                <a:latin typeface="맑은 고딕"/>
+              </a:rPr>
+              <a:t> (초 단위)</a:t>
             </a:r>
           </a:p>
           <a:p>
@@ -9006,7 +9695,44 @@
                 </a:solidFill>
                 <a:latin typeface="맑은 고딕"/>
               </a:rPr>
-              <a:t>•  `=0` → **ORA-03172 of 0 seconds exceeded** (ASYNC 라 항상)</a:t>
+              <a:t>•  </a:t>
+            </a:r>
+            <a:r>
+              <a:rPr sz="1700" b="0">
+                <a:solidFill>
+                  <a:srgbClr val="222222"/>
+                </a:solidFill>
+                <a:latin typeface="Consolas"/>
+                <a:cs typeface="Consolas"/>
+              </a:rPr>
+              <a:t>=0</a:t>
+            </a:r>
+            <a:r>
+              <a:rPr sz="1700" b="0">
+                <a:solidFill>
+                  <a:srgbClr val="222222"/>
+                </a:solidFill>
+                <a:latin typeface="맑은 고딕"/>
+              </a:rPr>
+              <a:t> → </a:t>
+            </a:r>
+            <a:r>
+              <a:rPr sz="1700" b="1">
+                <a:solidFill>
+                  <a:srgbClr val="222222"/>
+                </a:solidFill>
+                <a:latin typeface="맑은 고딕"/>
+              </a:rPr>
+              <a:t>ORA-03172 of 0 seconds exceeded</a:t>
+            </a:r>
+            <a:r>
+              <a:rPr sz="1700" b="0">
+                <a:solidFill>
+                  <a:srgbClr val="222222"/>
+                </a:solidFill>
+                <a:latin typeface="맑은 고딕"/>
+              </a:rPr>
+              <a:t> (ASYNC 라 항상)</a:t>
             </a:r>
           </a:p>
           <a:p>
@@ -9022,7 +9748,35 @@
                 </a:solidFill>
                 <a:latin typeface="맑은 고딕"/>
               </a:rPr>
-              <a:t>•  적용 정지 후 lag 1분 22초 → `=1` 로 **ORA-03172**</a:t>
+              <a:t>•  적용 정지 후 lag 1분 22초 → </a:t>
+            </a:r>
+            <a:r>
+              <a:rPr sz="1700" b="0">
+                <a:solidFill>
+                  <a:srgbClr val="222222"/>
+                </a:solidFill>
+                <a:latin typeface="Consolas"/>
+                <a:cs typeface="Consolas"/>
+              </a:rPr>
+              <a:t>=1</a:t>
+            </a:r>
+            <a:r>
+              <a:rPr sz="1700" b="0">
+                <a:solidFill>
+                  <a:srgbClr val="222222"/>
+                </a:solidFill>
+                <a:latin typeface="맑은 고딕"/>
+              </a:rPr>
+              <a:t> 로 </a:t>
+            </a:r>
+            <a:r>
+              <a:rPr sz="1700" b="1">
+                <a:solidFill>
+                  <a:srgbClr val="222222"/>
+                </a:solidFill>
+                <a:latin typeface="맑은 고딕"/>
+              </a:rPr>
+              <a:t>ORA-03172</a:t>
             </a:r>
           </a:p>
         </p:txBody>
@@ -9201,7 +9955,25 @@
                 </a:solidFill>
                 <a:latin typeface="맑은 고딕"/>
               </a:rPr>
-              <a:t>•  한도 없음 → 성공하되 **옛 데이터**를 돌려준다</a:t>
+              <a:t>•  한도 없음 → 성공하되 </a:t>
+            </a:r>
+            <a:r>
+              <a:rPr sz="1700" b="1">
+                <a:solidFill>
+                  <a:srgbClr val="222222"/>
+                </a:solidFill>
+                <a:latin typeface="맑은 고딕"/>
+              </a:rPr>
+              <a:t>옛 데이터</a:t>
+            </a:r>
+            <a:r>
+              <a:rPr sz="1700" b="0">
+                <a:solidFill>
+                  <a:srgbClr val="222222"/>
+                </a:solidFill>
+                <a:latin typeface="맑은 고딕"/>
+              </a:rPr>
+              <a:t>를 돌려준다</a:t>
             </a:r>
           </a:p>
           <a:p>
@@ -9217,7 +9989,25 @@
                 </a:solidFill>
                 <a:latin typeface="맑은 고딕"/>
               </a:rPr>
-              <a:t>•  한도 있음 → **거부**한다 (ORA-03172)</a:t>
+              <a:t>•  한도 있음 → </a:t>
+            </a:r>
+            <a:r>
+              <a:rPr sz="1700" b="1">
+                <a:solidFill>
+                  <a:srgbClr val="222222"/>
+                </a:solidFill>
+                <a:latin typeface="맑은 고딕"/>
+              </a:rPr>
+              <a:t>거부</a:t>
+            </a:r>
+            <a:r>
+              <a:rPr sz="1700" b="0">
+                <a:solidFill>
+                  <a:srgbClr val="222222"/>
+                </a:solidFill>
+                <a:latin typeface="맑은 고딕"/>
+              </a:rPr>
+              <a:t>한다 (ORA-03172)</a:t>
             </a:r>
           </a:p>
           <a:p>
@@ -9233,7 +10023,25 @@
                 </a:solidFill>
                 <a:latin typeface="맑은 고딕"/>
               </a:rPr>
-              <a:t>•  판단을 **애플리케이션이 하게** 해 준다</a:t>
+              <a:t>•  판단을 </a:t>
+            </a:r>
+            <a:r>
+              <a:rPr sz="1700" b="1">
+                <a:solidFill>
+                  <a:srgbClr val="222222"/>
+                </a:solidFill>
+                <a:latin typeface="맑은 고딕"/>
+              </a:rPr>
+              <a:t>애플리케이션이 하게</a:t>
+            </a:r>
+            <a:r>
+              <a:rPr sz="1700" b="0">
+                <a:solidFill>
+                  <a:srgbClr val="222222"/>
+                </a:solidFill>
+                <a:latin typeface="맑은 고딕"/>
+              </a:rPr>
+              <a:t> 해 준다</a:t>
             </a:r>
           </a:p>
           <a:p>
@@ -9249,7 +10057,17 @@
                 </a:solidFill>
                 <a:latin typeface="맑은 고딕"/>
               </a:rPr>
-              <a:t>•  `try { standby } catch (ORA-03172) { primary }`</a:t>
+              <a:t>•  </a:t>
+            </a:r>
+            <a:r>
+              <a:rPr sz="1700" b="0">
+                <a:solidFill>
+                  <a:srgbClr val="222222"/>
+                </a:solidFill>
+                <a:latin typeface="Consolas"/>
+                <a:cs typeface="Consolas"/>
+              </a:rPr>
+              <a:t>try { standby } catch (ORA-03172) { primary }</a:t>
             </a:r>
           </a:p>
         </p:txBody>
@@ -9428,7 +10246,35 @@
                 </a:solidFill>
                 <a:latin typeface="맑은 고딕"/>
               </a:rPr>
-              <a:t>•  `SYS` 로 설정 → **ORA-03174: does not apply to SYS users**</a:t>
+              <a:t>•  </a:t>
+            </a:r>
+            <a:r>
+              <a:rPr sz="1700" b="0">
+                <a:solidFill>
+                  <a:srgbClr val="222222"/>
+                </a:solidFill>
+                <a:latin typeface="Consolas"/>
+                <a:cs typeface="Consolas"/>
+              </a:rPr>
+              <a:t>SYS</a:t>
+            </a:r>
+            <a:r>
+              <a:rPr sz="1700" b="0">
+                <a:solidFill>
+                  <a:srgbClr val="222222"/>
+                </a:solidFill>
+                <a:latin typeface="맑은 고딕"/>
+              </a:rPr>
+              <a:t> 로 설정 → </a:t>
+            </a:r>
+            <a:r>
+              <a:rPr sz="1700" b="1">
+                <a:solidFill>
+                  <a:srgbClr val="222222"/>
+                </a:solidFill>
+                <a:latin typeface="맑은 고딕"/>
+              </a:rPr>
+              <a:t>ORA-03174: does not apply to SYS users</a:t>
             </a:r>
           </a:p>
           <a:p>
@@ -9444,7 +10290,25 @@
                 </a:solidFill>
                 <a:latin typeface="맑은 고딕"/>
               </a:rPr>
-              <a:t>•  오류가 나도 **그 뒤의 조회는 정상 수행**된다</a:t>
+              <a:t>•  오류가 나도 </a:t>
+            </a:r>
+            <a:r>
+              <a:rPr sz="1700" b="1">
+                <a:solidFill>
+                  <a:srgbClr val="222222"/>
+                </a:solidFill>
+                <a:latin typeface="맑은 고딕"/>
+              </a:rPr>
+              <a:t>그 뒤의 조회는 정상 수행</a:t>
+            </a:r>
+            <a:r>
+              <a:rPr sz="1700" b="0">
+                <a:solidFill>
+                  <a:srgbClr val="222222"/>
+                </a:solidFill>
+                <a:latin typeface="맑은 고딕"/>
+              </a:rPr>
+              <a:t>된다</a:t>
             </a:r>
           </a:p>
           <a:p>
@@ -9476,7 +10340,16 @@
                 </a:solidFill>
                 <a:latin typeface="맑은 고딕"/>
               </a:rPr>
-              <a:t>•  리다이렉션의 ORA-16397 과 **같은 교훈**</a:t>
+              <a:t>•  리다이렉션의 ORA-16397 과 </a:t>
+            </a:r>
+            <a:r>
+              <a:rPr sz="1700" b="1">
+                <a:solidFill>
+                  <a:srgbClr val="222222"/>
+                </a:solidFill>
+                <a:latin typeface="맑은 고딕"/>
+              </a:rPr>
+              <a:t>같은 교훈</a:t>
             </a:r>
           </a:p>
         </p:txBody>
@@ -9655,7 +10528,35 @@
                 </a:solidFill>
                 <a:latin typeface="맑은 고딕"/>
               </a:rPr>
-              <a:t>•  `ALTER SESSION SYNC WITH PRIMARY` → **ORA-03173**</a:t>
+              <a:t>•  </a:t>
+            </a:r>
+            <a:r>
+              <a:rPr sz="1700" b="0">
+                <a:solidFill>
+                  <a:srgbClr val="222222"/>
+                </a:solidFill>
+                <a:latin typeface="Consolas"/>
+                <a:cs typeface="Consolas"/>
+              </a:rPr>
+              <a:t>ALTER SESSION SYNC WITH PRIMARY</a:t>
+            </a:r>
+            <a:r>
+              <a:rPr sz="1700" b="0">
+                <a:solidFill>
+                  <a:srgbClr val="222222"/>
+                </a:solidFill>
+                <a:latin typeface="맑은 고딕"/>
+              </a:rPr>
+              <a:t> → </a:t>
+            </a:r>
+            <a:r>
+              <a:rPr sz="1700" b="1">
+                <a:solidFill>
+                  <a:srgbClr val="222222"/>
+                </a:solidFill>
+                <a:latin typeface="맑은 고딕"/>
+              </a:rPr>
+              <a:t>ORA-03173</a:t>
             </a:r>
           </a:p>
           <a:p>
@@ -9687,7 +10588,25 @@
                 </a:solidFill>
                 <a:latin typeface="맑은 고딕"/>
               </a:rPr>
-              <a:t>•  8장 : 보호 모드가 **복구 가능성**을 결정했다</a:t>
+              <a:t>•  8장 : 보호 모드가 </a:t>
+            </a:r>
+            <a:r>
+              <a:rPr sz="1700" b="1">
+                <a:solidFill>
+                  <a:srgbClr val="222222"/>
+                </a:solidFill>
+                <a:latin typeface="맑은 고딕"/>
+              </a:rPr>
+              <a:t>복구 가능성</a:t>
+            </a:r>
+            <a:r>
+              <a:rPr sz="1700" b="0">
+                <a:solidFill>
+                  <a:srgbClr val="222222"/>
+                </a:solidFill>
+                <a:latin typeface="맑은 고딕"/>
+              </a:rPr>
+              <a:t>을 결정했다</a:t>
             </a:r>
           </a:p>
           <a:p>
@@ -9703,7 +10622,25 @@
                 </a:solidFill>
                 <a:latin typeface="맑은 고딕"/>
               </a:rPr>
-              <a:t>•  9장 : 보호 모드가 **조회 신선도 보장**을 결정한다</a:t>
+              <a:t>•  9장 : 보호 모드가 </a:t>
+            </a:r>
+            <a:r>
+              <a:rPr sz="1700" b="1">
+                <a:solidFill>
+                  <a:srgbClr val="222222"/>
+                </a:solidFill>
+                <a:latin typeface="맑은 고딕"/>
+              </a:rPr>
+              <a:t>조회 신선도 보장</a:t>
+            </a:r>
+            <a:r>
+              <a:rPr sz="1700" b="0">
+                <a:solidFill>
+                  <a:srgbClr val="222222"/>
+                </a:solidFill>
+                <a:latin typeface="맑은 고딕"/>
+              </a:rPr>
+              <a:t>을 결정한다</a:t>
             </a:r>
           </a:p>
         </p:txBody>
@@ -10121,7 +11058,64 @@
                 </a:solidFill>
                 <a:latin typeface="맑은 고딕"/>
               </a:rPr>
-              <a:t>•  `TIME` + `UNIT` 이 구간, `COUNT` 가 표본 수</a:t>
+              <a:t>•  </a:t>
+            </a:r>
+            <a:r>
+              <a:rPr sz="1700" b="0">
+                <a:solidFill>
+                  <a:srgbClr val="222222"/>
+                </a:solidFill>
+                <a:latin typeface="Consolas"/>
+                <a:cs typeface="Consolas"/>
+              </a:rPr>
+              <a:t>TIME</a:t>
+            </a:r>
+            <a:r>
+              <a:rPr sz="1700" b="0">
+                <a:solidFill>
+                  <a:srgbClr val="222222"/>
+                </a:solidFill>
+                <a:latin typeface="맑은 고딕"/>
+              </a:rPr>
+              <a:t> + </a:t>
+            </a:r>
+            <a:r>
+              <a:rPr sz="1700" b="0">
+                <a:solidFill>
+                  <a:srgbClr val="222222"/>
+                </a:solidFill>
+                <a:latin typeface="Consolas"/>
+                <a:cs typeface="Consolas"/>
+              </a:rPr>
+              <a:t>UNIT</a:t>
+            </a:r>
+            <a:r>
+              <a:rPr sz="1700" b="0">
+                <a:solidFill>
+                  <a:srgbClr val="222222"/>
+                </a:solidFill>
+                <a:latin typeface="맑은 고딕"/>
+              </a:rPr>
+              <a:t> 이 구간, </a:t>
+            </a:r>
+            <a:r>
+              <a:rPr sz="1700" b="0">
+                <a:solidFill>
+                  <a:srgbClr val="222222"/>
+                </a:solidFill>
+                <a:latin typeface="Consolas"/>
+                <a:cs typeface="Consolas"/>
+              </a:rPr>
+              <a:t>COUNT</a:t>
+            </a:r>
+            <a:r>
+              <a:rPr sz="1700" b="0">
+                <a:solidFill>
+                  <a:srgbClr val="222222"/>
+                </a:solidFill>
+                <a:latin typeface="맑은 고딕"/>
+              </a:rPr>
+              <a:t> 가 표본 수</a:t>
             </a:r>
           </a:p>
           <a:p>
@@ -10137,7 +11131,26 @@
                 </a:solidFill>
                 <a:latin typeface="맑은 고딕"/>
               </a:rPr>
-              <a:t>•  실측 : 0초 854회, 2초 1회, **`2 minutes` 59회**</a:t>
+              <a:t>•  실측 : 0초 854회, 2초 1회, </a:t>
+            </a:r>
+            <a:r>
+              <a:rPr sz="1700" b="1">
+                <a:solidFill>
+                  <a:srgbClr val="222222"/>
+                </a:solidFill>
+                <a:latin typeface="Consolas"/>
+                <a:cs typeface="Consolas"/>
+              </a:rPr>
+              <a:t>2 minutes</a:t>
+            </a:r>
+            <a:r>
+              <a:rPr sz="1700" b="1">
+                <a:solidFill>
+                  <a:srgbClr val="222222"/>
+                </a:solidFill>
+                <a:latin typeface="맑은 고딕"/>
+              </a:rPr>
+              <a:t> 59회</a:t>
             </a:r>
           </a:p>
           <a:p>
@@ -10348,7 +11361,17 @@
                 </a:solidFill>
                 <a:latin typeface="맑은 고딕"/>
               </a:rPr>
-              <a:t>•  `ROUND(100*SUM(CASE WHEN time&gt;0 THEN count END)/SUM(count),2)`</a:t>
+              <a:t>•  </a:t>
+            </a:r>
+            <a:r>
+              <a:rPr sz="1700" b="0">
+                <a:solidFill>
+                  <a:srgbClr val="222222"/>
+                </a:solidFill>
+                <a:latin typeface="Consolas"/>
+                <a:cs typeface="Consolas"/>
+              </a:rPr>
+              <a:t>ROUND(100*SUM(CASE WHEN time&gt;0 THEN count END)/SUM(count),2)</a:t>
             </a:r>
           </a:p>
           <a:p>
@@ -10380,7 +11403,25 @@
                 </a:solidFill>
                 <a:latin typeface="맑은 고딕"/>
               </a:rPr>
-              <a:t>•  **누적값이므로 두 시점의 차이**를 본다</a:t>
+              <a:t>•  </a:t>
+            </a:r>
+            <a:r>
+              <a:rPr sz="1700" b="1">
+                <a:solidFill>
+                  <a:srgbClr val="222222"/>
+                </a:solidFill>
+                <a:latin typeface="맑은 고딕"/>
+              </a:rPr>
+              <a:t>누적값이므로 두 시점의 차이</a:t>
+            </a:r>
+            <a:r>
+              <a:rPr sz="1700" b="0">
+                <a:solidFill>
+                  <a:srgbClr val="222222"/>
+                </a:solidFill>
+                <a:latin typeface="맑은 고딕"/>
+              </a:rPr>
+              <a:t>를 본다</a:t>
             </a:r>
           </a:p>
           <a:p>
@@ -10811,7 +11852,26 @@
                 </a:solidFill>
                 <a:latin typeface="맑은 고딕"/>
               </a:rPr>
-              <a:t>•  `V$MANAGED_STANDBY` — 적용이 도는가 (지연은 모른다)</a:t>
+              <a:t>•  </a:t>
+            </a:r>
+            <a:r>
+              <a:rPr sz="1700" b="0">
+                <a:solidFill>
+                  <a:srgbClr val="222222"/>
+                </a:solidFill>
+                <a:latin typeface="Consolas"/>
+                <a:cs typeface="Consolas"/>
+              </a:rPr>
+              <a:t>V$MANAGED_STANDBY</a:t>
+            </a:r>
+            <a:r>
+              <a:rPr sz="1700" b="0">
+                <a:solidFill>
+                  <a:srgbClr val="222222"/>
+                </a:solidFill>
+                <a:latin typeface="맑은 고딕"/>
+              </a:rPr>
+              <a:t> — 적용이 도는가 (지연은 모른다)</a:t>
             </a:r>
           </a:p>
           <a:p>
@@ -10827,7 +11887,26 @@
                 </a:solidFill>
                 <a:latin typeface="맑은 고딕"/>
               </a:rPr>
-              <a:t>•  `V$DATAGUARD_STATS` — 지금 얼마나 뒤처졌나 (십수 초 전 정보)</a:t>
+              <a:t>•  </a:t>
+            </a:r>
+            <a:r>
+              <a:rPr sz="1700" b="0">
+                <a:solidFill>
+                  <a:srgbClr val="222222"/>
+                </a:solidFill>
+                <a:latin typeface="Consolas"/>
+                <a:cs typeface="Consolas"/>
+              </a:rPr>
+              <a:t>V$DATAGUARD_STATS</a:t>
+            </a:r>
+            <a:r>
+              <a:rPr sz="1700" b="0">
+                <a:solidFill>
+                  <a:srgbClr val="222222"/>
+                </a:solidFill>
+                <a:latin typeface="맑은 고딕"/>
+              </a:rPr>
+              <a:t> — 지금 얼마나 뒤처졌나 (십수 초 전 정보)</a:t>
             </a:r>
           </a:p>
           <a:p>
@@ -10843,7 +11922,26 @@
                 </a:solidFill>
                 <a:latin typeface="맑은 고딕"/>
               </a:rPr>
-              <a:t>•  `V$STANDBY_EVENT_HISTOGRAM` — 그동안 안정적이었나 (언제인지 모른다)</a:t>
+              <a:t>•  </a:t>
+            </a:r>
+            <a:r>
+              <a:rPr sz="1700" b="0">
+                <a:solidFill>
+                  <a:srgbClr val="222222"/>
+                </a:solidFill>
+                <a:latin typeface="Consolas"/>
+                <a:cs typeface="Consolas"/>
+              </a:rPr>
+              <a:t>V$STANDBY_EVENT_HISTOGRAM</a:t>
+            </a:r>
+            <a:r>
+              <a:rPr sz="1700" b="0">
+                <a:solidFill>
+                  <a:srgbClr val="222222"/>
+                </a:solidFill>
+                <a:latin typeface="맑은 고딕"/>
+              </a:rPr>
+              <a:t> — 그동안 안정적이었나 (언제인지 모른다)</a:t>
             </a:r>
           </a:p>
           <a:p>
@@ -10859,7 +11957,25 @@
                 </a:solidFill>
                 <a:latin typeface="맑은 고딕"/>
               </a:rPr>
-              <a:t>•  **MRP0 을 먼저 본다** — 없으면 나머지는 무의미하다</a:t>
+              <a:t>•  </a:t>
+            </a:r>
+            <a:r>
+              <a:rPr sz="1700" b="1">
+                <a:solidFill>
+                  <a:srgbClr val="222222"/>
+                </a:solidFill>
+                <a:latin typeface="맑은 고딕"/>
+              </a:rPr>
+              <a:t>MRP0 을 먼저 본다</a:t>
+            </a:r>
+            <a:r>
+              <a:rPr sz="1700" b="0">
+                <a:solidFill>
+                  <a:srgbClr val="222222"/>
+                </a:solidFill>
+                <a:latin typeface="맑은 고딕"/>
+              </a:rPr>
+              <a:t> — 없으면 나머지는 무의미하다</a:t>
             </a:r>
           </a:p>
         </p:txBody>
@@ -11054,7 +12170,25 @@
                 </a:solidFill>
                 <a:latin typeface="맑은 고딕"/>
               </a:rPr>
-              <a:t>•  일반 테이블을 임시 저장소로 쓰는 조회 → **GTT 로 바꿔야** 옮길 수 있다</a:t>
+              <a:t>•  일반 테이블을 임시 저장소로 쓰는 조회 → </a:t>
+            </a:r>
+            <a:r>
+              <a:rPr sz="1700" b="1">
+                <a:solidFill>
+                  <a:srgbClr val="222222"/>
+                </a:solidFill>
+                <a:latin typeface="맑은 고딕"/>
+              </a:rPr>
+              <a:t>GTT 로 바꿔야</a:t>
+            </a:r>
+            <a:r>
+              <a:rPr sz="1700" b="0">
+                <a:solidFill>
+                  <a:srgbClr val="222222"/>
+                </a:solidFill>
+                <a:latin typeface="맑은 고딕"/>
+              </a:rPr>
+              <a:t> 옮길 수 있다</a:t>
             </a:r>
           </a:p>
           <a:p>
@@ -11265,7 +12399,25 @@
                 </a:solidFill>
                 <a:latin typeface="맑은 고딕"/>
               </a:rPr>
-              <a:t>•  기능 검증은 **애플리케이션 계정**으로 한다 — SYS 로 두 번 오판할 뻔했다</a:t>
+              <a:t>•  기능 검증은 </a:t>
+            </a:r>
+            <a:r>
+              <a:rPr sz="1700" b="1">
+                <a:solidFill>
+                  <a:srgbClr val="222222"/>
+                </a:solidFill>
+                <a:latin typeface="맑은 고딕"/>
+              </a:rPr>
+              <a:t>애플리케이션 계정</a:t>
+            </a:r>
+            <a:r>
+              <a:rPr sz="1700" b="0">
+                <a:solidFill>
+                  <a:srgbClr val="222222"/>
+                </a:solidFill>
+                <a:latin typeface="맑은 고딕"/>
+              </a:rPr>
+              <a:t>으로 한다 — SYS 로 두 번 오판할 뻔했다</a:t>
             </a:r>
           </a:p>
           <a:p>
@@ -11281,7 +12433,25 @@
                 </a:solidFill>
                 <a:latin typeface="맑은 고딕"/>
               </a:rPr>
-              <a:t>•  예상과 다르면 **측정을 먼저 의심**한다 — SQL*Plus 암묵적 커밋</a:t>
+              <a:t>•  예상과 다르면 </a:t>
+            </a:r>
+            <a:r>
+              <a:rPr sz="1700" b="1">
+                <a:solidFill>
+                  <a:srgbClr val="222222"/>
+                </a:solidFill>
+                <a:latin typeface="맑은 고딕"/>
+              </a:rPr>
+              <a:t>측정을 먼저 의심</a:t>
+            </a:r>
+            <a:r>
+              <a:rPr sz="1700" b="0">
+                <a:solidFill>
+                  <a:srgbClr val="222222"/>
+                </a:solidFill>
+                <a:latin typeface="맑은 고딕"/>
+              </a:rPr>
+              <a:t>한다 — SQL*Plus 암묵적 커밋</a:t>
             </a:r>
           </a:p>
           <a:p>
@@ -11297,7 +12467,25 @@
                 </a:solidFill>
                 <a:latin typeface="맑은 고딕"/>
               </a:rPr>
-              <a:t>•  오류 번호를 **경로 정보**로 읽는다 — 16000 대 16397, 16000 대 13516</a:t>
+              <a:t>•  오류 번호를 </a:t>
+            </a:r>
+            <a:r>
+              <a:rPr sz="1700" b="1">
+                <a:solidFill>
+                  <a:srgbClr val="222222"/>
+                </a:solidFill>
+                <a:latin typeface="맑은 고딕"/>
+              </a:rPr>
+              <a:t>경로 정보</a:t>
+            </a:r>
+            <a:r>
+              <a:rPr sz="1700" b="0">
+                <a:solidFill>
+                  <a:srgbClr val="222222"/>
+                </a:solidFill>
+                <a:latin typeface="맑은 고딕"/>
+              </a:rPr>
+              <a:t>로 읽는다 — 16000 대 16397, 16000 대 13516</a:t>
             </a:r>
           </a:p>
         </p:txBody>
@@ -11715,7 +12903,82 @@
                 </a:solidFill>
                 <a:latin typeface="맑은 고딕"/>
               </a:rPr>
-              <a:t>•  `OPEN_MODE` **MOUNTED**, `MRP0` 은 `APPLYING_LOG` 그대로</a:t>
+              <a:t>•  </a:t>
+            </a:r>
+            <a:r>
+              <a:rPr sz="1700" b="0">
+                <a:solidFill>
+                  <a:srgbClr val="222222"/>
+                </a:solidFill>
+                <a:latin typeface="Consolas"/>
+                <a:cs typeface="Consolas"/>
+              </a:rPr>
+              <a:t>OPEN_MODE</a:t>
+            </a:r>
+            <a:r>
+              <a:rPr sz="1700" b="0">
+                <a:solidFill>
+                  <a:srgbClr val="222222"/>
+                </a:solidFill>
+                <a:latin typeface="맑은 고딕"/>
+              </a:rPr>
+              <a:t> </a:t>
+            </a:r>
+            <a:r>
+              <a:rPr sz="1700" b="1">
+                <a:solidFill>
+                  <a:srgbClr val="222222"/>
+                </a:solidFill>
+                <a:latin typeface="맑은 고딕"/>
+              </a:rPr>
+              <a:t>MOUNTED</a:t>
+            </a:r>
+            <a:r>
+              <a:rPr sz="1700" b="0">
+                <a:solidFill>
+                  <a:srgbClr val="222222"/>
+                </a:solidFill>
+                <a:latin typeface="맑은 고딕"/>
+              </a:rPr>
+              <a:t>, </a:t>
+            </a:r>
+            <a:r>
+              <a:rPr sz="1700" b="0">
+                <a:solidFill>
+                  <a:srgbClr val="222222"/>
+                </a:solidFill>
+                <a:latin typeface="Consolas"/>
+                <a:cs typeface="Consolas"/>
+              </a:rPr>
+              <a:t>MRP0</a:t>
+            </a:r>
+            <a:r>
+              <a:rPr sz="1700" b="0">
+                <a:solidFill>
+                  <a:srgbClr val="222222"/>
+                </a:solidFill>
+                <a:latin typeface="맑은 고딕"/>
+              </a:rPr>
+              <a:t> 은 </a:t>
+            </a:r>
+            <a:r>
+              <a:rPr sz="1700" b="0">
+                <a:solidFill>
+                  <a:srgbClr val="222222"/>
+                </a:solidFill>
+                <a:latin typeface="Consolas"/>
+                <a:cs typeface="Consolas"/>
+              </a:rPr>
+              <a:t>APPLYING_LOG</a:t>
+            </a:r>
+            <a:r>
+              <a:rPr sz="1700" b="0">
+                <a:solidFill>
+                  <a:srgbClr val="222222"/>
+                </a:solidFill>
+                <a:latin typeface="맑은 고딕"/>
+              </a:rPr>
+              <a:t> 그대로</a:t>
             </a:r>
           </a:p>
           <a:p>
@@ -11731,7 +12994,45 @@
                 </a:solidFill>
                 <a:latin typeface="맑은 고딕"/>
               </a:rPr>
-              <a:t>•  사용자 표 조회 → **`ORA-01219`** (9.4 의 `ORA-16000` 과 다르다)</a:t>
+              <a:t>•  사용자 표 조회 → </a:t>
+            </a:r>
+            <a:r>
+              <a:rPr sz="1700" b="1">
+                <a:solidFill>
+                  <a:srgbClr val="222222"/>
+                </a:solidFill>
+                <a:latin typeface="Consolas"/>
+                <a:cs typeface="Consolas"/>
+              </a:rPr>
+              <a:t>ORA-01219</a:t>
+            </a:r>
+            <a:r>
+              <a:rPr sz="1700" b="0">
+                <a:solidFill>
+                  <a:srgbClr val="222222"/>
+                </a:solidFill>
+                <a:latin typeface="맑은 고딕"/>
+              </a:rPr>
+              <a:t> (9.4 의 </a:t>
+            </a:r>
+            <a:r>
+              <a:rPr sz="1700" b="0">
+                <a:solidFill>
+                  <a:srgbClr val="222222"/>
+                </a:solidFill>
+                <a:latin typeface="Consolas"/>
+                <a:cs typeface="Consolas"/>
+              </a:rPr>
+              <a:t>ORA-16000</a:t>
+            </a:r>
+            <a:r>
+              <a:rPr sz="1700" b="0">
+                <a:solidFill>
+                  <a:srgbClr val="222222"/>
+                </a:solidFill>
+                <a:latin typeface="맑은 고딕"/>
+              </a:rPr>
+              <a:t> 과 다르다)</a:t>
             </a:r>
           </a:p>
           <a:p>
@@ -11747,7 +13048,16 @@
                 </a:solidFill>
                 <a:latin typeface="맑은 고딕"/>
               </a:rPr>
-              <a:t>•  메시지의 뒷부분 — **"fixed tables or views only"**</a:t>
+              <a:t>•  메시지의 뒷부분 — </a:t>
+            </a:r>
+            <a:r>
+              <a:rPr sz="1700" b="1">
+                <a:solidFill>
+                  <a:srgbClr val="222222"/>
+                </a:solidFill>
+                <a:latin typeface="맑은 고딕"/>
+              </a:rPr>
+              <a:t>"fixed tables or views only"</a:t>
             </a:r>
           </a:p>
           <a:p>
@@ -11763,7 +13073,35 @@
                 </a:solidFill>
                 <a:latin typeface="맑은 고딕"/>
               </a:rPr>
-              <a:t>•  그래서 `V$DATAGUARD_STATS` 는 **닫혀 있어도 값이 나온다**</a:t>
+              <a:t>•  그래서 </a:t>
+            </a:r>
+            <a:r>
+              <a:rPr sz="1700" b="0">
+                <a:solidFill>
+                  <a:srgbClr val="222222"/>
+                </a:solidFill>
+                <a:latin typeface="Consolas"/>
+                <a:cs typeface="Consolas"/>
+              </a:rPr>
+              <a:t>V$DATAGUARD_STATS</a:t>
+            </a:r>
+            <a:r>
+              <a:rPr sz="1700" b="0">
+                <a:solidFill>
+                  <a:srgbClr val="222222"/>
+                </a:solidFill>
+                <a:latin typeface="맑은 고딕"/>
+              </a:rPr>
+              <a:t> 는 </a:t>
+            </a:r>
+            <a:r>
+              <a:rPr sz="1700" b="1">
+                <a:solidFill>
+                  <a:srgbClr val="222222"/>
+                </a:solidFill>
+                <a:latin typeface="맑은 고딕"/>
+              </a:rPr>
+              <a:t>닫혀 있어도 값이 나온다</a:t>
             </a:r>
           </a:p>
         </p:txBody>
@@ -11942,7 +13280,55 @@
                 </a:solidFill>
                 <a:latin typeface="맑은 고딕"/>
               </a:rPr>
-              <a:t>•  `DATABASE_MODE` — `OPEN_READ-ONLY` ↔ **`MOUNTED-STANDBY`**</a:t>
+              <a:t>•  </a:t>
+            </a:r>
+            <a:r>
+              <a:rPr sz="1700" b="0">
+                <a:solidFill>
+                  <a:srgbClr val="222222"/>
+                </a:solidFill>
+                <a:latin typeface="Consolas"/>
+                <a:cs typeface="Consolas"/>
+              </a:rPr>
+              <a:t>DATABASE_MODE</a:t>
+            </a:r>
+            <a:r>
+              <a:rPr sz="1700" b="0">
+                <a:solidFill>
+                  <a:srgbClr val="222222"/>
+                </a:solidFill>
+                <a:latin typeface="맑은 고딕"/>
+              </a:rPr>
+              <a:t> — </a:t>
+            </a:r>
+            <a:r>
+              <a:rPr sz="1700" b="0">
+                <a:solidFill>
+                  <a:srgbClr val="222222"/>
+                </a:solidFill>
+                <a:latin typeface="Consolas"/>
+                <a:cs typeface="Consolas"/>
+              </a:rPr>
+              <a:t>OPEN_READ-ONLY</a:t>
+            </a:r>
+            <a:r>
+              <a:rPr sz="1700" b="0">
+                <a:solidFill>
+                  <a:srgbClr val="222222"/>
+                </a:solidFill>
+                <a:latin typeface="맑은 고딕"/>
+              </a:rPr>
+              <a:t> ↔ </a:t>
+            </a:r>
+            <a:r>
+              <a:rPr sz="1700" b="1">
+                <a:solidFill>
+                  <a:srgbClr val="222222"/>
+                </a:solidFill>
+                <a:latin typeface="Consolas"/>
+                <a:cs typeface="Consolas"/>
+              </a:rPr>
+              <a:t>MOUNTED-STANDBY</a:t>
             </a:r>
           </a:p>
           <a:p>
@@ -11958,7 +13344,64 @@
                 </a:solidFill>
                 <a:latin typeface="맑은 고딕"/>
               </a:rPr>
-              <a:t>•  `RECOVERY_MODE` — `... REAL TIME APPLY` **`WITH QUERY`** 유무</a:t>
+              <a:t>•  </a:t>
+            </a:r>
+            <a:r>
+              <a:rPr sz="1700" b="0">
+                <a:solidFill>
+                  <a:srgbClr val="222222"/>
+                </a:solidFill>
+                <a:latin typeface="Consolas"/>
+                <a:cs typeface="Consolas"/>
+              </a:rPr>
+              <a:t>RECOVERY_MODE</a:t>
+            </a:r>
+            <a:r>
+              <a:rPr sz="1700" b="0">
+                <a:solidFill>
+                  <a:srgbClr val="222222"/>
+                </a:solidFill>
+                <a:latin typeface="맑은 고딕"/>
+              </a:rPr>
+              <a:t> — </a:t>
+            </a:r>
+            <a:r>
+              <a:rPr sz="1700" b="0">
+                <a:solidFill>
+                  <a:srgbClr val="222222"/>
+                </a:solidFill>
+                <a:latin typeface="Consolas"/>
+                <a:cs typeface="Consolas"/>
+              </a:rPr>
+              <a:t>... REAL TIME APPLY</a:t>
+            </a:r>
+            <a:r>
+              <a:rPr sz="1700" b="0">
+                <a:solidFill>
+                  <a:srgbClr val="222222"/>
+                </a:solidFill>
+                <a:latin typeface="맑은 고딕"/>
+              </a:rPr>
+              <a:t> </a:t>
+            </a:r>
+            <a:r>
+              <a:rPr sz="1700" b="1">
+                <a:solidFill>
+                  <a:srgbClr val="222222"/>
+                </a:solidFill>
+                <a:latin typeface="Consolas"/>
+                <a:cs typeface="Consolas"/>
+              </a:rPr>
+              <a:t>WITH QUERY</a:t>
+            </a:r>
+            <a:r>
+              <a:rPr sz="1700" b="0">
+                <a:solidFill>
+                  <a:srgbClr val="222222"/>
+                </a:solidFill>
+                <a:latin typeface="맑은 고딕"/>
+              </a:rPr>
+              <a:t> 유무</a:t>
             </a:r>
           </a:p>
           <a:p>
@@ -11974,7 +13417,26 @@
                 </a:solidFill>
                 <a:latin typeface="맑은 고딕"/>
               </a:rPr>
-              <a:t>•  `APPLIED_SEQ#` 는 닫은 뒤에도 올라간다 (8 → 10)</a:t>
+              <a:t>•  </a:t>
+            </a:r>
+            <a:r>
+              <a:rPr sz="1700" b="0">
+                <a:solidFill>
+                  <a:srgbClr val="222222"/>
+                </a:solidFill>
+                <a:latin typeface="Consolas"/>
+                <a:cs typeface="Consolas"/>
+              </a:rPr>
+              <a:t>APPLIED_SEQ#</a:t>
+            </a:r>
+            <a:r>
+              <a:rPr sz="1700" b="0">
+                <a:solidFill>
+                  <a:srgbClr val="222222"/>
+                </a:solidFill>
+                <a:latin typeface="맑은 고딕"/>
+              </a:rPr>
+              <a:t> 는 닫은 뒤에도 올라간다 (8 → 10)</a:t>
             </a:r>
           </a:p>
           <a:p>
@@ -11990,7 +13452,44 @@
                 </a:solidFill>
                 <a:latin typeface="맑은 고딕"/>
               </a:rPr>
-              <a:t>•  `V$DATAGUARD_STATS` 는 Primary 에서 **0행** — 이 방법은 성립하지 않는다</a:t>
+              <a:t>•  </a:t>
+            </a:r>
+            <a:r>
+              <a:rPr sz="1700" b="0">
+                <a:solidFill>
+                  <a:srgbClr val="222222"/>
+                </a:solidFill>
+                <a:latin typeface="Consolas"/>
+                <a:cs typeface="Consolas"/>
+              </a:rPr>
+              <a:t>V$DATAGUARD_STATS</a:t>
+            </a:r>
+            <a:r>
+              <a:rPr sz="1700" b="0">
+                <a:solidFill>
+                  <a:srgbClr val="222222"/>
+                </a:solidFill>
+                <a:latin typeface="맑은 고딕"/>
+              </a:rPr>
+              <a:t> 는 Primary 에서 </a:t>
+            </a:r>
+            <a:r>
+              <a:rPr sz="1700" b="1">
+                <a:solidFill>
+                  <a:srgbClr val="222222"/>
+                </a:solidFill>
+                <a:latin typeface="맑은 고딕"/>
+              </a:rPr>
+              <a:t>0행</a:t>
+            </a:r>
+            <a:r>
+              <a:rPr sz="1700" b="0">
+                <a:solidFill>
+                  <a:srgbClr val="222222"/>
+                </a:solidFill>
+                <a:latin typeface="맑은 고딕"/>
+              </a:rPr>
+              <a:t> — 이 방법은 성립하지 않는다</a:t>
             </a:r>
           </a:p>
         </p:txBody>
@@ -12194,7 +13693,26 @@
                 </a:solidFill>
                 <a:latin typeface="맑은 고딕"/>
               </a:rPr>
-              <a:t>•  Q5. DML 리다이렉션이 `SYS` 로 실패하는 이유와, 그것이 기능 검증에 주는 교훈은?</a:t>
+              <a:t>•  Q5. DML 리다이렉션이 </a:t>
+            </a:r>
+            <a:r>
+              <a:rPr sz="1600" b="0">
+                <a:solidFill>
+                  <a:srgbClr val="222222"/>
+                </a:solidFill>
+                <a:latin typeface="Consolas"/>
+                <a:cs typeface="Consolas"/>
+              </a:rPr>
+              <a:t>SYS</a:t>
+            </a:r>
+            <a:r>
+              <a:rPr sz="1600" b="0">
+                <a:solidFill>
+                  <a:srgbClr val="222222"/>
+                </a:solidFill>
+                <a:latin typeface="맑은 고딕"/>
+              </a:rPr>
+              <a:t> 로 실패하는 이유와, 그것이 기능 검증에 주는 교훈은?</a:t>
             </a:r>
           </a:p>
           <a:p>
@@ -12210,7 +13728,26 @@
                 </a:solidFill>
                 <a:latin typeface="맑은 고딕"/>
               </a:rPr>
-              <a:t>•  Q6. ASYNC 구성에서 `SYNC WITH PRIMARY` 가 거부되는 이유를 보호 모드와 연결해 설명하라.</a:t>
+              <a:t>•  Q6. ASYNC 구성에서 </a:t>
+            </a:r>
+            <a:r>
+              <a:rPr sz="1600" b="0">
+                <a:solidFill>
+                  <a:srgbClr val="222222"/>
+                </a:solidFill>
+                <a:latin typeface="Consolas"/>
+                <a:cs typeface="Consolas"/>
+              </a:rPr>
+              <a:t>SYNC WITH PRIMARY</a:t>
+            </a:r>
+            <a:r>
+              <a:rPr sz="1600" b="0">
+                <a:solidFill>
+                  <a:srgbClr val="222222"/>
+                </a:solidFill>
+                <a:latin typeface="맑은 고딕"/>
+              </a:rPr>
+              <a:t> 가 거부되는 이유를 보호 모드와 연결해 설명하라.</a:t>
             </a:r>
           </a:p>
         </p:txBody>
@@ -12350,7 +13887,45 @@
                 </a:solidFill>
                 <a:latin typeface="맑은 고딕"/>
               </a:rPr>
-              <a:t>•  ADG 의 표식은 `OPEN_MODE = READ ONLY WITH APPLY` 와 `RECOVERY_MODE = MANAGED REAL TIME APPLY` 두 가지다.</a:t>
+              <a:t>•  ADG 의 표식은 </a:t>
+            </a:r>
+            <a:r>
+              <a:rPr sz="1600" b="0">
+                <a:solidFill>
+                  <a:srgbClr val="222222"/>
+                </a:solidFill>
+                <a:latin typeface="Consolas"/>
+                <a:cs typeface="Consolas"/>
+              </a:rPr>
+              <a:t>OPEN_MODE = READ ONLY WITH APPLY</a:t>
+            </a:r>
+            <a:r>
+              <a:rPr sz="1600" b="0">
+                <a:solidFill>
+                  <a:srgbClr val="222222"/>
+                </a:solidFill>
+                <a:latin typeface="맑은 고딕"/>
+              </a:rPr>
+              <a:t> 와 </a:t>
+            </a:r>
+            <a:r>
+              <a:rPr sz="1600" b="0">
+                <a:solidFill>
+                  <a:srgbClr val="222222"/>
+                </a:solidFill>
+                <a:latin typeface="Consolas"/>
+                <a:cs typeface="Consolas"/>
+              </a:rPr>
+              <a:t>RECOVERY_MODE = MANAGED REAL TIME APPLY</a:t>
+            </a:r>
+            <a:r>
+              <a:rPr sz="1600" b="0">
+                <a:solidFill>
+                  <a:srgbClr val="222222"/>
+                </a:solidFill>
+                <a:latin typeface="맑은 고딕"/>
+              </a:rPr>
+              <a:t> 두 가지다.</a:t>
             </a:r>
           </a:p>
           <a:p>
@@ -12366,7 +13941,45 @@
                 </a:solidFill>
                 <a:latin typeface="맑은 고딕"/>
               </a:rPr>
-              <a:t>•  기능 사용 통계는 `CDB_` 뷰의 CON_ID 3 에만 있고 `DETECTED_USAGES` 는 0이었다. 라이선스 근거로는 부족하다.</a:t>
+              <a:t>•  기능 사용 통계는 </a:t>
+            </a:r>
+            <a:r>
+              <a:rPr sz="1600" b="0">
+                <a:solidFill>
+                  <a:srgbClr val="222222"/>
+                </a:solidFill>
+                <a:latin typeface="Consolas"/>
+                <a:cs typeface="Consolas"/>
+              </a:rPr>
+              <a:t>CDB_</a:t>
+            </a:r>
+            <a:r>
+              <a:rPr sz="1600" b="0">
+                <a:solidFill>
+                  <a:srgbClr val="222222"/>
+                </a:solidFill>
+                <a:latin typeface="맑은 고딕"/>
+              </a:rPr>
+              <a:t> 뷰의 CON_ID 3 에만 있고 </a:t>
+            </a:r>
+            <a:r>
+              <a:rPr sz="1600" b="0">
+                <a:solidFill>
+                  <a:srgbClr val="222222"/>
+                </a:solidFill>
+                <a:latin typeface="Consolas"/>
+                <a:cs typeface="Consolas"/>
+              </a:rPr>
+              <a:t>DETECTED_USAGES</a:t>
+            </a:r>
+            <a:r>
+              <a:rPr sz="1600" b="0">
+                <a:solidFill>
+                  <a:srgbClr val="222222"/>
+                </a:solidFill>
+                <a:latin typeface="맑은 고딕"/>
+              </a:rPr>
+              <a:t> 는 0이었다. 라이선스 근거로는 부족하다.</a:t>
             </a:r>
           </a:p>
           <a:p>
@@ -12398,7 +14011,25 @@
                 </a:solidFill>
                 <a:latin typeface="맑은 고딕"/>
               </a:rPr>
-              <a:t>•  Standby 조회는 **커밋된 데이터만** 보여 준다. 리두와 함께 UNDO 도 적용되기 때문이다.</a:t>
+              <a:t>•  Standby 조회는 </a:t>
+            </a:r>
+            <a:r>
+              <a:rPr sz="1600" b="1">
+                <a:solidFill>
+                  <a:srgbClr val="222222"/>
+                </a:solidFill>
+                <a:latin typeface="맑은 고딕"/>
+              </a:rPr>
+              <a:t>커밋된 데이터만</a:t>
+            </a:r>
+            <a:r>
+              <a:rPr sz="1600" b="0">
+                <a:solidFill>
+                  <a:srgbClr val="222222"/>
+                </a:solidFill>
+                <a:latin typeface="맑은 고딕"/>
+              </a:rPr>
+              <a:t> 보여 준다. 리두와 함께 UNDO 도 적용되기 때문이다.</a:t>
             </a:r>
           </a:p>
           <a:p>
@@ -12414,7 +14045,26 @@
                 </a:solidFill>
                 <a:latin typeface="맑은 고딕"/>
               </a:rPr>
-              <a:t>•  SQL*Plus 는 `EXIT` 시 암묵적으로 커밋한다. 이 때문에 첫 측정이 잘못된 결론을 낼 뻔했다.</a:t>
+              <a:t>•  SQL*Plus 는 </a:t>
+            </a:r>
+            <a:r>
+              <a:rPr sz="1600" b="0">
+                <a:solidFill>
+                  <a:srgbClr val="222222"/>
+                </a:solidFill>
+                <a:latin typeface="Consolas"/>
+                <a:cs typeface="Consolas"/>
+              </a:rPr>
+              <a:t>EXIT</a:t>
+            </a:r>
+            <a:r>
+              <a:rPr sz="1600" b="0">
+                <a:solidFill>
+                  <a:srgbClr val="222222"/>
+                </a:solidFill>
+                <a:latin typeface="맑은 고딕"/>
+              </a:rPr>
+              <a:t> 시 암묵적으로 커밋한다. 이 때문에 첫 측정이 잘못된 결론을 낼 뻔했다.</a:t>
             </a:r>
           </a:p>
           <a:p>
@@ -12430,7 +14080,63 @@
                 </a:solidFill>
                 <a:latin typeface="맑은 고딕"/>
               </a:rPr>
-              <a:t>•  쓰기는 모두 **ORA-16000** 이다. `INSERT`·`UPDATE`·DDL 이 같은 오류다.</a:t>
+              <a:t>•  쓰기는 모두 </a:t>
+            </a:r>
+            <a:r>
+              <a:rPr sz="1600" b="1">
+                <a:solidFill>
+                  <a:srgbClr val="222222"/>
+                </a:solidFill>
+                <a:latin typeface="맑은 고딕"/>
+              </a:rPr>
+              <a:t>ORA-16000</a:t>
+            </a:r>
+            <a:r>
+              <a:rPr sz="1600" b="0">
+                <a:solidFill>
+                  <a:srgbClr val="222222"/>
+                </a:solidFill>
+                <a:latin typeface="맑은 고딕"/>
+              </a:rPr>
+              <a:t> 이다. </a:t>
+            </a:r>
+            <a:r>
+              <a:rPr sz="1600" b="0">
+                <a:solidFill>
+                  <a:srgbClr val="222222"/>
+                </a:solidFill>
+                <a:latin typeface="Consolas"/>
+                <a:cs typeface="Consolas"/>
+              </a:rPr>
+              <a:t>INSERT</a:t>
+            </a:r>
+            <a:r>
+              <a:rPr sz="1600" b="0">
+                <a:solidFill>
+                  <a:srgbClr val="222222"/>
+                </a:solidFill>
+                <a:latin typeface="맑은 고딕"/>
+              </a:rPr>
+              <a:t>·</a:t>
+            </a:r>
+            <a:r>
+              <a:rPr sz="1600" b="0">
+                <a:solidFill>
+                  <a:srgbClr val="222222"/>
+                </a:solidFill>
+                <a:latin typeface="Consolas"/>
+                <a:cs typeface="Consolas"/>
+              </a:rPr>
+              <a:t>UPDATE</a:t>
+            </a:r>
+            <a:r>
+              <a:rPr sz="1600" b="0">
+                <a:solidFill>
+                  <a:srgbClr val="222222"/>
+                </a:solidFill>
+                <a:latin typeface="맑은 고딕"/>
+              </a:rPr>
+              <a:t>·DDL 이 같은 오류다.</a:t>
             </a:r>
           </a:p>
           <a:p>
@@ -12462,7 +14168,45 @@
                 </a:solidFill>
                 <a:latin typeface="맑은 고딕"/>
               </a:rPr>
-              <a:t>•  `EXPLAIN PLAN` 과 GTT `INSERT` 도 된다. 데이터가 임시 테이블스페이스에 있기 때문이다.</a:t>
+              <a:t>•  </a:t>
+            </a:r>
+            <a:r>
+              <a:rPr sz="1600" b="0">
+                <a:solidFill>
+                  <a:srgbClr val="222222"/>
+                </a:solidFill>
+                <a:latin typeface="Consolas"/>
+                <a:cs typeface="Consolas"/>
+              </a:rPr>
+              <a:t>EXPLAIN PLAN</a:t>
+            </a:r>
+            <a:r>
+              <a:rPr sz="1600" b="0">
+                <a:solidFill>
+                  <a:srgbClr val="222222"/>
+                </a:solidFill>
+                <a:latin typeface="맑은 고딕"/>
+              </a:rPr>
+              <a:t> 과 GTT </a:t>
+            </a:r>
+            <a:r>
+              <a:rPr sz="1600" b="0">
+                <a:solidFill>
+                  <a:srgbClr val="222222"/>
+                </a:solidFill>
+                <a:latin typeface="Consolas"/>
+                <a:cs typeface="Consolas"/>
+              </a:rPr>
+              <a:t>INSERT</a:t>
+            </a:r>
+            <a:r>
+              <a:rPr sz="1600" b="0">
+                <a:solidFill>
+                  <a:srgbClr val="222222"/>
+                </a:solidFill>
+                <a:latin typeface="맑은 고딕"/>
+              </a:rPr>
+              <a:t> 도 된다. 데이터가 임시 테이블스페이스에 있기 때문이다.</a:t>
             </a:r>
           </a:p>
           <a:p>
@@ -12478,7 +14222,25 @@
                 </a:solidFill>
                 <a:latin typeface="맑은 고딕"/>
               </a:rPr>
-              <a:t>•  시퀀스도 되지만 **값이 뛴다.** Primary 에서 1이었던 시퀀스가 Standby 에서 21을 돌려주었다.</a:t>
+              <a:t>•  시퀀스도 되지만 </a:t>
+            </a:r>
+            <a:r>
+              <a:rPr sz="1600" b="1">
+                <a:solidFill>
+                  <a:srgbClr val="222222"/>
+                </a:solidFill>
+                <a:latin typeface="맑은 고딕"/>
+              </a:rPr>
+              <a:t>값이 뛴다.</a:t>
+            </a:r>
+            <a:r>
+              <a:rPr sz="1600" b="0">
+                <a:solidFill>
+                  <a:srgbClr val="222222"/>
+                </a:solidFill>
+                <a:latin typeface="맑은 고딕"/>
+              </a:rPr>
+              <a:t> Primary 에서 1이었던 시퀀스가 Standby 에서 21을 돌려주었다.</a:t>
             </a:r>
           </a:p>
           <a:p>
@@ -12494,7 +14256,44 @@
                 </a:solidFill>
                 <a:latin typeface="맑은 고딕"/>
               </a:rPr>
-              <a:t>•  통계 수집은 ORA-16000, AWR 은 전용 오류 **ORA-13516**. `V$` 뷰 조회는 자유롭다.</a:t>
+              <a:t>•  통계 수집은 ORA-16000, AWR 은 전용 오류 </a:t>
+            </a:r>
+            <a:r>
+              <a:rPr sz="1600" b="1">
+                <a:solidFill>
+                  <a:srgbClr val="222222"/>
+                </a:solidFill>
+                <a:latin typeface="맑은 고딕"/>
+              </a:rPr>
+              <a:t>ORA-13516</a:t>
+            </a:r>
+            <a:r>
+              <a:rPr sz="1600" b="0">
+                <a:solidFill>
+                  <a:srgbClr val="222222"/>
+                </a:solidFill>
+                <a:latin typeface="맑은 고딕"/>
+              </a:rPr>
+              <a:t>. </a:t>
+            </a:r>
+            <a:r>
+              <a:rPr sz="1600" b="0">
+                <a:solidFill>
+                  <a:srgbClr val="222222"/>
+                </a:solidFill>
+                <a:latin typeface="Consolas"/>
+                <a:cs typeface="Consolas"/>
+              </a:rPr>
+              <a:t>V$</a:t>
+            </a:r>
+            <a:r>
+              <a:rPr sz="1600" b="0">
+                <a:solidFill>
+                  <a:srgbClr val="222222"/>
+                </a:solidFill>
+                <a:latin typeface="맑은 고딕"/>
+              </a:rPr>
+              <a:t> 뷰 조회는 자유롭다.</a:t>
             </a:r>
           </a:p>
           <a:p>
@@ -12510,7 +14309,25 @@
                 </a:solidFill>
                 <a:latin typeface="맑은 고딕"/>
               </a:rPr>
-              <a:t>•  경계를 가르는 기준은 **영구 데이터 파일이나 딕셔너리를 바꾸는가** 하나다.</a:t>
+              <a:t>•  경계를 가르는 기준은 </a:t>
+            </a:r>
+            <a:r>
+              <a:rPr sz="1600" b="1">
+                <a:solidFill>
+                  <a:srgbClr val="222222"/>
+                </a:solidFill>
+                <a:latin typeface="맑은 고딕"/>
+              </a:rPr>
+              <a:t>영구 데이터 파일이나 딕셔너리를 바꾸는가</a:t>
+            </a:r>
+            <a:r>
+              <a:rPr sz="1600" b="0">
+                <a:solidFill>
+                  <a:srgbClr val="222222"/>
+                </a:solidFill>
+                <a:latin typeface="맑은 고딕"/>
+              </a:rPr>
+              <a:t> 하나다.</a:t>
             </a:r>
           </a:p>
           <a:p>
@@ -12526,7 +14343,64 @@
                 </a:solidFill>
                 <a:latin typeface="맑은 고딕"/>
               </a:rPr>
-              <a:t>•  DML 리다이렉션은 일반 사용자로 `INSERT`·`UPDATE`·`DELETE` 가 모두 성공하며 Primary 에 반영된다.</a:t>
+              <a:t>•  DML 리다이렉션은 일반 사용자로 </a:t>
+            </a:r>
+            <a:r>
+              <a:rPr sz="1600" b="0">
+                <a:solidFill>
+                  <a:srgbClr val="222222"/>
+                </a:solidFill>
+                <a:latin typeface="Consolas"/>
+                <a:cs typeface="Consolas"/>
+              </a:rPr>
+              <a:t>INSERT</a:t>
+            </a:r>
+            <a:r>
+              <a:rPr sz="1600" b="0">
+                <a:solidFill>
+                  <a:srgbClr val="222222"/>
+                </a:solidFill>
+                <a:latin typeface="맑은 고딕"/>
+              </a:rPr>
+              <a:t>·</a:t>
+            </a:r>
+            <a:r>
+              <a:rPr sz="1600" b="0">
+                <a:solidFill>
+                  <a:srgbClr val="222222"/>
+                </a:solidFill>
+                <a:latin typeface="Consolas"/>
+                <a:cs typeface="Consolas"/>
+              </a:rPr>
+              <a:t>UPDATE</a:t>
+            </a:r>
+            <a:r>
+              <a:rPr sz="1600" b="0">
+                <a:solidFill>
+                  <a:srgbClr val="222222"/>
+                </a:solidFill>
+                <a:latin typeface="맑은 고딕"/>
+              </a:rPr>
+              <a:t>·</a:t>
+            </a:r>
+            <a:r>
+              <a:rPr sz="1600" b="0">
+                <a:solidFill>
+                  <a:srgbClr val="222222"/>
+                </a:solidFill>
+                <a:latin typeface="Consolas"/>
+                <a:cs typeface="Consolas"/>
+              </a:rPr>
+              <a:t>DELETE</a:t>
+            </a:r>
+            <a:r>
+              <a:rPr sz="1600" b="0">
+                <a:solidFill>
+                  <a:srgbClr val="222222"/>
+                </a:solidFill>
+                <a:latin typeface="맑은 고딕"/>
+              </a:rPr>
+              <a:t> 가 모두 성공하며 Primary 에 반영된다.</a:t>
             </a:r>
           </a:p>
           <a:p>
@@ -12542,7 +14416,35 @@
                 </a:solidFill>
                 <a:latin typeface="맑은 고딕"/>
               </a:rPr>
-              <a:t>•  **`SYS` 로는 ORA-16397 로 실패한다.** 관리자 계정으로 시험하면 기능이 없다고 오판하기 쉽다.</a:t>
+              <a:t>•  </a:t>
+            </a:r>
+            <a:r>
+              <a:rPr sz="1600" b="1">
+                <a:solidFill>
+                  <a:srgbClr val="222222"/>
+                </a:solidFill>
+                <a:latin typeface="Consolas"/>
+                <a:cs typeface="Consolas"/>
+              </a:rPr>
+              <a:t>SYS</a:t>
+            </a:r>
+            <a:r>
+              <a:rPr sz="1600" b="1">
+                <a:solidFill>
+                  <a:srgbClr val="222222"/>
+                </a:solidFill>
+                <a:latin typeface="맑은 고딕"/>
+              </a:rPr>
+              <a:t> 로는 ORA-16397 로 실패한다.</a:t>
+            </a:r>
+            <a:r>
+              <a:rPr sz="1600" b="0">
+                <a:solidFill>
+                  <a:srgbClr val="222222"/>
+                </a:solidFill>
+                <a:latin typeface="맑은 고딕"/>
+              </a:rPr>
+              <a:t> 관리자 계정으로 시험하면 기능이 없다고 오판하기 쉽다.</a:t>
             </a:r>
           </a:p>
           <a:p>
@@ -12574,7 +14476,25 @@
                 </a:solidFill>
                 <a:latin typeface="맑은 고딕"/>
               </a:rPr>
-              <a:t>•  리다이렉션의 가치는 부하 분산이 아니라 **접속 단순화**다. 실행은 Primary 에서 일어난다.</a:t>
+              <a:t>•  리다이렉션의 가치는 부하 분산이 아니라 </a:t>
+            </a:r>
+            <a:r>
+              <a:rPr sz="1600" b="1">
+                <a:solidFill>
+                  <a:srgbClr val="222222"/>
+                </a:solidFill>
+                <a:latin typeface="맑은 고딕"/>
+              </a:rPr>
+              <a:t>접속 단순화</a:t>
+            </a:r>
+            <a:r>
+              <a:rPr sz="1600" b="0">
+                <a:solidFill>
+                  <a:srgbClr val="222222"/>
+                </a:solidFill>
+                <a:latin typeface="맑은 고딕"/>
+              </a:rPr>
+              <a:t>다. 실행은 Primary 에서 일어난다.</a:t>
             </a:r>
           </a:p>
           <a:p>
@@ -12590,7 +14510,44 @@
                 </a:solidFill>
                 <a:latin typeface="맑은 고딕"/>
               </a:rPr>
-              <a:t>•  `STANDBY_MAX_DATA_DELAY` 초과 시 **ORA-03172**. ASYNC 에서 0은 항상 위반된다.</a:t>
+              <a:t>•  </a:t>
+            </a:r>
+            <a:r>
+              <a:rPr sz="1600" b="0">
+                <a:solidFill>
+                  <a:srgbClr val="222222"/>
+                </a:solidFill>
+                <a:latin typeface="Consolas"/>
+                <a:cs typeface="Consolas"/>
+              </a:rPr>
+              <a:t>STANDBY_MAX_DATA_DELAY</a:t>
+            </a:r>
+            <a:r>
+              <a:rPr sz="1600" b="0">
+                <a:solidFill>
+                  <a:srgbClr val="222222"/>
+                </a:solidFill>
+                <a:latin typeface="맑은 고딕"/>
+              </a:rPr>
+              <a:t> 초과 시 </a:t>
+            </a:r>
+            <a:r>
+              <a:rPr sz="1600" b="1">
+                <a:solidFill>
+                  <a:srgbClr val="222222"/>
+                </a:solidFill>
+                <a:latin typeface="맑은 고딕"/>
+              </a:rPr>
+              <a:t>ORA-03172</a:t>
+            </a:r>
+            <a:r>
+              <a:rPr sz="1600" b="0">
+                <a:solidFill>
+                  <a:srgbClr val="222222"/>
+                </a:solidFill>
+                <a:latin typeface="맑은 고딕"/>
+              </a:rPr>
+              <a:t>. ASYNC 에서 0은 항상 위반된다.</a:t>
             </a:r>
           </a:p>
           <a:p>
@@ -12606,7 +14563,35 @@
                 </a:solidFill>
                 <a:latin typeface="맑은 고딕"/>
               </a:rPr>
-              <a:t>•  **`SYS` 세션에는 적용되지 않는다 — ORA-03174.** ADG 세션 기능은 일반 사용자를 전제로 한다.</a:t>
+              <a:t>•  </a:t>
+            </a:r>
+            <a:r>
+              <a:rPr sz="1600" b="1">
+                <a:solidFill>
+                  <a:srgbClr val="222222"/>
+                </a:solidFill>
+                <a:latin typeface="Consolas"/>
+                <a:cs typeface="Consolas"/>
+              </a:rPr>
+              <a:t>SYS</a:t>
+            </a:r>
+            <a:r>
+              <a:rPr sz="1600" b="1">
+                <a:solidFill>
+                  <a:srgbClr val="222222"/>
+                </a:solidFill>
+                <a:latin typeface="맑은 고딕"/>
+              </a:rPr>
+              <a:t> 세션에는 적용되지 않는다 — ORA-03174.</a:t>
+            </a:r>
+            <a:r>
+              <a:rPr sz="1600" b="0">
+                <a:solidFill>
+                  <a:srgbClr val="222222"/>
+                </a:solidFill>
+                <a:latin typeface="맑은 고딕"/>
+              </a:rPr>
+              <a:t> ADG 세션 기능은 일반 사용자를 전제로 한다.</a:t>
             </a:r>
           </a:p>
           <a:p>
@@ -12622,7 +14607,44 @@
                 </a:solidFill>
                 <a:latin typeface="맑은 고딕"/>
               </a:rPr>
-              <a:t>•  `SYNC WITH PRIMARY` 는 동기 전송이 전제다. ASYNC 에서는 **ORA-03173**.</a:t>
+              <a:t>•  </a:t>
+            </a:r>
+            <a:r>
+              <a:rPr sz="1600" b="0">
+                <a:solidFill>
+                  <a:srgbClr val="222222"/>
+                </a:solidFill>
+                <a:latin typeface="Consolas"/>
+                <a:cs typeface="Consolas"/>
+              </a:rPr>
+              <a:t>SYNC WITH PRIMARY</a:t>
+            </a:r>
+            <a:r>
+              <a:rPr sz="1600" b="0">
+                <a:solidFill>
+                  <a:srgbClr val="222222"/>
+                </a:solidFill>
+                <a:latin typeface="맑은 고딕"/>
+              </a:rPr>
+              <a:t> 는 동기 전송이 전제다. ASYNC 에서는 </a:t>
+            </a:r>
+            <a:r>
+              <a:rPr sz="1600" b="1">
+                <a:solidFill>
+                  <a:srgbClr val="222222"/>
+                </a:solidFill>
+                <a:latin typeface="맑은 고딕"/>
+              </a:rPr>
+              <a:t>ORA-03173</a:t>
+            </a:r>
+            <a:r>
+              <a:rPr sz="1600" b="0">
+                <a:solidFill>
+                  <a:srgbClr val="222222"/>
+                </a:solidFill>
+                <a:latin typeface="맑은 고딕"/>
+              </a:rPr>
+              <a:t>.</a:t>
             </a:r>
           </a:p>
           <a:p>
@@ -12654,7 +14676,64 @@
                 </a:solidFill>
                 <a:latin typeface="맑은 고딕"/>
               </a:rPr>
-              <a:t>•  `V$STANDBY_EVENT_HISTOGRAM` 은 `apply lag` 하나만 누적한다. 2분 정지가 `2 minutes` 59회로 남았다.</a:t>
+              <a:t>•  </a:t>
+            </a:r>
+            <a:r>
+              <a:rPr sz="1600" b="0">
+                <a:solidFill>
+                  <a:srgbClr val="222222"/>
+                </a:solidFill>
+                <a:latin typeface="Consolas"/>
+                <a:cs typeface="Consolas"/>
+              </a:rPr>
+              <a:t>V$STANDBY_EVENT_HISTOGRAM</a:t>
+            </a:r>
+            <a:r>
+              <a:rPr sz="1600" b="0">
+                <a:solidFill>
+                  <a:srgbClr val="222222"/>
+                </a:solidFill>
+                <a:latin typeface="맑은 고딕"/>
+              </a:rPr>
+              <a:t> 은 </a:t>
+            </a:r>
+            <a:r>
+              <a:rPr sz="1600" b="0">
+                <a:solidFill>
+                  <a:srgbClr val="222222"/>
+                </a:solidFill>
+                <a:latin typeface="Consolas"/>
+                <a:cs typeface="Consolas"/>
+              </a:rPr>
+              <a:t>apply lag</a:t>
+            </a:r>
+            <a:r>
+              <a:rPr sz="1600" b="0">
+                <a:solidFill>
+                  <a:srgbClr val="222222"/>
+                </a:solidFill>
+                <a:latin typeface="맑은 고딕"/>
+              </a:rPr>
+              <a:t> 하나만 누적한다. 2분 정지가 </a:t>
+            </a:r>
+            <a:r>
+              <a:rPr sz="1600" b="0">
+                <a:solidFill>
+                  <a:srgbClr val="222222"/>
+                </a:solidFill>
+                <a:latin typeface="Consolas"/>
+                <a:cs typeface="Consolas"/>
+              </a:rPr>
+              <a:t>2 minutes</a:t>
+            </a:r>
+            <a:r>
+              <a:rPr sz="1600" b="0">
+                <a:solidFill>
+                  <a:srgbClr val="222222"/>
+                </a:solidFill>
+                <a:latin typeface="맑은 고딕"/>
+              </a:rPr>
+              <a:t> 59회로 남았다.</a:t>
             </a:r>
           </a:p>
           <a:p>
@@ -12670,7 +14749,25 @@
                 </a:solidFill>
                 <a:latin typeface="맑은 고딕"/>
               </a:rPr>
-              <a:t>•  옵션 없이 쓰려면 MOUNTED 로 둔다. 적용은 돌고 조회만 **ORA-01219** 로 막힌다.</a:t>
+              <a:t>•  옵션 없이 쓰려면 MOUNTED 로 둔다. 적용은 돌고 조회만 </a:t>
+            </a:r>
+            <a:r>
+              <a:rPr sz="1600" b="1">
+                <a:solidFill>
+                  <a:srgbClr val="222222"/>
+                </a:solidFill>
+                <a:latin typeface="맑은 고딕"/>
+              </a:rPr>
+              <a:t>ORA-01219</a:t>
+            </a:r>
+            <a:r>
+              <a:rPr sz="1600" b="0">
+                <a:solidFill>
+                  <a:srgbClr val="222222"/>
+                </a:solidFill>
+                <a:latin typeface="맑은 고딕"/>
+              </a:rPr>
+              <a:t> 로 막힌다.</a:t>
             </a:r>
           </a:p>
           <a:p>
@@ -12686,7 +14783,64 @@
                 </a:solidFill>
                 <a:latin typeface="맑은 고딕"/>
               </a:rPr>
-              <a:t>•  Primary 쪽 표식은 `DATABASE_MODE` 와 `RECOVERY_MODE` 의 **`WITH QUERY`** 유무다.</a:t>
+              <a:t>•  Primary 쪽 표식은 </a:t>
+            </a:r>
+            <a:r>
+              <a:rPr sz="1600" b="0">
+                <a:solidFill>
+                  <a:srgbClr val="222222"/>
+                </a:solidFill>
+                <a:latin typeface="Consolas"/>
+                <a:cs typeface="Consolas"/>
+              </a:rPr>
+              <a:t>DATABASE_MODE</a:t>
+            </a:r>
+            <a:r>
+              <a:rPr sz="1600" b="0">
+                <a:solidFill>
+                  <a:srgbClr val="222222"/>
+                </a:solidFill>
+                <a:latin typeface="맑은 고딕"/>
+              </a:rPr>
+              <a:t> 와 </a:t>
+            </a:r>
+            <a:r>
+              <a:rPr sz="1600" b="0">
+                <a:solidFill>
+                  <a:srgbClr val="222222"/>
+                </a:solidFill>
+                <a:latin typeface="Consolas"/>
+                <a:cs typeface="Consolas"/>
+              </a:rPr>
+              <a:t>RECOVERY_MODE</a:t>
+            </a:r>
+            <a:r>
+              <a:rPr sz="1600" b="0">
+                <a:solidFill>
+                  <a:srgbClr val="222222"/>
+                </a:solidFill>
+                <a:latin typeface="맑은 고딕"/>
+              </a:rPr>
+              <a:t> 의 </a:t>
+            </a:r>
+            <a:r>
+              <a:rPr sz="1600" b="1">
+                <a:solidFill>
+                  <a:srgbClr val="222222"/>
+                </a:solidFill>
+                <a:latin typeface="Consolas"/>
+                <a:cs typeface="Consolas"/>
+              </a:rPr>
+              <a:t>WITH QUERY</a:t>
+            </a:r>
+            <a:r>
+              <a:rPr sz="1600" b="0">
+                <a:solidFill>
+                  <a:srgbClr val="222222"/>
+                </a:solidFill>
+                <a:latin typeface="맑은 고딕"/>
+              </a:rPr>
+              <a:t> 유무다.</a:t>
             </a:r>
           </a:p>
         </p:txBody>
@@ -12890,7 +15044,26 @@
                 </a:solidFill>
                 <a:latin typeface="맑은 고딕"/>
               </a:rPr>
-              <a:t>•  실습 05 — 리다이렉션의 제약: `SYS` 의 ORA-16397 과 DDL 의 ORA-16000 을 구분하고 점검표를 만든다.</a:t>
+              <a:t>•  실습 05 — 리다이렉션의 제약: </a:t>
+            </a:r>
+            <a:r>
+              <a:rPr sz="1600" b="0">
+                <a:solidFill>
+                  <a:srgbClr val="222222"/>
+                </a:solidFill>
+                <a:latin typeface="Consolas"/>
+                <a:cs typeface="Consolas"/>
+              </a:rPr>
+              <a:t>SYS</a:t>
+            </a:r>
+            <a:r>
+              <a:rPr sz="1600" b="0">
+                <a:solidFill>
+                  <a:srgbClr val="222222"/>
+                </a:solidFill>
+                <a:latin typeface="맑은 고딕"/>
+              </a:rPr>
+              <a:t> 의 ORA-16397 과 DDL 의 ORA-16000 을 구분하고 점검표를 만든다.</a:t>
             </a:r>
           </a:p>
           <a:p>
@@ -12938,7 +15111,26 @@
                 </a:solidFill>
                 <a:latin typeface="맑은 고딕"/>
               </a:rPr>
-              <a:t>•  실습 08 — 옵션 없는 대안 경로: MOUNTED 로 내려 `ORA-01219` 를 재현하고 양쪽에서 동기화를 확인한다.</a:t>
+              <a:t>•  실습 08 — 옵션 없는 대안 경로: MOUNTED 로 내려 </a:t>
+            </a:r>
+            <a:r>
+              <a:rPr sz="1600" b="0">
+                <a:solidFill>
+                  <a:srgbClr val="222222"/>
+                </a:solidFill>
+                <a:latin typeface="Consolas"/>
+                <a:cs typeface="Consolas"/>
+              </a:rPr>
+              <a:t>ORA-01219</a:t>
+            </a:r>
+            <a:r>
+              <a:rPr sz="1600" b="0">
+                <a:solidFill>
+                  <a:srgbClr val="222222"/>
+                </a:solidFill>
+                <a:latin typeface="맑은 고딕"/>
+              </a:rPr>
+              <a:t> 를 재현하고 양쪽에서 동기화를 확인한다.</a:t>
             </a:r>
           </a:p>
           <a:p>
@@ -13388,7 +15580,35 @@
                 </a:solidFill>
                 <a:latin typeface="맑은 고딕"/>
               </a:rPr>
-              <a:t>•  `OPEN_MODE` = **READ ONLY WITH APPLY**</a:t>
+              <a:t>•  </a:t>
+            </a:r>
+            <a:r>
+              <a:rPr sz="1700" b="0">
+                <a:solidFill>
+                  <a:srgbClr val="222222"/>
+                </a:solidFill>
+                <a:latin typeface="Consolas"/>
+                <a:cs typeface="Consolas"/>
+              </a:rPr>
+              <a:t>OPEN_MODE</a:t>
+            </a:r>
+            <a:r>
+              <a:rPr sz="1700" b="0">
+                <a:solidFill>
+                  <a:srgbClr val="222222"/>
+                </a:solidFill>
+                <a:latin typeface="맑은 고딕"/>
+              </a:rPr>
+              <a:t> = </a:t>
+            </a:r>
+            <a:r>
+              <a:rPr sz="1700" b="1">
+                <a:solidFill>
+                  <a:srgbClr val="222222"/>
+                </a:solidFill>
+                <a:latin typeface="맑은 고딕"/>
+              </a:rPr>
+              <a:t>READ ONLY WITH APPLY</a:t>
             </a:r>
           </a:p>
           <a:p>
@@ -13404,7 +15624,35 @@
                 </a:solidFill>
                 <a:latin typeface="맑은 고딕"/>
               </a:rPr>
-              <a:t>•  `RECOVERY_MODE` = **MANAGED REAL TIME APPLY**</a:t>
+              <a:t>•  </a:t>
+            </a:r>
+            <a:r>
+              <a:rPr sz="1700" b="0">
+                <a:solidFill>
+                  <a:srgbClr val="222222"/>
+                </a:solidFill>
+                <a:latin typeface="Consolas"/>
+                <a:cs typeface="Consolas"/>
+              </a:rPr>
+              <a:t>RECOVERY_MODE</a:t>
+            </a:r>
+            <a:r>
+              <a:rPr sz="1700" b="0">
+                <a:solidFill>
+                  <a:srgbClr val="222222"/>
+                </a:solidFill>
+                <a:latin typeface="맑은 고딕"/>
+              </a:rPr>
+              <a:t> = </a:t>
+            </a:r>
+            <a:r>
+              <a:rPr sz="1700" b="1">
+                <a:solidFill>
+                  <a:srgbClr val="222222"/>
+                </a:solidFill>
+                <a:latin typeface="맑은 고딕"/>
+              </a:rPr>
+              <a:t>MANAGED REAL TIME APPLY</a:t>
             </a:r>
           </a:p>
           <a:p>
@@ -13420,7 +15668,26 @@
                 </a:solidFill>
                 <a:latin typeface="맑은 고딕"/>
               </a:rPr>
-              <a:t>•  두 번째는 목적지 `STATUS` 가 VALID 일 때만 의미가 있다</a:t>
+              <a:t>•  두 번째는 목적지 </a:t>
+            </a:r>
+            <a:r>
+              <a:rPr sz="1700" b="0">
+                <a:solidFill>
+                  <a:srgbClr val="222222"/>
+                </a:solidFill>
+                <a:latin typeface="Consolas"/>
+                <a:cs typeface="Consolas"/>
+              </a:rPr>
+              <a:t>STATUS</a:t>
+            </a:r>
+            <a:r>
+              <a:rPr sz="1700" b="0">
+                <a:solidFill>
+                  <a:srgbClr val="222222"/>
+                </a:solidFill>
+                <a:latin typeface="맑은 고딕"/>
+              </a:rPr>
+              <a:t> 가 VALID 일 때만 의미가 있다</a:t>
             </a:r>
           </a:p>
           <a:p>
@@ -13615,7 +15882,35 @@
                 </a:solidFill>
                 <a:latin typeface="맑은 고딕"/>
               </a:rPr>
-              <a:t>•  `DBA_FEATURE_USAGE_STATISTICS` → **no rows selected**</a:t>
+              <a:t>•  </a:t>
+            </a:r>
+            <a:r>
+              <a:rPr sz="1700" b="0">
+                <a:solidFill>
+                  <a:srgbClr val="222222"/>
+                </a:solidFill>
+                <a:latin typeface="Consolas"/>
+                <a:cs typeface="Consolas"/>
+              </a:rPr>
+              <a:t>DBA_FEATURE_USAGE_STATISTICS</a:t>
+            </a:r>
+            <a:r>
+              <a:rPr sz="1700" b="0">
+                <a:solidFill>
+                  <a:srgbClr val="222222"/>
+                </a:solidFill>
+                <a:latin typeface="맑은 고딕"/>
+              </a:rPr>
+              <a:t> → </a:t>
+            </a:r>
+            <a:r>
+              <a:rPr sz="1700" b="1">
+                <a:solidFill>
+                  <a:srgbClr val="222222"/>
+                </a:solidFill>
+                <a:latin typeface="맑은 고딕"/>
+              </a:rPr>
+              <a:t>no rows selected</a:t>
             </a:r>
           </a:p>
           <a:p>
@@ -13631,7 +15926,26 @@
                 </a:solidFill>
                 <a:latin typeface="맑은 고딕"/>
               </a:rPr>
-              <a:t>•  `CDB_FEATURE_USAGE_STATISTICS` CON_ID 3 에 두 항목</a:t>
+              <a:t>•  </a:t>
+            </a:r>
+            <a:r>
+              <a:rPr sz="1700" b="0">
+                <a:solidFill>
+                  <a:srgbClr val="222222"/>
+                </a:solidFill>
+                <a:latin typeface="Consolas"/>
+                <a:cs typeface="Consolas"/>
+              </a:rPr>
+              <a:t>CDB_FEATURE_USAGE_STATISTICS</a:t>
+            </a:r>
+            <a:r>
+              <a:rPr sz="1700" b="0">
+                <a:solidFill>
+                  <a:srgbClr val="222222"/>
+                </a:solidFill>
+                <a:latin typeface="맑은 고딕"/>
+              </a:rPr>
+              <a:t> CON_ID 3 에 두 항목</a:t>
             </a:r>
           </a:p>
           <a:p>
@@ -13647,7 +15961,35 @@
                 </a:solidFill>
                 <a:latin typeface="맑은 고딕"/>
               </a:rPr>
-              <a:t>•  그런데 `DETECTED_USAGES` 가 **0**</a:t>
+              <a:t>•  그런데 </a:t>
+            </a:r>
+            <a:r>
+              <a:rPr sz="1700" b="0">
+                <a:solidFill>
+                  <a:srgbClr val="222222"/>
+                </a:solidFill>
+                <a:latin typeface="Consolas"/>
+                <a:cs typeface="Consolas"/>
+              </a:rPr>
+              <a:t>DETECTED_USAGES</a:t>
+            </a:r>
+            <a:r>
+              <a:rPr sz="1700" b="0">
+                <a:solidFill>
+                  <a:srgbClr val="222222"/>
+                </a:solidFill>
+                <a:latin typeface="맑은 고딕"/>
+              </a:rPr>
+              <a:t> 가 </a:t>
+            </a:r>
+            <a:r>
+              <a:rPr sz="1700" b="1">
+                <a:solidFill>
+                  <a:srgbClr val="222222"/>
+                </a:solidFill>
+                <a:latin typeface="맑은 고딕"/>
+              </a:rPr>
+              <a:t>0</a:t>
             </a:r>
           </a:p>
           <a:p>
@@ -13663,7 +16005,26 @@
                 </a:solidFill>
                 <a:latin typeface="맑은 고딕"/>
               </a:rPr>
-              <a:t>•  라이선스 판단은 `OPEN_MODE` 로 하는 편이 정확하다</a:t>
+              <a:t>•  라이선스 판단은 </a:t>
+            </a:r>
+            <a:r>
+              <a:rPr sz="1700" b="0">
+                <a:solidFill>
+                  <a:srgbClr val="222222"/>
+                </a:solidFill>
+                <a:latin typeface="Consolas"/>
+                <a:cs typeface="Consolas"/>
+              </a:rPr>
+              <a:t>OPEN_MODE</a:t>
+            </a:r>
+            <a:r>
+              <a:rPr sz="1700" b="0">
+                <a:solidFill>
+                  <a:srgbClr val="222222"/>
+                </a:solidFill>
+                <a:latin typeface="맑은 고딕"/>
+              </a:rPr>
+              <a:t> 로 하는 편이 정확하다</a:t>
             </a:r>
           </a:p>
         </p:txBody>
@@ -13842,7 +16203,26 @@
                 </a:solidFill>
                 <a:latin typeface="맑은 고딕"/>
               </a:rPr>
-              <a:t>•  `SYS_CONTEXT('userenv','db_unique_name')` → boston</a:t>
+              <a:t>•  </a:t>
+            </a:r>
+            <a:r>
+              <a:rPr sz="1700" b="0">
+                <a:solidFill>
+                  <a:srgbClr val="222222"/>
+                </a:solidFill>
+                <a:latin typeface="Consolas"/>
+                <a:cs typeface="Consolas"/>
+              </a:rPr>
+              <a:t>SYS_CONTEXT('userenv','db_unique_name')</a:t>
+            </a:r>
+            <a:r>
+              <a:rPr sz="1700" b="0">
+                <a:solidFill>
+                  <a:srgbClr val="222222"/>
+                </a:solidFill>
+                <a:latin typeface="맑은 고딕"/>
+              </a:rPr>
+              <a:t> → boston</a:t>
             </a:r>
           </a:p>
           <a:p>
@@ -13858,7 +16238,26 @@
                 </a:solidFill>
                 <a:latin typeface="맑은 고딕"/>
               </a:rPr>
-              <a:t>•  `SYS_CONTEXT('userenv','database_role')` → PHYSICAL STANDBY</a:t>
+              <a:t>•  </a:t>
+            </a:r>
+            <a:r>
+              <a:rPr sz="1700" b="0">
+                <a:solidFill>
+                  <a:srgbClr val="222222"/>
+                </a:solidFill>
+                <a:latin typeface="Consolas"/>
+                <a:cs typeface="Consolas"/>
+              </a:rPr>
+              <a:t>SYS_CONTEXT('userenv','database_role')</a:t>
+            </a:r>
+            <a:r>
+              <a:rPr sz="1700" b="0">
+                <a:solidFill>
+                  <a:srgbClr val="222222"/>
+                </a:solidFill>
+                <a:latin typeface="맑은 고딕"/>
+              </a:rPr>
+              <a:t> → PHYSICAL STANDBY</a:t>
             </a:r>
           </a:p>
           <a:p>
@@ -13874,7 +16273,25 @@
                 </a:solidFill>
                 <a:latin typeface="맑은 고딕"/>
               </a:rPr>
-              <a:t>•  역할 전환 환경에서는 **역할로 판단**해야 한다</a:t>
+              <a:t>•  역할 전환 환경에서는 </a:t>
+            </a:r>
+            <a:r>
+              <a:rPr sz="1700" b="1">
+                <a:solidFill>
+                  <a:srgbClr val="222222"/>
+                </a:solidFill>
+                <a:latin typeface="맑은 고딕"/>
+              </a:rPr>
+              <a:t>역할로 판단</a:t>
+            </a:r>
+            <a:r>
+              <a:rPr sz="1700" b="0">
+                <a:solidFill>
+                  <a:srgbClr val="222222"/>
+                </a:solidFill>
+                <a:latin typeface="맑은 고딕"/>
+              </a:rPr>
+              <a:t>해야 한다</a:t>
             </a:r>
           </a:p>
           <a:p>
@@ -14324,7 +16741,25 @@
                 </a:solidFill>
                 <a:latin typeface="맑은 고딕"/>
               </a:rPr>
-              <a:t>•  그 사이 Standby 조회 → **커밋된 1건만** 보인다</a:t>
+              <a:t>•  그 사이 Standby 조회 → </a:t>
+            </a:r>
+            <a:r>
+              <a:rPr sz="1700" b="1">
+                <a:solidFill>
+                  <a:srgbClr val="222222"/>
+                </a:solidFill>
+                <a:latin typeface="맑은 고딕"/>
+              </a:rPr>
+              <a:t>커밋된 1건만</a:t>
+            </a:r>
+            <a:r>
+              <a:rPr sz="1700" b="0">
+                <a:solidFill>
+                  <a:srgbClr val="222222"/>
+                </a:solidFill>
+                <a:latin typeface="맑은 고딕"/>
+              </a:rPr>
+              <a:t> 보인다</a:t>
             </a:r>
           </a:p>
           <a:p>
@@ -14356,7 +16791,25 @@
                 </a:solidFill>
                 <a:latin typeface="맑은 고딕"/>
               </a:rPr>
-              <a:t>•  리두와 함께 **UNDO 도 적용**되어 일관성이 유지된다</a:t>
+              <a:t>•  리두와 함께 </a:t>
+            </a:r>
+            <a:r>
+              <a:rPr sz="1700" b="1">
+                <a:solidFill>
+                  <a:srgbClr val="222222"/>
+                </a:solidFill>
+                <a:latin typeface="맑은 고딕"/>
+              </a:rPr>
+              <a:t>UNDO 도 적용</a:t>
+            </a:r>
+            <a:r>
+              <a:rPr sz="1700" b="0">
+                <a:solidFill>
+                  <a:srgbClr val="222222"/>
+                </a:solidFill>
+                <a:latin typeface="맑은 고딕"/>
+              </a:rPr>
+              <a:t>되어 일관성이 유지된다</a:t>
             </a:r>
           </a:p>
         </p:txBody>

--- a/ADG/09장/9장_ActiveDataGuard_실시간조회와DML리다이렉션.pptx
+++ b/ADG/09장/9장_ActiveDataGuard_실시간조회와DML리다이렉션.pptx
@@ -43,6 +43,20 @@
     <p:sldId id="291" r:id="rId43"/>
     <p:sldId id="292" r:id="rId44"/>
     <p:sldId id="293" r:id="rId45"/>
+    <p:sldId id="294" r:id="rId46"/>
+    <p:sldId id="295" r:id="rId47"/>
+    <p:sldId id="296" r:id="rId48"/>
+    <p:sldId id="297" r:id="rId49"/>
+    <p:sldId id="298" r:id="rId50"/>
+    <p:sldId id="299" r:id="rId51"/>
+    <p:sldId id="300" r:id="rId52"/>
+    <p:sldId id="301" r:id="rId53"/>
+    <p:sldId id="302" r:id="rId54"/>
+    <p:sldId id="303" r:id="rId55"/>
+    <p:sldId id="304" r:id="rId56"/>
+    <p:sldId id="305" r:id="rId57"/>
+    <p:sldId id="306" r:id="rId58"/>
+    <p:sldId id="307" r:id="rId59"/>
   </p:sldIdLst>
   <p:sldSz cx="12191695" cy="6858000" type="screen4x3"/>
   <p:notesSz cx="6858000" cy="9144000"/>
@@ -539,7 +553,7 @@
           <a:lstStyle/>
           <a:p>
             <a:r>
-              <a:t>7장에서 배운 주의사항이 여기서도 그대로 적용됩니다. RECOVERY_MODE 는 목적지가 BAD PARAM 이면 실제로 적용 중이어도 IDLE 로 나옵니다. 그래서 두 열을 함께 조회해야 합니다. OPEN_MODE 의 WITH APPLY 라는 꼬리표는 MRP0 의 존재를 그대로 반영하므로, 이 한 문자열만으로도 적용 여부를 알 수 있습니다. 반대로 MRP 를 멈추면 READ ONLY 로 바뀝니다. 이 장에서 다룰 모든 기능이 이 상태를 전제로 합니다.</a:t>
+              <a:t>물리 Standby는 서버와 스토리지 비용이 Primary와 비슷하게 드는데, 마운트 상태로만 두면 장애가 나기 전까지 업무에 쓰이지 않습니다. 운영 DB에서 OLTP와 월말 보고서가 같이 돌면 응답 시간이 흔들리는데, 보고서 쪽을 Standby로 옮기면 Primary는 갱신 업무만 맡게 됩니다. 별도 복제 도구로 보고서 DB를 만드는 방식과 비교하면, Standby는 리두를 블록 단위로 적용하므로 데이터 유형 제약이 없고 재해 복구 사본 역할도 그대로 유지합니다. 다만 읽기 전용이라 보고서용 인덱스를 추가할 수 없고, 그런 요구가 있으면 12장의 논리 Standby가 후보입니다.</a:t>
             </a:r>
           </a:p>
         </p:txBody>
@@ -609,7 +623,7 @@
           <a:lstStyle/>
           <a:p>
             <a:r>
-              <a:t>이 기준의 가치는 새로운 상황도 판단할 수 있다는 것입니다. 표를 외우는 대신 "이 작업이 영구 파일이나 딕셔너리를 바꾸는가"를 물으면 됩니다. 예를 들어 DBMS_STATS 는 딕셔너리를 바꾸니 안 되고, PLAN_TABLE 은 GTT 니까 됩니다. 시퀀스는 애매해 보이지만 메모리에서만 관리하는 방식으로 우회했다는 것을 알면 이해됩니다. 읽기 분산 설계에서 조회를 분류할 때 이 기준이 그대로 판단 근거가 됩니다.</a:t>
+              <a:t>물리 Standby의 블록은 Primary 블록의 복제본이어야 다음 리두가 그대로 적용됩니다. Standby가 스스로 블록 하나라도 바꾸면 그 뒤 도착하는 리두와 내용이 맞지 않게 되니, 리두를 만드는 작업은 전부 거부됩니다. 통계 수집이 막히는 것을 의외로 여기는 분이 많은데, 통계도 딕셔너리 테이블에 쓰는 작업입니다. Standby의 실행 계획은 Primary에서 수집해 리두로 넘어온 통계로 만들어집니다. AWR은 기능 쪽에서 먼저 상태를 확인하기 때문에 ORA-16000이 아닌 전용 오류 ORA-13516이 나옵니다.</a:t>
             </a:r>
           </a:p>
         </p:txBody>
@@ -679,7 +693,7 @@
           <a:lstStyle/>
           <a:p>
             <a:r>
-              <a:t>동작 방식은 이렇습니다. Standby 가 Primary 로 새 연결을 만들어 현재 세션의 사용자로 인증한 뒤 그 문장을 실행합니다. 커밋 후 그 변경이 리두를 통해 Standby 로 돌아옵니다. 즉 실제로 실행된 곳은 Primary 이고 Standby 는 중계 역할만 합니다. 목적은 편의성입니다. 조회는 Standby 로 보내고 싶은데 애플리케이션이 가끔 작은 갱신을 한다면 그 한두 문장 때문에 접속을 나누는 것이 번거롭죠. 리다이렉션이 그 간격을 메웁니다.</a:t>
+              <a:t>정렬과 해시 조인은 임시 테이블스페이스를 쓰므로 문제없이 돌아갑니다. 한 가지 함정은 임시 파일이 리두로 만들어지지 않는다는 것입니다. Standby를 새로 만들었거나 Primary에서 임시 테이블스페이스를 바꿨다면 Standby 쪽 임시 파일이 있는지 확인하고 필요하면 직접 추가해야 합니다. EXPLAIN PLAN이 되는 이유는 19c의 PLAN_TABLE이 전역 임시 테이블이기 때문입니다. Data Pump 내보내기는 마스터 테이블을 써야 해서 Standby에서 직접 돌릴 수 없고, 다른 읽기·쓰기 DB에서 네트워크 링크로 끌어오는 방식을 씁니다.</a:t>
             </a:r>
           </a:p>
         </p:txBody>
@@ -749,7 +763,7 @@
           <a:lstStyle/>
           <a:p>
             <a:r>
-              <a:t>실습에서도 처음에 SYS 로 시도해 이 오류를 만났고 일반 사용자로 바꾸자 바로 동작했습니다. 오류 메시지가 원인을 알려 주지 않는다는 점도 문제입니다. "리다이렉션이 실패했다"고만 말할 뿐 왜인지는 말하지 않습니다. 접속 계정, Primary 접근 가능 여부, 대상 객체의 존재를 차례로 확인해야 합니다. 기능 검증은 실제 애플리케이션이 쓰는 계정과 같은 종류로 해야 한다는 교훈이 여기서 나옵니다.</a:t>
+              <a:t>목록을 외우기보다 "블록, 언두, 딕셔너리 중 영구 파일에 기록되는 것이 있는가"를 묻는 습관을 들이면 처음 보는 작업도 결과를 대부분 맞힙니다. 성공하는 작업을 보면 공통점이 있습니다. GTT는 언두를 임시 공간으로, PTT는 정의를 메모리로 옮겼고, 시퀀스와 리다이렉션은 실제 기록을 Primary에 맡깁니다. 오류 번호도 단서입니다. ORA-16000은 읽기 전용 검사에서 막힌 것이고, 기능 전용 오류가 먼저 나오면 그 기능이 초기에 상태를 점검한 것입니다. 실습 3이 이 경계를 하나씩 확인합니다.</a:t>
             </a:r>
           </a:p>
         </p:txBody>
@@ -819,7 +833,7 @@
           <a:lstStyle/>
           <a:p>
             <a:r>
-              <a:t>이 구분이 진단의 출발점입니다. DDL 에서 ORA-16397 이 아니라 ORA-16000 이 나오는 것이 특히 중요합니다. 리다이렉션을 켰는데도 아예 시도되지 않았다는 뜻이니까요. 이름 그대로 DML 리다이렉션이며 DDL 은 포함하지 않습니다. 점검 순서는 문장 종류 → 설정 → 계정 → 경로 → 객체입니다. 네 번째 단계는 3장의 진단이 그대로 쓰입니다. Standby 에서 Primary 로 tnsping 이 되는지 확인하는 것이죠.</a:t>
+              <a:t>히스토그램의 각 행은 "apply lag가 몇 초였던 관측이 몇 번 있었고 마지막은 언제였다"로 읽습니다. 누적값이라 특정 시간대만 보려면 시작 시점과 끝 시점에 한 번씩 저장해 빼야 합니다. 이 분포가 다음 슬라이드의 지연 한도를 정하는 근거가 됩니다. 평소 관측의 대부분이 1초 이내이고 야간 배치 때만 꼬리가 길어진다면, 보고서 세션의 한도를 5초 정도로 두어도 낮 시간에는 오류가 거의 나지 않습니다. 한도를 감으로 정하면 오류가 너무 잦거나 반대로 아무 의미가 없는 값이 됩니다.</a:t>
             </a:r>
           </a:p>
         </p:txBody>
@@ -889,7 +903,7 @@
           <a:lstStyle/>
           <a:p>
             <a:r>
-              <a:t>리다이렉션의 가치는 부하 분산이 아니라 접속 단순화에 있습니다. 이 점을 오해하면 기대한 효과를 얻지 못합니다. 수십만 행을 갱신하는 배치를 리다이렉션으로 돌리면 Standby 가 중계기 노릇을 하며 지연만 늘어납니다. 그런 작업은 처음부터 Primary 에 접속해 실행해야 합니다. 적합한 용도는 마지막 접속 시각 기록이나 조회 이력 한 줄 남기기 정도입니다. 그리고 트랜잭션이 Primary 에 존재하므로 Standby 세션이 문제를 겪는 동안 Primary 에 잠금이 남을 수 있습니다.</a:t>
+              <a:t>기본값 NONE이 무엇을 뜻하는지 짚고 넘어가야 합니다. 이 파라미터를 건드리지 않은 세션은 적용이 한 시간 멈춘 Standby에서도 한 시간 전 데이터를 아무 경고 없이 받습니다. 한도를 걸면 넘는 순간 기다리지 않고 ORA-03172로 끝나므로, 애플리케이션이 이 오류를 받아 Primary로 재시도하는 식의 처리가 가능해집니다. SYS 세션에는 적용되지 않아 관리자 계정으로 시험하면 한도가 무시됩니다. 기능이 안 된다고 오판하는 가장 흔한 원인이라 실습 6도 일반 사용자로 진행합니다.</a:t>
             </a:r>
           </a:p>
         </p:txBody>
@@ -959,7 +973,7 @@
           <a:lstStyle/>
           <a:p>
             <a:r>
-              <a:t>0은 "지연이 전혀 없어야 한다"는 뜻인데 비동기 전송에서는 사실상 항상 위반됩니다. LGWR 이 쓴 리두와 Standby 에 도착한 리두 사이에 아무리 짧아도 시차가 있으니까요. 0을 쓰려면 동기 전송이어야 합니다. 값은 정상 상태의 지연을 관찰해 정합니다. 실측에서 정상 상태는 0초였고 히스토그램의 대부분이 0초 구간이었으므로, 5초나 10초로 잡으면 평상시에는 거의 걸리지 않고 실제 문제가 있을 때만 걸립니다.</a:t>
+              <a:t>한도를 0으로 두면 쿼리는 "쿼리를 낸 시점의 Primary SCN"까지 Standby가 따라올 때까지 기다렸다가 실행됩니다. 이것이 가능하려면 커밋된 리두가 이미 Standby에 와 있어야 하므로 SYNC 전송과 Maximum Availability 이상의 보호 모드가 필요하고, 쿼리 SCN이 초 단위로 움직여야 하니 실시간 조회도 켜져 있어야 합니다. 조건이 하나라도 빠지면 기다림으로 해결되지 않고 오류로 끝난다고 보면 됩니다. ASYNC로 원거리 Standby를 둔 구성에서 zero lag를 요구하는 업무가 있다면 그 업무는 Primary로 보내는 편이 맞습니다.</a:t>
             </a:r>
           </a:p>
         </p:txBody>
@@ -1029,7 +1043,7 @@
           <a:lstStyle/>
           <a:p>
             <a:r>
-              <a:t>이 구조의 장점은 Standby 가 정상일 때는 부하를 나누고 뒤처졌을 때만 Primary 로 간다는 것입니다. 평상시 대부분의 조회가 Standby 에서 처리되고 문제가 있을 때만 Primary 가 받습니다. 그리고 이 오류는 장애가 아니라 "지금 이 Standby 로는 요건을 못 맞춘다"는 통보이므로 재시도가 자연스러운 처리입니다. 실패 경로는 반드시 실제로 실패시켜 검증해야 합니다. 적용을 잠시 멈춰 지연을 만들고 재시도가 동작하는지 확인하십시오.</a:t>
+              <a:t>STANDBY_MAX_DATA_DELAY를 0으로 두는 방식은 쿼리마다 기다리고, 이 명령은 보고서 시작 시점에 한 번만 기다립니다. 보고서 하나가 수십 개 쿼리로 이루어져 있고 시작 시점의 데이터면 충분하다면 이쪽이 대기 시간을 크게 줄입니다. 명령이 돌아온 뒤에는 Standby가 다시 조금씩 뒤처질 수 있다는 것도 함께 알아 두어야 합니다. 적용이 꺼져 있으면 ORA-03173이 나오는데, 이 오류는 적용 상태에서 오는 문제이므로 7장의 점검 순서로 돌아가 MRP0부터 확인합니다.</a:t>
             </a:r>
           </a:p>
         </p:txBody>
@@ -1099,7 +1113,7 @@
           <a:lstStyle/>
           <a:p>
             <a:r>
-              <a:t>이 장에서 SYS 로 시험해 오판할 뻔한 기능이 두 개나 나왔습니다. DML 리다이렉션과 지연 한도입니다. 둘 다 일반 사용자로 바꾸자 바로 동작했습니다. 여기서 일반화할 수 있습니다. ADG 의 세션 기능들은 대체로 일반 사용자를 전제로 설계되어 있습니다. 기능 검증은 실제 애플리케이션 계정과 같은 종류로 해야 합니다. 그리고 설정만 거부되고 세션은 그대로 쓸 수 있다는 점도 기억해 두십시오.</a:t>
+              <a:t>트리거를 Standby에서 만들 수는 없으니 Primary에서 만들고, 그 정의가 리두로 넘어가 Standby에도 같은 트리거가 생깁니다. Primary에서는 조건이 거짓이라 아무 일도 하지 않고 Standby에서 로그온할 때만 동작합니다. 역할이 바뀌어도 조건이 알아서 따라가므로 Switchover 후에 손댈 것이 없습니다. SYNC WITH PRIMARY를 트리거에 넣는 경우에는 주의가 필요합니다. 연결 풀은 한 번 로그온한 연결을 몇 시간씩 재사용하므로 로그온 시점에 맞춘 동기화가 실제 보고서 시점의 신선도를 보장하지 못합니다.</a:t>
             </a:r>
           </a:p>
         </p:txBody>
@@ -1169,7 +1183,7 @@
           <a:lstStyle/>
           <a:p>
             <a:r>
-              <a:t>2장에서 보호 모드를 성능과 보호의 교환으로 설명했습니다. 그때는 주로 평상시 성능과 Primary 정지 위험의 교환으로 다뤘죠. 그런데 8장에서는 사고 시 복구 가능성을 결정했고, 이 장에서는 조회 신선도 보장 장치의 사용 가능 여부를 결정합니다. 보호 모드는 한 가지가 아니라 여러 기능의 전제 조건입니다. 그러므로 보호 모드 선택은 성능 문제가 아니라 얼마만큼의 손실과 제약을 감수할 것인가의 문제입니다.</a:t>
+              <a:t>접속 문자열에 Standby 서버 이름을 직접 적어 두면 역할 전환 때마다 애플리케이션 설정을 바꿔야 합니다. 서비스를 역할에 따라 켜지게 해 두면 클라이언트는 두 서버 주소를 모두 적고 서비스 이름만 지정하면 되고, 서비스가 켜진 쪽으로 자연스럽게 연결됩니다. 이 과정은 Grid Infrastructure가 없는 단일 인스턴스 구성이라 DBMS_SERVICE로 만든 서비스를 기동 트리거와 역할 변경 트리거에서 켜고 끕니다. Standby를 MOUNTED로 내리면 리스너가 조회 서비스를 모르게 되어 ORA-12514가 나는데, 실습 8에서 이 장면을 보게 됩니다.</a:t>
             </a:r>
           </a:p>
         </p:txBody>
@@ -1239,7 +1253,7 @@
           <a:lstStyle/>
           <a:p>
             <a:r>
-              <a:t>표본이 대략 2초에 한 번 수집되므로 59회는 약 2분에 해당합니다. 3초부터 59초까지 구간마다 1~2회씩 있는 것은 적용을 재개해 따라잡는 동안 지연이 점진적으로 줄어든 흔적입니다. 59초에서 3초로 내려오면서 각 구간을 한두 번씩 스친 것이죠. 참고로 이 뷰가 기록하는 항목은 apply lag 하나뿐입니다. transport lag 히스토그램은 없으므로 전송 쪽 추세가 필요하면 별도로 수집해야 합니다.</a:t>
+              <a:t>하나의 Standby를 여러 업무가 같이 쓰면 신선도 요구가 다릅니다. 대시보드는 몇 초 늦어도 괜찮지만 적용이 몇 분씩 밀리는 날에는 알아야 하므로 5초 한도를 겁니다. 정산 확인 조회는 Primary와 결과가 같아야 하는데, 구성이 ASYNC라면 zero lag가 성립하지 않으니 처음부터 Primary로 보내는 것이 정직한 설계입니다. 업무마다 서비스 이름을 나눠 두면 나중에 정책을 바꿀 때 애플리케이션 대신 서비스 설정만 고치면 되고, 트리거도 스키마나 서비스 단위로 걸 수 있습니다.</a:t>
             </a:r>
           </a:p>
         </p:txBody>
@@ -1309,7 +1323,7 @@
           <a:lstStyle/>
           <a:p>
             <a:r>
-              <a:t>DBA_ 뷰는 현재 컨테이너만 보여 줍니다. SYS 로 접속하면 CDB$ROOT 이므로 루트의 통계만 조회되죠. 1장에서 겪은 것과 같은 상황입니다. 더 중요한 것은 값이 0이라는 사실입니다. 지금 이 순간 ADG 로 조회하고 있는데도 0입니다. 이 통계는 주기적으로 수집되고 Standby 에서는 갱신이 제한적이기 때문입니다. 따라서 이 값을 근거로 "쓰지 않았다"고 말할 수 없습니다. MOUNTED 로만 두면 옵션이 필요 없고, READ ONLY 로 여는 순간부터 옵션의 영역이라는 점을 절차서에 명시해 두십시오.</a:t>
+              <a:t>Active Data Guard는 이 목록 전체를 하나의 옵션으로 삽니다. 그중 하나라도 쓰면 옵션을 쓰는 것으로 봅니다. 재미있는 대비가 하나 있는데, 갱신이 가능한 Snapshot Standby와 논리 Standby는 오히려 Enterprise Edition 기본 기능입니다. 수강생들이 "쓰기가 되는 쪽이 더 비싸겠지"라고 짐작하기 쉬운데 실제는 반대입니다. 판단할 때는 공식 문서에서 해당 기능 설명에 Active Data Guard 옵션이 필요하다는 문구가 붙어 있는지를 기준으로 삼으면 됩니다.</a:t>
             </a:r>
           </a:p>
         </p:txBody>
@@ -1379,7 +1393,7 @@
           <a:lstStyle/>
           <a:p>
             <a:r>
-              <a:t>안정성을 한 숫자로 요약할 수 있다는 것이 이 지표의 가치입니다. 다만 누적값이라는 점을 반드시 기억해야 합니다. 한 번의 조회로는 "지금까지 전체가 어땠는가"만 알 수 있고 "최근 한 시간이 어땠는가"는 알 수 없습니다. 정기적으로 스냅샷을 떠 두고 비교하십시오. 그리고 재기동 직후의 낮은 값은 안정성의 증거가 아니라 표본이 적다는 뜻일 뿐입니다. 실측의 9.3 퍼센트도 실습 때문에 올라간 값이므로 기준으로 삼으면 안 됩니다.</a:t>
+              <a:t>예전에는 Standby에서 GTT에 INSERT할 수 없었는데, 걸림돌은 언두였습니다. 언두가 언두 테이블스페이스에 쓰이면 그 언두에 대한 리두가 생기고, 읽기 전용 DB는 리두를 만들 수 없습니다. 임시 언두는 그 고리를 끊습니다. Primary에서도 켜면 GTT를 많이 쓰는 배치의 리두가 줄어 전송량과 Standby의 SRL·아카이브 쓰기까지 함께 줄어듭니다. Primary에서는 세션이 GTT를 처음 쓰기 전에 설정되어야 적용되고, 이미 일반 언두로 GTT를 쓴 세션은 끝날 때까지 바뀌지 않습니다.</a:t>
             </a:r>
           </a:p>
         </p:txBody>
@@ -1449,7 +1463,7 @@
           <a:lstStyle/>
           <a:p>
             <a:r>
-              <a:t>7장에서 배운 함정이 여기서도 적용됩니다. 적용이 멈추면 두 지연이 0으로 보이므로, 지연 값만 감시하는 모니터링은 이 상태를 정상으로 보고합니다. 그래서 MRP0 의 존재를 먼저 확인해야 합니다. 세 뷰를 조합하면 "적용이 도는데 뒤처져 있고 최근에도 그랬다" 같은 판단을 할 수 있습니다. 하나만으로는 불가능한 판단이죠. 7장의 통합 점검 조회에 히스토그램 비율을 더하면 이 세 관점이 한 화면에 들어옵니다.</a:t>
+              <a:t>GTT 데이터는 세션별 임시 공간에 있지만 테이블 정의는 딕셔너리에 있으므로 만들고 지우는 일은 원래 Primary 몫입니다. 공식 교재는 Standby에서 실행한 GTT의 CREATE와 DROP을 Primary로 넘겨 실행하고 적용될 때까지 기다리는 기능을 소개하는데, 언더바로 시작하는 숨은 파라미터로 켭니다. 숨은 파라미터는 Oracle Support 지침 없이 바꾸지 않는 것이 원칙이라, 실제 운영에서는 보고서가 쓸 GTT를 Primary에서 미리 만들어 두는 방식을 씁니다. 일반 테이블 DDL은 9.7절의 리다이렉션을 켜도 넘어가지 않습니다.</a:t>
             </a:r>
           </a:p>
         </p:txBody>
@@ -1519,7 +1533,7 @@
           <a:lstStyle/>
           <a:p>
             <a:r>
-              <a:t>실무에서 부딪히는 것은 대개 "순수한 조회가 아닌 조회"입니다. 조회할 때마다 로그 테이블에 한 줄 넣는 구조라면 그 한 줄 때문에 전체가 Standby 에서 실패합니다. 중간 결과를 일반 테이블에 넣는 방식이라면 GTT 로 바꾸는 것이 선행 작업이 됩니다. 그래서 읽기 분산은 접속만 바꾸면 되는 일이 아니라, 어떤 조회를 옮길 수 있는지 먼저 분류하는 작업이 필요합니다. 9.4절의 기준이 그 분류의 근거가 됩니다.</a:t>
+              <a:t>PTT는 정의를 딕셔너리 대신 메모리에 둡니다. GTT와 가장 크게 다른 부분이고, 덕분에 Standby에서 Primary를 거치지 않고 만들 수 있습니다. 접두어는 PRIVATE_TEMP_TABLE_PREFIX 파라미터 값을 따르며 기본은 ORA$PTT_입니다. 접두어 없이 만들면 거부되니 수강생이 처음 만들 때 거의 반드시 한 번 겪습니다. 생성해도 트랜잭션을 커밋하지 않는다는 점도 일반 DDL과 다릅니다. 여러 연결로 같은 보고서를 돌리면서 각자 같은 이름의 중간 테이블을 쓰는 프로그램에 잘 맞습니다. 인덱스나 영구 객체에서의 참조는 쓸 수 없습니다.</a:t>
             </a:r>
           </a:p>
         </p:txBody>
@@ -1589,7 +1603,7 @@
           <a:lstStyle/>
           <a:p>
             <a:r>
-              <a:t>세 습관 모두 이 장의 실측에서 검증됐습니다. 첫 번째는 DML 리다이렉션과 지연 한도에서 각각 ORA-16397 과 ORA-03174 를 만난 경험입니다. 둘 다 일반 사용자로 바꾸자 바로 동작했습니다. 두 번째는 읽기 일관성 측정에서 SQL*Plus 의 암묵적 커밋 때문에 잘못된 결론에 이를 뻔한 경험입니다. 세 번째는 같은 상황에서도 오류 번호가 다르면 처리 경로가 다르다는 것입니다. 기술적으로 어려운 내용은 없지만 습관이 되어 있어야 급할 때 제대로 판단할 수 있습니다.</a:t>
+              <a:t>Standby가 시퀀스를 처음 쓰면 Primary에 번호 범위를 요청하고, Primary는 딕셔너리의 시퀀스 값을 캐시 크기만큼 앞으로 옮긴 뒤 그 범위를 넘겨줍니다. 이 때문에 Primary에서 1, 2를 쓴 직후 Standby에서 21이 나오는 식으로 값이 뜁니다. 요청마다 Primary와 왕복하므로 Standby에서 자주 쓰는 시퀀스는 캐시를 넉넉하게 잡습니다. 순서 보장이나 캐시 없음 속성은 매번 Primary를 거쳐야 해서 지원되지 않습니다. 세션 시퀀스는 세션 범위 GTT와 짝을 이루도록 만든 것으로, 보고서 중간 결과에 일련번호를 붙이는 용도에 맞습니다.</a:t>
             </a:r>
           </a:p>
         </p:txBody>
@@ -1659,7 +1673,7 @@
           <a:lstStyle/>
           <a:p>
             <a:r>
-              <a:t>재해 복구 능력은 조금도 줄지 않는다. USING CURRENT LOGFILE 도 그대로 쓸 수 있어 실시간 적용이며, 줄어드는 것은 조회뿐이다. ORA-01219 는 열려 있지 않다는 뜻이고 ORA-16000 은 읽기 전용이라 쓸 수 없다는 뜻이다. 오류 번호가 상태를 가른다. 고정 뷰는 조회되므로 Standby 에 SYSDBA 로 붙기만 하면 두 지연을 그대로 잴 수 있다. PDB 서비스는 사라져 그 서비스로 접속하면 ORA-12514 다. 리스너는 살아 있고 등록된 서비스만 사라진 것이다.</a:t>
+              <a:t>19c에서 새로 들어온 기능입니다. 조회 위주 애플리케이션이 가끔 하는 작은 갱신 하나 때문에 Standby로 옮기지 못하던 문제를 겨냥했습니다. Standby는 여전히 읽기 전용이고 실제 기록은 Primary에서 일어나므로 9.4절의 원칙은 깨지지 않습니다. 세션은 4단계가 끝날 때까지 기다리므로 응답 시간은 Primary 실행 시간에 왕복 지연과 적용 지연이 더해진 값입니다. 해당 세션은 커밋 전에도 자기 변경을 보고, 다른 세션과 다른 Standby는 커밋과 적용이 끝난 뒤에야 봅니다.</a:t>
             </a:r>
           </a:p>
         </p:txBody>
@@ -1729,7 +1743,287 @@
           <a:lstStyle/>
           <a:p>
             <a:r>
-              <a:t>9.2.1 에서 정리한 표식 둘에 하나가 더 붙는 셈이고 이것은 Primary 에서 보이는 표식이다. WITH QUERY 가 있으면 그 Standby 는 열려 있고 곧 옵션을 쓰고 있다는 뜻이다. ARCHIVED_SEQ# 와 APPLIED_SEQ# 의 차이가 밀린 양이다. Broker 의 Real Time Query 도 ON 에서 OFF 로 바뀌지만 구성 상태는 양쪽 모두 SUCCESS 다. 닫는 것은 장애가 아니다. V$ARCHIVED_LOG 의 최댓값을 쓰면 RESETLOGS 이전 인큐네이션의 번호를 집는다. 실측에서 94 가 나왔는데 그때 현재 시퀀스는 12 였다.</a:t>
+              <a:t>시스템 수준으로 켜면 편하지만, 의도하지 않은 프로그램의 갱신까지 조용히 Primary로 넘어갑니다. 예전에는 ORA-16000으로 실패해 드러나던 잘못된 갱신이 이제는 성공해 버리는 셈이라 Primary 부하가 예상 밖으로 늘 수 있습니다. 처음에는 필요한 스키마의 로그온 트리거나 애플리케이션 초기화 코드에서 세션 수준으로 켜는 방식을 권합니다. 세션 수준으로 켠 상태는 V$PARAMETER에 나타나지 않으므로, 확인은 실제로 DML을 하나 실행해 보는 편이 확실합니다.</a:t>
+            </a:r>
+          </a:p>
+        </p:txBody>
+      </p:sp>
+      <p:sp>
+        <p:nvSpPr>
+          <p:cNvPr id="4" name="Slide Number Placeholder 3"/>
+          <p:cNvSpPr>
+            <a:spLocks noGrp="1"/>
+          </p:cNvSpPr>
+          <p:nvPr>
+            <p:ph type="sldNum" idx="5" sz="quarter"/>
+          </p:nvPr>
+        </p:nvSpPr>
+        <p:spPr/>
+      </p:sp>
+    </p:spTree>
+  </p:cSld>
+  <p:clrMapOvr>
+    <a:masterClrMapping/>
+  </p:clrMapOvr>
+</p:notes>
+</file>
+
+<file path=ppt/notesSlides/notesSlide26.xml><?xml version="1.0" encoding="utf-8"?>
+<p:notes xmlns:a="http://schemas.openxmlformats.org/drawingml/2006/main" xmlns:p="http://schemas.openxmlformats.org/presentationml/2006/main" xmlns:r="http://schemas.openxmlformats.org/officeDocument/2006/relationships">
+  <p:cSld>
+    <p:spTree>
+      <p:nvGrpSpPr>
+        <p:cNvPr id="1" name=""/>
+        <p:cNvGrpSpPr/>
+        <p:nvPr/>
+      </p:nvGrpSpPr>
+      <p:grpSpPr>
+        <a:xfrm>
+          <a:off x="0" y="0"/>
+          <a:ext cx="0" cy="0"/>
+          <a:chOff x="0" y="0"/>
+          <a:chExt cx="0" cy="0"/>
+        </a:xfrm>
+      </p:grpSpPr>
+      <p:sp>
+        <p:nvSpPr>
+          <p:cNvPr id="2" name="Slide Image Placeholder 1"/>
+          <p:cNvSpPr>
+            <a:spLocks noGrp="1"/>
+          </p:cNvSpPr>
+          <p:nvPr>
+            <p:ph type="sldImg" idx="2"/>
+          </p:nvPr>
+        </p:nvSpPr>
+        <p:spPr/>
+      </p:sp>
+      <p:sp>
+        <p:nvSpPr>
+          <p:cNvPr id="3" name="Notes Placeholder 2"/>
+          <p:cNvSpPr>
+            <a:spLocks noGrp="1"/>
+          </p:cNvSpPr>
+          <p:nvPr>
+            <p:ph type="body" idx="3" sz="quarter"/>
+          </p:nvPr>
+        </p:nvSpPr>
+        <p:spPr/>
+        <p:txBody>
+          <a:bodyPr/>
+          <a:lstStyle/>
+          <a:p>
+            <a:r>
+              <a:t>DML 리다이렉션도 PL/SQL 블록 안의 DML을 넘기지만, 그 경우 문장 하나마다 Primary와 왕복합니다. PL/SQL 리다이렉션은 호출 전체를 Primary로 보내 실행하므로 여러 DML을 묶어 처리하는 프로시저에 유리하고, 프로시저 안에 리두를 만드는 다른 작업이 있어도 Primary에서 실행됩니다. 제약은 바인드 변수입니다. 애플리케이션이 바인드 변수로 프로시저를 호출하는 구조라면 쓸 수 없으니, 도입 전에 호출 방식을 먼저 확인해야 합니다. 시스템 수준 파라미터는 없습니다.</a:t>
+            </a:r>
+          </a:p>
+        </p:txBody>
+      </p:sp>
+      <p:sp>
+        <p:nvSpPr>
+          <p:cNvPr id="4" name="Slide Number Placeholder 3"/>
+          <p:cNvSpPr>
+            <a:spLocks noGrp="1"/>
+          </p:cNvSpPr>
+          <p:nvPr>
+            <p:ph type="sldNum" idx="5" sz="quarter"/>
+          </p:nvPr>
+        </p:nvSpPr>
+        <p:spPr/>
+      </p:sp>
+    </p:spTree>
+  </p:cSld>
+  <p:clrMapOvr>
+    <a:masterClrMapping/>
+  </p:clrMapOvr>
+</p:notes>
+</file>
+
+<file path=ppt/notesSlides/notesSlide27.xml><?xml version="1.0" encoding="utf-8"?>
+<p:notes xmlns:a="http://schemas.openxmlformats.org/drawingml/2006/main" xmlns:p="http://schemas.openxmlformats.org/presentationml/2006/main" xmlns:r="http://schemas.openxmlformats.org/officeDocument/2006/relationships">
+  <p:cSld>
+    <p:spTree>
+      <p:nvGrpSpPr>
+        <p:cNvPr id="1" name=""/>
+        <p:cNvGrpSpPr/>
+        <p:nvPr/>
+      </p:nvGrpSpPr>
+      <p:grpSpPr>
+        <a:xfrm>
+          <a:off x="0" y="0"/>
+          <a:ext cx="0" cy="0"/>
+          <a:chOff x="0" y="0"/>
+          <a:chExt cx="0" cy="0"/>
+        </a:xfrm>
+      </p:grpSpPr>
+      <p:sp>
+        <p:nvSpPr>
+          <p:cNvPr id="2" name="Slide Image Placeholder 1"/>
+          <p:cNvSpPr>
+            <a:spLocks noGrp="1"/>
+          </p:cNvSpPr>
+          <p:nvPr>
+            <p:ph type="sldImg" idx="2"/>
+          </p:nvPr>
+        </p:nvSpPr>
+        <p:spPr/>
+      </p:sp>
+      <p:sp>
+        <p:nvSpPr>
+          <p:cNvPr id="3" name="Notes Placeholder 2"/>
+          <p:cNvSpPr>
+            <a:spLocks noGrp="1"/>
+          </p:cNvSpPr>
+          <p:nvPr>
+            <p:ph type="body" idx="3" sz="quarter"/>
+          </p:nvPr>
+        </p:nvSpPr>
+        <p:spPr/>
+        <p:txBody>
+          <a:bodyPr/>
+          <a:lstStyle/>
+          <a:p>
+            <a:r>
+              <a:t>두 오류 번호를 구분하면 진단 범위가 반으로 줄어듭니다. ORA-16000은 리다이렉션이 아예 시도되지 않은 경우라 기능이 꺼져 있는지, 문장이 DDL처럼 대상이 아닌지를 봅니다. ORA-16397은 시도했다가 Primary 쪽에서 실패한 경우라 접속 계정, Primary로의 연결, 대상 객체와 권한을 차례로 봅니다. 가장 흔한 실패는 SYS로 시험하는 것입니다. 관리자 계정으로 해 보고 기능이 안 된다고 결론 내리는 일이 잦으니, 검증은 실제 애플리케이션 계정과 같은 종류의 사용자로 합니다.</a:t>
+            </a:r>
+          </a:p>
+        </p:txBody>
+      </p:sp>
+      <p:sp>
+        <p:nvSpPr>
+          <p:cNvPr id="4" name="Slide Number Placeholder 3"/>
+          <p:cNvSpPr>
+            <a:spLocks noGrp="1"/>
+          </p:cNvSpPr>
+          <p:nvPr>
+            <p:ph type="sldNum" idx="5" sz="quarter"/>
+          </p:nvPr>
+        </p:nvSpPr>
+        <p:spPr/>
+      </p:sp>
+    </p:spTree>
+  </p:cSld>
+  <p:clrMapOvr>
+    <a:masterClrMapping/>
+  </p:clrMapOvr>
+</p:notes>
+</file>
+
+<file path=ppt/notesSlides/notesSlide28.xml><?xml version="1.0" encoding="utf-8"?>
+<p:notes xmlns:a="http://schemas.openxmlformats.org/drawingml/2006/main" xmlns:p="http://schemas.openxmlformats.org/presentationml/2006/main" xmlns:r="http://schemas.openxmlformats.org/officeDocument/2006/relationships">
+  <p:cSld>
+    <p:spTree>
+      <p:nvGrpSpPr>
+        <p:cNvPr id="1" name=""/>
+        <p:cNvGrpSpPr/>
+        <p:nvPr/>
+      </p:nvGrpSpPr>
+      <p:grpSpPr>
+        <a:xfrm>
+          <a:off x="0" y="0"/>
+          <a:ext cx="0" cy="0"/>
+          <a:chOff x="0" y="0"/>
+          <a:chExt cx="0" cy="0"/>
+        </a:xfrm>
+      </p:grpSpPr>
+      <p:sp>
+        <p:nvSpPr>
+          <p:cNvPr id="2" name="Slide Image Placeholder 1"/>
+          <p:cNvSpPr>
+            <a:spLocks noGrp="1"/>
+          </p:cNvSpPr>
+          <p:nvPr>
+            <p:ph type="sldImg" idx="2"/>
+          </p:nvPr>
+        </p:nvSpPr>
+        <p:spPr/>
+      </p:sp>
+      <p:sp>
+        <p:nvSpPr>
+          <p:cNvPr id="3" name="Notes Placeholder 2"/>
+          <p:cNvSpPr>
+            <a:spLocks noGrp="1"/>
+          </p:cNvSpPr>
+          <p:nvPr>
+            <p:ph type="body" idx="3" sz="quarter"/>
+          </p:nvPr>
+        </p:nvSpPr>
+        <p:spPr/>
+        <p:txBody>
+          <a:bodyPr/>
+          <a:lstStyle/>
+          <a:p>
+            <a:r>
+              <a:t>대표적인 예가 조회 화면의 감사 기록입니다. 고객 정보 조회는 읽기만 하는데 개인 정보 조회 이력을 한 행씩 남겨야 해서 화면 전체가 Primary에 묶여 있던 경우, 그 INSERT 하나만 리다이렉션으로 넘기면 나머지 조회는 Standby에서 끝납니다. 반대로 갱신이 잦은 업무에 쓰면 실행은 어차피 Primary에서 일어나고 문장마다 대기가 붙어 오히려 느려집니다. 도입 후에는 Primary에서 해당 서비스가 만드는 트랜잭션 수를 주기적으로 보고, apply lag 경보와 리다이렉션 응답 시간을 같은 기준으로 묶어 감시합니다.</a:t>
+            </a:r>
+          </a:p>
+        </p:txBody>
+      </p:sp>
+      <p:sp>
+        <p:nvSpPr>
+          <p:cNvPr id="4" name="Slide Number Placeholder 3"/>
+          <p:cNvSpPr>
+            <a:spLocks noGrp="1"/>
+          </p:cNvSpPr>
+          <p:nvPr>
+            <p:ph type="sldNum" idx="5" sz="quarter"/>
+          </p:nvPr>
+        </p:nvSpPr>
+        <p:spPr/>
+      </p:sp>
+    </p:spTree>
+  </p:cSld>
+  <p:clrMapOvr>
+    <a:masterClrMapping/>
+  </p:clrMapOvr>
+</p:notes>
+</file>
+
+<file path=ppt/notesSlides/notesSlide29.xml><?xml version="1.0" encoding="utf-8"?>
+<p:notes xmlns:a="http://schemas.openxmlformats.org/drawingml/2006/main" xmlns:p="http://schemas.openxmlformats.org/presentationml/2006/main" xmlns:r="http://schemas.openxmlformats.org/officeDocument/2006/relationships">
+  <p:cSld>
+    <p:spTree>
+      <p:nvGrpSpPr>
+        <p:cNvPr id="1" name=""/>
+        <p:cNvGrpSpPr/>
+        <p:nvPr/>
+      </p:nvGrpSpPr>
+      <p:grpSpPr>
+        <a:xfrm>
+          <a:off x="0" y="0"/>
+          <a:ext cx="0" cy="0"/>
+          <a:chOff x="0" y="0"/>
+          <a:chExt cx="0" cy="0"/>
+        </a:xfrm>
+      </p:grpSpPr>
+      <p:sp>
+        <p:nvSpPr>
+          <p:cNvPr id="2" name="Slide Image Placeholder 1"/>
+          <p:cNvSpPr>
+            <a:spLocks noGrp="1"/>
+          </p:cNvSpPr>
+          <p:nvPr>
+            <p:ph type="sldImg" idx="2"/>
+          </p:nvPr>
+        </p:nvSpPr>
+        <p:spPr/>
+      </p:sp>
+      <p:sp>
+        <p:nvSpPr>
+          <p:cNvPr id="3" name="Notes Placeholder 2"/>
+          <p:cNvSpPr>
+            <a:spLocks noGrp="1"/>
+          </p:cNvSpPr>
+          <p:nvPr>
+            <p:ph type="body" idx="3" sz="quarter"/>
+          </p:nvPr>
+        </p:nvSpPr>
+        <p:spPr/>
+        <p:txBody>
+          <a:bodyPr/>
+          <a:lstStyle/>
+          <a:p>
+            <a:r>
+              <a:t>물리 Standby는 Primary와 블록 단위로 같은 사본이라, 한쪽 블록이 깨져도 다른 쪽에는 정상 블록이 있을 가능성이 높습니다. 이 기능은 그 사본을 자동으로 활용합니다. Primary에서 손상 블록을 읽은 세션은 ORA-01578을 받는 대신 Standby에서 정상 블록을 받아 교체한 뒤 계속 진행합니다. 실시간 조회가 켜진 Standby가 전제이므로 마운트 Standby에서는 일어나지 않습니다. 감지되지 않는 손상까지 고쳐 주지는 않으니 7장에서 본 DB_BLOCK_CHECKSUM과 DB_LOST_WRITE_PROTECT 설정을 함께 갖춰야 효과가 있습니다.</a:t>
             </a:r>
           </a:p>
         </p:txBody>
@@ -1799,7 +2093,497 @@
           <a:lstStyle/>
           <a:p>
             <a:r>
-              <a:t>읽기를 분산하면 세션이 어느 쪽에 붙었는지 헷갈리는 일이 생깁니다. 접속 문자열만 믿지 말고 세션 스스로 확인하게 하는 편이 안전합니다. 특히 역할 전환이 있는 환경에서는 접속 대상이 그대로인데 역할이 바뀔 수 있으므로 이름이 아니라 역할을 기준으로 삼아야 합니다. 실측에서 boston 의 chicago_pdb1 서비스가 리스너에 status READY 로 등록되어 있었습니다. 8장에서 새 PDB 를 열어야 한다고 강조한 이유가 여기서도 확인됩니다. 열지 않으면 서비스가 없고 접속할 수 없습니다.</a:t>
+              <a:t>경계는 생각보다 단순해서 "열린 채로 적용하는가" 한 가지입니다. 실무에서 문제가 되는 것은 의도치 않게 이 상태가 되는 경로입니다. Standby를 습관처럼 STARTUP으로 올리면 읽기 전용으로 열리고, 그다음 Broker나 기동 스크립트가 적용을 시작하는 순간 READ ONLY WITH APPLY가 됩니다. 아무 오류도 경고도 없습니다. 옵션을 사지 않은 사이트는 기동 스크립트와 Oracle Restart 등록 정보의 시작 모드를 마운트로 고정해 둡니다. 라이선스는 원칙적으로 Primary와 Standby 서버 모두에 필요하지만 계약 조건은 도입 전에 따로 확인해야 합니다.</a:t>
+            </a:r>
+          </a:p>
+        </p:txBody>
+      </p:sp>
+      <p:sp>
+        <p:nvSpPr>
+          <p:cNvPr id="4" name="Slide Number Placeholder 3"/>
+          <p:cNvSpPr>
+            <a:spLocks noGrp="1"/>
+          </p:cNvSpPr>
+          <p:nvPr>
+            <p:ph type="sldNum" idx="5" sz="quarter"/>
+          </p:nvPr>
+        </p:nvSpPr>
+        <p:spPr/>
+      </p:sp>
+    </p:spTree>
+  </p:cSld>
+  <p:clrMapOvr>
+    <a:masterClrMapping/>
+  </p:clrMapOvr>
+</p:notes>
+</file>
+
+<file path=ppt/notesSlides/notesSlide30.xml><?xml version="1.0" encoding="utf-8"?>
+<p:notes xmlns:a="http://schemas.openxmlformats.org/drawingml/2006/main" xmlns:p="http://schemas.openxmlformats.org/presentationml/2006/main" xmlns:r="http://schemas.openxmlformats.org/officeDocument/2006/relationships">
+  <p:cSld>
+    <p:spTree>
+      <p:nvGrpSpPr>
+        <p:cNvPr id="1" name=""/>
+        <p:cNvGrpSpPr/>
+        <p:nvPr/>
+      </p:nvGrpSpPr>
+      <p:grpSpPr>
+        <a:xfrm>
+          <a:off x="0" y="0"/>
+          <a:ext cx="0" cy="0"/>
+          <a:chOff x="0" y="0"/>
+          <a:chExt cx="0" cy="0"/>
+        </a:xfrm>
+      </p:grpSpPr>
+      <p:sp>
+        <p:nvSpPr>
+          <p:cNvPr id="2" name="Slide Image Placeholder 1"/>
+          <p:cNvSpPr>
+            <a:spLocks noGrp="1"/>
+          </p:cNvSpPr>
+          <p:nvPr>
+            <p:ph type="sldImg" idx="2"/>
+          </p:nvPr>
+        </p:nvSpPr>
+        <p:spPr/>
+      </p:sp>
+      <p:sp>
+        <p:nvSpPr>
+          <p:cNvPr id="3" name="Notes Placeholder 2"/>
+          <p:cNvSpPr>
+            <a:spLocks noGrp="1"/>
+          </p:cNvSpPr>
+          <p:nvPr>
+            <p:ph type="body" idx="3" sz="quarter"/>
+          </p:nvPr>
+        </p:nvSpPr>
+        <p:spPr/>
+        <p:txBody>
+          <a:bodyPr/>
+          <a:lstStyle/>
+          <a:p>
+            <a:r>
+              <a:t>보고서 조회가 열 형식으로 압축된 데이터를 메모리에서 읽으므로 집계 위주의 쿼리가 빨라집니다. 흥미로운 점은 Primary와 Standby의 열 저장소에 다른 객체를 올릴 수 있다는 것입니다. OLTP가 쓰는 테이블은 Primary에, 보고서가 쓰는 테이블은 Standby에 올리면 애플리케이션 입장에서는 열 저장소가 두 배가 된 효과가 납니다. 다만 In-Memory 자체가 별도 옵션이라 Standby에서 쓰려면 Active Data Guard와 Database In-Memory를 모두 갖춰야 합니다. multi-instance Redo Apply와 함께 쓸 수 없다는 제약은 단일 인스턴스인 이 과정에는 해당하지 않습니다.</a:t>
+            </a:r>
+          </a:p>
+        </p:txBody>
+      </p:sp>
+      <p:sp>
+        <p:nvSpPr>
+          <p:cNvPr id="4" name="Slide Number Placeholder 3"/>
+          <p:cNvSpPr>
+            <a:spLocks noGrp="1"/>
+          </p:cNvSpPr>
+          <p:nvPr>
+            <p:ph type="sldNum" idx="5" sz="quarter"/>
+          </p:nvPr>
+        </p:nvSpPr>
+        <p:spPr/>
+      </p:sp>
+    </p:spTree>
+  </p:cSld>
+  <p:clrMapOvr>
+    <a:masterClrMapping/>
+  </p:clrMapOvr>
+</p:notes>
+</file>
+
+<file path=ppt/notesSlides/notesSlide31.xml><?xml version="1.0" encoding="utf-8"?>
+<p:notes xmlns:a="http://schemas.openxmlformats.org/drawingml/2006/main" xmlns:p="http://schemas.openxmlformats.org/presentationml/2006/main" xmlns:r="http://schemas.openxmlformats.org/officeDocument/2006/relationships">
+  <p:cSld>
+    <p:spTree>
+      <p:nvGrpSpPr>
+        <p:cNvPr id="1" name=""/>
+        <p:cNvGrpSpPr/>
+        <p:nvPr/>
+      </p:nvGrpSpPr>
+      <p:grpSpPr>
+        <a:xfrm>
+          <a:off x="0" y="0"/>
+          <a:ext cx="0" cy="0"/>
+          <a:chOff x="0" y="0"/>
+          <a:chExt cx="0" cy="0"/>
+        </a:xfrm>
+      </p:grpSpPr>
+      <p:sp>
+        <p:nvSpPr>
+          <p:cNvPr id="2" name="Slide Image Placeholder 1"/>
+          <p:cNvSpPr>
+            <a:spLocks noGrp="1"/>
+          </p:cNvSpPr>
+          <p:nvPr>
+            <p:ph type="sldImg" idx="2"/>
+          </p:nvPr>
+        </p:nvSpPr>
+        <p:spPr/>
+      </p:sp>
+      <p:sp>
+        <p:nvSpPr>
+          <p:cNvPr id="3" name="Notes Placeholder 2"/>
+          <p:cNvSpPr>
+            <a:spLocks noGrp="1"/>
+          </p:cNvSpPr>
+          <p:nvPr>
+            <p:ph type="body" idx="3" sz="quarter"/>
+          </p:nvPr>
+        </p:nvSpPr>
+        <p:spPr/>
+        <p:txBody>
+          <a:bodyPr/>
+          <a:lstStyle/>
+          <a:p>
+            <a:r>
+              <a:t>AWR은 결과를 AWR 테이블에 써야 하므로 읽기 전용 Standby에서는 로컬 스냅샷을 만들 수 없습니다. UMF는 Standby의 성능 데이터를 Primary 같은 읽기·쓰기 데이터베이스에 저장해 주는 구조입니다. 두 데이터베이스를 노드로 등록해 토폴로지를 만들고, Standby를 원격 대상으로 등록한 뒤 원격 스냅샷을 만드는 순서이며, SYS$UMF 사용자와 데이터베이스 링크가 쓰입니다. 세부 절차는 버전별 차이가 있어 도입할 때 19c 문서를 기준으로 따르면 됩니다. 평소 진단은 V$ 뷰와 V$ACTIVE_SESSION_HISTORY만으로도 대부분 가능합니다.</a:t>
+            </a:r>
+          </a:p>
+        </p:txBody>
+      </p:sp>
+      <p:sp>
+        <p:nvSpPr>
+          <p:cNvPr id="4" name="Slide Number Placeholder 3"/>
+          <p:cNvSpPr>
+            <a:spLocks noGrp="1"/>
+          </p:cNvSpPr>
+          <p:nvPr>
+            <p:ph type="sldNum" idx="5" sz="quarter"/>
+          </p:nvPr>
+        </p:nvSpPr>
+        <p:spPr/>
+      </p:sp>
+    </p:spTree>
+  </p:cSld>
+  <p:clrMapOvr>
+    <a:masterClrMapping/>
+  </p:clrMapOvr>
+</p:notes>
+</file>
+
+<file path=ppt/notesSlides/notesSlide32.xml><?xml version="1.0" encoding="utf-8"?>
+<p:notes xmlns:a="http://schemas.openxmlformats.org/drawingml/2006/main" xmlns:p="http://schemas.openxmlformats.org/presentationml/2006/main" xmlns:r="http://schemas.openxmlformats.org/officeDocument/2006/relationships">
+  <p:cSld>
+    <p:spTree>
+      <p:nvGrpSpPr>
+        <p:cNvPr id="1" name=""/>
+        <p:cNvGrpSpPr/>
+        <p:nvPr/>
+      </p:nvGrpSpPr>
+      <p:grpSpPr>
+        <a:xfrm>
+          <a:off x="0" y="0"/>
+          <a:ext cx="0" cy="0"/>
+          <a:chOff x="0" y="0"/>
+          <a:chExt cx="0" cy="0"/>
+        </a:xfrm>
+      </p:grpSpPr>
+      <p:sp>
+        <p:nvSpPr>
+          <p:cNvPr id="2" name="Slide Image Placeholder 1"/>
+          <p:cNvSpPr>
+            <a:spLocks noGrp="1"/>
+          </p:cNvSpPr>
+          <p:nvPr>
+            <p:ph type="sldImg" idx="2"/>
+          </p:nvPr>
+        </p:nvSpPr>
+        <p:spPr/>
+      </p:sp>
+      <p:sp>
+        <p:nvSpPr>
+          <p:cNvPr id="3" name="Notes Placeholder 2"/>
+          <p:cNvSpPr>
+            <a:spLocks noGrp="1"/>
+          </p:cNvSpPr>
+          <p:nvPr>
+            <p:ph type="body" idx="3" sz="quarter"/>
+          </p:nvPr>
+        </p:nvSpPr>
+        <p:spPr/>
+        <p:txBody>
+          <a:bodyPr/>
+          <a:lstStyle/>
+          <a:p>
+            <a:r>
+              <a:t>Active Data Guard는 설치하거나 켜는 스위치가 따로 없고 바이너리에 이미 들어 있습니다. 옵션 범위 관리는 결국 기능을 쓰는 순간을 잡아내는 일이 됩니다. 블록 변경 추적은 작아 보이지만 Standby에서 증분 백업을 받는 구성이라면 이것 하나로 옵션 사용입니다. 점검 항목에는 OPEN_MODE 같은 상태와 함께 Standby의 블록 변경 추적, ADG_REDIRECT_DML, In-Memory 크기 같은 설정도 넣어야 빠짐이 없습니다. Far Sync는 10장에서, 백업 오프로드는 16장에서 다시 다룹니다.</a:t>
+            </a:r>
+          </a:p>
+        </p:txBody>
+      </p:sp>
+      <p:sp>
+        <p:nvSpPr>
+          <p:cNvPr id="4" name="Slide Number Placeholder 3"/>
+          <p:cNvSpPr>
+            <a:spLocks noGrp="1"/>
+          </p:cNvSpPr>
+          <p:nvPr>
+            <p:ph type="sldNum" idx="5" sz="quarter"/>
+          </p:nvPr>
+        </p:nvSpPr>
+        <p:spPr/>
+      </p:sp>
+    </p:spTree>
+  </p:cSld>
+  <p:clrMapOvr>
+    <a:masterClrMapping/>
+  </p:clrMapOvr>
+</p:notes>
+</file>
+
+<file path=ppt/notesSlides/notesSlide33.xml><?xml version="1.0" encoding="utf-8"?>
+<p:notes xmlns:a="http://schemas.openxmlformats.org/drawingml/2006/main" xmlns:p="http://schemas.openxmlformats.org/presentationml/2006/main" xmlns:r="http://schemas.openxmlformats.org/officeDocument/2006/relationships">
+  <p:cSld>
+    <p:spTree>
+      <p:nvGrpSpPr>
+        <p:cNvPr id="1" name=""/>
+        <p:cNvGrpSpPr/>
+        <p:nvPr/>
+      </p:nvGrpSpPr>
+      <p:grpSpPr>
+        <a:xfrm>
+          <a:off x="0" y="0"/>
+          <a:ext cx="0" cy="0"/>
+          <a:chOff x="0" y="0"/>
+          <a:chExt cx="0" cy="0"/>
+        </a:xfrm>
+      </p:grpSpPr>
+      <p:sp>
+        <p:nvSpPr>
+          <p:cNvPr id="2" name="Slide Image Placeholder 1"/>
+          <p:cNvSpPr>
+            <a:spLocks noGrp="1"/>
+          </p:cNvSpPr>
+          <p:nvPr>
+            <p:ph type="sldImg" idx="2"/>
+          </p:nvPr>
+        </p:nvSpPr>
+        <p:spPr/>
+      </p:sp>
+      <p:sp>
+        <p:nvSpPr>
+          <p:cNvPr id="3" name="Notes Placeholder 2"/>
+          <p:cNvSpPr>
+            <a:spLocks noGrp="1"/>
+          </p:cNvSpPr>
+          <p:nvPr>
+            <p:ph type="body" idx="3" sz="quarter"/>
+          </p:nvPr>
+        </p:nvSpPr>
+        <p:spPr/>
+        <p:txBody>
+          <a:bodyPr/>
+          <a:lstStyle/>
+          <a:p>
+            <a:r>
+              <a:t>ORA-01219와 ORA-16000을 구분해 두면 상태를 오류 번호만으로 읽어 낼 수 있습니다. 16000은 열려 있는데 쓰려고 한 것이고, 01219는 아예 열려 있지 않은 것입니다. 01219 메시지 뒷부분을 보면 고정 테이블과 뷰는 조회된다고 적혀 있는데, 실제로 V$DATAGUARD_STATS 같은 감시용 뷰는 모두 동작합니다. 동기화 감시만 필요하다면 옵션 없이도 충분합니다. 다만 옵션을 내리면 조회 서비스가 사라져 보고서 접속이 ORA-12514로 실패하므로, 옵션을 끄는 결정은 애플리케이션 접속 설계와 같이 검토해야 합니다.</a:t>
+            </a:r>
+          </a:p>
+        </p:txBody>
+      </p:sp>
+      <p:sp>
+        <p:nvSpPr>
+          <p:cNvPr id="4" name="Slide Number Placeholder 3"/>
+          <p:cNvSpPr>
+            <a:spLocks noGrp="1"/>
+          </p:cNvSpPr>
+          <p:nvPr>
+            <p:ph type="sldNum" idx="5" sz="quarter"/>
+          </p:nvPr>
+        </p:nvSpPr>
+        <p:spPr/>
+      </p:sp>
+    </p:spTree>
+  </p:cSld>
+  <p:clrMapOvr>
+    <a:masterClrMapping/>
+  </p:clrMapOvr>
+</p:notes>
+</file>
+
+<file path=ppt/notesSlides/notesSlide34.xml><?xml version="1.0" encoding="utf-8"?>
+<p:notes xmlns:a="http://schemas.openxmlformats.org/drawingml/2006/main" xmlns:p="http://schemas.openxmlformats.org/presentationml/2006/main" xmlns:r="http://schemas.openxmlformats.org/officeDocument/2006/relationships">
+  <p:cSld>
+    <p:spTree>
+      <p:nvGrpSpPr>
+        <p:cNvPr id="1" name=""/>
+        <p:cNvGrpSpPr/>
+        <p:nvPr/>
+      </p:nvGrpSpPr>
+      <p:grpSpPr>
+        <a:xfrm>
+          <a:off x="0" y="0"/>
+          <a:ext cx="0" cy="0"/>
+          <a:chOff x="0" y="0"/>
+          <a:chExt cx="0" cy="0"/>
+        </a:xfrm>
+      </p:grpSpPr>
+      <p:sp>
+        <p:nvSpPr>
+          <p:cNvPr id="2" name="Slide Image Placeholder 1"/>
+          <p:cNvSpPr>
+            <a:spLocks noGrp="1"/>
+          </p:cNvSpPr>
+          <p:nvPr>
+            <p:ph type="sldImg" idx="2"/>
+          </p:nvPr>
+        </p:nvSpPr>
+        <p:spPr/>
+      </p:sp>
+      <p:sp>
+        <p:nvSpPr>
+          <p:cNvPr id="3" name="Notes Placeholder 2"/>
+          <p:cNvSpPr>
+            <a:spLocks noGrp="1"/>
+          </p:cNvSpPr>
+          <p:nvPr>
+            <p:ph type="body" idx="3" sz="quarter"/>
+          </p:nvPr>
+        </p:nvSpPr>
+        <p:spPr/>
+        <p:txBody>
+          <a:bodyPr/>
+          <a:lstStyle/>
+          <a:p>
+            <a:r>
+              <a:t>야간에 적용을 멈추고 보고서를 돌린 뒤 다시 적용하는 방식으로 옵션 없이 조회를 쓸 수 있습니다. 전송은 계속되므로 데이터 손실 관점의 보호는 유지됩니다. 대신 조회 창 동안 쌓인 리두를 나중에 몰아서 적용해야 하고, 그 사이 장애가 나면 Failover가 그만큼 오래 걸립니다. 가장 조심할 지점은 재개입니다. 열린 상태에서 적용만 다시 기동하면 그 순간 READ ONLY WITH APPLY가 되어 옵션 사용 상태로 넘어가므로, 반드시 재기동해 마운트로 내린 뒤 적용을 시작합니다.</a:t>
+            </a:r>
+          </a:p>
+        </p:txBody>
+      </p:sp>
+      <p:sp>
+        <p:nvSpPr>
+          <p:cNvPr id="4" name="Slide Number Placeholder 3"/>
+          <p:cNvSpPr>
+            <a:spLocks noGrp="1"/>
+          </p:cNvSpPr>
+          <p:nvPr>
+            <p:ph type="sldNum" idx="5" sz="quarter"/>
+          </p:nvPr>
+        </p:nvSpPr>
+        <p:spPr/>
+      </p:sp>
+    </p:spTree>
+  </p:cSld>
+  <p:clrMapOvr>
+    <a:masterClrMapping/>
+  </p:clrMapOvr>
+</p:notes>
+</file>
+
+<file path=ppt/notesSlides/notesSlide35.xml><?xml version="1.0" encoding="utf-8"?>
+<p:notes xmlns:a="http://schemas.openxmlformats.org/drawingml/2006/main" xmlns:p="http://schemas.openxmlformats.org/presentationml/2006/main" xmlns:r="http://schemas.openxmlformats.org/officeDocument/2006/relationships">
+  <p:cSld>
+    <p:spTree>
+      <p:nvGrpSpPr>
+        <p:cNvPr id="1" name=""/>
+        <p:cNvGrpSpPr/>
+        <p:nvPr/>
+      </p:nvGrpSpPr>
+      <p:grpSpPr>
+        <a:xfrm>
+          <a:off x="0" y="0"/>
+          <a:ext cx="0" cy="0"/>
+          <a:chOff x="0" y="0"/>
+          <a:chExt cx="0" cy="0"/>
+        </a:xfrm>
+      </p:grpSpPr>
+      <p:sp>
+        <p:nvSpPr>
+          <p:cNvPr id="2" name="Slide Image Placeholder 1"/>
+          <p:cNvSpPr>
+            <a:spLocks noGrp="1"/>
+          </p:cNvSpPr>
+          <p:nvPr>
+            <p:ph type="sldImg" idx="2"/>
+          </p:nvPr>
+        </p:nvSpPr>
+        <p:spPr/>
+      </p:sp>
+      <p:sp>
+        <p:nvSpPr>
+          <p:cNvPr id="3" name="Notes Placeholder 2"/>
+          <p:cNvSpPr>
+            <a:spLocks noGrp="1"/>
+          </p:cNvSpPr>
+          <p:nvPr>
+            <p:ph type="body" idx="3" sz="quarter"/>
+          </p:nvPr>
+        </p:nvSpPr>
+        <p:spPr/>
+        <p:txBody>
+          <a:bodyPr/>
+          <a:lstStyle/>
+          <a:p>
+            <a:r>
+              <a:t>조회 신선도가 중요하면서 Standby를 보호 용도로도 쓰려면 Active Data Guard 말고는 마땅한 답이 없습니다. 테스트처럼 갱신이 필요하지만 결과를 남길 필요가 없으면 Snapshot Standby, 보고서용 인덱스나 별도 테이블이 필요하면 Logical Standby가 후보가 됩니다. 감시만 하면 되는 사이트라면 MOUNTED로 충분하고, V$ 뷰 기반 감시 스크립트를 Primary와 Standby에 똑같이 두면 옵션 유무와 관계없이 그대로 동작합니다. 옵션 없는 사이트는 기동 모드와 OPEN_MODE를 정기 점검 항목에 넣어 두면 안전합니다.</a:t>
+            </a:r>
+          </a:p>
+        </p:txBody>
+      </p:sp>
+      <p:sp>
+        <p:nvSpPr>
+          <p:cNvPr id="4" name="Slide Number Placeholder 3"/>
+          <p:cNvSpPr>
+            <a:spLocks noGrp="1"/>
+          </p:cNvSpPr>
+          <p:nvPr>
+            <p:ph type="sldNum" idx="5" sz="quarter"/>
+          </p:nvPr>
+        </p:nvSpPr>
+        <p:spPr/>
+      </p:sp>
+    </p:spTree>
+  </p:cSld>
+  <p:clrMapOvr>
+    <a:masterClrMapping/>
+  </p:clrMapOvr>
+</p:notes>
+</file>
+
+<file path=ppt/notesSlides/notesSlide36.xml><?xml version="1.0" encoding="utf-8"?>
+<p:notes xmlns:a="http://schemas.openxmlformats.org/drawingml/2006/main" xmlns:p="http://schemas.openxmlformats.org/presentationml/2006/main" xmlns:r="http://schemas.openxmlformats.org/officeDocument/2006/relationships">
+  <p:cSld>
+    <p:spTree>
+      <p:nvGrpSpPr>
+        <p:cNvPr id="1" name=""/>
+        <p:cNvGrpSpPr/>
+        <p:nvPr/>
+      </p:nvGrpSpPr>
+      <p:grpSpPr>
+        <a:xfrm>
+          <a:off x="0" y="0"/>
+          <a:ext cx="0" cy="0"/>
+          <a:chOff x="0" y="0"/>
+          <a:chExt cx="0" cy="0"/>
+        </a:xfrm>
+      </p:grpSpPr>
+      <p:sp>
+        <p:nvSpPr>
+          <p:cNvPr id="2" name="Slide Image Placeholder 1"/>
+          <p:cNvSpPr>
+            <a:spLocks noGrp="1"/>
+          </p:cNvSpPr>
+          <p:nvPr>
+            <p:ph type="sldImg" idx="2"/>
+          </p:nvPr>
+        </p:nvSpPr>
+        <p:spPr/>
+      </p:sp>
+      <p:sp>
+        <p:nvSpPr>
+          <p:cNvPr id="3" name="Notes Placeholder 2"/>
+          <p:cNvSpPr>
+            <a:spLocks noGrp="1"/>
+          </p:cNvSpPr>
+          <p:nvPr>
+            <p:ph type="body" idx="3" sz="quarter"/>
+          </p:nvPr>
+        </p:nvSpPr>
+        <p:spPr/>
+        <p:txBody>
+          <a:bodyPr/>
+          <a:lstStyle/>
+          <a:p>
+            <a:r>
+              <a:t>실시간 조회를 켠다고 보호 수준이 떨어지지는 않습니다. 하지만 Standby에 보고서가 몰려 CPU와 I/O를 다 쓰면 적용이 밀리고, 그만큼 장애 때 Failover가 오래 걸립니다. 조회 부하가 큰 사이트는 Resource Manager로 사용자 세션을 제한하거나 보호 전용 Standby를 따로 둡니다. Standby의 긴 조회는 Primary가 정한 언두 보존을 그대로 따르므로 ORA-01555가 나면 Primary 쪽 설정을 봐야 합니다. 지연 한도와 리다이렉션은 SYS에게 다르게 동작하니 검증은 항상 일반 사용자로 합니다.</a:t>
             </a:r>
           </a:p>
         </p:txBody>
@@ -1869,7 +2653,7 @@
           <a:lstStyle/>
           <a:p>
             <a:r>
-              <a:t>리두는 커밋 전에도 전송되고 적용됩니다. 그러므로 Standby 의 데이터 블록에는 커밋되지 않은 변경이 이미 반영되어 있을 수 있습니다. 그럼에도 조회 결과가 깨끗한 것은 UNDO 정보 역시 함께 적용되기 때문입니다. Primary 에서와 같은 읽기 일관성 규칙이 그대로 적용됩니다. 측정의 핵심은 세션을 살려 두는 것이었습니다. DBMS_SESSION.SLEEP 으로 40초를 붙잡아 두고 그 사이에 조회했습니다.</a:t>
+              <a:t>지금 옵션을 쓰고 있는지는 OPEN_MODE 하나로 판단됩니다. 기능 사용 통계는 주기적으로 수집되는 기록이라 즉시 반영되지 않고, 읽기 전용 Standby에서는 갱신이 제한되기도 합니다. CDB 구성에서 루트에 접속해 DBA_ 뷰를 조회하면 행이 하나도 안 나오는 일이 흔한데, 현재 컨테이너만 보여 주기 때문입니다. CDB_ 뷰로 바꾸면 PDB별 행이 나옵니다. 감사에서는 경고 로그의 기동 기록도 근거가 되므로, 한 번이라도 열린 채 적용했다면 그 흔적은 남는다고 보는 것이 맞습니다.</a:t>
             </a:r>
           </a:p>
         </p:txBody>
@@ -1939,7 +2723,7 @@
           <a:lstStyle/>
           <a:p>
             <a:r>
-              <a:t>이 사례가 주는 교훈은 Data Guard 지식이 아니라 측정 방법에 관한 것입니다. 도구가 세션을 닫으면서 무엇을 하는지 알아야 합니다. 커밋·롤백·잠금 해제 같은 동작이 조용히 일어납니다. 상태를 유지해야 하는 시험은 그 상태를 만든 세션 안에서 처리해야 합니다. 실무에서도 같은 일이 일어납니다. "운영에서는 되는데 테스트에서는 안 된다"는 보고의 상당수가 테스트 방법의 차이에서 나옵니다.</a:t>
+              <a:t>7장에서 다룬 실시간 적용은 MRP0가 SRL에 막 쓰인 리두를 곧장 따라 읽는 방식으로, 마운트 상태에서도 동작합니다. 다만 마운트 상태에서는 사용자 테이블을 조회할 수 없습니다. 실시간 조회는 그 위에 열린 데이터베이스를 얹은 것입니다. 아카이브 기반 적용에 읽기 전용 열기를 조합하는 것도 이론상 가능하지만, 그래도 옵션 사용이면서 데이터는 로그 전환 단위로 늦게 보이므로 얻는 것이 거의 없습니다. 두 용어가 시험이나 면접에서 자주 섞여 나오는데, 하나는 적용 시점, 하나는 조회 가능 여부를 묻는 개념입니다.</a:t>
             </a:r>
           </a:p>
         </p:txBody>
@@ -2009,7 +2793,7 @@
           <a:lstStyle/>
           <a:p>
             <a:r>
-              <a:t>원인도 같습니다. 읽기 전용으로 열려 있기 때문입니다. STANDBY_FILE_MANAGEMENT 값과는 무관합니다. 그 파라미터는 리두를 적용하다 파일 추가 지시를 만났을 때의 동작을 정하는 것이고, 여기는 사람이 직접 쓰기를 시도한 경우입니다. 이 둘을 혼동하면 "AUTO 인데 왜 안 되지" 하는 잘못된 질문에 갇히게 됩니다. Standby 의 파일과 데이터는 오직 리두를 통해서만 바뀝니다.</a:t>
+              <a:t>적용이 도는 동안에는 데이터베이스를 열 수 없어서 순서가 이렇게 됩니다. 열기는 모든 데이터 파일이 같은 SCN까지 복구된 일관된 상태여야 성공하는데, 적용을 정상 CANCEL하면 이 조건이 맞춰집니다. CDB에서 자주 놓치는 것이 PDB 열기입니다. 루트만 열고 PDB를 열지 않으면 애플리케이션 사용자는 여전히 접속하지 못합니다. SAVE STATE로 상태를 저장해 두면 다음 기동부터 따라서 열립니다. Broker로 관리하는 구성은 적용을 멈추고 다시 거는 일을 Broker가 처리하므로 Standby를 열기만 하면 됩니다.</a:t>
             </a:r>
           </a:p>
         </p:txBody>
@@ -2079,7 +2863,7 @@
           <a:lstStyle/>
           <a:p>
             <a:r>
-              <a:t>정렬이 된다는 것이 ADG 활용의 핵심 근거입니다. 보고서와 집계처럼 정렬과 해시 조인이 많은 조회를 Standby 로 옮길 수 있습니다. 실측에서 임시 테이블스페이스가 실제로 쓰인 것을 V$TEMP_SPACE_HEADER 로 확인했습니다. GTT 에 대한 INSERT 가 되는 것도 같은 이유입니다. 데이터가 임시 테이블스페이스에 있고 영구 데이터 파일을 건드리지 않으니까요. 읽기 전용 데이터베이스에서 INSERT 가 성공하는 것이 처음에는 의아하지만 원리를 알면 자연스럽습니다.</a:t>
+              <a:t>끌 때는 재기동이 필요합니다. 열린 데이터베이스를 닫아 마운트로 되돌리는 명령이 없기 때문입니다. 적용만 CANCEL하면 OPEN_MODE가 READ ONLY로 바뀌어 그 순간은 옵션 사용 상태를 벗어나지만, 데이터는 그 시점에 고정됩니다. 그 상태에서 누군가 적용을 다시 기동하면 그 즉시 옵션 사용 상태로 돌아갑니다. 옵션을 정말 끄려는 목적이라면 재기동해 마운트로 내리는 것까지가 한 세트입니다. 실습 8에서 이 순서와 원복을 직접 해 보게 됩니다.</a:t>
             </a:r>
           </a:p>
         </p:txBody>
@@ -2149,7 +2933,7 @@
           <a:lstStyle/>
           <a:p>
             <a:r>
-              <a:t>시퀀스는 값을 주려면 어딘가에 "여기까지 썼다"를 기록해야 하는데 Standby 는 딕셔너리를 갱신할 수 없습니다. 그래서 Primary 가 쓰지 않을 범위를 통째로 떼어 메모리에서만 관리합니다. 실무적으로 중요한 결론이 나옵니다. 채번을 두 노드에서 나눠 하면 값에 큰 구멍이 생깁니다. 전표 번호처럼 연속성이 감사 요건이라면 문제가 되고, 단순히 유일한 값이 필요할 뿐이라면 괜찮습니다. 연속성이 요건인가 유일성이 요건인가를 구분하는 것이 판단의 출발점입니다.</a:t>
+              <a:t>V$DATABASE의 OPEN_MODE는 세 값 중 하나로 나옵니다. READ ONLY는 열렸지만 적용이 멈춘 상태이고, 열린 뒤 적용을 기동하면 READ ONLY WITH APPLY로 바뀝니다. Primary에서 원격 목적지의 V$ARCHIVE_DEST_STATUS를 보면 RECOVERY_MODE가 MANAGED REAL TIME APPLY WITH QUERY처럼 끝에 WITH QUERY가 붙고, Broker에서는 Real Time Query 항목이 ON으로 표시됩니다. 점검 스크립트를 만들 때 Standby에 접속하지 못하는 상황도 있으니, Primary 쪽에서 볼 수 있는 지표를 하나 함께 넣어 두면 쓸모가 있습니다.</a:t>
             </a:r>
           </a:p>
         </p:txBody>
@@ -2219,7 +3003,7 @@
           <a:lstStyle/>
           <a:p>
             <a:r>
-              <a:t>긴 스택을 읽는 요령이 있습니다. ORA-06512 는 PL/SQL 호출 스택으로 어디를 지났는지만 알려 줍니다. 그것을 건너뛰고 그것이 아닌 번호를 찾으면 됩니다. 실측 스택에서는 맨 위 ORA-00604 가 형식이고 중간의 ORA-16000 이 내용이었습니다. AWR 은 대조적입니다. 전용 오류 번호가 있고 스택도 짧습니다. ORA-16000 까지 내려가기 전에 패키지가 먼저 상태를 확인하고 거부했기 때문입니다. 오류 번호와 스택 길이가 그 기능이 상태를 얼마나 일찍 점검하는지 보여 줍니다.</a:t>
+              <a:t>리두는 커밋을 기다리지 않고 전송·적용되므로 Standby 데이터 블록에는 아직 커밋되지 않은 변경이 들어 있을 수 있습니다. 그래도 조회 결과에는 나타나지 않는데, 언두 블록도 리두로 함께 적용되어 있어 Primary와 똑같이 과거 시점으로 되돌려 읽기 때문입니다. 기준 시점이 쿼리 SCN이고, 적용이 일관된 지점까지 갈 때마다 앞으로 움직입니다. 커밋 전 행이 안 보인다고 "리두가 아직 안 왔다"로 해석하면 틀린 결론이 됩니다. 실습 2에서 적용 지점이 해당 변경을 넘어섰는지 확인하는 단계를 넣은 이유가 이것입니다.</a:t>
             </a:r>
           </a:p>
         </p:txBody>
@@ -5430,7 +6214,7 @@
                 </a:solidFill>
                 <a:latin typeface="맑은 고딕"/>
               </a:rPr>
-              <a:t>Active Data Guard ①</a:t>
+              <a:t>Active Data Guard ① 실시간 조회와 DML 리다이렉션</a:t>
             </a:r>
           </a:p>
         </p:txBody>
@@ -5469,7 +6253,7 @@
                 </a:solidFill>
                 <a:latin typeface="맑은 고딕"/>
               </a:rPr>
-              <a:t>실시간 조회와 DML 리다이렉션</a:t>
+              <a:t>열린 채 적용하는 Standby에 무엇을 맡길 것인가</a:t>
             </a:r>
           </a:p>
         </p:txBody>
@@ -5508,7 +6292,7 @@
                 </a:solidFill>
                 <a:latin typeface="맑은 고딕"/>
               </a:rPr>
-              <a:t>되는 것·안 되는 것·그리고 SYS 라는 함정</a:t>
+              <a:t>제9장</a:t>
             </a:r>
           </a:p>
         </p:txBody>
@@ -5609,7 +6393,7 @@
                 </a:solidFill>
                 <a:latin typeface="맑은 고딕"/>
               </a:rPr>
-              <a:t>첫 측정은 틀렸다</a:t>
+              <a:t>실시간 적용과 실시간 조회</a:t>
             </a:r>
           </a:p>
         </p:txBody>
@@ -5648,7 +6432,7 @@
                 </a:solidFill>
                 <a:latin typeface="맑은 고딕"/>
               </a:rPr>
-              <a:t>SQL*Plus 의 암묵적 커밋</a:t>
+              <a:t>이름은 비슷하지만 다른 축</a:t>
             </a:r>
           </a:p>
         </p:txBody>
@@ -5687,7 +6471,7 @@
                 </a:solidFill>
                 <a:latin typeface="맑은 고딕"/>
               </a:rPr>
-              <a:t>•  `INSERT` 후 `COMMIT` 없이 `EXIT` → Standby 에서 **보였다**</a:t>
+              <a:t>•  실시간 적용: 리두를 언제 읽어 적용하는가</a:t>
             </a:r>
           </a:p>
           <a:p>
@@ -5703,7 +6487,7 @@
                 </a:solidFill>
                 <a:latin typeface="맑은 고딕"/>
               </a:rPr>
-              <a:t>•  원인은 Data Guard 가 아니라 **SQL*Plus**</a:t>
+              <a:t>•  실시간 조회: 적용 중에 조회할 수 있는가</a:t>
             </a:r>
           </a:p>
           <a:p>
@@ -5719,7 +6503,7 @@
                 </a:solidFill>
                 <a:latin typeface="맑은 고딕"/>
               </a:rPr>
-              <a:t>•  정상 종료 시 암묵적으로 커밋한다 (비정상 종료는 롤백)</a:t>
+              <a:t>•  실시간 적용은 SRL 전제, 19c 기본, 기본 기능</a:t>
             </a:r>
           </a:p>
           <a:p>
@@ -5735,7 +6519,23 @@
                 </a:solidFill>
                 <a:latin typeface="맑은 고딕"/>
               </a:rPr>
-              <a:t>•  **"제품이 이상하다"보다 "내 측정이 이상하다"를 먼저 의심한다**</a:t>
+              <a:t>•  실시간 조회는 명시적 열기, 옵션 필요</a:t>
+            </a:r>
+          </a:p>
+          <a:p>
+            <a:pPr algn="l">
+              <a:spcAft>
+                <a:spcPts val="1000"/>
+              </a:spcAft>
+            </a:pPr>
+            <a:r>
+              <a:rPr sz="1700" b="0">
+                <a:solidFill>
+                  <a:srgbClr val="222222"/>
+                </a:solidFill>
+                <a:latin typeface="맑은 고딕"/>
+              </a:rPr>
+              <a:t>•  둘을 함께 써야 초 단위 신선도</a:t>
             </a:r>
           </a:p>
         </p:txBody>
@@ -5767,7 +6567,7 @@
         <p:spPr>
           <a:xfrm>
             <a:off x="0" y="0"/>
-            <a:ext cx="12191695" cy="6858000"/>
+            <a:ext cx="12191695" cy="1005840"/>
           </a:xfrm>
           <a:prstGeom prst="rect">
             <a:avLst/>
@@ -5810,8 +6610,8 @@
         </p:nvSpPr>
         <p:spPr>
           <a:xfrm>
-            <a:off x="822960" y="2011680"/>
-            <a:ext cx="10515600" cy="1097280"/>
+            <a:off x="548640" y="91440"/>
+            <a:ext cx="10972800" cy="777240"/>
           </a:xfrm>
           <a:prstGeom prst="rect">
             <a:avLst/>
@@ -5830,13 +6630,13 @@
               </a:spcAft>
             </a:pPr>
             <a:r>
-              <a:rPr sz="4000" b="1">
+              <a:rPr sz="2600" b="1">
                 <a:solidFill>
                   <a:srgbClr val="FFFFFF"/>
                 </a:solidFill>
                 <a:latin typeface="맑은 고딕"/>
               </a:rPr>
-              <a:t>9.4</a:t>
+              <a:t>켜는 절차</a:t>
             </a:r>
           </a:p>
         </p:txBody>
@@ -5849,8 +6649,8 @@
         </p:nvSpPr>
         <p:spPr>
           <a:xfrm>
-            <a:off x="822960" y="3017520"/>
-            <a:ext cx="10515600" cy="914400"/>
+            <a:off x="640080" y="1078992"/>
+            <a:ext cx="10881360" cy="457200"/>
           </a:xfrm>
           <a:prstGeom prst="rect">
             <a:avLst/>
@@ -5869,71 +6669,27 @@
               </a:spcAft>
             </a:pPr>
             <a:r>
-              <a:rPr sz="2800" b="1">
-                <a:solidFill>
-                  <a:srgbClr val="FFFFFF"/>
-                </a:solidFill>
-                <a:latin typeface="맑은 고딕"/>
-              </a:rPr>
-              <a:t>되는 것과 안 되는 것</a:t>
-            </a:r>
-          </a:p>
-        </p:txBody>
-      </p:sp>
-      <p:sp>
-        <p:nvSpPr>
-          <p:cNvPr id="5" name="Rectangle 4"/>
-          <p:cNvSpPr/>
-          <p:nvPr/>
-        </p:nvSpPr>
-        <p:spPr>
-          <a:xfrm>
-            <a:off x="822960" y="4114800"/>
-            <a:ext cx="5486400" cy="54864"/>
-          </a:xfrm>
-          <a:prstGeom prst="rect">
-            <a:avLst/>
-          </a:prstGeom>
-          <a:solidFill>
-            <a:srgbClr val="FFFFFF"/>
-          </a:solidFill>
-          <a:ln>
-            <a:noFill/>
-          </a:ln>
-          <a:effectLst/>
-        </p:spPr>
-        <p:style>
-          <a:lnRef idx="1">
-            <a:schemeClr val="accent1"/>
-          </a:lnRef>
-          <a:fillRef idx="3">
-            <a:schemeClr val="accent1"/>
-          </a:fillRef>
-          <a:effectRef idx="2">
-            <a:schemeClr val="accent1"/>
-          </a:effectRef>
-          <a:fontRef idx="minor">
-            <a:schemeClr val="lt1"/>
-          </a:fontRef>
-        </p:style>
-        <p:txBody>
-          <a:bodyPr rtlCol="0" anchor="ctr"/>
-          <a:lstStyle/>
-          <a:p>
-            <a:pPr algn="ctr"/>
-          </a:p>
-        </p:txBody>
-      </p:sp>
-      <p:sp>
-        <p:nvSpPr>
-          <p:cNvPr id="6" name="TextBox 5"/>
+              <a:rPr sz="1500" b="0">
+                <a:solidFill>
+                  <a:srgbClr val="5A6672"/>
+                </a:solidFill>
+                <a:latin typeface="맑은 고딕"/>
+              </a:rPr>
+              <a:t>멈추고, 열고, 다시 기동</a:t>
+            </a:r>
+          </a:p>
+        </p:txBody>
+      </p:sp>
+      <p:sp>
+        <p:nvSpPr>
+          <p:cNvPr id="5" name="TextBox 4"/>
           <p:cNvSpPr txBox="1"/>
           <p:nvPr/>
         </p:nvSpPr>
         <p:spPr>
           <a:xfrm>
-            <a:off x="822960" y="4297680"/>
-            <a:ext cx="10058400" cy="2011680"/>
+            <a:off x="640080" y="1737360"/>
+            <a:ext cx="10881360" cy="4754880"/>
           </a:xfrm>
           <a:prstGeom prst="rect">
             <a:avLst/>
@@ -5948,49 +6704,81 @@
           <a:p>
             <a:pPr algn="l">
               <a:spcAft>
-                <a:spcPts val="800"/>
-              </a:spcAft>
-            </a:pPr>
-            <a:r>
-              <a:rPr sz="1600" b="0">
-                <a:solidFill>
-                  <a:srgbClr val="FFFFFF"/>
-                </a:solidFill>
-                <a:latin typeface="맑은 고딕"/>
-              </a:rPr>
-              <a:t>•  쓰기는 막힌다</a:t>
-            </a:r>
-          </a:p>
-          <a:p>
-            <a:pPr algn="l">
-              <a:spcAft>
-                <a:spcPts val="800"/>
-              </a:spcAft>
-            </a:pPr>
-            <a:r>
-              <a:rPr sz="1600" b="0">
-                <a:solidFill>
-                  <a:srgbClr val="FFFFFF"/>
-                </a:solidFill>
-                <a:latin typeface="맑은 고딕"/>
-              </a:rPr>
-              <a:t>•  그런데 되는 것들</a:t>
-            </a:r>
-          </a:p>
-          <a:p>
-            <a:pPr algn="l">
-              <a:spcAft>
-                <a:spcPts val="800"/>
-              </a:spcAft>
-            </a:pPr>
-            <a:r>
-              <a:rPr sz="1600" b="0">
-                <a:solidFill>
-                  <a:srgbClr val="FFFFFF"/>
-                </a:solidFill>
-                <a:latin typeface="맑은 고딕"/>
-              </a:rPr>
-              <a:t>•  하나의 기준</a:t>
+                <a:spcPts val="1000"/>
+              </a:spcAft>
+            </a:pPr>
+            <a:r>
+              <a:rPr sz="1700" b="0">
+                <a:solidFill>
+                  <a:srgbClr val="222222"/>
+                </a:solidFill>
+                <a:latin typeface="맑은 고딕"/>
+              </a:rPr>
+              <a:t>•  RECOVER MANAGED STANDBY DATABASE CANCEL</a:t>
+            </a:r>
+          </a:p>
+          <a:p>
+            <a:pPr algn="l">
+              <a:spcAft>
+                <a:spcPts val="1000"/>
+              </a:spcAft>
+            </a:pPr>
+            <a:r>
+              <a:rPr sz="1700" b="0">
+                <a:solidFill>
+                  <a:srgbClr val="222222"/>
+                </a:solidFill>
+                <a:latin typeface="맑은 고딕"/>
+              </a:rPr>
+              <a:t>•  ALTER DATABASE OPEN READ ONLY</a:t>
+            </a:r>
+          </a:p>
+          <a:p>
+            <a:pPr algn="l">
+              <a:spcAft>
+                <a:spcPts val="1000"/>
+              </a:spcAft>
+            </a:pPr>
+            <a:r>
+              <a:rPr sz="1700" b="0">
+                <a:solidFill>
+                  <a:srgbClr val="222222"/>
+                </a:solidFill>
+                <a:latin typeface="맑은 고딕"/>
+              </a:rPr>
+              <a:t>•  CDB면 ALTER PLUGGABLE DATABASE ALL OPEN READ ONLY</a:t>
+            </a:r>
+          </a:p>
+          <a:p>
+            <a:pPr algn="l">
+              <a:spcAft>
+                <a:spcPts val="1000"/>
+              </a:spcAft>
+            </a:pPr>
+            <a:r>
+              <a:rPr sz="1700" b="0">
+                <a:solidFill>
+                  <a:srgbClr val="222222"/>
+                </a:solidFill>
+                <a:latin typeface="맑은 고딕"/>
+              </a:rPr>
+              <a:t>•  RECOVER MANAGED STANDBY DATABASE DISCONNECT</a:t>
+            </a:r>
+          </a:p>
+          <a:p>
+            <a:pPr algn="l">
+              <a:spcAft>
+                <a:spcPts val="1000"/>
+              </a:spcAft>
+            </a:pPr>
+            <a:r>
+              <a:rPr sz="1700" b="0">
+                <a:solidFill>
+                  <a:srgbClr val="222222"/>
+                </a:solidFill>
+                <a:latin typeface="맑은 고딕"/>
+              </a:rPr>
+              <a:t>•  Broker 구성은 열기만 하면 적용 상태 유지</a:t>
             </a:r>
           </a:p>
         </p:txBody>
@@ -6091,7 +6879,7 @@
                 </a:solidFill>
                 <a:latin typeface="맑은 고딕"/>
               </a:rPr>
-              <a:t>쓰기는 모두 ORA-16000</a:t>
+              <a:t>끄는 절차</a:t>
             </a:r>
           </a:p>
         </p:txBody>
@@ -6130,7 +6918,7 @@
                 </a:solidFill>
                 <a:latin typeface="맑은 고딕"/>
               </a:rPr>
-              <a:t>세 형태가 같은 오류</a:t>
+              <a:t>열린 DB를 마운트로 바로 내리는 명령은 없음</a:t>
             </a:r>
           </a:p>
         </p:txBody>
@@ -6169,7 +6957,7 @@
                 </a:solidFill>
                 <a:latin typeface="맑은 고딕"/>
               </a:rPr>
-              <a:t>•  `INSERT` → ORA-16000</a:t>
+              <a:t>•  SHUTDOWN IMMEDIATE</a:t>
             </a:r>
           </a:p>
           <a:p>
@@ -6185,7 +6973,7 @@
                 </a:solidFill>
                 <a:latin typeface="맑은 고딕"/>
               </a:rPr>
-              <a:t>•  `UPDATE` → ORA-16000</a:t>
+              <a:t>•  STARTUP MOUNT</a:t>
             </a:r>
           </a:p>
           <a:p>
@@ -6201,7 +6989,7 @@
                 </a:solidFill>
                 <a:latin typeface="맑은 고딕"/>
               </a:rPr>
-              <a:t>•  `CREATE TABLE` → ORA-16000</a:t>
+              <a:t>•  RECOVER MANAGED STANDBY DATABASE DISCONNECT</a:t>
             </a:r>
           </a:p>
           <a:p>
@@ -6217,7 +7005,23 @@
                 </a:solidFill>
                 <a:latin typeface="맑은 고딕"/>
               </a:rPr>
-              <a:t>•  8장에서 테이블스페이스를 만들려다 만난 것과 같다</a:t>
+              <a:t>•  적용만 CANCEL하면 READ ONLY로 남음</a:t>
+            </a:r>
+          </a:p>
+          <a:p>
+            <a:pPr algn="l">
+              <a:spcAft>
+                <a:spcPts val="1000"/>
+              </a:spcAft>
+            </a:pPr>
+            <a:r>
+              <a:rPr sz="1700" b="0">
+                <a:solidFill>
+                  <a:srgbClr val="222222"/>
+                </a:solidFill>
+                <a:latin typeface="맑은 고딕"/>
+              </a:rPr>
+              <a:t>•  COMPATIBLE 11.0 이상이 전제 (19c는 충족)</a:t>
             </a:r>
           </a:p>
         </p:txBody>
@@ -6318,7 +7122,7 @@
                 </a:solidFill>
                 <a:latin typeface="맑은 고딕"/>
               </a:rPr>
-              <a:t>그런데 이런 것들은 된다</a:t>
+              <a:t>열린 모드 판별</a:t>
             </a:r>
           </a:p>
         </p:txBody>
@@ -6357,7 +7161,7 @@
                 </a:solidFill>
                 <a:latin typeface="맑은 고딕"/>
               </a:rPr>
-              <a:t>네 가지</a:t>
+              <a:t>세 위치가 같은 사실을 보여 줌</a:t>
             </a:r>
           </a:p>
         </p:txBody>
@@ -6396,7 +7200,7 @@
                 </a:solidFill>
                 <a:latin typeface="맑은 고딕"/>
               </a:rPr>
-              <a:t>•  **정렬** — 7만 행 정렬 성공, TEMP 3MB씩 사용</a:t>
+              <a:t>•  MOUNTED / READ ONLY / READ ONLY WITH APPLY</a:t>
             </a:r>
           </a:p>
           <a:p>
@@ -6412,7 +7216,7 @@
                 </a:solidFill>
                 <a:latin typeface="맑은 고딕"/>
               </a:rPr>
-              <a:t>•  **`EXPLAIN PLAN`** — `PLAN_TABLE` 이 GTT 다</a:t>
+              <a:t>•  Primary의 RECOVERY_MODE 끝에 WITH QUERY</a:t>
             </a:r>
           </a:p>
           <a:p>
@@ -6428,7 +7232,7 @@
                 </a:solidFill>
                 <a:latin typeface="맑은 고딕"/>
               </a:rPr>
-              <a:t>•  **GTT `INSERT`** — `TEMP_UNDO_ENABLED=FALSE` 인데도 동작</a:t>
+              <a:t>•  Broker SHOW DATABASE: Real Time Query ON</a:t>
             </a:r>
           </a:p>
           <a:p>
@@ -6444,7 +7248,7 @@
                 </a:solidFill>
                 <a:latin typeface="맑은 고딕"/>
               </a:rPr>
-              <a:t>•  **시퀀스 `NEXTVAL`** — 되지만 값이 뛴다</a:t>
+              <a:t>•  Standby 쪽 하나, Primary 쪽 하나를 함께 확인</a:t>
             </a:r>
           </a:p>
         </p:txBody>
@@ -6545,7 +7349,7 @@
                 </a:solidFill>
                 <a:latin typeface="맑은 고딕"/>
               </a:rPr>
-              <a:t>시퀀스는 값이 뛴다</a:t>
+              <a:t>읽기 일관성과 쿼리 SCN</a:t>
             </a:r>
           </a:p>
         </p:txBody>
@@ -6584,7 +7388,7 @@
                 </a:solidFill>
                 <a:latin typeface="맑은 고딕"/>
               </a:rPr>
-              <a:t>1 다음이 21</a:t>
+              <a:t>Standby 결과 = 조금 과거의 Primary 결과</a:t>
             </a:r>
           </a:p>
         </p:txBody>
@@ -6623,7 +7427,7 @@
                 </a:solidFill>
                 <a:latin typeface="맑은 고딕"/>
               </a:rPr>
-              <a:t>•  Primary 에서 `NEXTVAL` → **1**</a:t>
+              <a:t>•  커밋 전 변경도 리두로 Standby 블록에 반영됨</a:t>
             </a:r>
           </a:p>
           <a:p>
@@ -6639,7 +7443,7 @@
                 </a:solidFill>
                 <a:latin typeface="맑은 고딕"/>
               </a:rPr>
-              <a:t>•  같은 시퀀스를 Standby 에서 → **21**</a:t>
+              <a:t>•  언두 블록도 함께 적용되어 있음</a:t>
             </a:r>
           </a:p>
           <a:p>
@@ -6655,7 +7459,7 @@
                 </a:solidFill>
                 <a:latin typeface="맑은 고딕"/>
               </a:rPr>
-              <a:t>•  딕셔너리를 못 쓰므로 별도 범위를 메모리에서 관리한다</a:t>
+              <a:t>•  쿼리 SCN 기준으로 블록을 되돌려 읽음</a:t>
             </a:r>
           </a:p>
           <a:p>
@@ -6671,7 +7475,23 @@
                 </a:solidFill>
                 <a:latin typeface="맑은 고딕"/>
               </a:rPr>
-              <a:t>•  **연속성이 요건이면 Standby 에서 쓰지 않는다**</a:t>
+              <a:t>•  적용이 멈추면 쿼리 SCN도 멈춤</a:t>
+            </a:r>
+          </a:p>
+          <a:p>
+            <a:pPr algn="l">
+              <a:spcAft>
+                <a:spcPts val="1000"/>
+              </a:spcAft>
+            </a:pPr>
+            <a:r>
+              <a:rPr sz="1700" b="0">
+                <a:solidFill>
+                  <a:srgbClr val="222222"/>
+                </a:solidFill>
+                <a:latin typeface="맑은 고딕"/>
+              </a:rPr>
+              <a:t>•  긴 조회는 ORA-01555 가능, Primary 언두 설정과 연동</a:t>
             </a:r>
           </a:p>
         </p:txBody>
@@ -6703,7 +7523,7 @@
         <p:spPr>
           <a:xfrm>
             <a:off x="0" y="0"/>
-            <a:ext cx="12191695" cy="1005840"/>
+            <a:ext cx="12191695" cy="6858000"/>
           </a:xfrm>
           <a:prstGeom prst="rect">
             <a:avLst/>
@@ -6746,8 +7566,8 @@
         </p:nvSpPr>
         <p:spPr>
           <a:xfrm>
-            <a:off x="548640" y="91440"/>
-            <a:ext cx="10972800" cy="777240"/>
+            <a:off x="822960" y="2011680"/>
+            <a:ext cx="10515600" cy="1097280"/>
           </a:xfrm>
           <a:prstGeom prst="rect">
             <a:avLst/>
@@ -6766,13 +7586,13 @@
               </a:spcAft>
             </a:pPr>
             <a:r>
-              <a:rPr sz="2600" b="1">
+              <a:rPr sz="4000" b="1">
                 <a:solidFill>
                   <a:srgbClr val="FFFFFF"/>
                 </a:solidFill>
                 <a:latin typeface="맑은 고딕"/>
               </a:rPr>
-              <a:t>관리 작업은 막힌다</a:t>
+              <a:t>9.4</a:t>
             </a:r>
           </a:p>
         </p:txBody>
@@ -6785,8 +7605,8 @@
         </p:nvSpPr>
         <p:spPr>
           <a:xfrm>
-            <a:off x="640080" y="1078992"/>
-            <a:ext cx="10881360" cy="457200"/>
+            <a:off x="822960" y="3017520"/>
+            <a:ext cx="10515600" cy="914400"/>
           </a:xfrm>
           <a:prstGeom prst="rect">
             <a:avLst/>
@@ -6805,27 +7625,71 @@
               </a:spcAft>
             </a:pPr>
             <a:r>
-              <a:rPr sz="1500" b="0">
-                <a:solidFill>
-                  <a:srgbClr val="5A6672"/>
-                </a:solidFill>
-                <a:latin typeface="맑은 고딕"/>
-              </a:rPr>
-              <a:t>오류 번호가 다르다</a:t>
-            </a:r>
-          </a:p>
-        </p:txBody>
-      </p:sp>
-      <p:sp>
-        <p:nvSpPr>
-          <p:cNvPr id="5" name="TextBox 4"/>
+              <a:rPr sz="2800" b="1">
+                <a:solidFill>
+                  <a:srgbClr val="FFFFFF"/>
+                </a:solidFill>
+                <a:latin typeface="맑은 고딕"/>
+              </a:rPr>
+              <a:t>Standby에서 되는 일과 안 되는 일</a:t>
+            </a:r>
+          </a:p>
+        </p:txBody>
+      </p:sp>
+      <p:sp>
+        <p:nvSpPr>
+          <p:cNvPr id="5" name="Rectangle 4"/>
+          <p:cNvSpPr/>
+          <p:nvPr/>
+        </p:nvSpPr>
+        <p:spPr>
+          <a:xfrm>
+            <a:off x="822960" y="4114800"/>
+            <a:ext cx="5486400" cy="54864"/>
+          </a:xfrm>
+          <a:prstGeom prst="rect">
+            <a:avLst/>
+          </a:prstGeom>
+          <a:solidFill>
+            <a:srgbClr val="FFFFFF"/>
+          </a:solidFill>
+          <a:ln>
+            <a:noFill/>
+          </a:ln>
+          <a:effectLst/>
+        </p:spPr>
+        <p:style>
+          <a:lnRef idx="1">
+            <a:schemeClr val="accent1"/>
+          </a:lnRef>
+          <a:fillRef idx="3">
+            <a:schemeClr val="accent1"/>
+          </a:fillRef>
+          <a:effectRef idx="2">
+            <a:schemeClr val="accent1"/>
+          </a:effectRef>
+          <a:fontRef idx="minor">
+            <a:schemeClr val="lt1"/>
+          </a:fontRef>
+        </p:style>
+        <p:txBody>
+          <a:bodyPr rtlCol="0" anchor="ctr"/>
+          <a:lstStyle/>
+          <a:p>
+            <a:pPr algn="ctr"/>
+          </a:p>
+        </p:txBody>
+      </p:sp>
+      <p:sp>
+        <p:nvSpPr>
+          <p:cNvPr id="6" name="TextBox 5"/>
           <p:cNvSpPr txBox="1"/>
           <p:nvPr/>
         </p:nvSpPr>
         <p:spPr>
           <a:xfrm>
-            <a:off x="640080" y="1737360"/>
-            <a:ext cx="10881360" cy="4754880"/>
+            <a:off x="822960" y="4297680"/>
+            <a:ext cx="10058400" cy="2011680"/>
           </a:xfrm>
           <a:prstGeom prst="rect">
             <a:avLst/>
@@ -6840,65 +7704,49 @@
           <a:p>
             <a:pPr algn="l">
               <a:spcAft>
-                <a:spcPts val="1000"/>
-              </a:spcAft>
-            </a:pPr>
-            <a:r>
-              <a:rPr sz="1700" b="0">
-                <a:solidFill>
-                  <a:srgbClr val="222222"/>
-                </a:solidFill>
-                <a:latin typeface="맑은 고딕"/>
-              </a:rPr>
-              <a:t>•  `DBMS_STATS` → 열 줄 넘는 스택, 안쪽에 **ORA-16000**</a:t>
-            </a:r>
-          </a:p>
-          <a:p>
-            <a:pPr algn="l">
-              <a:spcAft>
-                <a:spcPts val="1000"/>
-              </a:spcAft>
-            </a:pPr>
-            <a:r>
-              <a:rPr sz="1700" b="0">
-                <a:solidFill>
-                  <a:srgbClr val="222222"/>
-                </a:solidFill>
-                <a:latin typeface="맑은 고딕"/>
-              </a:rPr>
-              <a:t>•  AWR 스냅샷 → 전용 오류 **ORA-13516**, 스택이 짧다</a:t>
-            </a:r>
-          </a:p>
-          <a:p>
-            <a:pPr algn="l">
-              <a:spcAft>
-                <a:spcPts val="1000"/>
-              </a:spcAft>
-            </a:pPr>
-            <a:r>
-              <a:rPr sz="1700" b="0">
-                <a:solidFill>
-                  <a:srgbClr val="222222"/>
-                </a:solidFill>
-                <a:latin typeface="맑은 고딕"/>
-              </a:rPr>
-              <a:t>•  `V$` 뷰 조회 → 문제없다</a:t>
-            </a:r>
-          </a:p>
-          <a:p>
-            <a:pPr algn="l">
-              <a:spcAft>
-                <a:spcPts val="1000"/>
-              </a:spcAft>
-            </a:pPr>
-            <a:r>
-              <a:rPr sz="1700" b="0">
-                <a:solidFill>
-                  <a:srgbClr val="222222"/>
-                </a:solidFill>
-                <a:latin typeface="맑은 고딕"/>
-              </a:rPr>
-              <a:t>•  **"보는 것은 되고 남기는 것은 안 된다"**</a:t>
+                <a:spcPts val="800"/>
+              </a:spcAft>
+            </a:pPr>
+            <a:r>
+              <a:rPr sz="1600" b="0">
+                <a:solidFill>
+                  <a:srgbClr val="FFFFFF"/>
+                </a:solidFill>
+                <a:latin typeface="맑은 고딕"/>
+              </a:rPr>
+              <a:t>•  쓰기가 막히는 이유</a:t>
+            </a:r>
+          </a:p>
+          <a:p>
+            <a:pPr algn="l">
+              <a:spcAft>
+                <a:spcPts val="800"/>
+              </a:spcAft>
+            </a:pPr>
+            <a:r>
+              <a:rPr sz="1600" b="0">
+                <a:solidFill>
+                  <a:srgbClr val="FFFFFF"/>
+                </a:solidFill>
+                <a:latin typeface="맑은 고딕"/>
+              </a:rPr>
+              <a:t>•  오프로드에 적합한 작업</a:t>
+            </a:r>
+          </a:p>
+          <a:p>
+            <a:pPr algn="l">
+              <a:spcAft>
+                <a:spcPts val="800"/>
+              </a:spcAft>
+            </a:pPr>
+            <a:r>
+              <a:rPr sz="1600" b="0">
+                <a:solidFill>
+                  <a:srgbClr val="FFFFFF"/>
+                </a:solidFill>
+                <a:latin typeface="맑은 고딕"/>
+              </a:rPr>
+              <a:t>•  판단 기준: 영구 파일·딕셔너리를 바꾸는가</a:t>
             </a:r>
           </a:p>
         </p:txBody>
@@ -6999,7 +7847,7 @@
                 </a:solidFill>
                 <a:latin typeface="맑은 고딕"/>
               </a:rPr>
-              <a:t>경계를 가르는 하나의 기준</a:t>
+              <a:t>쓰기가 막히는 이유</a:t>
             </a:r>
           </a:p>
         </p:txBody>
@@ -7038,7 +7886,7 @@
                 </a:solidFill>
                 <a:latin typeface="맑은 고딕"/>
               </a:rPr>
-              <a:t>표를 외우지 않는다</a:t>
+              <a:t>데이터 파일은 Primary의 리두로만 바뀐다</a:t>
             </a:r>
           </a:p>
         </p:txBody>
@@ -7077,7 +7925,7 @@
                 </a:solidFill>
                 <a:latin typeface="맑은 고딕"/>
               </a:rPr>
-              <a:t>•  **영구 데이터 파일이나 딕셔너리를 바꾸는가**</a:t>
+              <a:t>•  Standby가 블록을 바꾸면 다음 리두와 어긋남</a:t>
             </a:r>
           </a:p>
           <a:p>
@@ -7093,7 +7941,7 @@
                 </a:solidFill>
                 <a:latin typeface="맑은 고딕"/>
               </a:rPr>
-              <a:t>•  임시 세그먼트에서 끝나면 → 된다</a:t>
+              <a:t>•  일반 DML·DDL: ORA-16000</a:t>
             </a:r>
           </a:p>
           <a:p>
@@ -7109,7 +7957,7 @@
                 </a:solidFill>
                 <a:latin typeface="맑은 고딕"/>
               </a:rPr>
-              <a:t>•  블록·UNDO·리두를 만들면 → ORA-16000</a:t>
+              <a:t>•  통계 수집: 딕셔너리 기록이라 ORA-16000</a:t>
             </a:r>
           </a:p>
           <a:p>
@@ -7125,7 +7973,23 @@
                 </a:solidFill>
                 <a:latin typeface="맑은 고딕"/>
               </a:rPr>
-              <a:t>•  딕셔너리까지 바꾸면 → ORA-16000 (DDL·통계)</a:t>
+              <a:t>•  로컬 AWR 스냅샷: ORA-13516</a:t>
+            </a:r>
+          </a:p>
+          <a:p>
+            <a:pPr algn="l">
+              <a:spcAft>
+                <a:spcPts val="1000"/>
+              </a:spcAft>
+            </a:pPr>
+            <a:r>
+              <a:rPr sz="1700" b="0">
+                <a:solidFill>
+                  <a:srgbClr val="222222"/>
+                </a:solidFill>
+                <a:latin typeface="맑은 고딕"/>
+              </a:rPr>
+              <a:t>•  옵티마이저는 Primary에서 넘어온 통계를 사용</a:t>
             </a:r>
           </a:p>
         </p:txBody>
@@ -7157,7 +8021,7 @@
         <p:spPr>
           <a:xfrm>
             <a:off x="0" y="0"/>
-            <a:ext cx="12191695" cy="6858000"/>
+            <a:ext cx="12191695" cy="1005840"/>
           </a:xfrm>
           <a:prstGeom prst="rect">
             <a:avLst/>
@@ -7200,8 +8064,8 @@
         </p:nvSpPr>
         <p:spPr>
           <a:xfrm>
-            <a:off x="822960" y="2011680"/>
-            <a:ext cx="10515600" cy="1097280"/>
+            <a:off x="548640" y="91440"/>
+            <a:ext cx="10972800" cy="777240"/>
           </a:xfrm>
           <a:prstGeom prst="rect">
             <a:avLst/>
@@ -7220,13 +8084,13 @@
               </a:spcAft>
             </a:pPr>
             <a:r>
-              <a:rPr sz="4000" b="1">
+              <a:rPr sz="2600" b="1">
                 <a:solidFill>
                   <a:srgbClr val="FFFFFF"/>
                 </a:solidFill>
                 <a:latin typeface="맑은 고딕"/>
               </a:rPr>
-              <a:t>9.5</a:t>
+              <a:t>오프로드에 적합한 작업</a:t>
             </a:r>
           </a:p>
         </p:txBody>
@@ -7239,8 +8103,8 @@
         </p:nvSpPr>
         <p:spPr>
           <a:xfrm>
-            <a:off x="822960" y="3017520"/>
-            <a:ext cx="10515600" cy="914400"/>
+            <a:off x="640080" y="1078992"/>
+            <a:ext cx="10881360" cy="457200"/>
           </a:xfrm>
           <a:prstGeom prst="rect">
             <a:avLst/>
@@ -7259,71 +8123,27 @@
               </a:spcAft>
             </a:pPr>
             <a:r>
-              <a:rPr sz="2800" b="1">
-                <a:solidFill>
-                  <a:srgbClr val="FFFFFF"/>
-                </a:solidFill>
-                <a:latin typeface="맑은 고딕"/>
-              </a:rPr>
-              <a:t>DML 리다이렉션</a:t>
-            </a:r>
-          </a:p>
-        </p:txBody>
-      </p:sp>
-      <p:sp>
-        <p:nvSpPr>
-          <p:cNvPr id="5" name="Rectangle 4"/>
-          <p:cNvSpPr/>
-          <p:nvPr/>
-        </p:nvSpPr>
-        <p:spPr>
-          <a:xfrm>
-            <a:off x="822960" y="4114800"/>
-            <a:ext cx="5486400" cy="54864"/>
-          </a:xfrm>
-          <a:prstGeom prst="rect">
-            <a:avLst/>
-          </a:prstGeom>
-          <a:solidFill>
-            <a:srgbClr val="FFFFFF"/>
-          </a:solidFill>
-          <a:ln>
-            <a:noFill/>
-          </a:ln>
-          <a:effectLst/>
-        </p:spPr>
-        <p:style>
-          <a:lnRef idx="1">
-            <a:schemeClr val="accent1"/>
-          </a:lnRef>
-          <a:fillRef idx="3">
-            <a:schemeClr val="accent1"/>
-          </a:fillRef>
-          <a:effectRef idx="2">
-            <a:schemeClr val="accent1"/>
-          </a:effectRef>
-          <a:fontRef idx="minor">
-            <a:schemeClr val="lt1"/>
-          </a:fontRef>
-        </p:style>
-        <p:txBody>
-          <a:bodyPr rtlCol="0" anchor="ctr"/>
-          <a:lstStyle/>
-          <a:p>
-            <a:pPr algn="ctr"/>
-          </a:p>
-        </p:txBody>
-      </p:sp>
-      <p:sp>
-        <p:nvSpPr>
-          <p:cNvPr id="6" name="TextBox 5"/>
+              <a:rPr sz="1500" b="0">
+                <a:solidFill>
+                  <a:srgbClr val="5A6672"/>
+                </a:solidFill>
+                <a:latin typeface="맑은 고딕"/>
+              </a:rPr>
+              <a:t>파일을 바꾸지 않거나 임시 공간만 쓰는 작업</a:t>
+            </a:r>
+          </a:p>
+        </p:txBody>
+      </p:sp>
+      <p:sp>
+        <p:nvSpPr>
+          <p:cNvPr id="5" name="TextBox 4"/>
           <p:cNvSpPr txBox="1"/>
           <p:nvPr/>
         </p:nvSpPr>
         <p:spPr>
           <a:xfrm>
-            <a:off x="822960" y="4297680"/>
-            <a:ext cx="10058400" cy="2011680"/>
+            <a:off x="640080" y="1737360"/>
+            <a:ext cx="10881360" cy="4754880"/>
           </a:xfrm>
           <a:prstGeom prst="rect">
             <a:avLst/>
@@ -7338,49 +8158,81 @@
           <a:p>
             <a:pPr algn="l">
               <a:spcAft>
-                <a:spcPts val="800"/>
-              </a:spcAft>
-            </a:pPr>
-            <a:r>
-              <a:rPr sz="1600" b="0">
-                <a:solidFill>
-                  <a:srgbClr val="FFFFFF"/>
-                </a:solidFill>
-                <a:latin typeface="맑은 고딕"/>
-              </a:rPr>
-              <a:t>•  동작 방식</a:t>
-            </a:r>
-          </a:p>
-          <a:p>
-            <a:pPr algn="l">
-              <a:spcAft>
-                <a:spcPts val="800"/>
-              </a:spcAft>
-            </a:pPr>
-            <a:r>
-              <a:rPr sz="1600" b="0">
-                <a:solidFill>
-                  <a:srgbClr val="FFFFFF"/>
-                </a:solidFill>
-                <a:latin typeface="맑은 고딕"/>
-              </a:rPr>
-              <a:t>•  SYS 라는 함정</a:t>
-            </a:r>
-          </a:p>
-          <a:p>
-            <a:pPr algn="l">
-              <a:spcAft>
-                <a:spcPts val="800"/>
-              </a:spcAft>
-            </a:pPr>
-            <a:r>
-              <a:rPr sz="1600" b="0">
-                <a:solidFill>
-                  <a:srgbClr val="FFFFFF"/>
-                </a:solidFill>
-                <a:latin typeface="맑은 고딕"/>
-              </a:rPr>
-              <a:t>•  비용과 용도</a:t>
+                <a:spcPts val="1000"/>
+              </a:spcAft>
+            </a:pPr>
+            <a:r>
+              <a:rPr sz="1700" b="0">
+                <a:solidFill>
+                  <a:srgbClr val="222222"/>
+                </a:solidFill>
+                <a:latin typeface="맑은 고딕"/>
+              </a:rPr>
+              <a:t>•  조회·보고서, 정렬·해시 조인(TEMP 사용)</a:t>
+            </a:r>
+          </a:p>
+          <a:p>
+            <a:pPr algn="l">
+              <a:spcAft>
+                <a:spcPts val="1000"/>
+              </a:spcAft>
+            </a:pPr>
+            <a:r>
+              <a:rPr sz="1700" b="0">
+                <a:solidFill>
+                  <a:srgbClr val="222222"/>
+                </a:solidFill>
+                <a:latin typeface="맑은 고딕"/>
+              </a:rPr>
+              <a:t>•  V$ 뷰, DISPLAY_CURSOR, EXPLAIN PLAN</a:t>
+            </a:r>
+          </a:p>
+          <a:p>
+            <a:pPr algn="l">
+              <a:spcAft>
+                <a:spcPts val="1000"/>
+              </a:spcAft>
+            </a:pPr>
+            <a:r>
+              <a:rPr sz="1700" b="0">
+                <a:solidFill>
+                  <a:srgbClr val="222222"/>
+                </a:solidFill>
+                <a:latin typeface="맑은 고딕"/>
+              </a:rPr>
+              <a:t>•  파일 추출, 네트워크 링크 기반 Data Pump</a:t>
+            </a:r>
+          </a:p>
+          <a:p>
+            <a:pPr algn="l">
+              <a:spcAft>
+                <a:spcPts val="1000"/>
+              </a:spcAft>
+            </a:pPr>
+            <a:r>
+              <a:rPr sz="1700" b="0">
+                <a:solidFill>
+                  <a:srgbClr val="222222"/>
+                </a:solidFill>
+                <a:latin typeface="맑은 고딕"/>
+              </a:rPr>
+              <a:t>•  RMAN 백업(기본 기능), BCT는 옵션</a:t>
+            </a:r>
+          </a:p>
+          <a:p>
+            <a:pPr algn="l">
+              <a:spcAft>
+                <a:spcPts val="1000"/>
+              </a:spcAft>
+            </a:pPr>
+            <a:r>
+              <a:rPr sz="1700" b="0">
+                <a:solidFill>
+                  <a:srgbClr val="222222"/>
+                </a:solidFill>
+                <a:latin typeface="맑은 고딕"/>
+              </a:rPr>
+              <a:t>•  임시 파일은 리두로 안 만들어짐, 직접 추가</a:t>
             </a:r>
           </a:p>
         </p:txBody>
@@ -7481,7 +8333,7 @@
                 </a:solidFill>
                 <a:latin typeface="맑은 고딕"/>
               </a:rPr>
-              <a:t>읽기 전용에서 INSERT 가 된다</a:t>
+              <a:t>막히는 작업과 우회 경로</a:t>
             </a:r>
           </a:p>
         </p:txBody>
@@ -7520,7 +8372,7 @@
                 </a:solidFill>
                 <a:latin typeface="맑은 고딕"/>
               </a:rPr>
-              <a:t>19c 의 기능</a:t>
+              <a:t>기준 하나로 결과를 예측</a:t>
             </a:r>
           </a:p>
         </p:txBody>
@@ -7559,7 +8411,7 @@
                 </a:solidFill>
                 <a:latin typeface="맑은 고딕"/>
               </a:rPr>
-              <a:t>•  `ALTER SESSION ENABLE ADG_REDIRECT_DML`</a:t>
+              <a:t>•  일반 DML → 리다이렉션 또는 Primary 접속</a:t>
             </a:r>
           </a:p>
           <a:p>
@@ -7575,7 +8427,7 @@
                 </a:solidFill>
                 <a:latin typeface="맑은 고딕"/>
               </a:rPr>
-              <a:t>•  일반 사용자로 `INSERT` → **1 row created**</a:t>
+              <a:t>•  DDL·인덱스·통계 → Primary에서 수행</a:t>
             </a:r>
           </a:p>
           <a:p>
@@ -7591,7 +8443,7 @@
                 </a:solidFill>
                 <a:latin typeface="맑은 고딕"/>
               </a:rPr>
-              <a:t>•  같은 행이 **Primary 에서도** 조회된다</a:t>
+              <a:t>•  로컬 AWR → 원격 AWR(UMF)</a:t>
             </a:r>
           </a:p>
           <a:p>
@@ -7607,7 +8459,23 @@
                 </a:solidFill>
                 <a:latin typeface="맑은 고딕"/>
               </a:rPr>
-              <a:t>•  `UPDATE`·`DELETE` 도 마찬가지</a:t>
+              <a:t>•  GTT·PTT·CACHE 시퀀스 → Standby에서 성공</a:t>
+            </a:r>
+          </a:p>
+          <a:p>
+            <a:pPr algn="l">
+              <a:spcAft>
+                <a:spcPts val="1000"/>
+              </a:spcAft>
+            </a:pPr>
+            <a:r>
+              <a:rPr sz="1700" b="0">
+                <a:solidFill>
+                  <a:srgbClr val="222222"/>
+                </a:solidFill>
+                <a:latin typeface="맑은 고딕"/>
+              </a:rPr>
+              <a:t>•  보고서용 인덱스·MV → 논리 Standby</a:t>
             </a:r>
           </a:p>
         </p:txBody>
@@ -7639,7 +8507,7 @@
         <p:spPr>
           <a:xfrm>
             <a:off x="0" y="0"/>
-            <a:ext cx="12191695" cy="1005840"/>
+            <a:ext cx="12191695" cy="6858000"/>
           </a:xfrm>
           <a:prstGeom prst="rect">
             <a:avLst/>
@@ -7682,8 +8550,8 @@
         </p:nvSpPr>
         <p:spPr>
           <a:xfrm>
-            <a:off x="548640" y="91440"/>
-            <a:ext cx="10972800" cy="777240"/>
+            <a:off x="822960" y="2011680"/>
+            <a:ext cx="10515600" cy="1097280"/>
           </a:xfrm>
           <a:prstGeom prst="rect">
             <a:avLst/>
@@ -7702,13 +8570,13 @@
               </a:spcAft>
             </a:pPr>
             <a:r>
-              <a:rPr sz="2600" b="1">
+              <a:rPr sz="4000" b="1">
                 <a:solidFill>
                   <a:srgbClr val="FFFFFF"/>
                 </a:solidFill>
                 <a:latin typeface="맑은 고딕"/>
               </a:rPr>
-              <a:t>SYS 로는 안 된다</a:t>
+              <a:t>9.5</a:t>
             </a:r>
           </a:p>
         </p:txBody>
@@ -7721,8 +8589,8 @@
         </p:nvSpPr>
         <p:spPr>
           <a:xfrm>
-            <a:off x="640080" y="1078992"/>
-            <a:ext cx="10881360" cy="457200"/>
+            <a:off x="822960" y="3017520"/>
+            <a:ext cx="10515600" cy="914400"/>
           </a:xfrm>
           <a:prstGeom prst="rect">
             <a:avLst/>
@@ -7741,27 +8609,71 @@
               </a:spcAft>
             </a:pPr>
             <a:r>
-              <a:rPr sz="1500" b="0">
-                <a:solidFill>
-                  <a:srgbClr val="5A6672"/>
-                </a:solidFill>
-                <a:latin typeface="맑은 고딕"/>
-              </a:rPr>
-              <a:t>ORA-16397</a:t>
-            </a:r>
-          </a:p>
-        </p:txBody>
-      </p:sp>
-      <p:sp>
-        <p:nvSpPr>
-          <p:cNvPr id="5" name="TextBox 4"/>
+              <a:rPr sz="2800" b="1">
+                <a:solidFill>
+                  <a:srgbClr val="FFFFFF"/>
+                </a:solidFill>
+                <a:latin typeface="맑은 고딕"/>
+              </a:rPr>
+              <a:t>데이터 신선도 관리</a:t>
+            </a:r>
+          </a:p>
+        </p:txBody>
+      </p:sp>
+      <p:sp>
+        <p:nvSpPr>
+          <p:cNvPr id="5" name="Rectangle 4"/>
+          <p:cNvSpPr/>
+          <p:nvPr/>
+        </p:nvSpPr>
+        <p:spPr>
+          <a:xfrm>
+            <a:off x="822960" y="4114800"/>
+            <a:ext cx="5486400" cy="54864"/>
+          </a:xfrm>
+          <a:prstGeom prst="rect">
+            <a:avLst/>
+          </a:prstGeom>
+          <a:solidFill>
+            <a:srgbClr val="FFFFFF"/>
+          </a:solidFill>
+          <a:ln>
+            <a:noFill/>
+          </a:ln>
+          <a:effectLst/>
+        </p:spPr>
+        <p:style>
+          <a:lnRef idx="1">
+            <a:schemeClr val="accent1"/>
+          </a:lnRef>
+          <a:fillRef idx="3">
+            <a:schemeClr val="accent1"/>
+          </a:fillRef>
+          <a:effectRef idx="2">
+            <a:schemeClr val="accent1"/>
+          </a:effectRef>
+          <a:fontRef idx="minor">
+            <a:schemeClr val="lt1"/>
+          </a:fontRef>
+        </p:style>
+        <p:txBody>
+          <a:bodyPr rtlCol="0" anchor="ctr"/>
+          <a:lstStyle/>
+          <a:p>
+            <a:pPr algn="ctr"/>
+          </a:p>
+        </p:txBody>
+      </p:sp>
+      <p:sp>
+        <p:nvSpPr>
+          <p:cNvPr id="6" name="TextBox 5"/>
           <p:cNvSpPr txBox="1"/>
           <p:nvPr/>
         </p:nvSpPr>
         <p:spPr>
           <a:xfrm>
-            <a:off x="640080" y="1737360"/>
-            <a:ext cx="10881360" cy="4754880"/>
+            <a:off x="822960" y="4297680"/>
+            <a:ext cx="10058400" cy="2011680"/>
           </a:xfrm>
           <a:prstGeom prst="rect">
             <a:avLst/>
@@ -7776,65 +8688,49 @@
           <a:p>
             <a:pPr algn="l">
               <a:spcAft>
-                <a:spcPts val="1000"/>
-              </a:spcAft>
-            </a:pPr>
-            <a:r>
-              <a:rPr sz="1700" b="0">
-                <a:solidFill>
-                  <a:srgbClr val="222222"/>
-                </a:solidFill>
-                <a:latin typeface="맑은 고딕"/>
-              </a:rPr>
-              <a:t>•  세션 설정은 성공 (`Session altered.`)</a:t>
-            </a:r>
-          </a:p>
-          <a:p>
-            <a:pPr algn="l">
-              <a:spcAft>
-                <a:spcPts val="1000"/>
-              </a:spcAft>
-            </a:pPr>
-            <a:r>
-              <a:rPr sz="1700" b="0">
-                <a:solidFill>
-                  <a:srgbClr val="222222"/>
-                </a:solidFill>
-                <a:latin typeface="맑은 고딕"/>
-              </a:rPr>
-              <a:t>•  실행에서 **ORA-16397**</a:t>
-            </a:r>
-          </a:p>
-          <a:p>
-            <a:pPr algn="l">
-              <a:spcAft>
-                <a:spcPts val="1000"/>
-              </a:spcAft>
-            </a:pPr>
-            <a:r>
-              <a:rPr sz="1700" b="0">
-                <a:solidFill>
-                  <a:srgbClr val="222222"/>
-                </a:solidFill>
-                <a:latin typeface="맑은 고딕"/>
-              </a:rPr>
-              <a:t>•  이유 : SYSDBA 접속은 재인증 경로가 없다</a:t>
-            </a:r>
-          </a:p>
-          <a:p>
-            <a:pPr algn="l">
-              <a:spcAft>
-                <a:spcPts val="1000"/>
-              </a:spcAft>
-            </a:pPr>
-            <a:r>
-              <a:rPr sz="1700" b="0">
-                <a:solidFill>
-                  <a:srgbClr val="222222"/>
-                </a:solidFill>
-                <a:latin typeface="맑은 고딕"/>
-              </a:rPr>
-              <a:t>•  **관리자 계정으로 시험하면 기능이 없다고 오판한다**</a:t>
+                <a:spcPts val="800"/>
+              </a:spcAft>
+            </a:pPr>
+            <a:r>
+              <a:rPr sz="1600" b="0">
+                <a:solidFill>
+                  <a:srgbClr val="FFFFFF"/>
+                </a:solidFill>
+                <a:latin typeface="맑은 고딕"/>
+              </a:rPr>
+              <a:t>•  지연 관찰과 히스토그램</a:t>
+            </a:r>
+          </a:p>
+          <a:p>
+            <a:pPr algn="l">
+              <a:spcAft>
+                <a:spcPts val="800"/>
+              </a:spcAft>
+            </a:pPr>
+            <a:r>
+              <a:rPr sz="1600" b="0">
+                <a:solidFill>
+                  <a:srgbClr val="FFFFFF"/>
+                </a:solidFill>
+                <a:latin typeface="맑은 고딕"/>
+              </a:rPr>
+              <a:t>•  STANDBY_MAX_DATA_DELAY, zero lag</a:t>
+            </a:r>
+          </a:p>
+          <a:p>
+            <a:pPr algn="l">
+              <a:spcAft>
+                <a:spcPts val="800"/>
+              </a:spcAft>
+            </a:pPr>
+            <a:r>
+              <a:rPr sz="1600" b="0">
+                <a:solidFill>
+                  <a:srgbClr val="FFFFFF"/>
+                </a:solidFill>
+                <a:latin typeface="맑은 고딕"/>
+              </a:rPr>
+              <a:t>•  SYNC WITH PRIMARY, 트리거, 서비스</a:t>
             </a:r>
           </a:p>
         </p:txBody>
@@ -7935,7 +8831,7 @@
                 </a:solidFill>
                 <a:latin typeface="맑은 고딕"/>
               </a:rPr>
-              <a:t>학습 목표 (Objectives)</a:t>
+              <a:t>학습 목표</a:t>
             </a:r>
           </a:p>
         </p:txBody>
@@ -7974,7 +8870,7 @@
                 </a:solidFill>
                 <a:latin typeface="맑은 고딕"/>
               </a:rPr>
-              <a:t>•  ADG 가 켜져 있음을 두 표식으로 확인하고 사용 기록을 조회한다.</a:t>
+              <a:t>•  옵션의 범위와 과금 경계를 설명한다</a:t>
             </a:r>
           </a:p>
           <a:p>
@@ -7990,7 +8886,7 @@
                 </a:solidFill>
                 <a:latin typeface="맑은 고딕"/>
               </a:rPr>
-              <a:t>•  Standby 조회가 커밋된 데이터만 보여 준다는 것을 정확한 방법으로 검증한다.</a:t>
+              <a:t>•  실시간 조회를 켜고 끄고 판별한다</a:t>
             </a:r>
           </a:p>
           <a:p>
@@ -8006,7 +8902,7 @@
                 </a:solidFill>
                 <a:latin typeface="맑은 고딕"/>
               </a:rPr>
-              <a:t>•  Standby 에서 되는 작업과 안 되는 작업의 경계를 하나의 기준으로 설명한다.</a:t>
+              <a:t>•  쿼리 SCN으로 읽기 일관성을 설명한다</a:t>
             </a:r>
           </a:p>
           <a:p>
@@ -8022,7 +8918,7 @@
                 </a:solidFill>
                 <a:latin typeface="맑은 고딕"/>
               </a:rPr>
-              <a:t>•  DML 리다이렉션을 세션 수준에서 켜고 동작 조건과 제약을 설명한다.</a:t>
+              <a:t>•  오프로드 가능 작업을 기준으로 가른다</a:t>
             </a:r>
           </a:p>
           <a:p>
@@ -8038,7 +8934,7 @@
                 </a:solidFill>
                 <a:latin typeface="맑은 고딕"/>
               </a:rPr>
-              <a:t>•  `STANDBY_MAX_DATA_DELAY` 로 허용 지연을 정하고 ORA-03172 를 해석한다.</a:t>
+              <a:t>•  지연 한도와 강제 동기화로 신선도를 통제한다</a:t>
             </a:r>
           </a:p>
           <a:p>
@@ -8054,39 +8950,7 @@
                 </a:solidFill>
                 <a:latin typeface="맑은 고딕"/>
               </a:rPr>
-              <a:t>•  `SYNC WITH PRIMARY` 가 실패하는 이유를 보호 모드와 연결해 설명한다.</a:t>
-            </a:r>
-          </a:p>
-          <a:p>
-            <a:pPr algn="l">
-              <a:spcAft>
-                <a:spcPts val="1000"/>
-              </a:spcAft>
-            </a:pPr>
-            <a:r>
-              <a:rPr sz="1600" b="0">
-                <a:solidFill>
-                  <a:srgbClr val="222222"/>
-                </a:solidFill>
-                <a:latin typeface="맑은 고딕"/>
-              </a:rPr>
-              <a:t>•  `V$STANDBY_EVENT_HISTOGRAM` 으로 지연의 분포를 읽는다.</a:t>
-            </a:r>
-          </a:p>
-          <a:p>
-            <a:pPr algn="l">
-              <a:spcAft>
-                <a:spcPts val="1000"/>
-              </a:spcAft>
-            </a:pPr>
-            <a:r>
-              <a:rPr sz="1600" b="0">
-                <a:solidFill>
-                  <a:srgbClr val="222222"/>
-                </a:solidFill>
-                <a:latin typeface="맑은 고딕"/>
-              </a:rPr>
-              <a:t>•  옵션 없이 운영할 때 MOUNTED 로 두고 동기화를 확인하는 방법을 제시한다.</a:t>
+              <a:t>•  임시 테이블·시퀀스·DML 리다이렉션을 쓴다</a:t>
             </a:r>
           </a:p>
         </p:txBody>
@@ -8187,7 +9051,7 @@
                 </a:solidFill>
                 <a:latin typeface="맑은 고딕"/>
               </a:rPr>
-              <a:t>오류 번호가 경로를 알려 준다</a:t>
+              <a:t>지연의 원인과 분포</a:t>
             </a:r>
           </a:p>
         </p:txBody>
@@ -8226,7 +9090,7 @@
                 </a:solidFill>
                 <a:latin typeface="맑은 고딕"/>
               </a:rPr>
-              <a:t>16000 대 16397</a:t>
+              <a:t>순간값보다 분포로 한도를 정한다</a:t>
             </a:r>
           </a:p>
         </p:txBody>
@@ -8265,7 +9129,7 @@
                 </a:solidFill>
                 <a:latin typeface="맑은 고딕"/>
               </a:rPr>
-              <a:t>•  리다이렉션 꺼짐 + DML → **ORA-16000** (시도하지 않았다)</a:t>
+              <a:t>•  원인: CPU·I/O 부족, 네트워크 지연, 대역폭</a:t>
             </a:r>
           </a:p>
           <a:p>
@@ -8281,7 +9145,7 @@
                 </a:solidFill>
                 <a:latin typeface="맑은 고딕"/>
               </a:rPr>
-              <a:t>•  리다이렉션 켜짐 + DDL → **ORA-16000** (대상이 아니다)</a:t>
+              <a:t>•  transport lag와 apply lag로 구간 구분(7.8절)</a:t>
             </a:r>
           </a:p>
           <a:p>
@@ -8297,7 +9161,7 @@
                 </a:solidFill>
                 <a:latin typeface="맑은 고딕"/>
               </a:rPr>
-              <a:t>•  리다이렉션 켜짐 + DML + SYS → **ORA-16397** (시도했다가 실패)</a:t>
+              <a:t>•  V$STANDBY_EVENT_HISTOGRAM: 값별 관측 횟수</a:t>
             </a:r>
           </a:p>
           <a:p>
@@ -8313,7 +9177,7 @@
                 </a:solidFill>
                 <a:latin typeface="맑은 고딕"/>
               </a:rPr>
-              <a:t>•  ORA-16000 이면 설정·대상을, ORA-16397 이면 접속·경로를 본다</a:t>
+              <a:t>•  누적값이므로 시작·끝을 저장해 차이를 냄</a:t>
             </a:r>
           </a:p>
         </p:txBody>
@@ -8414,7 +9278,7 @@
                 </a:solidFill>
                 <a:latin typeface="맑은 고딕"/>
               </a:rPr>
-              <a:t>비용을 이해한다</a:t>
+              <a:t>STANDBY_MAX_DATA_DELAY</a:t>
             </a:r>
           </a:p>
         </p:txBody>
@@ -8453,7 +9317,7 @@
                 </a:solidFill>
                 <a:latin typeface="맑은 고딕"/>
               </a:rPr>
-              <a:t>부하 분산이 아니다</a:t>
+              <a:t>세션이 허용할 지연을 초 단위로</a:t>
             </a:r>
           </a:p>
         </p:txBody>
@@ -8492,7 +9356,7 @@
                 </a:solidFill>
                 <a:latin typeface="맑은 고딕"/>
               </a:rPr>
-              <a:t>•  문장 하나가 **두 번의 네트워크 왕복**</a:t>
+              <a:t>•  ALTER SESSION SET STANDBY_MAX_DATA_DELAY = 5</a:t>
             </a:r>
           </a:p>
           <a:p>
@@ -8508,7 +9372,7 @@
                 </a:solidFill>
                 <a:latin typeface="맑은 고딕"/>
               </a:rPr>
-              <a:t>•  실행은 결국 **Primary** 에서 일어난다 — Primary 부담은 줄지 않는다</a:t>
+              <a:t>•  세션 파라미터, 시스템 수준 설정 없음</a:t>
             </a:r>
           </a:p>
           <a:p>
@@ -8524,7 +9388,7 @@
                 </a:solidFill>
                 <a:latin typeface="맑은 고딕"/>
               </a:rPr>
-              <a:t>•  트랜잭션도 Primary 에 존재한다. 길게 열어 두지 않는다</a:t>
+              <a:t>•  한도 초과 시 ORA-03172, 경고 로그에도 기록</a:t>
             </a:r>
           </a:p>
           <a:p>
@@ -8540,7 +9404,23 @@
                 </a:solidFill>
                 <a:latin typeface="맑은 고딕"/>
               </a:rPr>
-              <a:t>•  적합 : 간헐적이고 작은 갱신 / 부적합 : 대량 DML</a:t>
+              <a:t>•  기본 NONE: 지연과 무관하게 실행</a:t>
+            </a:r>
+          </a:p>
+          <a:p>
+            <a:pPr algn="l">
+              <a:spcAft>
+                <a:spcPts val="1000"/>
+              </a:spcAft>
+            </a:pPr>
+            <a:r>
+              <a:rPr sz="1700" b="0">
+                <a:solidFill>
+                  <a:srgbClr val="222222"/>
+                </a:solidFill>
+                <a:latin typeface="맑은 고딕"/>
+              </a:rPr>
+              <a:t>•  SYS에는 적용되지 않음 (일반 사용자로 검증)</a:t>
             </a:r>
           </a:p>
         </p:txBody>
@@ -8572,7 +9452,7 @@
         <p:spPr>
           <a:xfrm>
             <a:off x="0" y="0"/>
-            <a:ext cx="12191695" cy="6858000"/>
+            <a:ext cx="12191695" cy="1005840"/>
           </a:xfrm>
           <a:prstGeom prst="rect">
             <a:avLst/>
@@ -8615,8 +9495,8 @@
         </p:nvSpPr>
         <p:spPr>
           <a:xfrm>
-            <a:off x="822960" y="2011680"/>
-            <a:ext cx="10515600" cy="1097280"/>
+            <a:off x="548640" y="91440"/>
+            <a:ext cx="10972800" cy="777240"/>
           </a:xfrm>
           <a:prstGeom prst="rect">
             <a:avLst/>
@@ -8635,13 +9515,13 @@
               </a:spcAft>
             </a:pPr>
             <a:r>
-              <a:rPr sz="4000" b="1">
+              <a:rPr sz="2600" b="1">
                 <a:solidFill>
                   <a:srgbClr val="FFFFFF"/>
                 </a:solidFill>
                 <a:latin typeface="맑은 고딕"/>
               </a:rPr>
-              <a:t>9.6</a:t>
+              <a:t>zero lag</a:t>
             </a:r>
           </a:p>
         </p:txBody>
@@ -8654,8 +9534,8 @@
         </p:nvSpPr>
         <p:spPr>
           <a:xfrm>
-            <a:off x="822960" y="3017520"/>
-            <a:ext cx="10515600" cy="914400"/>
+            <a:off x="640080" y="1078992"/>
+            <a:ext cx="10881360" cy="457200"/>
           </a:xfrm>
           <a:prstGeom prst="rect">
             <a:avLst/>
@@ -8674,71 +9554,27 @@
               </a:spcAft>
             </a:pPr>
             <a:r>
-              <a:rPr sz="2800" b="1">
-                <a:solidFill>
-                  <a:srgbClr val="FFFFFF"/>
-                </a:solidFill>
-                <a:latin typeface="맑은 고딕"/>
-              </a:rPr>
-              <a:t>세션이 허용할 지연</a:t>
-            </a:r>
-          </a:p>
-        </p:txBody>
-      </p:sp>
-      <p:sp>
-        <p:nvSpPr>
-          <p:cNvPr id="5" name="Rectangle 4"/>
-          <p:cNvSpPr/>
-          <p:nvPr/>
-        </p:nvSpPr>
-        <p:spPr>
-          <a:xfrm>
-            <a:off x="822960" y="4114800"/>
-            <a:ext cx="5486400" cy="54864"/>
-          </a:xfrm>
-          <a:prstGeom prst="rect">
-            <a:avLst/>
-          </a:prstGeom>
-          <a:solidFill>
-            <a:srgbClr val="FFFFFF"/>
-          </a:solidFill>
-          <a:ln>
-            <a:noFill/>
-          </a:ln>
-          <a:effectLst/>
-        </p:spPr>
-        <p:style>
-          <a:lnRef idx="1">
-            <a:schemeClr val="accent1"/>
-          </a:lnRef>
-          <a:fillRef idx="3">
-            <a:schemeClr val="accent1"/>
-          </a:fillRef>
-          <a:effectRef idx="2">
-            <a:schemeClr val="accent1"/>
-          </a:effectRef>
-          <a:fontRef idx="minor">
-            <a:schemeClr val="lt1"/>
-          </a:fontRef>
-        </p:style>
-        <p:txBody>
-          <a:bodyPr rtlCol="0" anchor="ctr"/>
-          <a:lstStyle/>
-          <a:p>
-            <a:pPr algn="ctr"/>
-          </a:p>
-        </p:txBody>
-      </p:sp>
-      <p:sp>
-        <p:nvSpPr>
-          <p:cNvPr id="6" name="TextBox 5"/>
+              <a:rPr sz="1500" b="0">
+                <a:solidFill>
+                  <a:srgbClr val="5A6672"/>
+                </a:solidFill>
+                <a:latin typeface="맑은 고딕"/>
+              </a:rPr>
+              <a:t>한도 0은 전제 조건이 붙는 별도 모드</a:t>
+            </a:r>
+          </a:p>
+        </p:txBody>
+      </p:sp>
+      <p:sp>
+        <p:nvSpPr>
+          <p:cNvPr id="5" name="TextBox 4"/>
           <p:cNvSpPr txBox="1"/>
           <p:nvPr/>
         </p:nvSpPr>
         <p:spPr>
           <a:xfrm>
-            <a:off x="822960" y="4297680"/>
-            <a:ext cx="10058400" cy="2011680"/>
+            <a:off x="640080" y="1737360"/>
+            <a:ext cx="10881360" cy="4754880"/>
           </a:xfrm>
           <a:prstGeom prst="rect">
             <a:avLst/>
@@ -8753,49 +9589,81 @@
           <a:p>
             <a:pPr algn="l">
               <a:spcAft>
-                <a:spcPts val="800"/>
-              </a:spcAft>
-            </a:pPr>
-            <a:r>
-              <a:rPr sz="1600" b="0">
-                <a:solidFill>
-                  <a:srgbClr val="FFFFFF"/>
-                </a:solidFill>
-                <a:latin typeface="맑은 고딕"/>
-              </a:rPr>
-              <a:t>•  STANDBY_MAX_DATA_DELAY</a:t>
-            </a:r>
-          </a:p>
-          <a:p>
-            <a:pPr algn="l">
-              <a:spcAft>
-                <a:spcPts val="800"/>
-              </a:spcAft>
-            </a:pPr>
-            <a:r>
-              <a:rPr sz="1600" b="0">
-                <a:solidFill>
-                  <a:srgbClr val="FFFFFF"/>
-                </a:solidFill>
-                <a:latin typeface="맑은 고딕"/>
-              </a:rPr>
-              <a:t>•  SYNC WITH PRIMARY</a:t>
-            </a:r>
-          </a:p>
-          <a:p>
-            <a:pPr algn="l">
-              <a:spcAft>
-                <a:spcPts val="800"/>
-              </a:spcAft>
-            </a:pPr>
-            <a:r>
-              <a:rPr sz="1600" b="0">
-                <a:solidFill>
-                  <a:srgbClr val="FFFFFF"/>
-                </a:solidFill>
-                <a:latin typeface="맑은 고딕"/>
-              </a:rPr>
-              <a:t>•  보호 모드가 결정한다</a:t>
+                <a:spcPts val="1000"/>
+              </a:spcAft>
+            </a:pPr>
+            <a:r>
+              <a:rPr sz="1700" b="0">
+                <a:solidFill>
+                  <a:srgbClr val="222222"/>
+                </a:solidFill>
+                <a:latin typeface="맑은 고딕"/>
+              </a:rPr>
+              <a:t>•  쿼리 SCN이 Primary의 현재 SCN에 닿을 때까지 대기</a:t>
+            </a:r>
+          </a:p>
+          <a:p>
+            <a:pPr algn="l">
+              <a:spcAft>
+                <a:spcPts val="1000"/>
+              </a:spcAft>
+            </a:pPr>
+            <a:r>
+              <a:rPr sz="1700" b="0">
+                <a:solidFill>
+                  <a:srgbClr val="222222"/>
+                </a:solidFill>
+                <a:latin typeface="맑은 고딕"/>
+              </a:rPr>
+              <a:t>•  결과가 같은 시점 Primary 결과와 동일</a:t>
+            </a:r>
+          </a:p>
+          <a:p>
+            <a:pPr algn="l">
+              <a:spcAft>
+                <a:spcPts val="1000"/>
+              </a:spcAft>
+            </a:pPr>
+            <a:r>
+              <a:rPr sz="1700" b="0">
+                <a:solidFill>
+                  <a:srgbClr val="222222"/>
+                </a:solidFill>
+                <a:latin typeface="맑은 고딕"/>
+              </a:rPr>
+              <a:t>•  보호 모드: Maximum Availability 이상</a:t>
+            </a:r>
+          </a:p>
+          <a:p>
+            <a:pPr algn="l">
+              <a:spcAft>
+                <a:spcPts val="1000"/>
+              </a:spcAft>
+            </a:pPr>
+            <a:r>
+              <a:rPr sz="1700" b="0">
+                <a:solidFill>
+                  <a:srgbClr val="222222"/>
+                </a:solidFill>
+                <a:latin typeface="맑은 고딕"/>
+              </a:rPr>
+              <a:t>•  해당 Standby로 SYNC 전송</a:t>
+            </a:r>
+          </a:p>
+          <a:p>
+            <a:pPr algn="l">
+              <a:spcAft>
+                <a:spcPts val="1000"/>
+              </a:spcAft>
+            </a:pPr>
+            <a:r>
+              <a:rPr sz="1700" b="0">
+                <a:solidFill>
+                  <a:srgbClr val="222222"/>
+                </a:solidFill>
+                <a:latin typeface="맑은 고딕"/>
+              </a:rPr>
+              <a:t>•  실시간 조회 활성</a:t>
             </a:r>
           </a:p>
         </p:txBody>
@@ -8896,7 +9764,7 @@
                 </a:solidFill>
                 <a:latin typeface="맑은 고딕"/>
               </a:rPr>
-              <a:t>얼마나 오래된 데이터까지 받을 것인가</a:t>
+              <a:t>ALTER SESSION SYNC WITH PRIMARY</a:t>
             </a:r>
           </a:p>
         </p:txBody>
@@ -8935,7 +9803,7 @@
                 </a:solidFill>
                 <a:latin typeface="맑은 고딕"/>
               </a:rPr>
-              <a:t>ORA-03172</a:t>
+              <a:t>세션 시작 시점에 한 번 맞추기</a:t>
             </a:r>
           </a:p>
         </p:txBody>
@@ -8974,7 +9842,7 @@
                 </a:solidFill>
                 <a:latin typeface="맑은 고딕"/>
               </a:rPr>
-              <a:t>•  `ALTER SESSION SET standby_max_data_delay=1` (초 단위)</a:t>
+              <a:t>•  실행 시점의 Primary까지 따라잡을 때까지 대기</a:t>
             </a:r>
           </a:p>
           <a:p>
@@ -8990,7 +9858,7 @@
                 </a:solidFill>
                 <a:latin typeface="맑은 고딕"/>
               </a:rPr>
-              <a:t>•  정상 상태 → 통과</a:t>
+              <a:t>•  돌아온 뒤의 쿼리는 기다리지 않음</a:t>
             </a:r>
           </a:p>
           <a:p>
@@ -9006,7 +9874,7 @@
                 </a:solidFill>
                 <a:latin typeface="맑은 고딕"/>
               </a:rPr>
-              <a:t>•  `=0` → **ORA-03172 of 0 seconds exceeded** (ASYNC 라 항상)</a:t>
+              <a:t>•  적용이 없거나 중간에 취소되면 ORA-03173</a:t>
             </a:r>
           </a:p>
           <a:p>
@@ -9022,7 +9890,7 @@
                 </a:solidFill>
                 <a:latin typeface="맑은 고딕"/>
               </a:rPr>
-              <a:t>•  적용 정지 후 lag 1분 22초 → `=1` 로 **ORA-03172**</a:t>
+              <a:t>•  SYNC 전송 구성을 전제로 사용</a:t>
             </a:r>
           </a:p>
         </p:txBody>
@@ -9123,7 +9991,7 @@
                 </a:solidFill>
                 <a:latin typeface="맑은 고딕"/>
               </a:rPr>
-              <a:t>한도가 있을 때와 없을 때</a:t>
+              <a:t>역할 인식 AFTER LOGON 트리거</a:t>
             </a:r>
           </a:p>
         </p:txBody>
@@ -9162,7 +10030,7 @@
                 </a:solidFill>
                 <a:latin typeface="맑은 고딕"/>
               </a:rPr>
-              <a:t>이 대비가 요점이다</a:t>
+              <a:t>애플리케이션 소스를 고치지 않고 정책 적용</a:t>
             </a:r>
           </a:p>
         </p:txBody>
@@ -9201,7 +10069,7 @@
                 </a:solidFill>
                 <a:latin typeface="맑은 고딕"/>
               </a:rPr>
-              <a:t>•  한도 없음 → 성공하되 **옛 데이터**를 돌려준다</a:t>
+              <a:t>•  SYS_CONTEXT('USERENV','DATABASE_ROLE')</a:t>
             </a:r>
           </a:p>
           <a:p>
@@ -9217,7 +10085,7 @@
                 </a:solidFill>
                 <a:latin typeface="맑은 고딕"/>
               </a:rPr>
-              <a:t>•  한도 있음 → **거부**한다 (ORA-03172)</a:t>
+              <a:t>•  PHYSICAL STANDBY일 때만 ALTER SESSION 실행</a:t>
             </a:r>
           </a:p>
           <a:p>
@@ -9233,7 +10101,7 @@
                 </a:solidFill>
                 <a:latin typeface="맑은 고딕"/>
               </a:rPr>
-              <a:t>•  판단을 **애플리케이션이 하게** 해 준다</a:t>
+              <a:t>•  Primary에서 생성, 리두로 Standby에 전달</a:t>
             </a:r>
           </a:p>
           <a:p>
@@ -9249,7 +10117,23 @@
                 </a:solidFill>
                 <a:latin typeface="맑은 고딕"/>
               </a:rPr>
-              <a:t>•  `try { standby } catch (ORA-03172) { primary }`</a:t>
+              <a:t>•  역할 전환 뒤에도 다시 만들 필요 없음</a:t>
+            </a:r>
+          </a:p>
+          <a:p>
+            <a:pPr algn="l">
+              <a:spcAft>
+                <a:spcPts val="1000"/>
+              </a:spcAft>
+            </a:pPr>
+            <a:r>
+              <a:rPr sz="1700" b="0">
+                <a:solidFill>
+                  <a:srgbClr val="222222"/>
+                </a:solidFill>
+                <a:latin typeface="맑은 고딕"/>
+              </a:rPr>
+              <a:t>•  SYNC WITH PRIMARY 트리거는 전용 연결에서만</a:t>
             </a:r>
           </a:p>
         </p:txBody>
@@ -9350,7 +10234,7 @@
                 </a:solidFill>
                 <a:latin typeface="맑은 고딕"/>
               </a:rPr>
-              <a:t>SYS 는 또 예외다</a:t>
+              <a:t>역할 기반 서비스</a:t>
             </a:r>
           </a:p>
         </p:txBody>
@@ -9389,7 +10273,7 @@
                 </a:solidFill>
                 <a:latin typeface="맑은 고딕"/>
               </a:rPr>
-              <a:t>ORA-03174</a:t>
+              <a:t>서버 이름 대신 서비스 이름으로 접속</a:t>
             </a:r>
           </a:p>
         </p:txBody>
@@ -9428,7 +10312,7 @@
                 </a:solidFill>
                 <a:latin typeface="맑은 고딕"/>
               </a:rPr>
-              <a:t>•  `SYS` 로 설정 → **ORA-03174: does not apply to SYS users**</a:t>
+              <a:t>•  갱신용 sales_rw는 Primary, 조회용 sales_ro는 Standby</a:t>
             </a:r>
           </a:p>
           <a:p>
@@ -9444,7 +10328,7 @@
                 </a:solidFill>
                 <a:latin typeface="맑은 고딕"/>
               </a:rPr>
-              <a:t>•  오류가 나도 **그 뒤의 조회는 정상 수행**된다</a:t>
+              <a:t>•  Grid·Restart: srvctl add service -role</a:t>
             </a:r>
           </a:p>
           <a:p>
@@ -9460,7 +10344,7 @@
                 </a:solidFill>
                 <a:latin typeface="맑은 고딕"/>
               </a:rPr>
-              <a:t>•  관리자가 진단 조회를 할 때 막히면 곤란하기 때문으로 보인다</a:t>
+              <a:t>•  단일 인스턴스: DBMS_SERVICE + 시작 트리거</a:t>
             </a:r>
           </a:p>
           <a:p>
@@ -9476,7 +10360,23 @@
                 </a:solidFill>
                 <a:latin typeface="맑은 고딕"/>
               </a:rPr>
-              <a:t>•  리다이렉션의 ORA-16397 과 **같은 교훈**</a:t>
+              <a:t>•  역할 전환 대비 DB_ROLE_CHANGE 트리거</a:t>
+            </a:r>
+          </a:p>
+          <a:p>
+            <a:pPr algn="l">
+              <a:spcAft>
+                <a:spcPts val="1000"/>
+              </a:spcAft>
+            </a:pPr>
+            <a:r>
+              <a:rPr sz="1700" b="0">
+                <a:solidFill>
+                  <a:srgbClr val="222222"/>
+                </a:solidFill>
+                <a:latin typeface="맑은 고딕"/>
+              </a:rPr>
+              <a:t>•  MOUNTED로 내리면 조회 서비스 접속은 ORA-12514</a:t>
             </a:r>
           </a:p>
         </p:txBody>
@@ -9577,7 +10477,7 @@
                 </a:solidFill>
                 <a:latin typeface="맑은 고딕"/>
               </a:rPr>
-              <a:t>보호 모드가 또 결정한다</a:t>
+              <a:t>사례: 신선도 요구가 다른 두 업무</a:t>
             </a:r>
           </a:p>
         </p:txBody>
@@ -9616,7 +10516,7 @@
                 </a:solidFill>
                 <a:latin typeface="맑은 고딕"/>
               </a:rPr>
-              <a:t>ORA-03173</a:t>
+              <a:t>서비스와 트리거로 정책을 나눈다</a:t>
             </a:r>
           </a:p>
         </p:txBody>
@@ -9655,7 +10555,7 @@
                 </a:solidFill>
                 <a:latin typeface="맑은 고딕"/>
               </a:rPr>
-              <a:t>•  `ALTER SESSION SYNC WITH PRIMARY` → **ORA-03173**</a:t>
+              <a:t>•  대시보드: 5초 한도 트리거, 초과 시 Primary로 재시도</a:t>
             </a:r>
           </a:p>
           <a:p>
@@ -9671,7 +10571,7 @@
                 </a:solidFill>
                 <a:latin typeface="맑은 고딕"/>
               </a:rPr>
-              <a:t>•  동기 전송이 전제다. ASYNC 에서는 시도 자체가 거부된다</a:t>
+              <a:t>•  정산 확인: zero lag 조건의 SYNC Standby에서만</a:t>
             </a:r>
           </a:p>
           <a:p>
@@ -9687,7 +10587,7 @@
                 </a:solidFill>
                 <a:latin typeface="맑은 고딕"/>
               </a:rPr>
-              <a:t>•  8장 : 보호 모드가 **복구 가능성**을 결정했다</a:t>
+              <a:t>•  조건이 없으면 정산은 처음부터 Primary 서비스</a:t>
             </a:r>
           </a:p>
           <a:p>
@@ -9703,7 +10603,7 @@
                 </a:solidFill>
                 <a:latin typeface="맑은 고딕"/>
               </a:rPr>
-              <a:t>•  9장 : 보호 모드가 **조회 신선도 보장**을 결정한다</a:t>
+              <a:t>•  정책 변경은 서비스 단위로 끝냄</a:t>
             </a:r>
           </a:p>
         </p:txBody>
@@ -9804,7 +10704,7 @@
                 </a:solidFill>
                 <a:latin typeface="맑은 고딕"/>
               </a:rPr>
-              <a:t>9.7</a:t>
+              <a:t>9.6</a:t>
             </a:r>
           </a:p>
         </p:txBody>
@@ -9843,7 +10743,7 @@
                 </a:solidFill>
                 <a:latin typeface="맑은 고딕"/>
               </a:rPr>
-              <a:t>지연의 분포</a:t>
+              <a:t>Standby에서의 임시 데이터와 시퀀스</a:t>
             </a:r>
           </a:p>
         </p:txBody>
@@ -9926,7 +10826,7 @@
                 </a:solidFill>
                 <a:latin typeface="맑은 고딕"/>
               </a:rPr>
-              <a:t>•  히스토그램 읽기</a:t>
+              <a:t>•  전역 임시 테이블과 임시 언두</a:t>
             </a:r>
           </a:p>
           <a:p>
@@ -9942,7 +10842,23 @@
                 </a:solidFill>
                 <a:latin typeface="맑은 고딕"/>
               </a:rPr>
-              <a:t>•  모니터링 지표</a:t>
+              <a:t>•  전용 임시 테이블</a:t>
+            </a:r>
+          </a:p>
+          <a:p>
+            <a:pPr algn="l">
+              <a:spcAft>
+                <a:spcPts val="800"/>
+              </a:spcAft>
+            </a:pPr>
+            <a:r>
+              <a:rPr sz="1600" b="0">
+                <a:solidFill>
+                  <a:srgbClr val="FFFFFF"/>
+                </a:solidFill>
+                <a:latin typeface="맑은 고딕"/>
+              </a:rPr>
+              <a:t>•  전역 시퀀스와 세션 시퀀스</a:t>
             </a:r>
           </a:p>
         </p:txBody>
@@ -10043,7 +10959,7 @@
                 </a:solidFill>
                 <a:latin typeface="맑은 고딕"/>
               </a:rPr>
-              <a:t>V$STANDBY_EVENT_HISTOGRAM</a:t>
+              <a:t>GTT의 DML과 임시 언두</a:t>
             </a:r>
           </a:p>
         </p:txBody>
@@ -10082,7 +10998,7 @@
                 </a:solidFill>
                 <a:latin typeface="맑은 고딕"/>
               </a:rPr>
-              <a:t>누적된 분포</a:t>
+              <a:t>언두를 TEMP에 두면 리두가 생기지 않는다</a:t>
             </a:r>
           </a:p>
         </p:txBody>
@@ -10121,7 +11037,7 @@
                 </a:solidFill>
                 <a:latin typeface="맑은 고딕"/>
               </a:rPr>
-              <a:t>•  `TIME` + `UNIT` 이 구간, `COUNT` 가 표본 수</a:t>
+              <a:t>•  GTT 데이터 변경 자체는 리두 없음</a:t>
             </a:r>
           </a:p>
           <a:p>
@@ -10137,7 +11053,7 @@
                 </a:solidFill>
                 <a:latin typeface="맑은 고딕"/>
               </a:rPr>
-              <a:t>•  실측 : 0초 854회, 2초 1회, **`2 minutes` 59회**</a:t>
+              <a:t>•  문제는 언두: 언두 기록이 리두를 만듦</a:t>
             </a:r>
           </a:p>
           <a:p>
@@ -10153,7 +11069,7 @@
                 </a:solidFill>
                 <a:latin typeface="맑은 고딕"/>
               </a:rPr>
-              <a:t>•  2분 정지가 그대로 기록됐다</a:t>
+              <a:t>•  임시 언두: GTT 언두를 임시 테이블스페이스에</a:t>
             </a:r>
           </a:p>
           <a:p>
@@ -10169,7 +11085,23 @@
                 </a:solidFill>
                 <a:latin typeface="맑은 고딕"/>
               </a:rPr>
-              <a:t>•  따라잡는 과정이 3~59초 구간에 1~2회씩 흔적을 남겼다</a:t>
+              <a:t>•  ADG Standby에서는 항상 켜짐(파라미터 무시)</a:t>
+            </a:r>
+          </a:p>
+          <a:p>
+            <a:pPr algn="l">
+              <a:spcAft>
+                <a:spcPts val="1000"/>
+              </a:spcAft>
+            </a:pPr>
+            <a:r>
+              <a:rPr sz="1700" b="0">
+                <a:solidFill>
+                  <a:srgbClr val="222222"/>
+                </a:solidFill>
+                <a:latin typeface="맑은 고딕"/>
+              </a:rPr>
+              <a:t>•  Primary에서 TEMP_UNDO_ENABLED=TRUE로 리두 감소</a:t>
             </a:r>
           </a:p>
         </p:txBody>
@@ -10270,7 +11202,7 @@
                 </a:solidFill>
                 <a:latin typeface="맑은 고딕"/>
               </a:rPr>
-              <a:t>실용 지표 하나</a:t>
+              <a:t>GTT의 생성과 삭제</a:t>
             </a:r>
           </a:p>
         </p:txBody>
@@ -10309,7 +11241,7 @@
                 </a:solidFill>
                 <a:latin typeface="맑은 고딕"/>
               </a:rPr>
-              <a:t>0초가 아닌 구간의 비율</a:t>
+              <a:t>정의는 딕셔너리에 있으므로 Primary에서</a:t>
             </a:r>
           </a:p>
         </p:txBody>
@@ -10348,7 +11280,7 @@
                 </a:solidFill>
                 <a:latin typeface="맑은 고딕"/>
               </a:rPr>
-              <a:t>•  `ROUND(100*SUM(CASE WHEN time&gt;0 THEN count END)/SUM(count),2)`</a:t>
+              <a:t>•  GTT 정의는 Primary에서 만들어 리두로 전달</a:t>
             </a:r>
           </a:p>
           <a:p>
@@ -10364,7 +11296,7 @@
                 </a:solidFill>
                 <a:latin typeface="맑은 고딕"/>
               </a:rPr>
-              <a:t>•  실측 9.3 퍼센트 (표본 1,849 중 0초가 1,677)</a:t>
+              <a:t>•  교재: Standby의 GTT DDL을 Primary로 투명하게 전달</a:t>
             </a:r>
           </a:p>
           <a:p>
@@ -10380,7 +11312,7 @@
                 </a:solidFill>
                 <a:latin typeface="맑은 고딕"/>
               </a:rPr>
-              <a:t>•  **누적값이므로 두 시점의 차이**를 본다</a:t>
+              <a:t>•  숨은 파라미터 _enable_proxy_adg_redirect 사용</a:t>
             </a:r>
           </a:p>
           <a:p>
@@ -10396,7 +11328,23 @@
                 </a:solidFill>
                 <a:latin typeface="맑은 고딕"/>
               </a:rPr>
-              <a:t>•  재기동하면 초기화된다</a:t>
+              <a:t>•  운영 정석은 Primary에서 미리 생성</a:t>
+            </a:r>
+          </a:p>
+          <a:p>
+            <a:pPr algn="l">
+              <a:spcAft>
+                <a:spcPts val="1000"/>
+              </a:spcAft>
+            </a:pPr>
+            <a:r>
+              <a:rPr sz="1700" b="0">
+                <a:solidFill>
+                  <a:srgbClr val="222222"/>
+                </a:solidFill>
+                <a:latin typeface="맑은 고딕"/>
+              </a:rPr>
+              <a:t>•  일반 테이블 DDL은 리다이렉션 대상 아님</a:t>
             </a:r>
           </a:p>
         </p:txBody>
@@ -10497,7 +11445,7 @@
                 </a:solidFill>
                 <a:latin typeface="맑은 고딕"/>
               </a:rPr>
-              <a:t>이 장의 구성 (Agenda)</a:t>
+              <a:t>Agenda</a:t>
             </a:r>
           </a:p>
         </p:txBody>
@@ -10536,7 +11484,7 @@
                 </a:solidFill>
                 <a:latin typeface="맑은 고딕"/>
               </a:rPr>
-              <a:t>•  9.2  무엇이 켜져 있는가</a:t>
+              <a:t>•  9.2  Active Data Guard 옵션과 라이선스</a:t>
             </a:r>
           </a:p>
           <a:p>
@@ -10552,7 +11500,7 @@
                 </a:solidFill>
                 <a:latin typeface="맑은 고딕"/>
               </a:rPr>
-              <a:t>•  9.3  실시간 조회의 일관성</a:t>
+              <a:t>•  9.3  Real-Time Query의 동작</a:t>
             </a:r>
           </a:p>
           <a:p>
@@ -10568,7 +11516,7 @@
                 </a:solidFill>
                 <a:latin typeface="맑은 고딕"/>
               </a:rPr>
-              <a:t>•  9.4  되는 것과 안 되는 것</a:t>
+              <a:t>•  9.4  Standby에서 되는 일과 안 되는 일</a:t>
             </a:r>
           </a:p>
           <a:p>
@@ -10584,7 +11532,7 @@
                 </a:solidFill>
                 <a:latin typeface="맑은 고딕"/>
               </a:rPr>
-              <a:t>•  9.5  DML 리다이렉션</a:t>
+              <a:t>•  9.5  데이터 신선도 관리  /  9.6  임시 데이터와 시퀀스</a:t>
             </a:r>
           </a:p>
           <a:p>
@@ -10600,7 +11548,7 @@
                 </a:solidFill>
                 <a:latin typeface="맑은 고딕"/>
               </a:rPr>
-              <a:t>•  9.6  세션이 허용할 지연을 정한다</a:t>
+              <a:t>•  9.7  DML 리다이렉션  /  9.8  자동 블록 손상 복구와 관련 기능</a:t>
             </a:r>
           </a:p>
           <a:p>
@@ -10616,23 +11564,7 @@
                 </a:solidFill>
                 <a:latin typeface="맑은 고딕"/>
               </a:rPr>
-              <a:t>•  9.7  지연의 분포 읽기</a:t>
-            </a:r>
-          </a:p>
-          <a:p>
-            <a:pPr algn="l">
-              <a:spcAft>
-                <a:spcPts val="1000"/>
-              </a:spcAft>
-            </a:pPr>
-            <a:r>
-              <a:rPr sz="1600" b="0">
-                <a:solidFill>
-                  <a:srgbClr val="222222"/>
-                </a:solidFill>
-                <a:latin typeface="맑은 고딕"/>
-              </a:rPr>
-              <a:t>•  9.8  옵션이 없다면 — MOUNTED 로 두고 확인한다</a:t>
+              <a:t>•  9.9  옵션 없이 쓸 수 있는 대안  /  9.10  운영 시 주의점</a:t>
             </a:r>
           </a:p>
         </p:txBody>
@@ -10733,7 +11665,7 @@
                 </a:solidFill>
                 <a:latin typeface="맑은 고딕"/>
               </a:rPr>
-              <a:t>세 뷰가 서로의 한계를 메운다</a:t>
+              <a:t>전용 임시 테이블 (PTT)</a:t>
             </a:r>
           </a:p>
         </p:txBody>
@@ -10772,7 +11704,7 @@
                 </a:solidFill>
                 <a:latin typeface="맑은 고딕"/>
               </a:rPr>
-              <a:t>조합해서 본다</a:t>
+              <a:t>정의가 메모리에 있어 Standby에서 직접 생성</a:t>
             </a:r>
           </a:p>
         </p:txBody>
@@ -10811,7 +11743,7 @@
                 </a:solidFill>
                 <a:latin typeface="맑은 고딕"/>
               </a:rPr>
-              <a:t>•  `V$MANAGED_STANDBY` — 적용이 도는가 (지연은 모른다)</a:t>
+              <a:t>•  18c 도입, 정의·데이터 모두 세션 전용</a:t>
             </a:r>
           </a:p>
           <a:p>
@@ -10827,7 +11759,7 @@
                 </a:solidFill>
                 <a:latin typeface="맑은 고딕"/>
               </a:rPr>
-              <a:t>•  `V$DATAGUARD_STATS` — 지금 얼마나 뒤처졌나 (십수 초 전 정보)</a:t>
+              <a:t>•  이름은 ORA$PTT_ 접두어로 시작</a:t>
             </a:r>
           </a:p>
           <a:p>
@@ -10843,7 +11775,7 @@
                 </a:solidFill>
                 <a:latin typeface="맑은 고딕"/>
               </a:rPr>
-              <a:t>•  `V$STANDBY_EVENT_HISTOGRAM` — 그동안 안정적이었나 (언제인지 모른다)</a:t>
+              <a:t>•  ON COMMIT DROP DEFINITION (기본, 트랜잭션)</a:t>
             </a:r>
           </a:p>
           <a:p>
@@ -10859,7 +11791,23 @@
                 </a:solidFill>
                 <a:latin typeface="맑은 고딕"/>
               </a:rPr>
-              <a:t>•  **MRP0 을 먼저 본다** — 없으면 나머지는 무의미하다</a:t>
+              <a:t>•  ON COMMIT PRESERVE DEFINITION (세션)</a:t>
+            </a:r>
+          </a:p>
+          <a:p>
+            <a:pPr algn="l">
+              <a:spcAft>
+                <a:spcPts val="1000"/>
+              </a:spcAft>
+            </a:pPr>
+            <a:r>
+              <a:rPr sz="1700" b="0">
+                <a:solidFill>
+                  <a:srgbClr val="222222"/>
+                </a:solidFill>
+                <a:latin typeface="맑은 고딕"/>
+              </a:rPr>
+              <a:t>•  같은 이름, 다른 열 구성을 세션마다 가질 수 있음</a:t>
             </a:r>
           </a:p>
         </p:txBody>
@@ -10960,7 +11908,7 @@
                 </a:solidFill>
                 <a:latin typeface="맑은 고딕"/>
               </a:rPr>
-              <a:t>읽기 분산은 접속만 바꾸는 일이 아니다</a:t>
+              <a:t>시퀀스</a:t>
             </a:r>
           </a:p>
         </p:txBody>
@@ -10999,7 +11947,7 @@
                 </a:solidFill>
                 <a:latin typeface="맑은 고딕"/>
               </a:rPr>
-              <a:t>먼저 분류한다</a:t>
+              <a:t>전역 시퀀스는 범위 할당, 세션 시퀀스는 세션 안에서만</a:t>
             </a:r>
           </a:p>
         </p:txBody>
@@ -11038,7 +11986,7 @@
                 </a:solidFill>
                 <a:latin typeface="맑은 고딕"/>
               </a:rPr>
-              <a:t>•  조회 이력을 남기는 코드 → 리다이렉션으로 메운다</a:t>
+              <a:t>•  CACHE·NOORDER 시퀀스는 Standby에서 NEXTVAL 가능</a:t>
             </a:r>
           </a:p>
           <a:p>
@@ -11054,7 +12002,7 @@
                 </a:solidFill>
                 <a:latin typeface="맑은 고딕"/>
               </a:rPr>
-              <a:t>•  일반 테이블을 임시 저장소로 쓰는 조회 → **GTT 로 바꿔야** 옮길 수 있다</a:t>
+              <a:t>•  Primary가 캐시 크기만큼 범위를 떼어 줌</a:t>
             </a:r>
           </a:p>
           <a:p>
@@ -11070,7 +12018,7 @@
                 </a:solidFill>
                 <a:latin typeface="맑은 고딕"/>
               </a:rPr>
-              <a:t>•  시퀀스로 식별자를 만드는 코드 → 값이 뛴다. 요건을 확인한다</a:t>
+              <a:t>•  번호는 유일하지만 연속적이지 않음</a:t>
             </a:r>
           </a:p>
           <a:p>
@@ -11086,7 +12034,23 @@
                 </a:solidFill>
                 <a:latin typeface="맑은 고딕"/>
               </a:rPr>
-              <a:t>•  순수 조회 → 그대로 옮긴다</a:t>
+              <a:t>•  ORDER·NOCACHE 시퀀스는 사용 불가</a:t>
+            </a:r>
+          </a:p>
+          <a:p>
+            <a:pPr algn="l">
+              <a:spcAft>
+                <a:spcPts val="1000"/>
+              </a:spcAft>
+            </a:pPr>
+            <a:r>
+              <a:rPr sz="1700" b="0">
+                <a:solidFill>
+                  <a:srgbClr val="222222"/>
+                </a:solidFill>
+                <a:latin typeface="맑은 고딕"/>
+              </a:rPr>
+              <a:t>•  CREATE SEQUENCE ... SESSION: 세션 범위, 비영속</a:t>
             </a:r>
           </a:p>
         </p:txBody>
@@ -11118,7 +12082,7 @@
         <p:spPr>
           <a:xfrm>
             <a:off x="0" y="0"/>
-            <a:ext cx="12191695" cy="1005840"/>
+            <a:ext cx="12191695" cy="6858000"/>
           </a:xfrm>
           <a:prstGeom prst="rect">
             <a:avLst/>
@@ -11161,8 +12125,8 @@
         </p:nvSpPr>
         <p:spPr>
           <a:xfrm>
-            <a:off x="548640" y="91440"/>
-            <a:ext cx="10972800" cy="777240"/>
+            <a:off x="822960" y="2011680"/>
+            <a:ext cx="10515600" cy="1097280"/>
           </a:xfrm>
           <a:prstGeom prst="rect">
             <a:avLst/>
@@ -11181,13 +12145,13 @@
               </a:spcAft>
             </a:pPr>
             <a:r>
-              <a:rPr sz="2600" b="1">
+              <a:rPr sz="4000" b="1">
                 <a:solidFill>
                   <a:srgbClr val="FFFFFF"/>
                 </a:solidFill>
                 <a:latin typeface="맑은 고딕"/>
               </a:rPr>
-              <a:t>이 장이 남기는 습관</a:t>
+              <a:t>9.7</a:t>
             </a:r>
           </a:p>
         </p:txBody>
@@ -11200,8 +12164,8 @@
         </p:nvSpPr>
         <p:spPr>
           <a:xfrm>
-            <a:off x="640080" y="1078992"/>
-            <a:ext cx="10881360" cy="457200"/>
+            <a:off x="822960" y="3017520"/>
+            <a:ext cx="10515600" cy="914400"/>
           </a:xfrm>
           <a:prstGeom prst="rect">
             <a:avLst/>
@@ -11220,27 +12184,71 @@
               </a:spcAft>
             </a:pPr>
             <a:r>
-              <a:rPr sz="1500" b="0">
-                <a:solidFill>
-                  <a:srgbClr val="5A6672"/>
-                </a:solidFill>
-                <a:latin typeface="맑은 고딕"/>
-              </a:rPr>
-              <a:t>세 가지</a:t>
-            </a:r>
-          </a:p>
-        </p:txBody>
-      </p:sp>
-      <p:sp>
-        <p:nvSpPr>
-          <p:cNvPr id="5" name="TextBox 4"/>
+              <a:rPr sz="2800" b="1">
+                <a:solidFill>
+                  <a:srgbClr val="FFFFFF"/>
+                </a:solidFill>
+                <a:latin typeface="맑은 고딕"/>
+              </a:rPr>
+              <a:t>DML 리다이렉션</a:t>
+            </a:r>
+          </a:p>
+        </p:txBody>
+      </p:sp>
+      <p:sp>
+        <p:nvSpPr>
+          <p:cNvPr id="5" name="Rectangle 4"/>
+          <p:cNvSpPr/>
+          <p:nvPr/>
+        </p:nvSpPr>
+        <p:spPr>
+          <a:xfrm>
+            <a:off x="822960" y="4114800"/>
+            <a:ext cx="5486400" cy="54864"/>
+          </a:xfrm>
+          <a:prstGeom prst="rect">
+            <a:avLst/>
+          </a:prstGeom>
+          <a:solidFill>
+            <a:srgbClr val="FFFFFF"/>
+          </a:solidFill>
+          <a:ln>
+            <a:noFill/>
+          </a:ln>
+          <a:effectLst/>
+        </p:spPr>
+        <p:style>
+          <a:lnRef idx="1">
+            <a:schemeClr val="accent1"/>
+          </a:lnRef>
+          <a:fillRef idx="3">
+            <a:schemeClr val="accent1"/>
+          </a:fillRef>
+          <a:effectRef idx="2">
+            <a:schemeClr val="accent1"/>
+          </a:effectRef>
+          <a:fontRef idx="minor">
+            <a:schemeClr val="lt1"/>
+          </a:fontRef>
+        </p:style>
+        <p:txBody>
+          <a:bodyPr rtlCol="0" anchor="ctr"/>
+          <a:lstStyle/>
+          <a:p>
+            <a:pPr algn="ctr"/>
+          </a:p>
+        </p:txBody>
+      </p:sp>
+      <p:sp>
+        <p:nvSpPr>
+          <p:cNvPr id="6" name="TextBox 5"/>
           <p:cNvSpPr txBox="1"/>
           <p:nvPr/>
         </p:nvSpPr>
         <p:spPr>
           <a:xfrm>
-            <a:off x="640080" y="1737360"/>
-            <a:ext cx="10881360" cy="4754880"/>
+            <a:off x="822960" y="4297680"/>
+            <a:ext cx="10058400" cy="2011680"/>
           </a:xfrm>
           <a:prstGeom prst="rect">
             <a:avLst/>
@@ -11255,49 +12263,49 @@
           <a:p>
             <a:pPr algn="l">
               <a:spcAft>
-                <a:spcPts val="1000"/>
-              </a:spcAft>
-            </a:pPr>
-            <a:r>
-              <a:rPr sz="1700" b="0">
-                <a:solidFill>
-                  <a:srgbClr val="222222"/>
-                </a:solidFill>
-                <a:latin typeface="맑은 고딕"/>
-              </a:rPr>
-              <a:t>•  기능 검증은 **애플리케이션 계정**으로 한다 — SYS 로 두 번 오판할 뻔했다</a:t>
-            </a:r>
-          </a:p>
-          <a:p>
-            <a:pPr algn="l">
-              <a:spcAft>
-                <a:spcPts val="1000"/>
-              </a:spcAft>
-            </a:pPr>
-            <a:r>
-              <a:rPr sz="1700" b="0">
-                <a:solidFill>
-                  <a:srgbClr val="222222"/>
-                </a:solidFill>
-                <a:latin typeface="맑은 고딕"/>
-              </a:rPr>
-              <a:t>•  예상과 다르면 **측정을 먼저 의심**한다 — SQL*Plus 암묵적 커밋</a:t>
-            </a:r>
-          </a:p>
-          <a:p>
-            <a:pPr algn="l">
-              <a:spcAft>
-                <a:spcPts val="1000"/>
-              </a:spcAft>
-            </a:pPr>
-            <a:r>
-              <a:rPr sz="1700" b="0">
-                <a:solidFill>
-                  <a:srgbClr val="222222"/>
-                </a:solidFill>
-                <a:latin typeface="맑은 고딕"/>
-              </a:rPr>
-              <a:t>•  오류 번호를 **경로 정보**로 읽는다 — 16000 대 16397, 16000 대 13516</a:t>
+                <a:spcPts val="800"/>
+              </a:spcAft>
+            </a:pPr>
+            <a:r>
+              <a:rPr sz="1600" b="0">
+                <a:solidFill>
+                  <a:srgbClr val="FFFFFF"/>
+                </a:solidFill>
+                <a:latin typeface="맑은 고딕"/>
+              </a:rPr>
+              <a:t>•  동작 흐름과 가시성</a:t>
+            </a:r>
+          </a:p>
+          <a:p>
+            <a:pPr algn="l">
+              <a:spcAft>
+                <a:spcPts val="800"/>
+              </a:spcAft>
+            </a:pPr>
+            <a:r>
+              <a:rPr sz="1600" b="0">
+                <a:solidFill>
+                  <a:srgbClr val="FFFFFF"/>
+                </a:solidFill>
+                <a:latin typeface="맑은 고딕"/>
+              </a:rPr>
+              <a:t>•  ADG_REDIRECT_DML, ADG_REDIRECT_PLSQL</a:t>
+            </a:r>
+          </a:p>
+          <a:p>
+            <a:pPr algn="l">
+              <a:spcAft>
+                <a:spcPts val="800"/>
+              </a:spcAft>
+            </a:pPr>
+            <a:r>
+              <a:rPr sz="1600" b="0">
+                <a:solidFill>
+                  <a:srgbClr val="FFFFFF"/>
+                </a:solidFill>
+                <a:latin typeface="맑은 고딕"/>
+              </a:rPr>
+              <a:t>•  제약, 오류 번호, 쓸 곳과 피할 곳</a:t>
             </a:r>
           </a:p>
         </p:txBody>
@@ -11329,7 +12337,7 @@
         <p:spPr>
           <a:xfrm>
             <a:off x="0" y="0"/>
-            <a:ext cx="12191695" cy="6858000"/>
+            <a:ext cx="12191695" cy="1005840"/>
           </a:xfrm>
           <a:prstGeom prst="rect">
             <a:avLst/>
@@ -11372,8 +12380,8 @@
         </p:nvSpPr>
         <p:spPr>
           <a:xfrm>
-            <a:off x="822960" y="2011680"/>
-            <a:ext cx="10515600" cy="1097280"/>
+            <a:off x="548640" y="91440"/>
+            <a:ext cx="10972800" cy="777240"/>
           </a:xfrm>
           <a:prstGeom prst="rect">
             <a:avLst/>
@@ -11392,13 +12400,13 @@
               </a:spcAft>
             </a:pPr>
             <a:r>
-              <a:rPr sz="4000" b="1">
+              <a:rPr sz="2600" b="1">
                 <a:solidFill>
                   <a:srgbClr val="FFFFFF"/>
                 </a:solidFill>
                 <a:latin typeface="맑은 고딕"/>
               </a:rPr>
-              <a:t>9.8</a:t>
+              <a:t>동작 흐름</a:t>
             </a:r>
           </a:p>
         </p:txBody>
@@ -11411,8 +12419,8 @@
         </p:nvSpPr>
         <p:spPr>
           <a:xfrm>
-            <a:off x="822960" y="3017520"/>
-            <a:ext cx="10515600" cy="914400"/>
+            <a:off x="640080" y="1078992"/>
+            <a:ext cx="10881360" cy="457200"/>
           </a:xfrm>
           <a:prstGeom prst="rect">
             <a:avLst/>
@@ -11431,71 +12439,27 @@
               </a:spcAft>
             </a:pPr>
             <a:r>
-              <a:rPr sz="2800" b="1">
-                <a:solidFill>
-                  <a:srgbClr val="FFFFFF"/>
-                </a:solidFill>
-                <a:latin typeface="맑은 고딕"/>
-              </a:rPr>
-              <a:t>옵션이 없다면</a:t>
-            </a:r>
-          </a:p>
-        </p:txBody>
-      </p:sp>
-      <p:sp>
-        <p:nvSpPr>
-          <p:cNvPr id="5" name="Rectangle 4"/>
-          <p:cNvSpPr/>
-          <p:nvPr/>
-        </p:nvSpPr>
-        <p:spPr>
-          <a:xfrm>
-            <a:off x="822960" y="4114800"/>
-            <a:ext cx="5486400" cy="54864"/>
-          </a:xfrm>
-          <a:prstGeom prst="rect">
-            <a:avLst/>
-          </a:prstGeom>
-          <a:solidFill>
-            <a:srgbClr val="FFFFFF"/>
-          </a:solidFill>
-          <a:ln>
-            <a:noFill/>
-          </a:ln>
-          <a:effectLst/>
-        </p:spPr>
-        <p:style>
-          <a:lnRef idx="1">
-            <a:schemeClr val="accent1"/>
-          </a:lnRef>
-          <a:fillRef idx="3">
-            <a:schemeClr val="accent1"/>
-          </a:fillRef>
-          <a:effectRef idx="2">
-            <a:schemeClr val="accent1"/>
-          </a:effectRef>
-          <a:fontRef idx="minor">
-            <a:schemeClr val="lt1"/>
-          </a:fontRef>
-        </p:style>
-        <p:txBody>
-          <a:bodyPr rtlCol="0" anchor="ctr"/>
-          <a:lstStyle/>
-          <a:p>
-            <a:pPr algn="ctr"/>
-          </a:p>
-        </p:txBody>
-      </p:sp>
-      <p:sp>
-        <p:nvSpPr>
-          <p:cNvPr id="6" name="TextBox 5"/>
+              <a:rPr sz="1500" b="0">
+                <a:solidFill>
+                  <a:srgbClr val="5A6672"/>
+                </a:solidFill>
+                <a:latin typeface="맑은 고딕"/>
+              </a:rPr>
+              <a:t>기록은 전부 Primary에서 일어난다</a:t>
+            </a:r>
+          </a:p>
+        </p:txBody>
+      </p:sp>
+      <p:sp>
+        <p:nvSpPr>
+          <p:cNvPr id="5" name="TextBox 4"/>
           <p:cNvSpPr txBox="1"/>
           <p:nvPr/>
         </p:nvSpPr>
         <p:spPr>
           <a:xfrm>
-            <a:off x="822960" y="4297680"/>
-            <a:ext cx="10058400" cy="2011680"/>
+            <a:off x="640080" y="1737360"/>
+            <a:ext cx="10881360" cy="4754880"/>
           </a:xfrm>
           <a:prstGeom prst="rect">
             <a:avLst/>
@@ -11510,33 +12474,81 @@
           <a:p>
             <a:pPr algn="l">
               <a:spcAft>
-                <a:spcPts val="800"/>
-              </a:spcAft>
-            </a:pPr>
-            <a:r>
-              <a:rPr sz="1600" b="0">
-                <a:solidFill>
-                  <a:srgbClr val="FFFFFF"/>
-                </a:solidFill>
-                <a:latin typeface="맑은 고딕"/>
-              </a:rPr>
-              <a:t>•  MOUNTED 로 두면 적용만 남는다</a:t>
-            </a:r>
-          </a:p>
-          <a:p>
-            <a:pPr algn="l">
-              <a:spcAft>
-                <a:spcPts val="800"/>
-              </a:spcAft>
-            </a:pPr>
-            <a:r>
-              <a:rPr sz="1600" b="0">
-                <a:solidFill>
-                  <a:srgbClr val="FFFFFF"/>
-                </a:solidFill>
-                <a:latin typeface="맑은 고딕"/>
-              </a:rPr>
-              <a:t>•  Primary 에서 읽는 두 열</a:t>
+                <a:spcPts val="1000"/>
+              </a:spcAft>
+            </a:pPr>
+            <a:r>
+              <a:rPr sz="1700" b="0">
+                <a:solidFill>
+                  <a:srgbClr val="222222"/>
+                </a:solidFill>
+                <a:latin typeface="맑은 고딕"/>
+              </a:rPr>
+              <a:t>•  1 Standby 세션이 DML 실행</a:t>
+            </a:r>
+          </a:p>
+          <a:p>
+            <a:pPr algn="l">
+              <a:spcAft>
+                <a:spcPts val="1000"/>
+              </a:spcAft>
+            </a:pPr>
+            <a:r>
+              <a:rPr sz="1700" b="0">
+                <a:solidFill>
+                  <a:srgbClr val="222222"/>
+                </a:solidFill>
+                <a:latin typeface="맑은 고딕"/>
+              </a:rPr>
+              <a:t>•  2 Standby가 Primary로 연결해 문장 전달</a:t>
+            </a:r>
+          </a:p>
+          <a:p>
+            <a:pPr algn="l">
+              <a:spcAft>
+                <a:spcPts val="1000"/>
+              </a:spcAft>
+            </a:pPr>
+            <a:r>
+              <a:rPr sz="1700" b="0">
+                <a:solidFill>
+                  <a:srgbClr val="222222"/>
+                </a:solidFill>
+                <a:latin typeface="맑은 고딕"/>
+              </a:rPr>
+              <a:t>•  3 Primary에서 실행, 리두 생성</a:t>
+            </a:r>
+          </a:p>
+          <a:p>
+            <a:pPr algn="l">
+              <a:spcAft>
+                <a:spcPts val="1000"/>
+              </a:spcAft>
+            </a:pPr>
+            <a:r>
+              <a:rPr sz="1700" b="0">
+                <a:solidFill>
+                  <a:srgbClr val="222222"/>
+                </a:solidFill>
+                <a:latin typeface="맑은 고딕"/>
+              </a:rPr>
+              <a:t>•  4 리두가 평소 경로로 Standby에 적용</a:t>
+            </a:r>
+          </a:p>
+          <a:p>
+            <a:pPr algn="l">
+              <a:spcAft>
+                <a:spcPts val="1000"/>
+              </a:spcAft>
+            </a:pPr>
+            <a:r>
+              <a:rPr sz="1700" b="0">
+                <a:solidFill>
+                  <a:srgbClr val="222222"/>
+                </a:solidFill>
+                <a:latin typeface="맑은 고딕"/>
+              </a:rPr>
+              <a:t>•  5 적용 후 세션에 제어 반환</a:t>
             </a:r>
           </a:p>
         </p:txBody>
@@ -11637,7 +12649,7 @@
                 </a:solidFill>
                 <a:latin typeface="맑은 고딕"/>
               </a:rPr>
-              <a:t>닫아도 적용은 돈다</a:t>
+              <a:t>ADG_REDIRECT_DML</a:t>
             </a:r>
           </a:p>
         </p:txBody>
@@ -11676,7 +12688,7 @@
                 </a:solidFill>
                 <a:latin typeface="맑은 고딕"/>
               </a:rPr>
-              <a:t>MOUNTED 의 실측</a:t>
+              <a:t>시스템 수준과 세션 수준</a:t>
             </a:r>
           </a:p>
         </p:txBody>
@@ -11715,7 +12727,7 @@
                 </a:solidFill>
                 <a:latin typeface="맑은 고딕"/>
               </a:rPr>
-              <a:t>•  `OPEN_MODE` **MOUNTED**, `MRP0` 은 `APPLYING_LOG` 그대로</a:t>
+              <a:t>•  초기화 파라미터, 기본값 FALSE</a:t>
             </a:r>
           </a:p>
           <a:p>
@@ -11731,7 +12743,7 @@
                 </a:solidFill>
                 <a:latin typeface="맑은 고딕"/>
               </a:rPr>
-              <a:t>•  사용자 표 조회 → **`ORA-01219`** (9.4 의 `ORA-16000` 과 다르다)</a:t>
+              <a:t>•  ALTER SESSION ENABLE ADG_REDIRECT_DML</a:t>
             </a:r>
           </a:p>
           <a:p>
@@ -11747,7 +12759,7 @@
                 </a:solidFill>
                 <a:latin typeface="맑은 고딕"/>
               </a:rPr>
-              <a:t>•  메시지의 뒷부분 — **"fixed tables or views only"**</a:t>
+              <a:t>•  세션 설정이 시스템 설정보다 우선</a:t>
             </a:r>
           </a:p>
           <a:p>
@@ -11763,7 +12775,23 @@
                 </a:solidFill>
                 <a:latin typeface="맑은 고딕"/>
               </a:rPr>
-              <a:t>•  그래서 `V$DATAGUARD_STATS` 는 **닫혀 있어도 값이 나온다**</a:t>
+              <a:t>•  세션 수준 상태는 V$PARAMETER에 안 보임</a:t>
+            </a:r>
+          </a:p>
+          <a:p>
+            <a:pPr algn="l">
+              <a:spcAft>
+                <a:spcPts val="1000"/>
+              </a:spcAft>
+            </a:pPr>
+            <a:r>
+              <a:rPr sz="1700" b="0">
+                <a:solidFill>
+                  <a:srgbClr val="222222"/>
+                </a:solidFill>
+                <a:latin typeface="맑은 고딕"/>
+              </a:rPr>
+              <a:t>•  도입 초기에는 세션 수준 권장</a:t>
             </a:r>
           </a:p>
         </p:txBody>
@@ -11864,7 +12892,7 @@
                 </a:solidFill>
                 <a:latin typeface="맑은 고딕"/>
               </a:rPr>
-              <a:t>Primary 에서 읽는 두 열</a:t>
+              <a:t>ADG_REDIRECT_PLSQL</a:t>
             </a:r>
           </a:p>
         </p:txBody>
@@ -11903,7 +12931,7 @@
                 </a:solidFill>
                 <a:latin typeface="맑은 고딕"/>
               </a:rPr>
-              <a:t>WITH QUERY 가 표식이다</a:t>
+              <a:t>호출을 통째로 Primary로</a:t>
             </a:r>
           </a:p>
         </p:txBody>
@@ -11942,7 +12970,7 @@
                 </a:solidFill>
                 <a:latin typeface="맑은 고딕"/>
               </a:rPr>
-              <a:t>•  `DATABASE_MODE` — `OPEN_READ-ONLY` ↔ **`MOUNTED-STANDBY`**</a:t>
+              <a:t>•  ALTER SESSION ENABLE ADG_REDIRECT_PLSQL</a:t>
             </a:r>
           </a:p>
           <a:p>
@@ -11958,7 +12986,7 @@
                 </a:solidFill>
                 <a:latin typeface="맑은 고딕"/>
               </a:rPr>
-              <a:t>•  `RECOVERY_MODE` — `... REAL TIME APPLY` **`WITH QUERY`** 유무</a:t>
+              <a:t>•  세션 수준에서만 설정 가능</a:t>
             </a:r>
           </a:p>
           <a:p>
@@ -11974,7 +13002,7 @@
                 </a:solidFill>
                 <a:latin typeface="맑은 고딕"/>
               </a:rPr>
-              <a:t>•  `APPLIED_SEQ#` 는 닫은 뒤에도 올라간다 (8 → 10)</a:t>
+              <a:t>•  바인드 변수를 쓰는 블록은 대상 아님</a:t>
             </a:r>
           </a:p>
           <a:p>
@@ -11990,7 +13018,7 @@
                 </a:solidFill>
                 <a:latin typeface="맑은 고딕"/>
               </a:rPr>
-              <a:t>•  `V$DATAGUARD_STATS` 는 Primary 에서 **0행** — 이 방법은 성립하지 않는다</a:t>
+              <a:t>•  블록 안 DML 리다이렉션과 구분: 왕복이 적음</a:t>
             </a:r>
           </a:p>
         </p:txBody>
@@ -12091,7 +13119,7 @@
                 </a:solidFill>
                 <a:latin typeface="맑은 고딕"/>
               </a:rPr>
-              <a:t>퀴즈 (Quiz)</a:t>
+              <a:t>제약과 오류 번호</a:t>
             </a:r>
           </a:p>
         </p:txBody>
@@ -12104,8 +13132,8 @@
         </p:nvSpPr>
         <p:spPr>
           <a:xfrm>
-            <a:off x="640080" y="1371600"/>
-            <a:ext cx="10881360" cy="5120640"/>
+            <a:off x="640080" y="1078992"/>
+            <a:ext cx="10881360" cy="457200"/>
           </a:xfrm>
           <a:prstGeom prst="rect">
             <a:avLst/>
@@ -12120,97 +13148,120 @@
           <a:p>
             <a:pPr algn="l">
               <a:spcAft>
-                <a:spcPts val="1000"/>
-              </a:spcAft>
-            </a:pPr>
-            <a:r>
-              <a:rPr sz="1600" b="0">
-                <a:solidFill>
-                  <a:srgbClr val="222222"/>
-                </a:solidFill>
-                <a:latin typeface="맑은 고딕"/>
-              </a:rPr>
-              <a:t>•  Q1. Standby 에서 커밋되지 않은 데이터가 보이지 않는 이유를 리두·UNDO 적용과 연결해 설명하라.</a:t>
-            </a:r>
-          </a:p>
-          <a:p>
-            <a:pPr algn="l">
-              <a:spcAft>
-                <a:spcPts val="1000"/>
-              </a:spcAft>
-            </a:pPr>
-            <a:r>
-              <a:rPr sz="1600" b="0">
-                <a:solidFill>
-                  <a:srgbClr val="222222"/>
-                </a:solidFill>
-                <a:latin typeface="맑은 고딕"/>
-              </a:rPr>
-              <a:t>•  Q2. 첫 측정이 잘못된 결론을 낼 뻔한 원인은 무엇이며, 어떻게 바로잡았는가?</a:t>
-            </a:r>
-          </a:p>
-          <a:p>
-            <a:pPr algn="l">
-              <a:spcAft>
-                <a:spcPts val="1000"/>
-              </a:spcAft>
-            </a:pPr>
-            <a:r>
-              <a:rPr sz="1600" b="0">
-                <a:solidFill>
-                  <a:srgbClr val="222222"/>
-                </a:solidFill>
-                <a:latin typeface="맑은 고딕"/>
-              </a:rPr>
-              <a:t>•  Q3. Standby 에서 되는 작업과 안 되는 작업을 가르는 기준은 무엇인가?</a:t>
-            </a:r>
-          </a:p>
-          <a:p>
-            <a:pPr algn="l">
-              <a:spcAft>
-                <a:spcPts val="1000"/>
-              </a:spcAft>
-            </a:pPr>
-            <a:r>
-              <a:rPr sz="1600" b="0">
-                <a:solidFill>
-                  <a:srgbClr val="222222"/>
-                </a:solidFill>
-                <a:latin typeface="맑은 고딕"/>
-              </a:rPr>
-              <a:t>•  Q4. Standby 에서 얻은 시퀀스 값이 Primary 와 연속되지 않는 이유와 실무적 함의는?</a:t>
-            </a:r>
-          </a:p>
-          <a:p>
-            <a:pPr algn="l">
-              <a:spcAft>
-                <a:spcPts val="1000"/>
-              </a:spcAft>
-            </a:pPr>
-            <a:r>
-              <a:rPr sz="1600" b="0">
-                <a:solidFill>
-                  <a:srgbClr val="222222"/>
-                </a:solidFill>
-                <a:latin typeface="맑은 고딕"/>
-              </a:rPr>
-              <a:t>•  Q5. DML 리다이렉션이 `SYS` 로 실패하는 이유와, 그것이 기능 검증에 주는 교훈은?</a:t>
-            </a:r>
-          </a:p>
-          <a:p>
-            <a:pPr algn="l">
-              <a:spcAft>
-                <a:spcPts val="1000"/>
-              </a:spcAft>
-            </a:pPr>
-            <a:r>
-              <a:rPr sz="1600" b="0">
-                <a:solidFill>
-                  <a:srgbClr val="222222"/>
-                </a:solidFill>
-                <a:latin typeface="맑은 고딕"/>
-              </a:rPr>
-              <a:t>•  Q6. ASYNC 구성에서 `SYNC WITH PRIMARY` 가 거부되는 이유를 보호 모드와 연결해 설명하라.</a:t>
+                <a:spcPts val="600"/>
+              </a:spcAft>
+            </a:pPr>
+            <a:r>
+              <a:rPr sz="1500" b="0">
+                <a:solidFill>
+                  <a:srgbClr val="5A6672"/>
+                </a:solidFill>
+                <a:latin typeface="맑은 고딕"/>
+              </a:rPr>
+              <a:t>16000은 미시도, 16397은 시도 후 실패</a:t>
+            </a:r>
+          </a:p>
+        </p:txBody>
+      </p:sp>
+      <p:sp>
+        <p:nvSpPr>
+          <p:cNvPr id="5" name="TextBox 4"/>
+          <p:cNvSpPr txBox="1"/>
+          <p:nvPr/>
+        </p:nvSpPr>
+        <p:spPr>
+          <a:xfrm>
+            <a:off x="640080" y="1737360"/>
+            <a:ext cx="10881360" cy="4754880"/>
+          </a:xfrm>
+          <a:prstGeom prst="rect">
+            <a:avLst/>
+          </a:prstGeom>
+          <a:noFill/>
+        </p:spPr>
+        <p:txBody>
+          <a:bodyPr wrap="square">
+            <a:spAutoFit/>
+          </a:bodyPr>
+          <a:lstStyle/>
+          <a:p>
+            <a:pPr algn="l">
+              <a:spcAft>
+                <a:spcPts val="1000"/>
+              </a:spcAft>
+            </a:pPr>
+            <a:r>
+              <a:rPr sz="1700" b="0">
+                <a:solidFill>
+                  <a:srgbClr val="222222"/>
+                </a:solidFill>
+                <a:latin typeface="맑은 고딕"/>
+              </a:rPr>
+              <a:t>•  Primary로 새 연결 후 현재 사용자로 재인증</a:t>
+            </a:r>
+          </a:p>
+          <a:p>
+            <a:pPr algn="l">
+              <a:spcAft>
+                <a:spcPts val="1000"/>
+              </a:spcAft>
+            </a:pPr>
+            <a:r>
+              <a:rPr sz="1700" b="0">
+                <a:solidFill>
+                  <a:srgbClr val="222222"/>
+                </a:solidFill>
+                <a:latin typeface="맑은 고딕"/>
+              </a:rPr>
+              <a:t>•  SYS(SYSDBA)는 재인증 불가 → ORA-16397</a:t>
+            </a:r>
+          </a:p>
+          <a:p>
+            <a:pPr algn="l">
+              <a:spcAft>
+                <a:spcPts val="1000"/>
+              </a:spcAft>
+            </a:pPr>
+            <a:r>
+              <a:rPr sz="1700" b="0">
+                <a:solidFill>
+                  <a:srgbClr val="222222"/>
+                </a:solidFill>
+                <a:latin typeface="맑은 고딕"/>
+              </a:rPr>
+              <a:t>•  Standby의 LOG_ARCHIVE_DEST_n 접속 정보 사용</a:t>
+            </a:r>
+          </a:p>
+          <a:p>
+            <a:pPr algn="l">
+              <a:spcAft>
+                <a:spcPts val="1000"/>
+              </a:spcAft>
+            </a:pPr>
+            <a:r>
+              <a:rPr sz="1700" b="0">
+                <a:solidFill>
+                  <a:srgbClr val="222222"/>
+                </a:solidFill>
+                <a:latin typeface="맑은 고딕"/>
+              </a:rPr>
+              <a:t>•  XA 분산 트랜잭션, 일반 DDL은 대상 아님</a:t>
+            </a:r>
+          </a:p>
+          <a:p>
+            <a:pPr algn="l">
+              <a:spcAft>
+                <a:spcPts val="1000"/>
+              </a:spcAft>
+            </a:pPr>
+            <a:r>
+              <a:rPr sz="1700" b="0">
+                <a:solidFill>
+                  <a:srgbClr val="222222"/>
+                </a:solidFill>
+                <a:latin typeface="맑은 고딕"/>
+              </a:rPr>
+              <a:t>•  16397 메시지는 원인을 말해 주지 않음</a:t>
             </a:r>
           </a:p>
         </p:txBody>
@@ -12311,7 +13362,7 @@
                 </a:solidFill>
                 <a:latin typeface="맑은 고딕"/>
               </a:rPr>
-              <a:t>요약 (Summary)</a:t>
+              <a:t>쓸 곳과 피할 곳</a:t>
             </a:r>
           </a:p>
         </p:txBody>
@@ -12324,8 +13375,8 @@
         </p:nvSpPr>
         <p:spPr>
           <a:xfrm>
-            <a:off x="640080" y="1371600"/>
-            <a:ext cx="10881360" cy="5120640"/>
+            <a:off x="640080" y="1078992"/>
+            <a:ext cx="10881360" cy="457200"/>
           </a:xfrm>
           <a:prstGeom prst="rect">
             <a:avLst/>
@@ -12340,353 +13391,120 @@
           <a:p>
             <a:pPr algn="l">
               <a:spcAft>
-                <a:spcPts val="1000"/>
-              </a:spcAft>
-            </a:pPr>
-            <a:r>
-              <a:rPr sz="1600" b="0">
-                <a:solidFill>
-                  <a:srgbClr val="222222"/>
-                </a:solidFill>
-                <a:latin typeface="맑은 고딕"/>
-              </a:rPr>
-              <a:t>•  ADG 의 표식은 `OPEN_MODE = READ ONLY WITH APPLY` 와 `RECOVERY_MODE = MANAGED REAL TIME APPLY` 두 가지다.</a:t>
-            </a:r>
-          </a:p>
-          <a:p>
-            <a:pPr algn="l">
-              <a:spcAft>
-                <a:spcPts val="1000"/>
-              </a:spcAft>
-            </a:pPr>
-            <a:r>
-              <a:rPr sz="1600" b="0">
-                <a:solidFill>
-                  <a:srgbClr val="222222"/>
-                </a:solidFill>
-                <a:latin typeface="맑은 고딕"/>
-              </a:rPr>
-              <a:t>•  기능 사용 통계는 `CDB_` 뷰의 CON_ID 3 에만 있고 `DETECTED_USAGES` 는 0이었다. 라이선스 근거로는 부족하다.</a:t>
-            </a:r>
-          </a:p>
-          <a:p>
-            <a:pPr algn="l">
-              <a:spcAft>
-                <a:spcPts val="1000"/>
-              </a:spcAft>
-            </a:pPr>
-            <a:r>
-              <a:rPr sz="1600" b="0">
-                <a:solidFill>
-                  <a:srgbClr val="222222"/>
-                </a:solidFill>
-                <a:latin typeface="맑은 고딕"/>
-              </a:rPr>
-              <a:t>•  MOUNTED 로만 두면 ADG 옵션이 필요 없다. 여는 순간부터 옵션의 영역이다.</a:t>
-            </a:r>
-          </a:p>
-          <a:p>
-            <a:pPr algn="l">
-              <a:spcAft>
-                <a:spcPts val="1000"/>
-              </a:spcAft>
-            </a:pPr>
-            <a:r>
-              <a:rPr sz="1600" b="0">
-                <a:solidFill>
-                  <a:srgbClr val="222222"/>
-                </a:solidFill>
-                <a:latin typeface="맑은 고딕"/>
-              </a:rPr>
-              <a:t>•  Standby 조회는 **커밋된 데이터만** 보여 준다. 리두와 함께 UNDO 도 적용되기 때문이다.</a:t>
-            </a:r>
-          </a:p>
-          <a:p>
-            <a:pPr algn="l">
-              <a:spcAft>
-                <a:spcPts val="1000"/>
-              </a:spcAft>
-            </a:pPr>
-            <a:r>
-              <a:rPr sz="1600" b="0">
-                <a:solidFill>
-                  <a:srgbClr val="222222"/>
-                </a:solidFill>
-                <a:latin typeface="맑은 고딕"/>
-              </a:rPr>
-              <a:t>•  SQL*Plus 는 `EXIT` 시 암묵적으로 커밋한다. 이 때문에 첫 측정이 잘못된 결론을 낼 뻔했다.</a:t>
-            </a:r>
-          </a:p>
-          <a:p>
-            <a:pPr algn="l">
-              <a:spcAft>
-                <a:spcPts val="1000"/>
-              </a:spcAft>
-            </a:pPr>
-            <a:r>
-              <a:rPr sz="1600" b="0">
-                <a:solidFill>
-                  <a:srgbClr val="222222"/>
-                </a:solidFill>
-                <a:latin typeface="맑은 고딕"/>
-              </a:rPr>
-              <a:t>•  쓰기는 모두 **ORA-16000** 이다. `INSERT`·`UPDATE`·DDL 이 같은 오류다.</a:t>
-            </a:r>
-          </a:p>
-          <a:p>
-            <a:pPr algn="l">
-              <a:spcAft>
-                <a:spcPts val="1000"/>
-              </a:spcAft>
-            </a:pPr>
-            <a:r>
-              <a:rPr sz="1600" b="0">
-                <a:solidFill>
-                  <a:srgbClr val="222222"/>
-                </a:solidFill>
-                <a:latin typeface="맑은 고딕"/>
-              </a:rPr>
-              <a:t>•  정렬은 된다. 실측 7만 행 정렬에 TEMP 3MB 씩 사용됐다. 보고서 조회를 옮기는 근거다.</a:t>
-            </a:r>
-          </a:p>
-          <a:p>
-            <a:pPr algn="l">
-              <a:spcAft>
-                <a:spcPts val="1000"/>
-              </a:spcAft>
-            </a:pPr>
-            <a:r>
-              <a:rPr sz="1600" b="0">
-                <a:solidFill>
-                  <a:srgbClr val="222222"/>
-                </a:solidFill>
-                <a:latin typeface="맑은 고딕"/>
-              </a:rPr>
-              <a:t>•  `EXPLAIN PLAN` 과 GTT `INSERT` 도 된다. 데이터가 임시 테이블스페이스에 있기 때문이다.</a:t>
-            </a:r>
-          </a:p>
-          <a:p>
-            <a:pPr algn="l">
-              <a:spcAft>
-                <a:spcPts val="1000"/>
-              </a:spcAft>
-            </a:pPr>
-            <a:r>
-              <a:rPr sz="1600" b="0">
-                <a:solidFill>
-                  <a:srgbClr val="222222"/>
-                </a:solidFill>
-                <a:latin typeface="맑은 고딕"/>
-              </a:rPr>
-              <a:t>•  시퀀스도 되지만 **값이 뛴다.** Primary 에서 1이었던 시퀀스가 Standby 에서 21을 돌려주었다.</a:t>
-            </a:r>
-          </a:p>
-          <a:p>
-            <a:pPr algn="l">
-              <a:spcAft>
-                <a:spcPts val="1000"/>
-              </a:spcAft>
-            </a:pPr>
-            <a:r>
-              <a:rPr sz="1600" b="0">
-                <a:solidFill>
-                  <a:srgbClr val="222222"/>
-                </a:solidFill>
-                <a:latin typeface="맑은 고딕"/>
-              </a:rPr>
-              <a:t>•  통계 수집은 ORA-16000, AWR 은 전용 오류 **ORA-13516**. `V$` 뷰 조회는 자유롭다.</a:t>
-            </a:r>
-          </a:p>
-          <a:p>
-            <a:pPr algn="l">
-              <a:spcAft>
-                <a:spcPts val="1000"/>
-              </a:spcAft>
-            </a:pPr>
-            <a:r>
-              <a:rPr sz="1600" b="0">
-                <a:solidFill>
-                  <a:srgbClr val="222222"/>
-                </a:solidFill>
-                <a:latin typeface="맑은 고딕"/>
-              </a:rPr>
-              <a:t>•  경계를 가르는 기준은 **영구 데이터 파일이나 딕셔너리를 바꾸는가** 하나다.</a:t>
-            </a:r>
-          </a:p>
-          <a:p>
-            <a:pPr algn="l">
-              <a:spcAft>
-                <a:spcPts val="1000"/>
-              </a:spcAft>
-            </a:pPr>
-            <a:r>
-              <a:rPr sz="1600" b="0">
-                <a:solidFill>
-                  <a:srgbClr val="222222"/>
-                </a:solidFill>
-                <a:latin typeface="맑은 고딕"/>
-              </a:rPr>
-              <a:t>•  DML 리다이렉션은 일반 사용자로 `INSERT`·`UPDATE`·`DELETE` 가 모두 성공하며 Primary 에 반영된다.</a:t>
-            </a:r>
-          </a:p>
-          <a:p>
-            <a:pPr algn="l">
-              <a:spcAft>
-                <a:spcPts val="1000"/>
-              </a:spcAft>
-            </a:pPr>
-            <a:r>
-              <a:rPr sz="1600" b="0">
-                <a:solidFill>
-                  <a:srgbClr val="222222"/>
-                </a:solidFill>
-                <a:latin typeface="맑은 고딕"/>
-              </a:rPr>
-              <a:t>•  **`SYS` 로는 ORA-16397 로 실패한다.** 관리자 계정으로 시험하면 기능이 없다고 오판하기 쉽다.</a:t>
-            </a:r>
-          </a:p>
-          <a:p>
-            <a:pPr algn="l">
-              <a:spcAft>
-                <a:spcPts val="1000"/>
-              </a:spcAft>
-            </a:pPr>
-            <a:r>
-              <a:rPr sz="1600" b="0">
-                <a:solidFill>
-                  <a:srgbClr val="222222"/>
-                </a:solidFill>
-                <a:latin typeface="맑은 고딕"/>
-              </a:rPr>
-              <a:t>•  DDL 은 대상이 아니다. ORA-16000 이 나며, 오류 번호가 처리 경로를 알려 준다.</a:t>
-            </a:r>
-          </a:p>
-          <a:p>
-            <a:pPr algn="l">
-              <a:spcAft>
-                <a:spcPts val="1000"/>
-              </a:spcAft>
-            </a:pPr>
-            <a:r>
-              <a:rPr sz="1600" b="0">
-                <a:solidFill>
-                  <a:srgbClr val="222222"/>
-                </a:solidFill>
-                <a:latin typeface="맑은 고딕"/>
-              </a:rPr>
-              <a:t>•  리다이렉션의 가치는 부하 분산이 아니라 **접속 단순화**다. 실행은 Primary 에서 일어난다.</a:t>
-            </a:r>
-          </a:p>
-          <a:p>
-            <a:pPr algn="l">
-              <a:spcAft>
-                <a:spcPts val="1000"/>
-              </a:spcAft>
-            </a:pPr>
-            <a:r>
-              <a:rPr sz="1600" b="0">
-                <a:solidFill>
-                  <a:srgbClr val="222222"/>
-                </a:solidFill>
-                <a:latin typeface="맑은 고딕"/>
-              </a:rPr>
-              <a:t>•  `STANDBY_MAX_DATA_DELAY` 초과 시 **ORA-03172**. ASYNC 에서 0은 항상 위반된다.</a:t>
-            </a:r>
-          </a:p>
-          <a:p>
-            <a:pPr algn="l">
-              <a:spcAft>
-                <a:spcPts val="1000"/>
-              </a:spcAft>
-            </a:pPr>
-            <a:r>
-              <a:rPr sz="1600" b="0">
-                <a:solidFill>
-                  <a:srgbClr val="222222"/>
-                </a:solidFill>
-                <a:latin typeface="맑은 고딕"/>
-              </a:rPr>
-              <a:t>•  **`SYS` 세션에는 적용되지 않는다 — ORA-03174.** ADG 세션 기능은 일반 사용자를 전제로 한다.</a:t>
-            </a:r>
-          </a:p>
-          <a:p>
-            <a:pPr algn="l">
-              <a:spcAft>
-                <a:spcPts val="1000"/>
-              </a:spcAft>
-            </a:pPr>
-            <a:r>
-              <a:rPr sz="1600" b="0">
-                <a:solidFill>
-                  <a:srgbClr val="222222"/>
-                </a:solidFill>
-                <a:latin typeface="맑은 고딕"/>
-              </a:rPr>
-              <a:t>•  `SYNC WITH PRIMARY` 는 동기 전송이 전제다. ASYNC 에서는 **ORA-03173**.</a:t>
-            </a:r>
-          </a:p>
-          <a:p>
-            <a:pPr algn="l">
-              <a:spcAft>
-                <a:spcPts val="1000"/>
-              </a:spcAft>
-            </a:pPr>
-            <a:r>
-              <a:rPr sz="1600" b="0">
-                <a:solidFill>
-                  <a:srgbClr val="222222"/>
-                </a:solidFill>
-                <a:latin typeface="맑은 고딕"/>
-              </a:rPr>
-              <a:t>•  보호 모드는 8장에서 복구 가능성을, 9장에서 조회 신선도 보장을 결정했다.</a:t>
-            </a:r>
-          </a:p>
-          <a:p>
-            <a:pPr algn="l">
-              <a:spcAft>
-                <a:spcPts val="1000"/>
-              </a:spcAft>
-            </a:pPr>
-            <a:r>
-              <a:rPr sz="1600" b="0">
-                <a:solidFill>
-                  <a:srgbClr val="222222"/>
-                </a:solidFill>
-                <a:latin typeface="맑은 고딕"/>
-              </a:rPr>
-              <a:t>•  `V$STANDBY_EVENT_HISTOGRAM` 은 `apply lag` 하나만 누적한다. 2분 정지가 `2 minutes` 59회로 남았다.</a:t>
-            </a:r>
-          </a:p>
-          <a:p>
-            <a:pPr algn="l">
-              <a:spcAft>
-                <a:spcPts val="1000"/>
-              </a:spcAft>
-            </a:pPr>
-            <a:r>
-              <a:rPr sz="1600" b="0">
-                <a:solidFill>
-                  <a:srgbClr val="222222"/>
-                </a:solidFill>
-                <a:latin typeface="맑은 고딕"/>
-              </a:rPr>
-              <a:t>•  옵션 없이 쓰려면 MOUNTED 로 둔다. 적용은 돌고 조회만 **ORA-01219** 로 막힌다.</a:t>
-            </a:r>
-          </a:p>
-          <a:p>
-            <a:pPr algn="l">
-              <a:spcAft>
-                <a:spcPts val="1000"/>
-              </a:spcAft>
-            </a:pPr>
-            <a:r>
-              <a:rPr sz="1600" b="0">
-                <a:solidFill>
-                  <a:srgbClr val="222222"/>
-                </a:solidFill>
-                <a:latin typeface="맑은 고딕"/>
-              </a:rPr>
-              <a:t>•  Primary 쪽 표식은 `DATABASE_MODE` 와 `RECOVERY_MODE` 의 **`WITH QUERY`** 유무다.</a:t>
+                <a:spcPts val="600"/>
+              </a:spcAft>
+            </a:pPr>
+            <a:r>
+              <a:rPr sz="1500" b="0">
+                <a:solidFill>
+                  <a:srgbClr val="5A6672"/>
+                </a:solidFill>
+                <a:latin typeface="맑은 고딕"/>
+              </a:rPr>
+              <a:t>거의 읽기만 하고 가끔 쓰는 애플리케이션</a:t>
+            </a:r>
+          </a:p>
+        </p:txBody>
+      </p:sp>
+      <p:sp>
+        <p:nvSpPr>
+          <p:cNvPr id="5" name="TextBox 4"/>
+          <p:cNvSpPr txBox="1"/>
+          <p:nvPr/>
+        </p:nvSpPr>
+        <p:spPr>
+          <a:xfrm>
+            <a:off x="640080" y="1737360"/>
+            <a:ext cx="10881360" cy="4754880"/>
+          </a:xfrm>
+          <a:prstGeom prst="rect">
+            <a:avLst/>
+          </a:prstGeom>
+          <a:noFill/>
+        </p:spPr>
+        <p:txBody>
+          <a:bodyPr wrap="square">
+            <a:spAutoFit/>
+          </a:bodyPr>
+          <a:lstStyle/>
+          <a:p>
+            <a:pPr algn="l">
+              <a:spcAft>
+                <a:spcPts val="1000"/>
+              </a:spcAft>
+            </a:pPr>
+            <a:r>
+              <a:rPr sz="1700" b="0">
+                <a:solidFill>
+                  <a:srgbClr val="222222"/>
+                </a:solidFill>
+                <a:latin typeface="맑은 고딕"/>
+              </a:rPr>
+              <a:t>•  적합: 실행 이력 한 행, 조회 시각 갱신</a:t>
+            </a:r>
+          </a:p>
+          <a:p>
+            <a:pPr algn="l">
+              <a:spcAft>
+                <a:spcPts val="1000"/>
+              </a:spcAft>
+            </a:pPr>
+            <a:r>
+              <a:rPr sz="1700" b="0">
+                <a:solidFill>
+                  <a:srgbClr val="222222"/>
+                </a:solidFill>
+                <a:latin typeface="맑은 고딕"/>
+              </a:rPr>
+              <a:t>•  부적합: 대량 DML, 잦은 갱신</a:t>
+            </a:r>
+          </a:p>
+          <a:p>
+            <a:pPr algn="l">
+              <a:spcAft>
+                <a:spcPts val="1000"/>
+              </a:spcAft>
+            </a:pPr>
+            <a:r>
+              <a:rPr sz="1700" b="0">
+                <a:solidFill>
+                  <a:srgbClr val="222222"/>
+                </a:solidFill>
+                <a:latin typeface="맑은 고딕"/>
+              </a:rPr>
+              <a:t>•  문장마다 왕복·적용 대기 → Primary 직접보다 느림</a:t>
+            </a:r>
+          </a:p>
+          <a:p>
+            <a:pPr algn="l">
+              <a:spcAft>
+                <a:spcPts val="1000"/>
+              </a:spcAft>
+            </a:pPr>
+            <a:r>
+              <a:rPr sz="1700" b="0">
+                <a:solidFill>
+                  <a:srgbClr val="222222"/>
+                </a:solidFill>
+                <a:latin typeface="맑은 고딕"/>
+              </a:rPr>
+              <a:t>•  리다이렉션이 늘면 오프로드 목적이 뒤집힘</a:t>
+            </a:r>
+          </a:p>
+          <a:p>
+            <a:pPr algn="l">
+              <a:spcAft>
+                <a:spcPts val="1000"/>
+              </a:spcAft>
+            </a:pPr>
+            <a:r>
+              <a:rPr sz="1700" b="0">
+                <a:solidFill>
+                  <a:srgbClr val="222222"/>
+                </a:solidFill>
+                <a:latin typeface="맑은 고딕"/>
+              </a:rPr>
+              <a:t>•  갱신이 늘 것 같으면 서비스로 접속 분리</a:t>
             </a:r>
           </a:p>
         </p:txBody>
@@ -12718,7 +13536,7 @@
         <p:spPr>
           <a:xfrm>
             <a:off x="0" y="0"/>
-            <a:ext cx="12191695" cy="1005840"/>
+            <a:ext cx="12191695" cy="6858000"/>
           </a:xfrm>
           <a:prstGeom prst="rect">
             <a:avLst/>
@@ -12761,8 +13579,8 @@
         </p:nvSpPr>
         <p:spPr>
           <a:xfrm>
-            <a:off x="548640" y="91440"/>
-            <a:ext cx="10972800" cy="777240"/>
+            <a:off x="822960" y="2011680"/>
+            <a:ext cx="10515600" cy="1097280"/>
           </a:xfrm>
           <a:prstGeom prst="rect">
             <a:avLst/>
@@ -12781,13 +13599,13 @@
               </a:spcAft>
             </a:pPr>
             <a:r>
-              <a:rPr sz="2600" b="1">
+              <a:rPr sz="4000" b="1">
                 <a:solidFill>
                   <a:srgbClr val="FFFFFF"/>
                 </a:solidFill>
                 <a:latin typeface="맑은 고딕"/>
               </a:rPr>
-              <a:t>실습 개요 (Practice Overview)</a:t>
+              <a:t>9.8</a:t>
             </a:r>
           </a:p>
         </p:txBody>
@@ -12800,8 +13618,8 @@
         </p:nvSpPr>
         <p:spPr>
           <a:xfrm>
-            <a:off x="640080" y="1371600"/>
-            <a:ext cx="10881360" cy="5120640"/>
+            <a:off x="822960" y="3017520"/>
+            <a:ext cx="10515600" cy="914400"/>
           </a:xfrm>
           <a:prstGeom prst="rect">
             <a:avLst/>
@@ -12816,145 +13634,375 @@
           <a:p>
             <a:pPr algn="l">
               <a:spcAft>
-                <a:spcPts val="1000"/>
+                <a:spcPts val="600"/>
+              </a:spcAft>
+            </a:pPr>
+            <a:r>
+              <a:rPr sz="2800" b="1">
+                <a:solidFill>
+                  <a:srgbClr val="FFFFFF"/>
+                </a:solidFill>
+                <a:latin typeface="맑은 고딕"/>
+              </a:rPr>
+              <a:t>자동 블록 손상 복구와 관련 기능</a:t>
+            </a:r>
+          </a:p>
+        </p:txBody>
+      </p:sp>
+      <p:sp>
+        <p:nvSpPr>
+          <p:cNvPr id="5" name="Rectangle 4"/>
+          <p:cNvSpPr/>
+          <p:nvPr/>
+        </p:nvSpPr>
+        <p:spPr>
+          <a:xfrm>
+            <a:off x="822960" y="4114800"/>
+            <a:ext cx="5486400" cy="54864"/>
+          </a:xfrm>
+          <a:prstGeom prst="rect">
+            <a:avLst/>
+          </a:prstGeom>
+          <a:solidFill>
+            <a:srgbClr val="FFFFFF"/>
+          </a:solidFill>
+          <a:ln>
+            <a:noFill/>
+          </a:ln>
+          <a:effectLst/>
+        </p:spPr>
+        <p:style>
+          <a:lnRef idx="1">
+            <a:schemeClr val="accent1"/>
+          </a:lnRef>
+          <a:fillRef idx="3">
+            <a:schemeClr val="accent1"/>
+          </a:fillRef>
+          <a:effectRef idx="2">
+            <a:schemeClr val="accent1"/>
+          </a:effectRef>
+          <a:fontRef idx="minor">
+            <a:schemeClr val="lt1"/>
+          </a:fontRef>
+        </p:style>
+        <p:txBody>
+          <a:bodyPr rtlCol="0" anchor="ctr"/>
+          <a:lstStyle/>
+          <a:p>
+            <a:pPr algn="ctr"/>
+          </a:p>
+        </p:txBody>
+      </p:sp>
+      <p:sp>
+        <p:nvSpPr>
+          <p:cNvPr id="6" name="TextBox 5"/>
+          <p:cNvSpPr txBox="1"/>
+          <p:nvPr/>
+        </p:nvSpPr>
+        <p:spPr>
+          <a:xfrm>
+            <a:off x="822960" y="4297680"/>
+            <a:ext cx="10058400" cy="2011680"/>
+          </a:xfrm>
+          <a:prstGeom prst="rect">
+            <a:avLst/>
+          </a:prstGeom>
+          <a:noFill/>
+        </p:spPr>
+        <p:txBody>
+          <a:bodyPr wrap="square">
+            <a:spAutoFit/>
+          </a:bodyPr>
+          <a:lstStyle/>
+          <a:p>
+            <a:pPr algn="l">
+              <a:spcAft>
+                <a:spcPts val="800"/>
               </a:spcAft>
             </a:pPr>
             <a:r>
               <a:rPr sz="1600" b="0">
                 <a:solidFill>
-                  <a:srgbClr val="222222"/>
-                </a:solidFill>
-                <a:latin typeface="맑은 고딕"/>
-              </a:rPr>
-              <a:t>•  실습 01 — ADG 상태 확인: 두 표식과 기능 사용 통계, 세션 컨텍스트, PDB 서비스를 확인한다.</a:t>
-            </a:r>
-          </a:p>
-          <a:p>
-            <a:pPr algn="l">
-              <a:spcAft>
-                <a:spcPts val="1000"/>
+                  <a:srgbClr val="FFFFFF"/>
+                </a:solidFill>
+                <a:latin typeface="맑은 고딕"/>
+              </a:rPr>
+              <a:t>•  자동 블록 손상 복구</a:t>
+            </a:r>
+          </a:p>
+          <a:p>
+            <a:pPr algn="l">
+              <a:spcAft>
+                <a:spcPts val="800"/>
               </a:spcAft>
             </a:pPr>
             <a:r>
               <a:rPr sz="1600" b="0">
                 <a:solidFill>
-                  <a:srgbClr val="222222"/>
-                </a:solidFill>
-                <a:latin typeface="맑은 고딕"/>
-              </a:rPr>
-              <a:t>•  실습 02 — 읽기 일관성 검증: 미커밋 상태를 유지한 채 조회하고, SQL*Plus 의 함정을 재현한다.</a:t>
-            </a:r>
-          </a:p>
-          <a:p>
-            <a:pPr algn="l">
-              <a:spcAft>
-                <a:spcPts val="1000"/>
+                  <a:srgbClr val="FFFFFF"/>
+                </a:solidFill>
+                <a:latin typeface="맑은 고딕"/>
+              </a:rPr>
+              <a:t>•  Standby의 In-Memory, 원격 AWR</a:t>
+            </a:r>
+          </a:p>
+          <a:p>
+            <a:pPr algn="l">
+              <a:spcAft>
+                <a:spcPts val="800"/>
               </a:spcAft>
             </a:pPr>
             <a:r>
               <a:rPr sz="1600" b="0">
                 <a:solidFill>
-                  <a:srgbClr val="222222"/>
-                </a:solidFill>
-                <a:latin typeface="맑은 고딕"/>
-              </a:rPr>
-              <a:t>•  실습 03 — 되는 것과 안 되는 것: ORA-16000 을 재현하고 정렬·GTT·시퀀스·통계·AWR 을 확인한다.</a:t>
-            </a:r>
-          </a:p>
-          <a:p>
-            <a:pPr algn="l">
-              <a:spcAft>
-                <a:spcPts val="1000"/>
-              </a:spcAft>
-            </a:pPr>
-            <a:r>
-              <a:rPr sz="1600" b="0">
-                <a:solidFill>
-                  <a:srgbClr val="222222"/>
-                </a:solidFill>
-                <a:latin typeface="맑은 고딕"/>
-              </a:rPr>
-              <a:t>•  실습 04 — DML 리다이렉션: 일반 사용자로 세 가지 DML 을 리다이렉트하고 Primary 에서 검증한다.</a:t>
-            </a:r>
-          </a:p>
-          <a:p>
-            <a:pPr algn="l">
-              <a:spcAft>
-                <a:spcPts val="1000"/>
-              </a:spcAft>
-            </a:pPr>
-            <a:r>
-              <a:rPr sz="1600" b="0">
-                <a:solidFill>
-                  <a:srgbClr val="222222"/>
-                </a:solidFill>
-                <a:latin typeface="맑은 고딕"/>
-              </a:rPr>
-              <a:t>•  실습 05 — 리다이렉션의 제약: `SYS` 의 ORA-16397 과 DDL 의 ORA-16000 을 구분하고 점검표를 만든다.</a:t>
-            </a:r>
-          </a:p>
-          <a:p>
-            <a:pPr algn="l">
-              <a:spcAft>
-                <a:spcPts val="1000"/>
-              </a:spcAft>
-            </a:pPr>
-            <a:r>
-              <a:rPr sz="1600" b="0">
-                <a:solidFill>
-                  <a:srgbClr val="222222"/>
-                </a:solidFill>
-                <a:latin typeface="맑은 고딕"/>
-              </a:rPr>
-              <a:t>•  실습 06 — 지연 한도: ORA-03172·ORA-03174·ORA-03173 을 재현하고 두 장치를 비교한다.</a:t>
-            </a:r>
-          </a:p>
-          <a:p>
-            <a:pPr algn="l">
-              <a:spcAft>
-                <a:spcPts val="1000"/>
-              </a:spcAft>
-            </a:pPr>
-            <a:r>
-              <a:rPr sz="1600" b="0">
-                <a:solidFill>
-                  <a:srgbClr val="222222"/>
-                </a:solidFill>
-                <a:latin typeface="맑은 고딕"/>
-              </a:rPr>
-              <a:t>•  실습 07 — 히스토그램: 적용을 멈췄다 재개하며 분포의 변화를 관찰한다.</a:t>
-            </a:r>
-          </a:p>
-          <a:p>
-            <a:pPr algn="l">
-              <a:spcAft>
-                <a:spcPts val="1000"/>
-              </a:spcAft>
-            </a:pPr>
-            <a:r>
-              <a:rPr sz="1600" b="0">
-                <a:solidFill>
-                  <a:srgbClr val="222222"/>
-                </a:solidFill>
-                <a:latin typeface="맑은 고딕"/>
-              </a:rPr>
-              <a:t>•  실습 08 — 옵션 없는 대안 경로: MOUNTED 로 내려 `ORA-01219` 를 재현하고 양쪽에서 동기화를 확인한다.</a:t>
-            </a:r>
-          </a:p>
-          <a:p>
-            <a:pPr algn="l">
-              <a:spcAft>
-                <a:spcPts val="1000"/>
-              </a:spcAft>
-            </a:pPr>
-            <a:r>
-              <a:rPr sz="1600" b="0">
-                <a:solidFill>
-                  <a:srgbClr val="222222"/>
-                </a:solidFill>
-                <a:latin typeface="맑은 고딕"/>
-              </a:rPr>
-              <a:t>•  실습 06·07 은 적용을 멈추고 08 은 Standby 를 닫는다. 각 실습 끝에서 반드시 원복한다.</a:t>
+                  <a:srgbClr val="FFFFFF"/>
+                </a:solidFill>
+                <a:latin typeface="맑은 고딕"/>
+              </a:rPr>
+              <a:t>•  그 밖의 옵션 기능</a:t>
+            </a:r>
+          </a:p>
+        </p:txBody>
+      </p:sp>
+    </p:spTree>
+  </p:cSld>
+  <p:clrMapOvr>
+    <a:masterClrMapping/>
+  </p:clrMapOvr>
+</p:sld>
+</file>
+
+<file path=ppt/slides/slide39.xml><?xml version="1.0" encoding="utf-8"?>
+<p:sld xmlns:a="http://schemas.openxmlformats.org/drawingml/2006/main" xmlns:p="http://schemas.openxmlformats.org/presentationml/2006/main" xmlns:r="http://schemas.openxmlformats.org/officeDocument/2006/relationships">
+  <p:cSld>
+    <p:spTree>
+      <p:nvGrpSpPr>
+        <p:cNvPr id="1" name=""/>
+        <p:cNvGrpSpPr/>
+        <p:nvPr/>
+      </p:nvGrpSpPr>
+      <p:grpSpPr/>
+      <p:sp>
+        <p:nvSpPr>
+          <p:cNvPr id="2" name="Rectangle 1"/>
+          <p:cNvSpPr/>
+          <p:nvPr/>
+        </p:nvSpPr>
+        <p:spPr>
+          <a:xfrm>
+            <a:off x="0" y="0"/>
+            <a:ext cx="12191695" cy="1005840"/>
+          </a:xfrm>
+          <a:prstGeom prst="rect">
+            <a:avLst/>
+          </a:prstGeom>
+          <a:solidFill>
+            <a:srgbClr val="C0392B"/>
+          </a:solidFill>
+          <a:ln>
+            <a:noFill/>
+          </a:ln>
+          <a:effectLst/>
+        </p:spPr>
+        <p:style>
+          <a:lnRef idx="1">
+            <a:schemeClr val="accent1"/>
+          </a:lnRef>
+          <a:fillRef idx="3">
+            <a:schemeClr val="accent1"/>
+          </a:fillRef>
+          <a:effectRef idx="2">
+            <a:schemeClr val="accent1"/>
+          </a:effectRef>
+          <a:fontRef idx="minor">
+            <a:schemeClr val="lt1"/>
+          </a:fontRef>
+        </p:style>
+        <p:txBody>
+          <a:bodyPr rtlCol="0" anchor="ctr"/>
+          <a:lstStyle/>
+          <a:p>
+            <a:pPr algn="ctr"/>
+          </a:p>
+        </p:txBody>
+      </p:sp>
+      <p:sp>
+        <p:nvSpPr>
+          <p:cNvPr id="3" name="TextBox 2"/>
+          <p:cNvSpPr txBox="1"/>
+          <p:nvPr/>
+        </p:nvSpPr>
+        <p:spPr>
+          <a:xfrm>
+            <a:off x="548640" y="91440"/>
+            <a:ext cx="10972800" cy="777240"/>
+          </a:xfrm>
+          <a:prstGeom prst="rect">
+            <a:avLst/>
+          </a:prstGeom>
+          <a:noFill/>
+        </p:spPr>
+        <p:txBody>
+          <a:bodyPr wrap="square">
+            <a:spAutoFit/>
+          </a:bodyPr>
+          <a:lstStyle/>
+          <a:p>
+            <a:pPr algn="l">
+              <a:spcAft>
+                <a:spcPts val="600"/>
+              </a:spcAft>
+            </a:pPr>
+            <a:r>
+              <a:rPr sz="2600" b="1">
+                <a:solidFill>
+                  <a:srgbClr val="FFFFFF"/>
+                </a:solidFill>
+                <a:latin typeface="맑은 고딕"/>
+              </a:rPr>
+              <a:t>자동 블록 손상 복구</a:t>
+            </a:r>
+          </a:p>
+        </p:txBody>
+      </p:sp>
+      <p:sp>
+        <p:nvSpPr>
+          <p:cNvPr id="4" name="TextBox 3"/>
+          <p:cNvSpPr txBox="1"/>
+          <p:nvPr/>
+        </p:nvSpPr>
+        <p:spPr>
+          <a:xfrm>
+            <a:off x="640080" y="1078992"/>
+            <a:ext cx="10881360" cy="457200"/>
+          </a:xfrm>
+          <a:prstGeom prst="rect">
+            <a:avLst/>
+          </a:prstGeom>
+          <a:noFill/>
+        </p:spPr>
+        <p:txBody>
+          <a:bodyPr wrap="square">
+            <a:spAutoFit/>
+          </a:bodyPr>
+          <a:lstStyle/>
+          <a:p>
+            <a:pPr algn="l">
+              <a:spcAft>
+                <a:spcPts val="600"/>
+              </a:spcAft>
+            </a:pPr>
+            <a:r>
+              <a:rPr sz="1500" b="0">
+                <a:solidFill>
+                  <a:srgbClr val="5A6672"/>
+                </a:solidFill>
+                <a:latin typeface="맑은 고딕"/>
+              </a:rPr>
+              <a:t>상대편의 정상 블록으로 자동 교체</a:t>
+            </a:r>
+          </a:p>
+        </p:txBody>
+      </p:sp>
+      <p:sp>
+        <p:nvSpPr>
+          <p:cNvPr id="5" name="TextBox 4"/>
+          <p:cNvSpPr txBox="1"/>
+          <p:nvPr/>
+        </p:nvSpPr>
+        <p:spPr>
+          <a:xfrm>
+            <a:off x="640080" y="1737360"/>
+            <a:ext cx="10881360" cy="4754880"/>
+          </a:xfrm>
+          <a:prstGeom prst="rect">
+            <a:avLst/>
+          </a:prstGeom>
+          <a:noFill/>
+        </p:spPr>
+        <p:txBody>
+          <a:bodyPr wrap="square">
+            <a:spAutoFit/>
+          </a:bodyPr>
+          <a:lstStyle/>
+          <a:p>
+            <a:pPr algn="l">
+              <a:spcAft>
+                <a:spcPts val="1000"/>
+              </a:spcAft>
+            </a:pPr>
+            <a:r>
+              <a:rPr sz="1700" b="0">
+                <a:solidFill>
+                  <a:srgbClr val="222222"/>
+                </a:solidFill>
+                <a:latin typeface="맑은 고딕"/>
+              </a:rPr>
+              <a:t>•  Primary 손상 → 실시간 조회 Standby에서 정상 블록</a:t>
+            </a:r>
+          </a:p>
+          <a:p>
+            <a:pPr algn="l">
+              <a:spcAft>
+                <a:spcPts val="1000"/>
+              </a:spcAft>
+            </a:pPr>
+            <a:r>
+              <a:rPr sz="1700" b="0">
+                <a:solidFill>
+                  <a:srgbClr val="222222"/>
+                </a:solidFill>
+                <a:latin typeface="맑은 고딕"/>
+              </a:rPr>
+              <a:t>•  Standby 손상 → Primary에서 받아 적용 지속</a:t>
+            </a:r>
+          </a:p>
+          <a:p>
+            <a:pPr algn="l">
+              <a:spcAft>
+                <a:spcPts val="1000"/>
+              </a:spcAft>
+            </a:pPr>
+            <a:r>
+              <a:rPr sz="1700" b="0">
+                <a:solidFill>
+                  <a:srgbClr val="222222"/>
+                </a:solidFill>
+                <a:latin typeface="맑은 고딕"/>
+              </a:rPr>
+              <a:t>•  세션은 오류 대신 약간의 지연만 겪음</a:t>
+            </a:r>
+          </a:p>
+          <a:p>
+            <a:pPr algn="l">
+              <a:spcAft>
+                <a:spcPts val="1000"/>
+              </a:spcAft>
+            </a:pPr>
+            <a:r>
+              <a:rPr sz="1700" b="0">
+                <a:solidFill>
+                  <a:srgbClr val="222222"/>
+                </a:solidFill>
+                <a:latin typeface="맑은 고딕"/>
+              </a:rPr>
+              <a:t>•  감지된 손상만 대상, 검사 파라미터와 병행</a:t>
+            </a:r>
+          </a:p>
+          <a:p>
+            <a:pPr algn="l">
+              <a:spcAft>
+                <a:spcPts val="1000"/>
+              </a:spcAft>
+            </a:pPr>
+            <a:r>
+              <a:rPr sz="1700" b="0">
+                <a:solidFill>
+                  <a:srgbClr val="222222"/>
+                </a:solidFill>
+                <a:latin typeface="맑은 고딕"/>
+              </a:rPr>
+              <a:t>•  마운트 Standby라면 RMAN 블록 복구로 수동 처리</a:t>
             </a:r>
           </a:p>
         </p:txBody>
@@ -13094,7 +14142,7 @@
                 </a:solidFill>
                 <a:latin typeface="맑은 고딕"/>
               </a:rPr>
-              <a:t>무엇이 켜져 있는가</a:t>
+              <a:t>Active Data Guard 옵션과 라이선스</a:t>
             </a:r>
           </a:p>
         </p:txBody>
@@ -13177,7 +14225,7 @@
                 </a:solidFill>
                 <a:latin typeface="맑은 고딕"/>
               </a:rPr>
-              <a:t>•  표식 두 가지</a:t>
+              <a:t>•  Standby를 쉬게 두지 않으려는 이유</a:t>
             </a:r>
           </a:p>
           <a:p>
@@ -13193,7 +14241,7 @@
                 </a:solidFill>
                 <a:latin typeface="맑은 고딕"/>
               </a:rPr>
-              <a:t>•  사용 기록과 라이선스</a:t>
+              <a:t>•  옵션에 묶인 기능</a:t>
             </a:r>
           </a:p>
           <a:p>
@@ -13209,7 +14257,2438 @@
                 </a:solidFill>
                 <a:latin typeface="맑은 고딕"/>
               </a:rPr>
-              <a:t>•  어디에 붙었는지 확인하기</a:t>
+              <a:t>•  어떤 상태가 옵션 사용인가</a:t>
+            </a:r>
+          </a:p>
+        </p:txBody>
+      </p:sp>
+    </p:spTree>
+  </p:cSld>
+  <p:clrMapOvr>
+    <a:masterClrMapping/>
+  </p:clrMapOvr>
+</p:sld>
+</file>
+
+<file path=ppt/slides/slide40.xml><?xml version="1.0" encoding="utf-8"?>
+<p:sld xmlns:a="http://schemas.openxmlformats.org/drawingml/2006/main" xmlns:p="http://schemas.openxmlformats.org/presentationml/2006/main" xmlns:r="http://schemas.openxmlformats.org/officeDocument/2006/relationships">
+  <p:cSld>
+    <p:spTree>
+      <p:nvGrpSpPr>
+        <p:cNvPr id="1" name=""/>
+        <p:cNvGrpSpPr/>
+        <p:nvPr/>
+      </p:nvGrpSpPr>
+      <p:grpSpPr/>
+      <p:sp>
+        <p:nvSpPr>
+          <p:cNvPr id="2" name="Rectangle 1"/>
+          <p:cNvSpPr/>
+          <p:nvPr/>
+        </p:nvSpPr>
+        <p:spPr>
+          <a:xfrm>
+            <a:off x="0" y="0"/>
+            <a:ext cx="12191695" cy="1005840"/>
+          </a:xfrm>
+          <a:prstGeom prst="rect">
+            <a:avLst/>
+          </a:prstGeom>
+          <a:solidFill>
+            <a:srgbClr val="C0392B"/>
+          </a:solidFill>
+          <a:ln>
+            <a:noFill/>
+          </a:ln>
+          <a:effectLst/>
+        </p:spPr>
+        <p:style>
+          <a:lnRef idx="1">
+            <a:schemeClr val="accent1"/>
+          </a:lnRef>
+          <a:fillRef idx="3">
+            <a:schemeClr val="accent1"/>
+          </a:fillRef>
+          <a:effectRef idx="2">
+            <a:schemeClr val="accent1"/>
+          </a:effectRef>
+          <a:fontRef idx="minor">
+            <a:schemeClr val="lt1"/>
+          </a:fontRef>
+        </p:style>
+        <p:txBody>
+          <a:bodyPr rtlCol="0" anchor="ctr"/>
+          <a:lstStyle/>
+          <a:p>
+            <a:pPr algn="ctr"/>
+          </a:p>
+        </p:txBody>
+      </p:sp>
+      <p:sp>
+        <p:nvSpPr>
+          <p:cNvPr id="3" name="TextBox 2"/>
+          <p:cNvSpPr txBox="1"/>
+          <p:nvPr/>
+        </p:nvSpPr>
+        <p:spPr>
+          <a:xfrm>
+            <a:off x="548640" y="91440"/>
+            <a:ext cx="10972800" cy="777240"/>
+          </a:xfrm>
+          <a:prstGeom prst="rect">
+            <a:avLst/>
+          </a:prstGeom>
+          <a:noFill/>
+        </p:spPr>
+        <p:txBody>
+          <a:bodyPr wrap="square">
+            <a:spAutoFit/>
+          </a:bodyPr>
+          <a:lstStyle/>
+          <a:p>
+            <a:pPr algn="l">
+              <a:spcAft>
+                <a:spcPts val="600"/>
+              </a:spcAft>
+            </a:pPr>
+            <a:r>
+              <a:rPr sz="2600" b="1">
+                <a:solidFill>
+                  <a:srgbClr val="FFFFFF"/>
+                </a:solidFill>
+                <a:latin typeface="맑은 고딕"/>
+              </a:rPr>
+              <a:t>Standby의 In-Memory 열 저장소</a:t>
+            </a:r>
+          </a:p>
+        </p:txBody>
+      </p:sp>
+      <p:sp>
+        <p:nvSpPr>
+          <p:cNvPr id="4" name="TextBox 3"/>
+          <p:cNvSpPr txBox="1"/>
+          <p:nvPr/>
+        </p:nvSpPr>
+        <p:spPr>
+          <a:xfrm>
+            <a:off x="640080" y="1078992"/>
+            <a:ext cx="10881360" cy="457200"/>
+          </a:xfrm>
+          <a:prstGeom prst="rect">
+            <a:avLst/>
+          </a:prstGeom>
+          <a:noFill/>
+        </p:spPr>
+        <p:txBody>
+          <a:bodyPr wrap="square">
+            <a:spAutoFit/>
+          </a:bodyPr>
+          <a:lstStyle/>
+          <a:p>
+            <a:pPr algn="l">
+              <a:spcAft>
+                <a:spcPts val="600"/>
+              </a:spcAft>
+            </a:pPr>
+            <a:r>
+              <a:rPr sz="1500" b="0">
+                <a:solidFill>
+                  <a:srgbClr val="5A6672"/>
+                </a:solidFill>
+                <a:latin typeface="맑은 고딕"/>
+              </a:rPr>
+              <a:t>12.2부터 지원, 두 옵션이 모두 필요</a:t>
+            </a:r>
+          </a:p>
+        </p:txBody>
+      </p:sp>
+      <p:sp>
+        <p:nvSpPr>
+          <p:cNvPr id="5" name="TextBox 4"/>
+          <p:cNvSpPr txBox="1"/>
+          <p:nvPr/>
+        </p:nvSpPr>
+        <p:spPr>
+          <a:xfrm>
+            <a:off x="640080" y="1737360"/>
+            <a:ext cx="10881360" cy="4754880"/>
+          </a:xfrm>
+          <a:prstGeom prst="rect">
+            <a:avLst/>
+          </a:prstGeom>
+          <a:noFill/>
+        </p:spPr>
+        <p:txBody>
+          <a:bodyPr wrap="square">
+            <a:spAutoFit/>
+          </a:bodyPr>
+          <a:lstStyle/>
+          <a:p>
+            <a:pPr algn="l">
+              <a:spcAft>
+                <a:spcPts val="1000"/>
+              </a:spcAft>
+            </a:pPr>
+            <a:r>
+              <a:rPr sz="1700" b="0">
+                <a:solidFill>
+                  <a:srgbClr val="222222"/>
+                </a:solidFill>
+                <a:latin typeface="맑은 고딕"/>
+              </a:rPr>
+              <a:t>•  Standby 인스턴스에 INMEMORY_SIZE 할당</a:t>
+            </a:r>
+          </a:p>
+          <a:p>
+            <a:pPr algn="l">
+              <a:spcAft>
+                <a:spcPts val="1000"/>
+              </a:spcAft>
+            </a:pPr>
+            <a:r>
+              <a:rPr sz="1700" b="0">
+                <a:solidFill>
+                  <a:srgbClr val="222222"/>
+                </a:solidFill>
+                <a:latin typeface="맑은 고딕"/>
+              </a:rPr>
+              <a:t>•  INMEMORY_ADG_ENABLED (기본 TRUE)</a:t>
+            </a:r>
+          </a:p>
+          <a:p>
+            <a:pPr algn="l">
+              <a:spcAft>
+                <a:spcPts val="1000"/>
+              </a:spcAft>
+            </a:pPr>
+            <a:r>
+              <a:rPr sz="1700" b="0">
+                <a:solidFill>
+                  <a:srgbClr val="222222"/>
+                </a:solidFill>
+                <a:latin typeface="맑은 고딕"/>
+              </a:rPr>
+              <a:t>•  Primary와 Standby에 서로 다른 객체 적재 가능</a:t>
+            </a:r>
+          </a:p>
+          <a:p>
+            <a:pPr algn="l">
+              <a:spcAft>
+                <a:spcPts val="1000"/>
+              </a:spcAft>
+            </a:pPr>
+            <a:r>
+              <a:rPr sz="1700" b="0">
+                <a:solidFill>
+                  <a:srgbClr val="222222"/>
+                </a:solidFill>
+                <a:latin typeface="맑은 고딕"/>
+              </a:rPr>
+              <a:t>•  Expression·ILM은 Primary 활동 기준</a:t>
+            </a:r>
+          </a:p>
+          <a:p>
+            <a:pPr algn="l">
+              <a:spcAft>
+                <a:spcPts val="1000"/>
+              </a:spcAft>
+            </a:pPr>
+            <a:r>
+              <a:rPr sz="1700" b="0">
+                <a:solidFill>
+                  <a:srgbClr val="222222"/>
+                </a:solidFill>
+                <a:latin typeface="맑은 고딕"/>
+              </a:rPr>
+              <a:t>•  FastStart, Join Group 미지원</a:t>
+            </a:r>
+          </a:p>
+        </p:txBody>
+      </p:sp>
+    </p:spTree>
+  </p:cSld>
+  <p:clrMapOvr>
+    <a:masterClrMapping/>
+  </p:clrMapOvr>
+</p:sld>
+</file>
+
+<file path=ppt/slides/slide41.xml><?xml version="1.0" encoding="utf-8"?>
+<p:sld xmlns:a="http://schemas.openxmlformats.org/drawingml/2006/main" xmlns:p="http://schemas.openxmlformats.org/presentationml/2006/main" xmlns:r="http://schemas.openxmlformats.org/officeDocument/2006/relationships">
+  <p:cSld>
+    <p:spTree>
+      <p:nvGrpSpPr>
+        <p:cNvPr id="1" name=""/>
+        <p:cNvGrpSpPr/>
+        <p:nvPr/>
+      </p:nvGrpSpPr>
+      <p:grpSpPr/>
+      <p:sp>
+        <p:nvSpPr>
+          <p:cNvPr id="2" name="Rectangle 1"/>
+          <p:cNvSpPr/>
+          <p:nvPr/>
+        </p:nvSpPr>
+        <p:spPr>
+          <a:xfrm>
+            <a:off x="0" y="0"/>
+            <a:ext cx="12191695" cy="1005840"/>
+          </a:xfrm>
+          <a:prstGeom prst="rect">
+            <a:avLst/>
+          </a:prstGeom>
+          <a:solidFill>
+            <a:srgbClr val="C0392B"/>
+          </a:solidFill>
+          <a:ln>
+            <a:noFill/>
+          </a:ln>
+          <a:effectLst/>
+        </p:spPr>
+        <p:style>
+          <a:lnRef idx="1">
+            <a:schemeClr val="accent1"/>
+          </a:lnRef>
+          <a:fillRef idx="3">
+            <a:schemeClr val="accent1"/>
+          </a:fillRef>
+          <a:effectRef idx="2">
+            <a:schemeClr val="accent1"/>
+          </a:effectRef>
+          <a:fontRef idx="minor">
+            <a:schemeClr val="lt1"/>
+          </a:fontRef>
+        </p:style>
+        <p:txBody>
+          <a:bodyPr rtlCol="0" anchor="ctr"/>
+          <a:lstStyle/>
+          <a:p>
+            <a:pPr algn="ctr"/>
+          </a:p>
+        </p:txBody>
+      </p:sp>
+      <p:sp>
+        <p:nvSpPr>
+          <p:cNvPr id="3" name="TextBox 2"/>
+          <p:cNvSpPr txBox="1"/>
+          <p:nvPr/>
+        </p:nvSpPr>
+        <p:spPr>
+          <a:xfrm>
+            <a:off x="548640" y="91440"/>
+            <a:ext cx="10972800" cy="777240"/>
+          </a:xfrm>
+          <a:prstGeom prst="rect">
+            <a:avLst/>
+          </a:prstGeom>
+          <a:noFill/>
+        </p:spPr>
+        <p:txBody>
+          <a:bodyPr wrap="square">
+            <a:spAutoFit/>
+          </a:bodyPr>
+          <a:lstStyle/>
+          <a:p>
+            <a:pPr algn="l">
+              <a:spcAft>
+                <a:spcPts val="600"/>
+              </a:spcAft>
+            </a:pPr>
+            <a:r>
+              <a:rPr sz="2600" b="1">
+                <a:solidFill>
+                  <a:srgbClr val="FFFFFF"/>
+                </a:solidFill>
+                <a:latin typeface="맑은 고딕"/>
+              </a:rPr>
+              <a:t>Standby의 성능 진단과 원격 AWR</a:t>
+            </a:r>
+          </a:p>
+        </p:txBody>
+      </p:sp>
+      <p:sp>
+        <p:nvSpPr>
+          <p:cNvPr id="4" name="TextBox 3"/>
+          <p:cNvSpPr txBox="1"/>
+          <p:nvPr/>
+        </p:nvSpPr>
+        <p:spPr>
+          <a:xfrm>
+            <a:off x="640080" y="1078992"/>
+            <a:ext cx="10881360" cy="457200"/>
+          </a:xfrm>
+          <a:prstGeom prst="rect">
+            <a:avLst/>
+          </a:prstGeom>
+          <a:noFill/>
+        </p:spPr>
+        <p:txBody>
+          <a:bodyPr wrap="square">
+            <a:spAutoFit/>
+          </a:bodyPr>
+          <a:lstStyle/>
+          <a:p>
+            <a:pPr algn="l">
+              <a:spcAft>
+                <a:spcPts val="600"/>
+              </a:spcAft>
+            </a:pPr>
+            <a:r>
+              <a:rPr sz="1500" b="0">
+                <a:solidFill>
+                  <a:srgbClr val="5A6672"/>
+                </a:solidFill>
+                <a:latin typeface="맑은 고딕"/>
+              </a:rPr>
+              <a:t>로컬 스냅샷은 실패, 이력은 Primary에 저장</a:t>
+            </a:r>
+          </a:p>
+        </p:txBody>
+      </p:sp>
+      <p:sp>
+        <p:nvSpPr>
+          <p:cNvPr id="5" name="TextBox 4"/>
+          <p:cNvSpPr txBox="1"/>
+          <p:nvPr/>
+        </p:nvSpPr>
+        <p:spPr>
+          <a:xfrm>
+            <a:off x="640080" y="1737360"/>
+            <a:ext cx="10881360" cy="4754880"/>
+          </a:xfrm>
+          <a:prstGeom prst="rect">
+            <a:avLst/>
+          </a:prstGeom>
+          <a:noFill/>
+        </p:spPr>
+        <p:txBody>
+          <a:bodyPr wrap="square">
+            <a:spAutoFit/>
+          </a:bodyPr>
+          <a:lstStyle/>
+          <a:p>
+            <a:pPr algn="l">
+              <a:spcAft>
+                <a:spcPts val="1000"/>
+              </a:spcAft>
+            </a:pPr>
+            <a:r>
+              <a:rPr sz="1700" b="0">
+                <a:solidFill>
+                  <a:srgbClr val="222222"/>
+                </a:solidFill>
+                <a:latin typeface="맑은 고딕"/>
+              </a:rPr>
+              <a:t>•  로컬 AWR 스냅샷: ORA-13516</a:t>
+            </a:r>
+          </a:p>
+          <a:p>
+            <a:pPr algn="l">
+              <a:spcAft>
+                <a:spcPts val="1000"/>
+              </a:spcAft>
+            </a:pPr>
+            <a:r>
+              <a:rPr sz="1700" b="0">
+                <a:solidFill>
+                  <a:srgbClr val="222222"/>
+                </a:solidFill>
+                <a:latin typeface="맑은 고딕"/>
+              </a:rPr>
+              <a:t>•  UMF(Remote Management Framework), 12.2부터</a:t>
+            </a:r>
+          </a:p>
+          <a:p>
+            <a:pPr algn="l">
+              <a:spcAft>
+                <a:spcPts val="1000"/>
+              </a:spcAft>
+            </a:pPr>
+            <a:r>
+              <a:rPr sz="1700" b="0">
+                <a:solidFill>
+                  <a:srgbClr val="222222"/>
+                </a:solidFill>
+                <a:latin typeface="맑은 고딕"/>
+              </a:rPr>
+              <a:t>•  DBMS_UMF로 토폴로지 구성, 원격 DB 등록</a:t>
+            </a:r>
+          </a:p>
+          <a:p>
+            <a:pPr algn="l">
+              <a:spcAft>
+                <a:spcPts val="1000"/>
+              </a:spcAft>
+            </a:pPr>
+            <a:r>
+              <a:rPr sz="1700" b="0">
+                <a:solidFill>
+                  <a:srgbClr val="222222"/>
+                </a:solidFill>
+                <a:latin typeface="맑은 고딕"/>
+              </a:rPr>
+              <a:t>•  CREATE_REMOTE_SNAPSHOT으로 스냅샷</a:t>
+            </a:r>
+          </a:p>
+          <a:p>
+            <a:pPr algn="l">
+              <a:spcAft>
+                <a:spcPts val="1000"/>
+              </a:spcAft>
+            </a:pPr>
+            <a:r>
+              <a:rPr sz="1700" b="0">
+                <a:solidFill>
+                  <a:srgbClr val="222222"/>
+                </a:solidFill>
+                <a:latin typeface="맑은 고딕"/>
+              </a:rPr>
+              <a:t>•  일상 진단은 V$ 뷰와 ASH 메모리로 충분</a:t>
+            </a:r>
+          </a:p>
+        </p:txBody>
+      </p:sp>
+    </p:spTree>
+  </p:cSld>
+  <p:clrMapOvr>
+    <a:masterClrMapping/>
+  </p:clrMapOvr>
+</p:sld>
+</file>
+
+<file path=ppt/slides/slide42.xml><?xml version="1.0" encoding="utf-8"?>
+<p:sld xmlns:a="http://schemas.openxmlformats.org/drawingml/2006/main" xmlns:p="http://schemas.openxmlformats.org/presentationml/2006/main" xmlns:r="http://schemas.openxmlformats.org/officeDocument/2006/relationships">
+  <p:cSld>
+    <p:spTree>
+      <p:nvGrpSpPr>
+        <p:cNvPr id="1" name=""/>
+        <p:cNvGrpSpPr/>
+        <p:nvPr/>
+      </p:nvGrpSpPr>
+      <p:grpSpPr/>
+      <p:sp>
+        <p:nvSpPr>
+          <p:cNvPr id="2" name="Rectangle 1"/>
+          <p:cNvSpPr/>
+          <p:nvPr/>
+        </p:nvSpPr>
+        <p:spPr>
+          <a:xfrm>
+            <a:off x="0" y="0"/>
+            <a:ext cx="12191695" cy="1005840"/>
+          </a:xfrm>
+          <a:prstGeom prst="rect">
+            <a:avLst/>
+          </a:prstGeom>
+          <a:solidFill>
+            <a:srgbClr val="C0392B"/>
+          </a:solidFill>
+          <a:ln>
+            <a:noFill/>
+          </a:ln>
+          <a:effectLst/>
+        </p:spPr>
+        <p:style>
+          <a:lnRef idx="1">
+            <a:schemeClr val="accent1"/>
+          </a:lnRef>
+          <a:fillRef idx="3">
+            <a:schemeClr val="accent1"/>
+          </a:fillRef>
+          <a:effectRef idx="2">
+            <a:schemeClr val="accent1"/>
+          </a:effectRef>
+          <a:fontRef idx="minor">
+            <a:schemeClr val="lt1"/>
+          </a:fontRef>
+        </p:style>
+        <p:txBody>
+          <a:bodyPr rtlCol="0" anchor="ctr"/>
+          <a:lstStyle/>
+          <a:p>
+            <a:pPr algn="ctr"/>
+          </a:p>
+        </p:txBody>
+      </p:sp>
+      <p:sp>
+        <p:nvSpPr>
+          <p:cNvPr id="3" name="TextBox 2"/>
+          <p:cNvSpPr txBox="1"/>
+          <p:nvPr/>
+        </p:nvSpPr>
+        <p:spPr>
+          <a:xfrm>
+            <a:off x="548640" y="91440"/>
+            <a:ext cx="10972800" cy="777240"/>
+          </a:xfrm>
+          <a:prstGeom prst="rect">
+            <a:avLst/>
+          </a:prstGeom>
+          <a:noFill/>
+        </p:spPr>
+        <p:txBody>
+          <a:bodyPr wrap="square">
+            <a:spAutoFit/>
+          </a:bodyPr>
+          <a:lstStyle/>
+          <a:p>
+            <a:pPr algn="l">
+              <a:spcAft>
+                <a:spcPts val="600"/>
+              </a:spcAft>
+            </a:pPr>
+            <a:r>
+              <a:rPr sz="2600" b="1">
+                <a:solidFill>
+                  <a:srgbClr val="FFFFFF"/>
+                </a:solidFill>
+                <a:latin typeface="맑은 고딕"/>
+              </a:rPr>
+              <a:t>그 밖의 관련 기능</a:t>
+            </a:r>
+          </a:p>
+        </p:txBody>
+      </p:sp>
+      <p:sp>
+        <p:nvSpPr>
+          <p:cNvPr id="4" name="TextBox 3"/>
+          <p:cNvSpPr txBox="1"/>
+          <p:nvPr/>
+        </p:nvSpPr>
+        <p:spPr>
+          <a:xfrm>
+            <a:off x="640080" y="1078992"/>
+            <a:ext cx="10881360" cy="457200"/>
+          </a:xfrm>
+          <a:prstGeom prst="rect">
+            <a:avLst/>
+          </a:prstGeom>
+          <a:noFill/>
+        </p:spPr>
+        <p:txBody>
+          <a:bodyPr wrap="square">
+            <a:spAutoFit/>
+          </a:bodyPr>
+          <a:lstStyle/>
+          <a:p>
+            <a:pPr algn="l">
+              <a:spcAft>
+                <a:spcPts val="600"/>
+              </a:spcAft>
+            </a:pPr>
+            <a:r>
+              <a:rPr sz="1500" b="0">
+                <a:solidFill>
+                  <a:srgbClr val="5A6672"/>
+                </a:solidFill>
+                <a:latin typeface="맑은 고딕"/>
+              </a:rPr>
+              <a:t>이름과 라이선스 위치를 알아 둔다</a:t>
+            </a:r>
+          </a:p>
+        </p:txBody>
+      </p:sp>
+      <p:sp>
+        <p:nvSpPr>
+          <p:cNvPr id="5" name="TextBox 4"/>
+          <p:cNvSpPr txBox="1"/>
+          <p:nvPr/>
+        </p:nvSpPr>
+        <p:spPr>
+          <a:xfrm>
+            <a:off x="640080" y="1737360"/>
+            <a:ext cx="10881360" cy="4754880"/>
+          </a:xfrm>
+          <a:prstGeom prst="rect">
+            <a:avLst/>
+          </a:prstGeom>
+          <a:noFill/>
+        </p:spPr>
+        <p:txBody>
+          <a:bodyPr wrap="square">
+            <a:spAutoFit/>
+          </a:bodyPr>
+          <a:lstStyle/>
+          <a:p>
+            <a:pPr algn="l">
+              <a:spcAft>
+                <a:spcPts val="1000"/>
+              </a:spcAft>
+            </a:pPr>
+            <a:r>
+              <a:rPr sz="1700" b="0">
+                <a:solidFill>
+                  <a:srgbClr val="222222"/>
+                </a:solidFill>
+                <a:latin typeface="맑은 고딕"/>
+              </a:rPr>
+              <a:t>•  Standby의 블록 변경 추적: 증분 백업 가속</a:t>
+            </a:r>
+          </a:p>
+          <a:p>
+            <a:pPr algn="l">
+              <a:spcAft>
+                <a:spcPts val="1000"/>
+              </a:spcAft>
+            </a:pPr>
+            <a:r>
+              <a:rPr sz="1700" b="0">
+                <a:solidFill>
+                  <a:srgbClr val="222222"/>
+                </a:solidFill>
+                <a:latin typeface="맑은 고딕"/>
+              </a:rPr>
+              <a:t>•  Far Sync, Real-Time Cascading (10장)</a:t>
+            </a:r>
+          </a:p>
+          <a:p>
+            <a:pPr algn="l">
+              <a:spcAft>
+                <a:spcPts val="1000"/>
+              </a:spcAft>
+            </a:pPr>
+            <a:r>
+              <a:rPr sz="1700" b="0">
+                <a:solidFill>
+                  <a:srgbClr val="222222"/>
+                </a:solidFill>
+                <a:latin typeface="맑은 고딕"/>
+              </a:rPr>
+              <a:t>•  DBMS_ROLLING 롤링 업그레이드</a:t>
+            </a:r>
+          </a:p>
+          <a:p>
+            <a:pPr algn="l">
+              <a:spcAft>
+                <a:spcPts val="1000"/>
+              </a:spcAft>
+            </a:pPr>
+            <a:r>
+              <a:rPr sz="1700" b="0">
+                <a:solidFill>
+                  <a:srgbClr val="222222"/>
+                </a:solidFill>
+                <a:latin typeface="맑은 고딕"/>
+              </a:rPr>
+              <a:t>•  Global Data Services, Application Continuity</a:t>
+            </a:r>
+          </a:p>
+          <a:p>
+            <a:pPr algn="l">
+              <a:spcAft>
+                <a:spcPts val="1000"/>
+              </a:spcAft>
+            </a:pPr>
+            <a:r>
+              <a:rPr sz="1700" b="0">
+                <a:solidFill>
+                  <a:srgbClr val="222222"/>
+                </a:solidFill>
+                <a:latin typeface="맑은 고딕"/>
+              </a:rPr>
+              <a:t>•  설치 스위치 없음, 쓰는 순간 옵션 사용</a:t>
+            </a:r>
+          </a:p>
+        </p:txBody>
+      </p:sp>
+    </p:spTree>
+  </p:cSld>
+  <p:clrMapOvr>
+    <a:masterClrMapping/>
+  </p:clrMapOvr>
+</p:sld>
+</file>
+
+<file path=ppt/slides/slide43.xml><?xml version="1.0" encoding="utf-8"?>
+<p:sld xmlns:a="http://schemas.openxmlformats.org/drawingml/2006/main" xmlns:p="http://schemas.openxmlformats.org/presentationml/2006/main" xmlns:r="http://schemas.openxmlformats.org/officeDocument/2006/relationships">
+  <p:cSld>
+    <p:spTree>
+      <p:nvGrpSpPr>
+        <p:cNvPr id="1" name=""/>
+        <p:cNvGrpSpPr/>
+        <p:nvPr/>
+      </p:nvGrpSpPr>
+      <p:grpSpPr/>
+      <p:sp>
+        <p:nvSpPr>
+          <p:cNvPr id="2" name="Rectangle 1"/>
+          <p:cNvSpPr/>
+          <p:nvPr/>
+        </p:nvSpPr>
+        <p:spPr>
+          <a:xfrm>
+            <a:off x="0" y="0"/>
+            <a:ext cx="12191695" cy="6858000"/>
+          </a:xfrm>
+          <a:prstGeom prst="rect">
+            <a:avLst/>
+          </a:prstGeom>
+          <a:solidFill>
+            <a:srgbClr val="C0392B"/>
+          </a:solidFill>
+          <a:ln>
+            <a:noFill/>
+          </a:ln>
+          <a:effectLst/>
+        </p:spPr>
+        <p:style>
+          <a:lnRef idx="1">
+            <a:schemeClr val="accent1"/>
+          </a:lnRef>
+          <a:fillRef idx="3">
+            <a:schemeClr val="accent1"/>
+          </a:fillRef>
+          <a:effectRef idx="2">
+            <a:schemeClr val="accent1"/>
+          </a:effectRef>
+          <a:fontRef idx="minor">
+            <a:schemeClr val="lt1"/>
+          </a:fontRef>
+        </p:style>
+        <p:txBody>
+          <a:bodyPr rtlCol="0" anchor="ctr"/>
+          <a:lstStyle/>
+          <a:p>
+            <a:pPr algn="ctr"/>
+          </a:p>
+        </p:txBody>
+      </p:sp>
+      <p:sp>
+        <p:nvSpPr>
+          <p:cNvPr id="3" name="TextBox 2"/>
+          <p:cNvSpPr txBox="1"/>
+          <p:nvPr/>
+        </p:nvSpPr>
+        <p:spPr>
+          <a:xfrm>
+            <a:off x="822960" y="2011680"/>
+            <a:ext cx="10515600" cy="1097280"/>
+          </a:xfrm>
+          <a:prstGeom prst="rect">
+            <a:avLst/>
+          </a:prstGeom>
+          <a:noFill/>
+        </p:spPr>
+        <p:txBody>
+          <a:bodyPr wrap="square">
+            <a:spAutoFit/>
+          </a:bodyPr>
+          <a:lstStyle/>
+          <a:p>
+            <a:pPr algn="l">
+              <a:spcAft>
+                <a:spcPts val="600"/>
+              </a:spcAft>
+            </a:pPr>
+            <a:r>
+              <a:rPr sz="4000" b="1">
+                <a:solidFill>
+                  <a:srgbClr val="FFFFFF"/>
+                </a:solidFill>
+                <a:latin typeface="맑은 고딕"/>
+              </a:rPr>
+              <a:t>9.9</a:t>
+            </a:r>
+          </a:p>
+        </p:txBody>
+      </p:sp>
+      <p:sp>
+        <p:nvSpPr>
+          <p:cNvPr id="4" name="TextBox 3"/>
+          <p:cNvSpPr txBox="1"/>
+          <p:nvPr/>
+        </p:nvSpPr>
+        <p:spPr>
+          <a:xfrm>
+            <a:off x="822960" y="3017520"/>
+            <a:ext cx="10515600" cy="914400"/>
+          </a:xfrm>
+          <a:prstGeom prst="rect">
+            <a:avLst/>
+          </a:prstGeom>
+          <a:noFill/>
+        </p:spPr>
+        <p:txBody>
+          <a:bodyPr wrap="square">
+            <a:spAutoFit/>
+          </a:bodyPr>
+          <a:lstStyle/>
+          <a:p>
+            <a:pPr algn="l">
+              <a:spcAft>
+                <a:spcPts val="600"/>
+              </a:spcAft>
+            </a:pPr>
+            <a:r>
+              <a:rPr sz="2800" b="1">
+                <a:solidFill>
+                  <a:srgbClr val="FFFFFF"/>
+                </a:solidFill>
+                <a:latin typeface="맑은 고딕"/>
+              </a:rPr>
+              <a:t>옵션 없이 쓸 수 있는 대안</a:t>
+            </a:r>
+          </a:p>
+        </p:txBody>
+      </p:sp>
+      <p:sp>
+        <p:nvSpPr>
+          <p:cNvPr id="5" name="Rectangle 4"/>
+          <p:cNvSpPr/>
+          <p:nvPr/>
+        </p:nvSpPr>
+        <p:spPr>
+          <a:xfrm>
+            <a:off x="822960" y="4114800"/>
+            <a:ext cx="5486400" cy="54864"/>
+          </a:xfrm>
+          <a:prstGeom prst="rect">
+            <a:avLst/>
+          </a:prstGeom>
+          <a:solidFill>
+            <a:srgbClr val="FFFFFF"/>
+          </a:solidFill>
+          <a:ln>
+            <a:noFill/>
+          </a:ln>
+          <a:effectLst/>
+        </p:spPr>
+        <p:style>
+          <a:lnRef idx="1">
+            <a:schemeClr val="accent1"/>
+          </a:lnRef>
+          <a:fillRef idx="3">
+            <a:schemeClr val="accent1"/>
+          </a:fillRef>
+          <a:effectRef idx="2">
+            <a:schemeClr val="accent1"/>
+          </a:effectRef>
+          <a:fontRef idx="minor">
+            <a:schemeClr val="lt1"/>
+          </a:fontRef>
+        </p:style>
+        <p:txBody>
+          <a:bodyPr rtlCol="0" anchor="ctr"/>
+          <a:lstStyle/>
+          <a:p>
+            <a:pPr algn="ctr"/>
+          </a:p>
+        </p:txBody>
+      </p:sp>
+      <p:sp>
+        <p:nvSpPr>
+          <p:cNvPr id="6" name="TextBox 5"/>
+          <p:cNvSpPr txBox="1"/>
+          <p:nvPr/>
+        </p:nvSpPr>
+        <p:spPr>
+          <a:xfrm>
+            <a:off x="822960" y="4297680"/>
+            <a:ext cx="10058400" cy="2011680"/>
+          </a:xfrm>
+          <a:prstGeom prst="rect">
+            <a:avLst/>
+          </a:prstGeom>
+          <a:noFill/>
+        </p:spPr>
+        <p:txBody>
+          <a:bodyPr wrap="square">
+            <a:spAutoFit/>
+          </a:bodyPr>
+          <a:lstStyle/>
+          <a:p>
+            <a:pPr algn="l">
+              <a:spcAft>
+                <a:spcPts val="800"/>
+              </a:spcAft>
+            </a:pPr>
+            <a:r>
+              <a:rPr sz="1600" b="0">
+                <a:solidFill>
+                  <a:srgbClr val="FFFFFF"/>
+                </a:solidFill>
+                <a:latin typeface="맑은 고딕"/>
+              </a:rPr>
+              <a:t>•  MOUNTED Standby</a:t>
+            </a:r>
+          </a:p>
+          <a:p>
+            <a:pPr algn="l">
+              <a:spcAft>
+                <a:spcPts val="800"/>
+              </a:spcAft>
+            </a:pPr>
+            <a:r>
+              <a:rPr sz="1600" b="0">
+                <a:solidFill>
+                  <a:srgbClr val="FFFFFF"/>
+                </a:solidFill>
+                <a:latin typeface="맑은 고딕"/>
+              </a:rPr>
+              <a:t>•  적용을 멈추고 READ ONLY로 여는 방식</a:t>
+            </a:r>
+          </a:p>
+          <a:p>
+            <a:pPr algn="l">
+              <a:spcAft>
+                <a:spcPts val="800"/>
+              </a:spcAft>
+            </a:pPr>
+            <a:r>
+              <a:rPr sz="1600" b="0">
+                <a:solidFill>
+                  <a:srgbClr val="FFFFFF"/>
+                </a:solidFill>
+                <a:latin typeface="맑은 고딕"/>
+              </a:rPr>
+              <a:t>•  선택지 비교</a:t>
+            </a:r>
+          </a:p>
+        </p:txBody>
+      </p:sp>
+    </p:spTree>
+  </p:cSld>
+  <p:clrMapOvr>
+    <a:masterClrMapping/>
+  </p:clrMapOvr>
+</p:sld>
+</file>
+
+<file path=ppt/slides/slide44.xml><?xml version="1.0" encoding="utf-8"?>
+<p:sld xmlns:a="http://schemas.openxmlformats.org/drawingml/2006/main" xmlns:p="http://schemas.openxmlformats.org/presentationml/2006/main" xmlns:r="http://schemas.openxmlformats.org/officeDocument/2006/relationships">
+  <p:cSld>
+    <p:spTree>
+      <p:nvGrpSpPr>
+        <p:cNvPr id="1" name=""/>
+        <p:cNvGrpSpPr/>
+        <p:nvPr/>
+      </p:nvGrpSpPr>
+      <p:grpSpPr/>
+      <p:sp>
+        <p:nvSpPr>
+          <p:cNvPr id="2" name="Rectangle 1"/>
+          <p:cNvSpPr/>
+          <p:nvPr/>
+        </p:nvSpPr>
+        <p:spPr>
+          <a:xfrm>
+            <a:off x="0" y="0"/>
+            <a:ext cx="12191695" cy="1005840"/>
+          </a:xfrm>
+          <a:prstGeom prst="rect">
+            <a:avLst/>
+          </a:prstGeom>
+          <a:solidFill>
+            <a:srgbClr val="C0392B"/>
+          </a:solidFill>
+          <a:ln>
+            <a:noFill/>
+          </a:ln>
+          <a:effectLst/>
+        </p:spPr>
+        <p:style>
+          <a:lnRef idx="1">
+            <a:schemeClr val="accent1"/>
+          </a:lnRef>
+          <a:fillRef idx="3">
+            <a:schemeClr val="accent1"/>
+          </a:fillRef>
+          <a:effectRef idx="2">
+            <a:schemeClr val="accent1"/>
+          </a:effectRef>
+          <a:fontRef idx="minor">
+            <a:schemeClr val="lt1"/>
+          </a:fontRef>
+        </p:style>
+        <p:txBody>
+          <a:bodyPr rtlCol="0" anchor="ctr"/>
+          <a:lstStyle/>
+          <a:p>
+            <a:pPr algn="ctr"/>
+          </a:p>
+        </p:txBody>
+      </p:sp>
+      <p:sp>
+        <p:nvSpPr>
+          <p:cNvPr id="3" name="TextBox 2"/>
+          <p:cNvSpPr txBox="1"/>
+          <p:nvPr/>
+        </p:nvSpPr>
+        <p:spPr>
+          <a:xfrm>
+            <a:off x="548640" y="91440"/>
+            <a:ext cx="10972800" cy="777240"/>
+          </a:xfrm>
+          <a:prstGeom prst="rect">
+            <a:avLst/>
+          </a:prstGeom>
+          <a:noFill/>
+        </p:spPr>
+        <p:txBody>
+          <a:bodyPr wrap="square">
+            <a:spAutoFit/>
+          </a:bodyPr>
+          <a:lstStyle/>
+          <a:p>
+            <a:pPr algn="l">
+              <a:spcAft>
+                <a:spcPts val="600"/>
+              </a:spcAft>
+            </a:pPr>
+            <a:r>
+              <a:rPr sz="2600" b="1">
+                <a:solidFill>
+                  <a:srgbClr val="FFFFFF"/>
+                </a:solidFill>
+                <a:latin typeface="맑은 고딕"/>
+              </a:rPr>
+              <a:t>MOUNTED Standby</a:t>
+            </a:r>
+          </a:p>
+        </p:txBody>
+      </p:sp>
+      <p:sp>
+        <p:nvSpPr>
+          <p:cNvPr id="4" name="TextBox 3"/>
+          <p:cNvSpPr txBox="1"/>
+          <p:nvPr/>
+        </p:nvSpPr>
+        <p:spPr>
+          <a:xfrm>
+            <a:off x="640080" y="1078992"/>
+            <a:ext cx="10881360" cy="457200"/>
+          </a:xfrm>
+          <a:prstGeom prst="rect">
+            <a:avLst/>
+          </a:prstGeom>
+          <a:noFill/>
+        </p:spPr>
+        <p:txBody>
+          <a:bodyPr wrap="square">
+            <a:spAutoFit/>
+          </a:bodyPr>
+          <a:lstStyle/>
+          <a:p>
+            <a:pPr algn="l">
+              <a:spcAft>
+                <a:spcPts val="600"/>
+              </a:spcAft>
+            </a:pPr>
+            <a:r>
+              <a:rPr sz="1500" b="0">
+                <a:solidFill>
+                  <a:srgbClr val="5A6672"/>
+                </a:solidFill>
+                <a:latin typeface="맑은 고딕"/>
+              </a:rPr>
+              <a:t>보호 수준과 역할 전환 능력은 그대로</a:t>
+            </a:r>
+          </a:p>
+        </p:txBody>
+      </p:sp>
+      <p:sp>
+        <p:nvSpPr>
+          <p:cNvPr id="5" name="TextBox 4"/>
+          <p:cNvSpPr txBox="1"/>
+          <p:nvPr/>
+        </p:nvSpPr>
+        <p:spPr>
+          <a:xfrm>
+            <a:off x="640080" y="1737360"/>
+            <a:ext cx="10881360" cy="4754880"/>
+          </a:xfrm>
+          <a:prstGeom prst="rect">
+            <a:avLst/>
+          </a:prstGeom>
+          <a:noFill/>
+        </p:spPr>
+        <p:txBody>
+          <a:bodyPr wrap="square">
+            <a:spAutoFit/>
+          </a:bodyPr>
+          <a:lstStyle/>
+          <a:p>
+            <a:pPr algn="l">
+              <a:spcAft>
+                <a:spcPts val="1000"/>
+              </a:spcAft>
+            </a:pPr>
+            <a:r>
+              <a:rPr sz="1700" b="0">
+                <a:solidFill>
+                  <a:srgbClr val="222222"/>
+                </a:solidFill>
+                <a:latin typeface="맑은 고딕"/>
+              </a:rPr>
+              <a:t>•  사용자 테이블 조회: ORA-01219</a:t>
+            </a:r>
+          </a:p>
+          <a:p>
+            <a:pPr algn="l">
+              <a:spcAft>
+                <a:spcPts val="1000"/>
+              </a:spcAft>
+            </a:pPr>
+            <a:r>
+              <a:rPr sz="1700" b="0">
+                <a:solidFill>
+                  <a:srgbClr val="222222"/>
+                </a:solidFill>
+                <a:latin typeface="맑은 고딕"/>
+              </a:rPr>
+              <a:t>•  고정 테이블·V$ 뷰는 조회 가능</a:t>
+            </a:r>
+          </a:p>
+          <a:p>
+            <a:pPr algn="l">
+              <a:spcAft>
+                <a:spcPts val="1000"/>
+              </a:spcAft>
+            </a:pPr>
+            <a:r>
+              <a:rPr sz="1700" b="0">
+                <a:solidFill>
+                  <a:srgbClr val="222222"/>
+                </a:solidFill>
+                <a:latin typeface="맑은 고딕"/>
+              </a:rPr>
+              <a:t>•  Broker 명령 사용 가능, Real Time Query OFF</a:t>
+            </a:r>
+          </a:p>
+          <a:p>
+            <a:pPr algn="l">
+              <a:spcAft>
+                <a:spcPts val="1000"/>
+              </a:spcAft>
+            </a:pPr>
+            <a:r>
+              <a:rPr sz="1700" b="0">
+                <a:solidFill>
+                  <a:srgbClr val="222222"/>
+                </a:solidFill>
+                <a:latin typeface="맑은 고딕"/>
+              </a:rPr>
+              <a:t>•  RMAN 백업 가능, BCT만 불가</a:t>
+            </a:r>
+          </a:p>
+          <a:p>
+            <a:pPr algn="l">
+              <a:spcAft>
+                <a:spcPts val="1000"/>
+              </a:spcAft>
+            </a:pPr>
+            <a:r>
+              <a:rPr sz="1700" b="0">
+                <a:solidFill>
+                  <a:srgbClr val="222222"/>
+                </a:solidFill>
+                <a:latin typeface="맑은 고딕"/>
+              </a:rPr>
+              <a:t>•  조회 서비스 접속은 ORA-12514</a:t>
+            </a:r>
+          </a:p>
+        </p:txBody>
+      </p:sp>
+    </p:spTree>
+  </p:cSld>
+  <p:clrMapOvr>
+    <a:masterClrMapping/>
+  </p:clrMapOvr>
+</p:sld>
+</file>
+
+<file path=ppt/slides/slide45.xml><?xml version="1.0" encoding="utf-8"?>
+<p:sld xmlns:a="http://schemas.openxmlformats.org/drawingml/2006/main" xmlns:p="http://schemas.openxmlformats.org/presentationml/2006/main" xmlns:r="http://schemas.openxmlformats.org/officeDocument/2006/relationships">
+  <p:cSld>
+    <p:spTree>
+      <p:nvGrpSpPr>
+        <p:cNvPr id="1" name=""/>
+        <p:cNvGrpSpPr/>
+        <p:nvPr/>
+      </p:nvGrpSpPr>
+      <p:grpSpPr/>
+      <p:sp>
+        <p:nvSpPr>
+          <p:cNvPr id="2" name="Rectangle 1"/>
+          <p:cNvSpPr/>
+          <p:nvPr/>
+        </p:nvSpPr>
+        <p:spPr>
+          <a:xfrm>
+            <a:off x="0" y="0"/>
+            <a:ext cx="12191695" cy="1005840"/>
+          </a:xfrm>
+          <a:prstGeom prst="rect">
+            <a:avLst/>
+          </a:prstGeom>
+          <a:solidFill>
+            <a:srgbClr val="C0392B"/>
+          </a:solidFill>
+          <a:ln>
+            <a:noFill/>
+          </a:ln>
+          <a:effectLst/>
+        </p:spPr>
+        <p:style>
+          <a:lnRef idx="1">
+            <a:schemeClr val="accent1"/>
+          </a:lnRef>
+          <a:fillRef idx="3">
+            <a:schemeClr val="accent1"/>
+          </a:fillRef>
+          <a:effectRef idx="2">
+            <a:schemeClr val="accent1"/>
+          </a:effectRef>
+          <a:fontRef idx="minor">
+            <a:schemeClr val="lt1"/>
+          </a:fontRef>
+        </p:style>
+        <p:txBody>
+          <a:bodyPr rtlCol="0" anchor="ctr"/>
+          <a:lstStyle/>
+          <a:p>
+            <a:pPr algn="ctr"/>
+          </a:p>
+        </p:txBody>
+      </p:sp>
+      <p:sp>
+        <p:nvSpPr>
+          <p:cNvPr id="3" name="TextBox 2"/>
+          <p:cNvSpPr txBox="1"/>
+          <p:nvPr/>
+        </p:nvSpPr>
+        <p:spPr>
+          <a:xfrm>
+            <a:off x="548640" y="91440"/>
+            <a:ext cx="10972800" cy="777240"/>
+          </a:xfrm>
+          <a:prstGeom prst="rect">
+            <a:avLst/>
+          </a:prstGeom>
+          <a:noFill/>
+        </p:spPr>
+        <p:txBody>
+          <a:bodyPr wrap="square">
+            <a:spAutoFit/>
+          </a:bodyPr>
+          <a:lstStyle/>
+          <a:p>
+            <a:pPr algn="l">
+              <a:spcAft>
+                <a:spcPts val="600"/>
+              </a:spcAft>
+            </a:pPr>
+            <a:r>
+              <a:rPr sz="2600" b="1">
+                <a:solidFill>
+                  <a:srgbClr val="FFFFFF"/>
+                </a:solidFill>
+                <a:latin typeface="맑은 고딕"/>
+              </a:rPr>
+              <a:t>적용을 멈추고 READ ONLY로 열기</a:t>
+            </a:r>
+          </a:p>
+        </p:txBody>
+      </p:sp>
+      <p:sp>
+        <p:nvSpPr>
+          <p:cNvPr id="4" name="TextBox 3"/>
+          <p:cNvSpPr txBox="1"/>
+          <p:nvPr/>
+        </p:nvSpPr>
+        <p:spPr>
+          <a:xfrm>
+            <a:off x="640080" y="1078992"/>
+            <a:ext cx="10881360" cy="457200"/>
+          </a:xfrm>
+          <a:prstGeom prst="rect">
+            <a:avLst/>
+          </a:prstGeom>
+          <a:noFill/>
+        </p:spPr>
+        <p:txBody>
+          <a:bodyPr wrap="square">
+            <a:spAutoFit/>
+          </a:bodyPr>
+          <a:lstStyle/>
+          <a:p>
+            <a:pPr algn="l">
+              <a:spcAft>
+                <a:spcPts val="600"/>
+              </a:spcAft>
+            </a:pPr>
+            <a:r>
+              <a:rPr sz="1500" b="0">
+                <a:solidFill>
+                  <a:srgbClr val="5A6672"/>
+                </a:solidFill>
+                <a:latin typeface="맑은 고딕"/>
+              </a:rPr>
+              <a:t>조회 창 운영</a:t>
+            </a:r>
+          </a:p>
+        </p:txBody>
+      </p:sp>
+      <p:sp>
+        <p:nvSpPr>
+          <p:cNvPr id="5" name="TextBox 4"/>
+          <p:cNvSpPr txBox="1"/>
+          <p:nvPr/>
+        </p:nvSpPr>
+        <p:spPr>
+          <a:xfrm>
+            <a:off x="640080" y="1737360"/>
+            <a:ext cx="10881360" cy="4754880"/>
+          </a:xfrm>
+          <a:prstGeom prst="rect">
+            <a:avLst/>
+          </a:prstGeom>
+          <a:noFill/>
+        </p:spPr>
+        <p:txBody>
+          <a:bodyPr wrap="square">
+            <a:spAutoFit/>
+          </a:bodyPr>
+          <a:lstStyle/>
+          <a:p>
+            <a:pPr algn="l">
+              <a:spcAft>
+                <a:spcPts val="1000"/>
+              </a:spcAft>
+            </a:pPr>
+            <a:r>
+              <a:rPr sz="1700" b="0">
+                <a:solidFill>
+                  <a:srgbClr val="222222"/>
+                </a:solidFill>
+                <a:latin typeface="맑은 고딕"/>
+              </a:rPr>
+              <a:t>•  적용을 멈추고 열면 옵션 없이 조회</a:t>
+            </a:r>
+          </a:p>
+          <a:p>
+            <a:pPr algn="l">
+              <a:spcAft>
+                <a:spcPts val="1000"/>
+              </a:spcAft>
+            </a:pPr>
+            <a:r>
+              <a:rPr sz="1700" b="0">
+                <a:solidFill>
+                  <a:srgbClr val="222222"/>
+                </a:solidFill>
+                <a:latin typeface="맑은 고딕"/>
+              </a:rPr>
+              <a:t>•  데이터는 멈춘 시점에 고정</a:t>
+            </a:r>
+          </a:p>
+          <a:p>
+            <a:pPr algn="l">
+              <a:spcAft>
+                <a:spcPts val="1000"/>
+              </a:spcAft>
+            </a:pPr>
+            <a:r>
+              <a:rPr sz="1700" b="0">
+                <a:solidFill>
+                  <a:srgbClr val="222222"/>
+                </a:solidFill>
+                <a:latin typeface="맑은 고딕"/>
+              </a:rPr>
+              <a:t>•  전송은 계속되어 손실 보호는 유지</a:t>
+            </a:r>
+          </a:p>
+          <a:p>
+            <a:pPr algn="l">
+              <a:spcAft>
+                <a:spcPts val="1000"/>
+              </a:spcAft>
+            </a:pPr>
+            <a:r>
+              <a:rPr sz="1700" b="0">
+                <a:solidFill>
+                  <a:srgbClr val="222222"/>
+                </a:solidFill>
+                <a:latin typeface="맑은 고딕"/>
+              </a:rPr>
+              <a:t>•  대가는 apply lag와 늘어나는 Failover 시간</a:t>
+            </a:r>
+          </a:p>
+          <a:p>
+            <a:pPr algn="l">
+              <a:spcAft>
+                <a:spcPts val="1000"/>
+              </a:spcAft>
+            </a:pPr>
+            <a:r>
+              <a:rPr sz="1700" b="0">
+                <a:solidFill>
+                  <a:srgbClr val="222222"/>
+                </a:solidFill>
+                <a:latin typeface="맑은 고딕"/>
+              </a:rPr>
+              <a:t>•  재개 전 반드시 재기동해 마운트로</a:t>
+            </a:r>
+          </a:p>
+        </p:txBody>
+      </p:sp>
+    </p:spTree>
+  </p:cSld>
+  <p:clrMapOvr>
+    <a:masterClrMapping/>
+  </p:clrMapOvr>
+</p:sld>
+</file>
+
+<file path=ppt/slides/slide46.xml><?xml version="1.0" encoding="utf-8"?>
+<p:sld xmlns:a="http://schemas.openxmlformats.org/drawingml/2006/main" xmlns:p="http://schemas.openxmlformats.org/presentationml/2006/main" xmlns:r="http://schemas.openxmlformats.org/officeDocument/2006/relationships">
+  <p:cSld>
+    <p:spTree>
+      <p:nvGrpSpPr>
+        <p:cNvPr id="1" name=""/>
+        <p:cNvGrpSpPr/>
+        <p:nvPr/>
+      </p:nvGrpSpPr>
+      <p:grpSpPr/>
+      <p:sp>
+        <p:nvSpPr>
+          <p:cNvPr id="2" name="Rectangle 1"/>
+          <p:cNvSpPr/>
+          <p:nvPr/>
+        </p:nvSpPr>
+        <p:spPr>
+          <a:xfrm>
+            <a:off x="0" y="0"/>
+            <a:ext cx="12191695" cy="1005840"/>
+          </a:xfrm>
+          <a:prstGeom prst="rect">
+            <a:avLst/>
+          </a:prstGeom>
+          <a:solidFill>
+            <a:srgbClr val="C0392B"/>
+          </a:solidFill>
+          <a:ln>
+            <a:noFill/>
+          </a:ln>
+          <a:effectLst/>
+        </p:spPr>
+        <p:style>
+          <a:lnRef idx="1">
+            <a:schemeClr val="accent1"/>
+          </a:lnRef>
+          <a:fillRef idx="3">
+            <a:schemeClr val="accent1"/>
+          </a:fillRef>
+          <a:effectRef idx="2">
+            <a:schemeClr val="accent1"/>
+          </a:effectRef>
+          <a:fontRef idx="minor">
+            <a:schemeClr val="lt1"/>
+          </a:fontRef>
+        </p:style>
+        <p:txBody>
+          <a:bodyPr rtlCol="0" anchor="ctr"/>
+          <a:lstStyle/>
+          <a:p>
+            <a:pPr algn="ctr"/>
+          </a:p>
+        </p:txBody>
+      </p:sp>
+      <p:sp>
+        <p:nvSpPr>
+          <p:cNvPr id="3" name="TextBox 2"/>
+          <p:cNvSpPr txBox="1"/>
+          <p:nvPr/>
+        </p:nvSpPr>
+        <p:spPr>
+          <a:xfrm>
+            <a:off x="548640" y="91440"/>
+            <a:ext cx="10972800" cy="777240"/>
+          </a:xfrm>
+          <a:prstGeom prst="rect">
+            <a:avLst/>
+          </a:prstGeom>
+          <a:noFill/>
+        </p:spPr>
+        <p:txBody>
+          <a:bodyPr wrap="square">
+            <a:spAutoFit/>
+          </a:bodyPr>
+          <a:lstStyle/>
+          <a:p>
+            <a:pPr algn="l">
+              <a:spcAft>
+                <a:spcPts val="600"/>
+              </a:spcAft>
+            </a:pPr>
+            <a:r>
+              <a:rPr sz="2600" b="1">
+                <a:solidFill>
+                  <a:srgbClr val="FFFFFF"/>
+                </a:solidFill>
+                <a:latin typeface="맑은 고딕"/>
+              </a:rPr>
+              <a:t>선택지 비교</a:t>
+            </a:r>
+          </a:p>
+        </p:txBody>
+      </p:sp>
+      <p:sp>
+        <p:nvSpPr>
+          <p:cNvPr id="4" name="TextBox 3"/>
+          <p:cNvSpPr txBox="1"/>
+          <p:nvPr/>
+        </p:nvSpPr>
+        <p:spPr>
+          <a:xfrm>
+            <a:off x="640080" y="1078992"/>
+            <a:ext cx="10881360" cy="457200"/>
+          </a:xfrm>
+          <a:prstGeom prst="rect">
+            <a:avLst/>
+          </a:prstGeom>
+          <a:noFill/>
+        </p:spPr>
+        <p:txBody>
+          <a:bodyPr wrap="square">
+            <a:spAutoFit/>
+          </a:bodyPr>
+          <a:lstStyle/>
+          <a:p>
+            <a:pPr algn="l">
+              <a:spcAft>
+                <a:spcPts val="600"/>
+              </a:spcAft>
+            </a:pPr>
+            <a:r>
+              <a:rPr sz="1500" b="0">
+                <a:solidFill>
+                  <a:srgbClr val="5A6672"/>
+                </a:solidFill>
+                <a:latin typeface="맑은 고딕"/>
+              </a:rPr>
+              <a:t>무엇을 포기하는지 알고 고른다</a:t>
+            </a:r>
+          </a:p>
+        </p:txBody>
+      </p:sp>
+      <p:sp>
+        <p:nvSpPr>
+          <p:cNvPr id="5" name="TextBox 4"/>
+          <p:cNvSpPr txBox="1"/>
+          <p:nvPr/>
+        </p:nvSpPr>
+        <p:spPr>
+          <a:xfrm>
+            <a:off x="640080" y="1737360"/>
+            <a:ext cx="10881360" cy="4754880"/>
+          </a:xfrm>
+          <a:prstGeom prst="rect">
+            <a:avLst/>
+          </a:prstGeom>
+          <a:noFill/>
+        </p:spPr>
+        <p:txBody>
+          <a:bodyPr wrap="square">
+            <a:spAutoFit/>
+          </a:bodyPr>
+          <a:lstStyle/>
+          <a:p>
+            <a:pPr algn="l">
+              <a:spcAft>
+                <a:spcPts val="1000"/>
+              </a:spcAft>
+            </a:pPr>
+            <a:r>
+              <a:rPr sz="1700" b="0">
+                <a:solidFill>
+                  <a:srgbClr val="222222"/>
+                </a:solidFill>
+                <a:latin typeface="맑은 고딕"/>
+              </a:rPr>
+              <a:t>•  MOUNTED: 조회 불가, 감시만, 기본 기능</a:t>
+            </a:r>
+          </a:p>
+          <a:p>
+            <a:pPr algn="l">
+              <a:spcAft>
+                <a:spcPts val="1000"/>
+              </a:spcAft>
+            </a:pPr>
+            <a:r>
+              <a:rPr sz="1700" b="0">
+                <a:solidFill>
+                  <a:srgbClr val="222222"/>
+                </a:solidFill>
+                <a:latin typeface="맑은 고딕"/>
+              </a:rPr>
+              <a:t>•  READ ONLY(적용 정지): 고정 데이터, 기본 기능</a:t>
+            </a:r>
+          </a:p>
+          <a:p>
+            <a:pPr algn="l">
+              <a:spcAft>
+                <a:spcPts val="1000"/>
+              </a:spcAft>
+            </a:pPr>
+            <a:r>
+              <a:rPr sz="1700" b="0">
+                <a:solidFill>
+                  <a:srgbClr val="222222"/>
+                </a:solidFill>
+                <a:latin typeface="맑은 고딕"/>
+              </a:rPr>
+              <a:t>•  READ ONLY WITH APPLY: 초 단위 신선도, 옵션</a:t>
+            </a:r>
+          </a:p>
+          <a:p>
+            <a:pPr algn="l">
+              <a:spcAft>
+                <a:spcPts val="1000"/>
+              </a:spcAft>
+            </a:pPr>
+            <a:r>
+              <a:rPr sz="1700" b="0">
+                <a:solidFill>
+                  <a:srgbClr val="222222"/>
+                </a:solidFill>
+                <a:latin typeface="맑은 고딕"/>
+              </a:rPr>
+              <a:t>•  Snapshot Standby: 갱신 가능, 나중에 폐기 (11장)</a:t>
+            </a:r>
+          </a:p>
+          <a:p>
+            <a:pPr algn="l">
+              <a:spcAft>
+                <a:spcPts val="1000"/>
+              </a:spcAft>
+            </a:pPr>
+            <a:r>
+              <a:rPr sz="1700" b="0">
+                <a:solidFill>
+                  <a:srgbClr val="222222"/>
+                </a:solidFill>
+                <a:latin typeface="맑은 고딕"/>
+              </a:rPr>
+              <a:t>•  Logical Standby: 별도 객체 가능 (12장)</a:t>
+            </a:r>
+          </a:p>
+        </p:txBody>
+      </p:sp>
+    </p:spTree>
+  </p:cSld>
+  <p:clrMapOvr>
+    <a:masterClrMapping/>
+  </p:clrMapOvr>
+</p:sld>
+</file>
+
+<file path=ppt/slides/slide47.xml><?xml version="1.0" encoding="utf-8"?>
+<p:sld xmlns:a="http://schemas.openxmlformats.org/drawingml/2006/main" xmlns:p="http://schemas.openxmlformats.org/presentationml/2006/main" xmlns:r="http://schemas.openxmlformats.org/officeDocument/2006/relationships">
+  <p:cSld>
+    <p:spTree>
+      <p:nvGrpSpPr>
+        <p:cNvPr id="1" name=""/>
+        <p:cNvGrpSpPr/>
+        <p:nvPr/>
+      </p:nvGrpSpPr>
+      <p:grpSpPr/>
+      <p:sp>
+        <p:nvSpPr>
+          <p:cNvPr id="2" name="Rectangle 1"/>
+          <p:cNvSpPr/>
+          <p:nvPr/>
+        </p:nvSpPr>
+        <p:spPr>
+          <a:xfrm>
+            <a:off x="0" y="0"/>
+            <a:ext cx="12191695" cy="6858000"/>
+          </a:xfrm>
+          <a:prstGeom prst="rect">
+            <a:avLst/>
+          </a:prstGeom>
+          <a:solidFill>
+            <a:srgbClr val="C0392B"/>
+          </a:solidFill>
+          <a:ln>
+            <a:noFill/>
+          </a:ln>
+          <a:effectLst/>
+        </p:spPr>
+        <p:style>
+          <a:lnRef idx="1">
+            <a:schemeClr val="accent1"/>
+          </a:lnRef>
+          <a:fillRef idx="3">
+            <a:schemeClr val="accent1"/>
+          </a:fillRef>
+          <a:effectRef idx="2">
+            <a:schemeClr val="accent1"/>
+          </a:effectRef>
+          <a:fontRef idx="minor">
+            <a:schemeClr val="lt1"/>
+          </a:fontRef>
+        </p:style>
+        <p:txBody>
+          <a:bodyPr rtlCol="0" anchor="ctr"/>
+          <a:lstStyle/>
+          <a:p>
+            <a:pPr algn="ctr"/>
+          </a:p>
+        </p:txBody>
+      </p:sp>
+      <p:sp>
+        <p:nvSpPr>
+          <p:cNvPr id="3" name="TextBox 2"/>
+          <p:cNvSpPr txBox="1"/>
+          <p:nvPr/>
+        </p:nvSpPr>
+        <p:spPr>
+          <a:xfrm>
+            <a:off x="822960" y="2011680"/>
+            <a:ext cx="10515600" cy="1097280"/>
+          </a:xfrm>
+          <a:prstGeom prst="rect">
+            <a:avLst/>
+          </a:prstGeom>
+          <a:noFill/>
+        </p:spPr>
+        <p:txBody>
+          <a:bodyPr wrap="square">
+            <a:spAutoFit/>
+          </a:bodyPr>
+          <a:lstStyle/>
+          <a:p>
+            <a:pPr algn="l">
+              <a:spcAft>
+                <a:spcPts val="600"/>
+              </a:spcAft>
+            </a:pPr>
+            <a:r>
+              <a:rPr sz="4000" b="1">
+                <a:solidFill>
+                  <a:srgbClr val="FFFFFF"/>
+                </a:solidFill>
+                <a:latin typeface="맑은 고딕"/>
+              </a:rPr>
+              <a:t>9.10</a:t>
+            </a:r>
+          </a:p>
+        </p:txBody>
+      </p:sp>
+      <p:sp>
+        <p:nvSpPr>
+          <p:cNvPr id="4" name="TextBox 3"/>
+          <p:cNvSpPr txBox="1"/>
+          <p:nvPr/>
+        </p:nvSpPr>
+        <p:spPr>
+          <a:xfrm>
+            <a:off x="822960" y="3017520"/>
+            <a:ext cx="10515600" cy="914400"/>
+          </a:xfrm>
+          <a:prstGeom prst="rect">
+            <a:avLst/>
+          </a:prstGeom>
+          <a:noFill/>
+        </p:spPr>
+        <p:txBody>
+          <a:bodyPr wrap="square">
+            <a:spAutoFit/>
+          </a:bodyPr>
+          <a:lstStyle/>
+          <a:p>
+            <a:pPr algn="l">
+              <a:spcAft>
+                <a:spcPts val="600"/>
+              </a:spcAft>
+            </a:pPr>
+            <a:r>
+              <a:rPr sz="2800" b="1">
+                <a:solidFill>
+                  <a:srgbClr val="FFFFFF"/>
+                </a:solidFill>
+                <a:latin typeface="맑은 고딕"/>
+              </a:rPr>
+              <a:t>운영 시 주의점</a:t>
+            </a:r>
+          </a:p>
+        </p:txBody>
+      </p:sp>
+      <p:sp>
+        <p:nvSpPr>
+          <p:cNvPr id="5" name="Rectangle 4"/>
+          <p:cNvSpPr/>
+          <p:nvPr/>
+        </p:nvSpPr>
+        <p:spPr>
+          <a:xfrm>
+            <a:off x="822960" y="4114800"/>
+            <a:ext cx="5486400" cy="54864"/>
+          </a:xfrm>
+          <a:prstGeom prst="rect">
+            <a:avLst/>
+          </a:prstGeom>
+          <a:solidFill>
+            <a:srgbClr val="FFFFFF"/>
+          </a:solidFill>
+          <a:ln>
+            <a:noFill/>
+          </a:ln>
+          <a:effectLst/>
+        </p:spPr>
+        <p:style>
+          <a:lnRef idx="1">
+            <a:schemeClr val="accent1"/>
+          </a:lnRef>
+          <a:fillRef idx="3">
+            <a:schemeClr val="accent1"/>
+          </a:fillRef>
+          <a:effectRef idx="2">
+            <a:schemeClr val="accent1"/>
+          </a:effectRef>
+          <a:fontRef idx="minor">
+            <a:schemeClr val="lt1"/>
+          </a:fontRef>
+        </p:style>
+        <p:txBody>
+          <a:bodyPr rtlCol="0" anchor="ctr"/>
+          <a:lstStyle/>
+          <a:p>
+            <a:pPr algn="ctr"/>
+          </a:p>
+        </p:txBody>
+      </p:sp>
+      <p:sp>
+        <p:nvSpPr>
+          <p:cNvPr id="6" name="TextBox 5"/>
+          <p:cNvSpPr txBox="1"/>
+          <p:nvPr/>
+        </p:nvSpPr>
+        <p:spPr>
+          <a:xfrm>
+            <a:off x="822960" y="4297680"/>
+            <a:ext cx="10058400" cy="2011680"/>
+          </a:xfrm>
+          <a:prstGeom prst="rect">
+            <a:avLst/>
+          </a:prstGeom>
+          <a:noFill/>
+        </p:spPr>
+        <p:txBody>
+          <a:bodyPr wrap="square">
+            <a:spAutoFit/>
+          </a:bodyPr>
+          <a:lstStyle/>
+          <a:p>
+            <a:pPr algn="l">
+              <a:spcAft>
+                <a:spcPts val="800"/>
+              </a:spcAft>
+            </a:pPr>
+            <a:r>
+              <a:rPr sz="1600" b="0">
+                <a:solidFill>
+                  <a:srgbClr val="FFFFFF"/>
+                </a:solidFill>
+                <a:latin typeface="맑은 고딕"/>
+              </a:rPr>
+              <a:t>•  조회 부하와 apply lag</a:t>
+            </a:r>
+          </a:p>
+          <a:p>
+            <a:pPr algn="l">
+              <a:spcAft>
+                <a:spcPts val="800"/>
+              </a:spcAft>
+            </a:pPr>
+            <a:r>
+              <a:rPr sz="1600" b="0">
+                <a:solidFill>
+                  <a:srgbClr val="FFFFFF"/>
+                </a:solidFill>
+                <a:latin typeface="맑은 고딕"/>
+              </a:rPr>
+              <a:t>•  신선도 한도와 언두 보존</a:t>
+            </a:r>
+          </a:p>
+          <a:p>
+            <a:pPr algn="l">
+              <a:spcAft>
+                <a:spcPts val="800"/>
+              </a:spcAft>
+            </a:pPr>
+            <a:r>
+              <a:rPr sz="1600" b="0">
+                <a:solidFill>
+                  <a:srgbClr val="FFFFFF"/>
+                </a:solidFill>
+                <a:latin typeface="맑은 고딕"/>
+              </a:rPr>
+              <a:t>•  검증 계정과 임시 파일</a:t>
+            </a:r>
+          </a:p>
+        </p:txBody>
+      </p:sp>
+    </p:spTree>
+  </p:cSld>
+  <p:clrMapOvr>
+    <a:masterClrMapping/>
+  </p:clrMapOvr>
+</p:sld>
+</file>
+
+<file path=ppt/slides/slide48.xml><?xml version="1.0" encoding="utf-8"?>
+<p:sld xmlns:a="http://schemas.openxmlformats.org/drawingml/2006/main" xmlns:p="http://schemas.openxmlformats.org/presentationml/2006/main" xmlns:r="http://schemas.openxmlformats.org/officeDocument/2006/relationships">
+  <p:cSld>
+    <p:spTree>
+      <p:nvGrpSpPr>
+        <p:cNvPr id="1" name=""/>
+        <p:cNvGrpSpPr/>
+        <p:nvPr/>
+      </p:nvGrpSpPr>
+      <p:grpSpPr/>
+      <p:sp>
+        <p:nvSpPr>
+          <p:cNvPr id="2" name="Rectangle 1"/>
+          <p:cNvSpPr/>
+          <p:nvPr/>
+        </p:nvSpPr>
+        <p:spPr>
+          <a:xfrm>
+            <a:off x="0" y="0"/>
+            <a:ext cx="12191695" cy="1005840"/>
+          </a:xfrm>
+          <a:prstGeom prst="rect">
+            <a:avLst/>
+          </a:prstGeom>
+          <a:solidFill>
+            <a:srgbClr val="C0392B"/>
+          </a:solidFill>
+          <a:ln>
+            <a:noFill/>
+          </a:ln>
+          <a:effectLst/>
+        </p:spPr>
+        <p:style>
+          <a:lnRef idx="1">
+            <a:schemeClr val="accent1"/>
+          </a:lnRef>
+          <a:fillRef idx="3">
+            <a:schemeClr val="accent1"/>
+          </a:fillRef>
+          <a:effectRef idx="2">
+            <a:schemeClr val="accent1"/>
+          </a:effectRef>
+          <a:fontRef idx="minor">
+            <a:schemeClr val="lt1"/>
+          </a:fontRef>
+        </p:style>
+        <p:txBody>
+          <a:bodyPr rtlCol="0" anchor="ctr"/>
+          <a:lstStyle/>
+          <a:p>
+            <a:pPr algn="ctr"/>
+          </a:p>
+        </p:txBody>
+      </p:sp>
+      <p:sp>
+        <p:nvSpPr>
+          <p:cNvPr id="3" name="TextBox 2"/>
+          <p:cNvSpPr txBox="1"/>
+          <p:nvPr/>
+        </p:nvSpPr>
+        <p:spPr>
+          <a:xfrm>
+            <a:off x="548640" y="91440"/>
+            <a:ext cx="10972800" cy="777240"/>
+          </a:xfrm>
+          <a:prstGeom prst="rect">
+            <a:avLst/>
+          </a:prstGeom>
+          <a:noFill/>
+        </p:spPr>
+        <p:txBody>
+          <a:bodyPr wrap="square">
+            <a:spAutoFit/>
+          </a:bodyPr>
+          <a:lstStyle/>
+          <a:p>
+            <a:pPr algn="l">
+              <a:spcAft>
+                <a:spcPts val="600"/>
+              </a:spcAft>
+            </a:pPr>
+            <a:r>
+              <a:rPr sz="2600" b="1">
+                <a:solidFill>
+                  <a:srgbClr val="FFFFFF"/>
+                </a:solidFill>
+                <a:latin typeface="맑은 고딕"/>
+              </a:rPr>
+              <a:t>운영 시 주의점</a:t>
+            </a:r>
+          </a:p>
+        </p:txBody>
+      </p:sp>
+      <p:sp>
+        <p:nvSpPr>
+          <p:cNvPr id="4" name="TextBox 3"/>
+          <p:cNvSpPr txBox="1"/>
+          <p:nvPr/>
+        </p:nvSpPr>
+        <p:spPr>
+          <a:xfrm>
+            <a:off x="640080" y="1078992"/>
+            <a:ext cx="10881360" cy="457200"/>
+          </a:xfrm>
+          <a:prstGeom prst="rect">
+            <a:avLst/>
+          </a:prstGeom>
+          <a:noFill/>
+        </p:spPr>
+        <p:txBody>
+          <a:bodyPr wrap="square">
+            <a:spAutoFit/>
+          </a:bodyPr>
+          <a:lstStyle/>
+          <a:p>
+            <a:pPr algn="l">
+              <a:spcAft>
+                <a:spcPts val="600"/>
+              </a:spcAft>
+            </a:pPr>
+            <a:r>
+              <a:rPr sz="1500" b="0">
+                <a:solidFill>
+                  <a:srgbClr val="5A6672"/>
+                </a:solidFill>
+                <a:latin typeface="맑은 고딕"/>
+              </a:rPr>
+              <a:t>조회 부하가 보호 수준을 깎지 않게</a:t>
+            </a:r>
+          </a:p>
+        </p:txBody>
+      </p:sp>
+      <p:sp>
+        <p:nvSpPr>
+          <p:cNvPr id="5" name="TextBox 4"/>
+          <p:cNvSpPr txBox="1"/>
+          <p:nvPr/>
+        </p:nvSpPr>
+        <p:spPr>
+          <a:xfrm>
+            <a:off x="640080" y="1737360"/>
+            <a:ext cx="10881360" cy="4754880"/>
+          </a:xfrm>
+          <a:prstGeom prst="rect">
+            <a:avLst/>
+          </a:prstGeom>
+          <a:noFill/>
+        </p:spPr>
+        <p:txBody>
+          <a:bodyPr wrap="square">
+            <a:spAutoFit/>
+          </a:bodyPr>
+          <a:lstStyle/>
+          <a:p>
+            <a:pPr algn="l">
+              <a:spcAft>
+                <a:spcPts val="1000"/>
+              </a:spcAft>
+            </a:pPr>
+            <a:r>
+              <a:rPr sz="1700" b="0">
+                <a:solidFill>
+                  <a:srgbClr val="222222"/>
+                </a:solidFill>
+                <a:latin typeface="맑은 고딕"/>
+              </a:rPr>
+              <a:t>•  조회 부하가 크면 적용 자원이 줄어 apply lag 증가</a:t>
+            </a:r>
+          </a:p>
+          <a:p>
+            <a:pPr algn="l">
+              <a:spcAft>
+                <a:spcPts val="1000"/>
+              </a:spcAft>
+            </a:pPr>
+            <a:r>
+              <a:rPr sz="1700" b="0">
+                <a:solidFill>
+                  <a:srgbClr val="222222"/>
+                </a:solidFill>
+                <a:latin typeface="맑은 고딕"/>
+              </a:rPr>
+              <a:t>•  Resource Manager 또는 조회 전용 Standby 분리</a:t>
+            </a:r>
+          </a:p>
+          <a:p>
+            <a:pPr algn="l">
+              <a:spcAft>
+                <a:spcPts val="1000"/>
+              </a:spcAft>
+            </a:pPr>
+            <a:r>
+              <a:rPr sz="1700" b="0">
+                <a:solidFill>
+                  <a:srgbClr val="222222"/>
+                </a:solidFill>
+                <a:latin typeface="맑은 고딕"/>
+              </a:rPr>
+              <a:t>•  신선도 요구가 있으면 지연 한도를 반드시 설정</a:t>
+            </a:r>
+          </a:p>
+          <a:p>
+            <a:pPr algn="l">
+              <a:spcAft>
+                <a:spcPts val="1000"/>
+              </a:spcAft>
+            </a:pPr>
+            <a:r>
+              <a:rPr sz="1700" b="0">
+                <a:solidFill>
+                  <a:srgbClr val="222222"/>
+                </a:solidFill>
+                <a:latin typeface="맑은 고딕"/>
+              </a:rPr>
+              <a:t>•  긴 보고서는 Primary 언두 보존과 함께 조정</a:t>
+            </a:r>
+          </a:p>
+          <a:p>
+            <a:pPr algn="l">
+              <a:spcAft>
+                <a:spcPts val="1000"/>
+              </a:spcAft>
+            </a:pPr>
+            <a:r>
+              <a:rPr sz="1700" b="0">
+                <a:solidFill>
+                  <a:srgbClr val="222222"/>
+                </a:solidFill>
+                <a:latin typeface="맑은 고딕"/>
+              </a:rPr>
+              <a:t>•  검증은 일반 사용자로, 임시 파일은 직접 확인</a:t>
+            </a:r>
+          </a:p>
+        </p:txBody>
+      </p:sp>
+    </p:spTree>
+  </p:cSld>
+  <p:clrMapOvr>
+    <a:masterClrMapping/>
+  </p:clrMapOvr>
+</p:sld>
+</file>
+
+<file path=ppt/slides/slide49.xml><?xml version="1.0" encoding="utf-8"?>
+<p:sld xmlns:a="http://schemas.openxmlformats.org/drawingml/2006/main" xmlns:p="http://schemas.openxmlformats.org/presentationml/2006/main" xmlns:r="http://schemas.openxmlformats.org/officeDocument/2006/relationships">
+  <p:cSld>
+    <p:spTree>
+      <p:nvGrpSpPr>
+        <p:cNvPr id="1" name=""/>
+        <p:cNvGrpSpPr/>
+        <p:nvPr/>
+      </p:nvGrpSpPr>
+      <p:grpSpPr/>
+      <p:sp>
+        <p:nvSpPr>
+          <p:cNvPr id="2" name="Rectangle 1"/>
+          <p:cNvSpPr/>
+          <p:nvPr/>
+        </p:nvSpPr>
+        <p:spPr>
+          <a:xfrm>
+            <a:off x="0" y="0"/>
+            <a:ext cx="12191695" cy="1005840"/>
+          </a:xfrm>
+          <a:prstGeom prst="rect">
+            <a:avLst/>
+          </a:prstGeom>
+          <a:solidFill>
+            <a:srgbClr val="C0392B"/>
+          </a:solidFill>
+          <a:ln>
+            <a:noFill/>
+          </a:ln>
+          <a:effectLst/>
+        </p:spPr>
+        <p:style>
+          <a:lnRef idx="1">
+            <a:schemeClr val="accent1"/>
+          </a:lnRef>
+          <a:fillRef idx="3">
+            <a:schemeClr val="accent1"/>
+          </a:fillRef>
+          <a:effectRef idx="2">
+            <a:schemeClr val="accent1"/>
+          </a:effectRef>
+          <a:fontRef idx="minor">
+            <a:schemeClr val="lt1"/>
+          </a:fontRef>
+        </p:style>
+        <p:txBody>
+          <a:bodyPr rtlCol="0" anchor="ctr"/>
+          <a:lstStyle/>
+          <a:p>
+            <a:pPr algn="ctr"/>
+          </a:p>
+        </p:txBody>
+      </p:sp>
+      <p:sp>
+        <p:nvSpPr>
+          <p:cNvPr id="3" name="TextBox 2"/>
+          <p:cNvSpPr txBox="1"/>
+          <p:nvPr/>
+        </p:nvSpPr>
+        <p:spPr>
+          <a:xfrm>
+            <a:off x="548640" y="91440"/>
+            <a:ext cx="10972800" cy="777240"/>
+          </a:xfrm>
+          <a:prstGeom prst="rect">
+            <a:avLst/>
+          </a:prstGeom>
+          <a:noFill/>
+        </p:spPr>
+        <p:txBody>
+          <a:bodyPr wrap="square">
+            <a:spAutoFit/>
+          </a:bodyPr>
+          <a:lstStyle/>
+          <a:p>
+            <a:pPr algn="l">
+              <a:spcAft>
+                <a:spcPts val="600"/>
+              </a:spcAft>
+            </a:pPr>
+            <a:r>
+              <a:rPr sz="2600" b="1">
+                <a:solidFill>
+                  <a:srgbClr val="FFFFFF"/>
+                </a:solidFill>
+                <a:latin typeface="맑은 고딕"/>
+              </a:rPr>
+              <a:t>요약</a:t>
+            </a:r>
+          </a:p>
+        </p:txBody>
+      </p:sp>
+      <p:sp>
+        <p:nvSpPr>
+          <p:cNvPr id="4" name="TextBox 3"/>
+          <p:cNvSpPr txBox="1"/>
+          <p:nvPr/>
+        </p:nvSpPr>
+        <p:spPr>
+          <a:xfrm>
+            <a:off x="640080" y="1371600"/>
+            <a:ext cx="10881360" cy="5120640"/>
+          </a:xfrm>
+          <a:prstGeom prst="rect">
+            <a:avLst/>
+          </a:prstGeom>
+          <a:noFill/>
+        </p:spPr>
+        <p:txBody>
+          <a:bodyPr wrap="square">
+            <a:spAutoFit/>
+          </a:bodyPr>
+          <a:lstStyle/>
+          <a:p>
+            <a:pPr algn="l">
+              <a:spcAft>
+                <a:spcPts val="1000"/>
+              </a:spcAft>
+            </a:pPr>
+            <a:r>
+              <a:rPr sz="1600" b="0">
+                <a:solidFill>
+                  <a:srgbClr val="222222"/>
+                </a:solidFill>
+                <a:latin typeface="맑은 고딕"/>
+              </a:rPr>
+              <a:t>•  READ ONLY WITH APPLY가 대표적인 옵션 사용 상태</a:t>
+            </a:r>
+          </a:p>
+          <a:p>
+            <a:pPr algn="l">
+              <a:spcAft>
+                <a:spcPts val="1000"/>
+              </a:spcAft>
+            </a:pPr>
+            <a:r>
+              <a:rPr sz="1600" b="0">
+                <a:solidFill>
+                  <a:srgbClr val="222222"/>
+                </a:solidFill>
+                <a:latin typeface="맑은 고딕"/>
+              </a:rPr>
+              <a:t>•  실시간 적용과 실시간 조회는 다른 축</a:t>
+            </a:r>
+          </a:p>
+          <a:p>
+            <a:pPr algn="l">
+              <a:spcAft>
+                <a:spcPts val="1000"/>
+              </a:spcAft>
+            </a:pPr>
+            <a:r>
+              <a:rPr sz="1600" b="0">
+                <a:solidFill>
+                  <a:srgbClr val="222222"/>
+                </a:solidFill>
+                <a:latin typeface="맑은 고딕"/>
+              </a:rPr>
+              <a:t>•  언두와 쿼리 SCN으로 커밋된 데이터만 보임</a:t>
+            </a:r>
+          </a:p>
+          <a:p>
+            <a:pPr algn="l">
+              <a:spcAft>
+                <a:spcPts val="1000"/>
+              </a:spcAft>
+            </a:pPr>
+            <a:r>
+              <a:rPr sz="1600" b="0">
+                <a:solidFill>
+                  <a:srgbClr val="222222"/>
+                </a:solidFill>
+                <a:latin typeface="맑은 고딕"/>
+              </a:rPr>
+              <a:t>•  영구 파일·딕셔너리를 바꾸면 Standby에서 불가</a:t>
+            </a:r>
+          </a:p>
+          <a:p>
+            <a:pPr algn="l">
+              <a:spcAft>
+                <a:spcPts val="1000"/>
+              </a:spcAft>
+            </a:pPr>
+            <a:r>
+              <a:rPr sz="1600" b="0">
+                <a:solidFill>
+                  <a:srgbClr val="222222"/>
+                </a:solidFill>
+                <a:latin typeface="맑은 고딕"/>
+              </a:rPr>
+              <a:t>•  지연 한도 ORA-03172, zero lag는 SYNC·MaxAvail 전제</a:t>
+            </a:r>
+          </a:p>
+          <a:p>
+            <a:pPr algn="l">
+              <a:spcAft>
+                <a:spcPts val="1000"/>
+              </a:spcAft>
+            </a:pPr>
+            <a:r>
+              <a:rPr sz="1600" b="0">
+                <a:solidFill>
+                  <a:srgbClr val="222222"/>
+                </a:solidFill>
+                <a:latin typeface="맑은 고딕"/>
+              </a:rPr>
+              <a:t>•  리다이렉션: 16000 미시도, 16397 시도 후 실패, SYS 불가</a:t>
             </a:r>
           </a:p>
         </p:txBody>
@@ -13310,7 +16789,7 @@
                 </a:solidFill>
                 <a:latin typeface="맑은 고딕"/>
               </a:rPr>
-              <a:t>ADG 의 표식</a:t>
+              <a:t>Standby를 쉬게 두지 않으려는 이유</a:t>
             </a:r>
           </a:p>
         </p:txBody>
@@ -13349,7 +16828,7 @@
                 </a:solidFill>
                 <a:latin typeface="맑은 고딕"/>
               </a:rPr>
-              <a:t>두 값을 함께 본다</a:t>
+              <a:t>보호용 사본을 평소에도 일하게</a:t>
             </a:r>
           </a:p>
         </p:txBody>
@@ -13388,7 +16867,7 @@
                 </a:solidFill>
                 <a:latin typeface="맑은 고딕"/>
               </a:rPr>
-              <a:t>•  `OPEN_MODE` = **READ ONLY WITH APPLY**</a:t>
+              <a:t>•  마운트 Standby는 장애 전까지 업무 기여가 없음</a:t>
             </a:r>
           </a:p>
           <a:p>
@@ -13404,7 +16883,7 @@
                 </a:solidFill>
                 <a:latin typeface="맑은 고딕"/>
               </a:rPr>
-              <a:t>•  `RECOVERY_MODE` = **MANAGED REAL TIME APPLY**</a:t>
+              <a:t>•  보고서·추출·임의 조회를 Standby로 오프로드</a:t>
             </a:r>
           </a:p>
           <a:p>
@@ -13420,7 +16899,7 @@
                 </a:solidFill>
                 <a:latin typeface="맑은 고딕"/>
               </a:rPr>
-              <a:t>•  두 번째는 목적지 `STATUS` 가 VALID 일 때만 의미가 있다</a:t>
+              <a:t>•  별도 복제 도구 없이, 데이터 유형 제약 없이</a:t>
             </a:r>
           </a:p>
           <a:p>
@@ -13436,7 +16915,571 @@
                 </a:solidFill>
                 <a:latin typeface="맑은 고딕"/>
               </a:rPr>
-              <a:t>•  이 둘이 함께 확인되면 조회와 적용이 동시에 이뤄지고 있다</a:t>
+              <a:t>•  갱신은 Primary, 조회는 여러 Standby로 분산</a:t>
+            </a:r>
+          </a:p>
+          <a:p>
+            <a:pPr algn="l">
+              <a:spcAft>
+                <a:spcPts val="1000"/>
+              </a:spcAft>
+            </a:pPr>
+            <a:r>
+              <a:rPr sz="1700" b="0">
+                <a:solidFill>
+                  <a:srgbClr val="222222"/>
+                </a:solidFill>
+                <a:latin typeface="맑은 고딕"/>
+              </a:rPr>
+              <a:t>•  보고서용 인덱스·MV는 만들 수 없음</a:t>
+            </a:r>
+          </a:p>
+        </p:txBody>
+      </p:sp>
+    </p:spTree>
+  </p:cSld>
+  <p:clrMapOvr>
+    <a:masterClrMapping/>
+  </p:clrMapOvr>
+</p:sld>
+</file>
+
+<file path=ppt/slides/slide50.xml><?xml version="1.0" encoding="utf-8"?>
+<p:sld xmlns:a="http://schemas.openxmlformats.org/drawingml/2006/main" xmlns:p="http://schemas.openxmlformats.org/presentationml/2006/main" xmlns:r="http://schemas.openxmlformats.org/officeDocument/2006/relationships">
+  <p:cSld>
+    <p:spTree>
+      <p:nvGrpSpPr>
+        <p:cNvPr id="1" name=""/>
+        <p:cNvGrpSpPr/>
+        <p:nvPr/>
+      </p:nvGrpSpPr>
+      <p:grpSpPr/>
+      <p:sp>
+        <p:nvSpPr>
+          <p:cNvPr id="2" name="Rectangle 1"/>
+          <p:cNvSpPr/>
+          <p:nvPr/>
+        </p:nvSpPr>
+        <p:spPr>
+          <a:xfrm>
+            <a:off x="0" y="0"/>
+            <a:ext cx="12191695" cy="1005840"/>
+          </a:xfrm>
+          <a:prstGeom prst="rect">
+            <a:avLst/>
+          </a:prstGeom>
+          <a:solidFill>
+            <a:srgbClr val="C0392B"/>
+          </a:solidFill>
+          <a:ln>
+            <a:noFill/>
+          </a:ln>
+          <a:effectLst/>
+        </p:spPr>
+        <p:style>
+          <a:lnRef idx="1">
+            <a:schemeClr val="accent1"/>
+          </a:lnRef>
+          <a:fillRef idx="3">
+            <a:schemeClr val="accent1"/>
+          </a:fillRef>
+          <a:effectRef idx="2">
+            <a:schemeClr val="accent1"/>
+          </a:effectRef>
+          <a:fontRef idx="minor">
+            <a:schemeClr val="lt1"/>
+          </a:fontRef>
+        </p:style>
+        <p:txBody>
+          <a:bodyPr rtlCol="0" anchor="ctr"/>
+          <a:lstStyle/>
+          <a:p>
+            <a:pPr algn="ctr"/>
+          </a:p>
+        </p:txBody>
+      </p:sp>
+      <p:sp>
+        <p:nvSpPr>
+          <p:cNvPr id="3" name="TextBox 2"/>
+          <p:cNvSpPr txBox="1"/>
+          <p:nvPr/>
+        </p:nvSpPr>
+        <p:spPr>
+          <a:xfrm>
+            <a:off x="548640" y="91440"/>
+            <a:ext cx="10972800" cy="777240"/>
+          </a:xfrm>
+          <a:prstGeom prst="rect">
+            <a:avLst/>
+          </a:prstGeom>
+          <a:noFill/>
+        </p:spPr>
+        <p:txBody>
+          <a:bodyPr wrap="square">
+            <a:spAutoFit/>
+          </a:bodyPr>
+          <a:lstStyle/>
+          <a:p>
+            <a:pPr algn="l">
+              <a:spcAft>
+                <a:spcPts val="600"/>
+              </a:spcAft>
+            </a:pPr>
+            <a:r>
+              <a:rPr sz="2600" b="1">
+                <a:solidFill>
+                  <a:srgbClr val="FFFFFF"/>
+                </a:solidFill>
+                <a:latin typeface="맑은 고딕"/>
+              </a:rPr>
+              <a:t>퀴즈 (1/2)</a:t>
+            </a:r>
+          </a:p>
+        </p:txBody>
+      </p:sp>
+      <p:sp>
+        <p:nvSpPr>
+          <p:cNvPr id="4" name="TextBox 3"/>
+          <p:cNvSpPr txBox="1"/>
+          <p:nvPr/>
+        </p:nvSpPr>
+        <p:spPr>
+          <a:xfrm>
+            <a:off x="640080" y="1371600"/>
+            <a:ext cx="10881360" cy="5120640"/>
+          </a:xfrm>
+          <a:prstGeom prst="rect">
+            <a:avLst/>
+          </a:prstGeom>
+          <a:noFill/>
+        </p:spPr>
+        <p:txBody>
+          <a:bodyPr wrap="square">
+            <a:spAutoFit/>
+          </a:bodyPr>
+          <a:lstStyle/>
+          <a:p>
+            <a:pPr algn="l">
+              <a:spcAft>
+                <a:spcPts val="1000"/>
+              </a:spcAft>
+            </a:pPr>
+            <a:r>
+              <a:rPr sz="1600" b="0">
+                <a:solidFill>
+                  <a:srgbClr val="222222"/>
+                </a:solidFill>
+                <a:latin typeface="맑은 고딕"/>
+              </a:rPr>
+              <a:t>•  Q1. 옵션 사용 상태는? → READ ONLY에서 적용 중</a:t>
+            </a:r>
+          </a:p>
+          <a:p>
+            <a:pPr algn="l">
+              <a:spcAft>
+                <a:spcPts val="1000"/>
+              </a:spcAft>
+            </a:pPr>
+            <a:r>
+              <a:rPr sz="1600" b="0">
+                <a:solidFill>
+                  <a:srgbClr val="222222"/>
+                </a:solidFill>
+                <a:latin typeface="맑은 고딕"/>
+              </a:rPr>
+              <a:t>•  Q2. 커밋 전 행이 Standby에 보이나? → 보이지 않는다</a:t>
+            </a:r>
+          </a:p>
+          <a:p>
+            <a:pPr algn="l">
+              <a:spcAft>
+                <a:spcPts val="1000"/>
+              </a:spcAft>
+            </a:pPr>
+            <a:r>
+              <a:rPr sz="1600" b="0">
+                <a:solidFill>
+                  <a:srgbClr val="222222"/>
+                </a:solidFill>
+                <a:latin typeface="맑은 고딕"/>
+              </a:rPr>
+              <a:t>•  Q3. STANDBY_MAX_DATA_DELAY의 특징은? → 세션 단위, 초과 시 ORA-03172</a:t>
+            </a:r>
+          </a:p>
+        </p:txBody>
+      </p:sp>
+    </p:spTree>
+  </p:cSld>
+  <p:clrMapOvr>
+    <a:masterClrMapping/>
+  </p:clrMapOvr>
+</p:sld>
+</file>
+
+<file path=ppt/slides/slide51.xml><?xml version="1.0" encoding="utf-8"?>
+<p:sld xmlns:a="http://schemas.openxmlformats.org/drawingml/2006/main" xmlns:p="http://schemas.openxmlformats.org/presentationml/2006/main" xmlns:r="http://schemas.openxmlformats.org/officeDocument/2006/relationships">
+  <p:cSld>
+    <p:spTree>
+      <p:nvGrpSpPr>
+        <p:cNvPr id="1" name=""/>
+        <p:cNvGrpSpPr/>
+        <p:nvPr/>
+      </p:nvGrpSpPr>
+      <p:grpSpPr/>
+      <p:sp>
+        <p:nvSpPr>
+          <p:cNvPr id="2" name="Rectangle 1"/>
+          <p:cNvSpPr/>
+          <p:nvPr/>
+        </p:nvSpPr>
+        <p:spPr>
+          <a:xfrm>
+            <a:off x="0" y="0"/>
+            <a:ext cx="12191695" cy="1005840"/>
+          </a:xfrm>
+          <a:prstGeom prst="rect">
+            <a:avLst/>
+          </a:prstGeom>
+          <a:solidFill>
+            <a:srgbClr val="C0392B"/>
+          </a:solidFill>
+          <a:ln>
+            <a:noFill/>
+          </a:ln>
+          <a:effectLst/>
+        </p:spPr>
+        <p:style>
+          <a:lnRef idx="1">
+            <a:schemeClr val="accent1"/>
+          </a:lnRef>
+          <a:fillRef idx="3">
+            <a:schemeClr val="accent1"/>
+          </a:fillRef>
+          <a:effectRef idx="2">
+            <a:schemeClr val="accent1"/>
+          </a:effectRef>
+          <a:fontRef idx="minor">
+            <a:schemeClr val="lt1"/>
+          </a:fontRef>
+        </p:style>
+        <p:txBody>
+          <a:bodyPr rtlCol="0" anchor="ctr"/>
+          <a:lstStyle/>
+          <a:p>
+            <a:pPr algn="ctr"/>
+          </a:p>
+        </p:txBody>
+      </p:sp>
+      <p:sp>
+        <p:nvSpPr>
+          <p:cNvPr id="3" name="TextBox 2"/>
+          <p:cNvSpPr txBox="1"/>
+          <p:nvPr/>
+        </p:nvSpPr>
+        <p:spPr>
+          <a:xfrm>
+            <a:off x="548640" y="91440"/>
+            <a:ext cx="10972800" cy="777240"/>
+          </a:xfrm>
+          <a:prstGeom prst="rect">
+            <a:avLst/>
+          </a:prstGeom>
+          <a:noFill/>
+        </p:spPr>
+        <p:txBody>
+          <a:bodyPr wrap="square">
+            <a:spAutoFit/>
+          </a:bodyPr>
+          <a:lstStyle/>
+          <a:p>
+            <a:pPr algn="l">
+              <a:spcAft>
+                <a:spcPts val="600"/>
+              </a:spcAft>
+            </a:pPr>
+            <a:r>
+              <a:rPr sz="2600" b="1">
+                <a:solidFill>
+                  <a:srgbClr val="FFFFFF"/>
+                </a:solidFill>
+                <a:latin typeface="맑은 고딕"/>
+              </a:rPr>
+              <a:t>퀴즈 (2/2)</a:t>
+            </a:r>
+          </a:p>
+        </p:txBody>
+      </p:sp>
+      <p:sp>
+        <p:nvSpPr>
+          <p:cNvPr id="4" name="TextBox 3"/>
+          <p:cNvSpPr txBox="1"/>
+          <p:nvPr/>
+        </p:nvSpPr>
+        <p:spPr>
+          <a:xfrm>
+            <a:off x="640080" y="1371600"/>
+            <a:ext cx="10881360" cy="5120640"/>
+          </a:xfrm>
+          <a:prstGeom prst="rect">
+            <a:avLst/>
+          </a:prstGeom>
+          <a:noFill/>
+        </p:spPr>
+        <p:txBody>
+          <a:bodyPr wrap="square">
+            <a:spAutoFit/>
+          </a:bodyPr>
+          <a:lstStyle/>
+          <a:p>
+            <a:pPr algn="l">
+              <a:spcAft>
+                <a:spcPts val="1000"/>
+              </a:spcAft>
+            </a:pPr>
+            <a:r>
+              <a:rPr sz="1600" b="0">
+                <a:solidFill>
+                  <a:srgbClr val="222222"/>
+                </a:solidFill>
+                <a:latin typeface="맑은 고딕"/>
+              </a:rPr>
+              <a:t>•  Q4. zero lag 전제가 아닌 것은? → ADG_REDIRECT_DML</a:t>
+            </a:r>
+          </a:p>
+          <a:p>
+            <a:pPr algn="l">
+              <a:spcAft>
+                <a:spcPts val="1000"/>
+              </a:spcAft>
+            </a:pPr>
+            <a:r>
+              <a:rPr sz="1600" b="0">
+                <a:solidFill>
+                  <a:srgbClr val="222222"/>
+                </a:solidFill>
+                <a:latin typeface="맑은 고딕"/>
+              </a:rPr>
+              <a:t>•  Q5. Standby GTT INSERT가 되는 이유는? → 임시 언두</a:t>
+            </a:r>
+          </a:p>
+          <a:p>
+            <a:pPr algn="l">
+              <a:spcAft>
+                <a:spcPts val="1000"/>
+              </a:spcAft>
+            </a:pPr>
+            <a:r>
+              <a:rPr sz="1600" b="0">
+                <a:solidFill>
+                  <a:srgbClr val="222222"/>
+                </a:solidFill>
+                <a:latin typeface="맑은 고딕"/>
+              </a:rPr>
+              <a:t>•  Q6. 리다이렉션 켜고 CREATE INDEX하면? → ORA-16000</a:t>
+            </a:r>
+          </a:p>
+        </p:txBody>
+      </p:sp>
+    </p:spTree>
+  </p:cSld>
+  <p:clrMapOvr>
+    <a:masterClrMapping/>
+  </p:clrMapOvr>
+</p:sld>
+</file>
+
+<file path=ppt/slides/slide52.xml><?xml version="1.0" encoding="utf-8"?>
+<p:sld xmlns:a="http://schemas.openxmlformats.org/drawingml/2006/main" xmlns:p="http://schemas.openxmlformats.org/presentationml/2006/main" xmlns:r="http://schemas.openxmlformats.org/officeDocument/2006/relationships">
+  <p:cSld>
+    <p:spTree>
+      <p:nvGrpSpPr>
+        <p:cNvPr id="1" name=""/>
+        <p:cNvGrpSpPr/>
+        <p:nvPr/>
+      </p:nvGrpSpPr>
+      <p:grpSpPr/>
+      <p:sp>
+        <p:nvSpPr>
+          <p:cNvPr id="2" name="Rectangle 1"/>
+          <p:cNvSpPr/>
+          <p:nvPr/>
+        </p:nvSpPr>
+        <p:spPr>
+          <a:xfrm>
+            <a:off x="0" y="0"/>
+            <a:ext cx="12191695" cy="1005840"/>
+          </a:xfrm>
+          <a:prstGeom prst="rect">
+            <a:avLst/>
+          </a:prstGeom>
+          <a:solidFill>
+            <a:srgbClr val="C0392B"/>
+          </a:solidFill>
+          <a:ln>
+            <a:noFill/>
+          </a:ln>
+          <a:effectLst/>
+        </p:spPr>
+        <p:style>
+          <a:lnRef idx="1">
+            <a:schemeClr val="accent1"/>
+          </a:lnRef>
+          <a:fillRef idx="3">
+            <a:schemeClr val="accent1"/>
+          </a:fillRef>
+          <a:effectRef idx="2">
+            <a:schemeClr val="accent1"/>
+          </a:effectRef>
+          <a:fontRef idx="minor">
+            <a:schemeClr val="lt1"/>
+          </a:fontRef>
+        </p:style>
+        <p:txBody>
+          <a:bodyPr rtlCol="0" anchor="ctr"/>
+          <a:lstStyle/>
+          <a:p>
+            <a:pPr algn="ctr"/>
+          </a:p>
+        </p:txBody>
+      </p:sp>
+      <p:sp>
+        <p:nvSpPr>
+          <p:cNvPr id="3" name="TextBox 2"/>
+          <p:cNvSpPr txBox="1"/>
+          <p:nvPr/>
+        </p:nvSpPr>
+        <p:spPr>
+          <a:xfrm>
+            <a:off x="548640" y="91440"/>
+            <a:ext cx="10972800" cy="777240"/>
+          </a:xfrm>
+          <a:prstGeom prst="rect">
+            <a:avLst/>
+          </a:prstGeom>
+          <a:noFill/>
+        </p:spPr>
+        <p:txBody>
+          <a:bodyPr wrap="square">
+            <a:spAutoFit/>
+          </a:bodyPr>
+          <a:lstStyle/>
+          <a:p>
+            <a:pPr algn="l">
+              <a:spcAft>
+                <a:spcPts val="600"/>
+              </a:spcAft>
+            </a:pPr>
+            <a:r>
+              <a:rPr sz="2600" b="1">
+                <a:solidFill>
+                  <a:srgbClr val="FFFFFF"/>
+                </a:solidFill>
+                <a:latin typeface="맑은 고딕"/>
+              </a:rPr>
+              <a:t>실습 개요</a:t>
+            </a:r>
+          </a:p>
+        </p:txBody>
+      </p:sp>
+      <p:sp>
+        <p:nvSpPr>
+          <p:cNvPr id="4" name="TextBox 3"/>
+          <p:cNvSpPr txBox="1"/>
+          <p:nvPr/>
+        </p:nvSpPr>
+        <p:spPr>
+          <a:xfrm>
+            <a:off x="640080" y="1371600"/>
+            <a:ext cx="10881360" cy="5120640"/>
+          </a:xfrm>
+          <a:prstGeom prst="rect">
+            <a:avLst/>
+          </a:prstGeom>
+          <a:noFill/>
+        </p:spPr>
+        <p:txBody>
+          <a:bodyPr wrap="square">
+            <a:spAutoFit/>
+          </a:bodyPr>
+          <a:lstStyle/>
+          <a:p>
+            <a:pPr algn="l">
+              <a:spcAft>
+                <a:spcPts val="1000"/>
+              </a:spcAft>
+            </a:pPr>
+            <a:r>
+              <a:rPr sz="1600" b="0">
+                <a:solidFill>
+                  <a:srgbClr val="222222"/>
+                </a:solidFill>
+                <a:latin typeface="맑은 고딕"/>
+              </a:rPr>
+              <a:t>•  01 ADG 상태 확인 / 02 읽기 일관성 검증 (9.2, 9.3)</a:t>
+            </a:r>
+          </a:p>
+          <a:p>
+            <a:pPr algn="l">
+              <a:spcAft>
+                <a:spcPts val="1000"/>
+              </a:spcAft>
+            </a:pPr>
+            <a:r>
+              <a:rPr sz="1600" b="0">
+                <a:solidFill>
+                  <a:srgbClr val="222222"/>
+                </a:solidFill>
+                <a:latin typeface="맑은 고딕"/>
+              </a:rPr>
+              <a:t>•  03 되는 것과 안 되는 것 (9.4, 9.6)</a:t>
+            </a:r>
+          </a:p>
+          <a:p>
+            <a:pPr algn="l">
+              <a:spcAft>
+                <a:spcPts val="1000"/>
+              </a:spcAft>
+            </a:pPr>
+            <a:r>
+              <a:rPr sz="1600" b="0">
+                <a:solidFill>
+                  <a:srgbClr val="222222"/>
+                </a:solidFill>
+                <a:latin typeface="맑은 고딕"/>
+              </a:rPr>
+              <a:t>•  04 DML 리다이렉션 / 05 리다이렉션의 제약 (9.7)</a:t>
+            </a:r>
+          </a:p>
+          <a:p>
+            <a:pPr algn="l">
+              <a:spcAft>
+                <a:spcPts val="1000"/>
+              </a:spcAft>
+            </a:pPr>
+            <a:r>
+              <a:rPr sz="1600" b="0">
+                <a:solidFill>
+                  <a:srgbClr val="222222"/>
+                </a:solidFill>
+                <a:latin typeface="맑은 고딕"/>
+              </a:rPr>
+              <a:t>•  06 지연 한도 / 07 지연 히스토그램 (9.5)</a:t>
+            </a:r>
+          </a:p>
+          <a:p>
+            <a:pPr algn="l">
+              <a:spcAft>
+                <a:spcPts val="1000"/>
+              </a:spcAft>
+            </a:pPr>
+            <a:r>
+              <a:rPr sz="1600" b="0">
+                <a:solidFill>
+                  <a:srgbClr val="222222"/>
+                </a:solidFill>
+                <a:latin typeface="맑은 고딕"/>
+              </a:rPr>
+              <a:t>•  08 옵션 없는 대안 경로 (9.9)</a:t>
             </a:r>
           </a:p>
         </p:txBody>
@@ -13537,7 +17580,7 @@
                 </a:solidFill>
                 <a:latin typeface="맑은 고딕"/>
               </a:rPr>
-              <a:t>사용 기록은 CDB_ 뷰에</a:t>
+              <a:t>옵션에 묶인 기능</a:t>
             </a:r>
           </a:p>
         </p:txBody>
@@ -13576,7 +17619,7 @@
                 </a:solidFill>
                 <a:latin typeface="맑은 고딕"/>
               </a:rPr>
-              <a:t>그리고 0이어도 쓴 것이다</a:t>
+              <a:t>하나라도 쓰면 옵션 사용</a:t>
             </a:r>
           </a:p>
         </p:txBody>
@@ -13615,7 +17658,7 @@
                 </a:solidFill>
                 <a:latin typeface="맑은 고딕"/>
               </a:rPr>
-              <a:t>•  `DBA_FEATURE_USAGE_STATISTICS` → **no rows selected**</a:t>
+              <a:t>•  Real-Time Query, 임시 테이블·시퀀스 지원</a:t>
             </a:r>
           </a:p>
           <a:p>
@@ -13631,7 +17674,7 @@
                 </a:solidFill>
                 <a:latin typeface="맑은 고딕"/>
               </a:rPr>
-              <a:t>•  `CDB_FEATURE_USAGE_STATISTICS` CON_ID 3 에 두 항목</a:t>
+              <a:t>•  DML·PL/SQL 리다이렉션</a:t>
             </a:r>
           </a:p>
           <a:p>
@@ -13647,7 +17690,7 @@
                 </a:solidFill>
                 <a:latin typeface="맑은 고딕"/>
               </a:rPr>
-              <a:t>•  그런데 `DETECTED_USAGES` 가 **0**</a:t>
+              <a:t>•  자동 블록 손상 복구, Standby In-Memory</a:t>
             </a:r>
           </a:p>
           <a:p>
@@ -13663,7 +17706,23 @@
                 </a:solidFill>
                 <a:latin typeface="맑은 고딕"/>
               </a:rPr>
-              <a:t>•  라이선스 판단은 `OPEN_MODE` 로 하는 편이 정확하다</a:t>
+              <a:t>•  Standby의 블록 변경 추적</a:t>
+            </a:r>
+          </a:p>
+          <a:p>
+            <a:pPr algn="l">
+              <a:spcAft>
+                <a:spcPts val="1000"/>
+              </a:spcAft>
+            </a:pPr>
+            <a:r>
+              <a:rPr sz="1700" b="0">
+                <a:solidFill>
+                  <a:srgbClr val="222222"/>
+                </a:solidFill>
+                <a:latin typeface="맑은 고딕"/>
+              </a:rPr>
+              <a:t>•  Far Sync, Real-Time Cascading (10장)</a:t>
             </a:r>
           </a:p>
         </p:txBody>
@@ -13764,7 +17823,7 @@
                 </a:solidFill>
                 <a:latin typeface="맑은 고딕"/>
               </a:rPr>
-              <a:t>세션이 어디에 붙었는지</a:t>
+              <a:t>과금 경계</a:t>
             </a:r>
           </a:p>
         </p:txBody>
@@ -13803,7 +17862,7 @@
                 </a:solidFill>
                 <a:latin typeface="맑은 고딕"/>
               </a:rPr>
-              <a:t>이름이 아니라 역할로</a:t>
+              <a:t>열린 채로 적용하면 옵션 사용</a:t>
             </a:r>
           </a:p>
         </p:txBody>
@@ -13842,7 +17901,7 @@
                 </a:solidFill>
                 <a:latin typeface="맑은 고딕"/>
               </a:rPr>
-              <a:t>•  `SYS_CONTEXT('userenv','db_unique_name')` → boston</a:t>
+              <a:t>•  마운트 상태에서 적용: 기본 기능</a:t>
             </a:r>
           </a:p>
           <a:p>
@@ -13858,7 +17917,7 @@
                 </a:solidFill>
                 <a:latin typeface="맑은 고딕"/>
               </a:rPr>
-              <a:t>•  `SYS_CONTEXT('userenv','database_role')` → PHYSICAL STANDBY</a:t>
+              <a:t>•  적용을 멈추고 READ ONLY: 기본 기능</a:t>
             </a:r>
           </a:p>
           <a:p>
@@ -13874,7 +17933,7 @@
                 </a:solidFill>
                 <a:latin typeface="맑은 고딕"/>
               </a:rPr>
-              <a:t>•  역할 전환 환경에서는 **역할로 판단**해야 한다</a:t>
+              <a:t>•  READ ONLY 상태에서 적용 기동: 옵션 사용</a:t>
             </a:r>
           </a:p>
           <a:p>
@@ -13890,7 +17949,23 @@
                 </a:solidFill>
                 <a:latin typeface="맑은 고딕"/>
               </a:rPr>
-              <a:t>•  Standby PDB 서비스는 PDB 가 열려 있어야 등록된다</a:t>
+              <a:t>•  STARTUP만으로 기동하면 READ ONLY로 열림</a:t>
+            </a:r>
+          </a:p>
+          <a:p>
+            <a:pPr algn="l">
+              <a:spcAft>
+                <a:spcPts val="1000"/>
+              </a:spcAft>
+            </a:pPr>
+            <a:r>
+              <a:rPr sz="1700" b="0">
+                <a:solidFill>
+                  <a:srgbClr val="222222"/>
+                </a:solidFill>
+                <a:latin typeface="맑은 고딕"/>
+              </a:rPr>
+              <a:t>•  옵션 없는 사이트는 STARTUP MOUNT로 고정</a:t>
             </a:r>
           </a:p>
         </p:txBody>
@@ -13922,7 +17997,7 @@
         <p:spPr>
           <a:xfrm>
             <a:off x="0" y="0"/>
-            <a:ext cx="12191695" cy="6858000"/>
+            <a:ext cx="12191695" cy="1005840"/>
           </a:xfrm>
           <a:prstGeom prst="rect">
             <a:avLst/>
@@ -13965,8 +18040,8 @@
         </p:nvSpPr>
         <p:spPr>
           <a:xfrm>
-            <a:off x="822960" y="2011680"/>
-            <a:ext cx="10515600" cy="1097280"/>
+            <a:off x="548640" y="91440"/>
+            <a:ext cx="10972800" cy="777240"/>
           </a:xfrm>
           <a:prstGeom prst="rect">
             <a:avLst/>
@@ -13985,13 +18060,13 @@
               </a:spcAft>
             </a:pPr>
             <a:r>
-              <a:rPr sz="4000" b="1">
+              <a:rPr sz="2600" b="1">
                 <a:solidFill>
                   <a:srgbClr val="FFFFFF"/>
                 </a:solidFill>
                 <a:latin typeface="맑은 고딕"/>
               </a:rPr>
-              <a:t>9.3</a:t>
+              <a:t>사용 흔적 확인</a:t>
             </a:r>
           </a:p>
         </p:txBody>
@@ -14004,8 +18079,8 @@
         </p:nvSpPr>
         <p:spPr>
           <a:xfrm>
-            <a:off x="822960" y="3017520"/>
-            <a:ext cx="10515600" cy="914400"/>
+            <a:off x="640080" y="1078992"/>
+            <a:ext cx="10881360" cy="457200"/>
           </a:xfrm>
           <a:prstGeom prst="rect">
             <a:avLst/>
@@ -14024,71 +18099,27 @@
               </a:spcAft>
             </a:pPr>
             <a:r>
-              <a:rPr sz="2800" b="1">
-                <a:solidFill>
-                  <a:srgbClr val="FFFFFF"/>
-                </a:solidFill>
-                <a:latin typeface="맑은 고딕"/>
-              </a:rPr>
-              <a:t>실시간 조회의 일관성</a:t>
-            </a:r>
-          </a:p>
-        </p:txBody>
-      </p:sp>
-      <p:sp>
-        <p:nvSpPr>
-          <p:cNvPr id="5" name="Rectangle 4"/>
-          <p:cNvSpPr/>
-          <p:nvPr/>
-        </p:nvSpPr>
-        <p:spPr>
-          <a:xfrm>
-            <a:off x="822960" y="4114800"/>
-            <a:ext cx="5486400" cy="54864"/>
-          </a:xfrm>
-          <a:prstGeom prst="rect">
-            <a:avLst/>
-          </a:prstGeom>
-          <a:solidFill>
-            <a:srgbClr val="FFFFFF"/>
-          </a:solidFill>
-          <a:ln>
-            <a:noFill/>
-          </a:ln>
-          <a:effectLst/>
-        </p:spPr>
-        <p:style>
-          <a:lnRef idx="1">
-            <a:schemeClr val="accent1"/>
-          </a:lnRef>
-          <a:fillRef idx="3">
-            <a:schemeClr val="accent1"/>
-          </a:fillRef>
-          <a:effectRef idx="2">
-            <a:schemeClr val="accent1"/>
-          </a:effectRef>
-          <a:fontRef idx="minor">
-            <a:schemeClr val="lt1"/>
-          </a:fontRef>
-        </p:style>
-        <p:txBody>
-          <a:bodyPr rtlCol="0" anchor="ctr"/>
-          <a:lstStyle/>
-          <a:p>
-            <a:pPr algn="ctr"/>
-          </a:p>
-        </p:txBody>
-      </p:sp>
-      <p:sp>
-        <p:nvSpPr>
-          <p:cNvPr id="6" name="TextBox 5"/>
+              <a:rPr sz="1500" b="0">
+                <a:solidFill>
+                  <a:srgbClr val="5A6672"/>
+                </a:solidFill>
+                <a:latin typeface="맑은 고딕"/>
+              </a:rPr>
+              <a:t>상태는 OPEN_MODE, 기록은 기능 사용 통계</a:t>
+            </a:r>
+          </a:p>
+        </p:txBody>
+      </p:sp>
+      <p:sp>
+        <p:nvSpPr>
+          <p:cNvPr id="5" name="TextBox 4"/>
           <p:cNvSpPr txBox="1"/>
           <p:nvPr/>
         </p:nvSpPr>
         <p:spPr>
           <a:xfrm>
-            <a:off x="822960" y="4297680"/>
-            <a:ext cx="10058400" cy="2011680"/>
+            <a:off x="640080" y="1737360"/>
+            <a:ext cx="10881360" cy="4754880"/>
           </a:xfrm>
           <a:prstGeom prst="rect">
             <a:avLst/>
@@ -14103,33 +18134,81 @@
           <a:p>
             <a:pPr algn="l">
               <a:spcAft>
-                <a:spcPts val="800"/>
-              </a:spcAft>
-            </a:pPr>
-            <a:r>
-              <a:rPr sz="1600" b="0">
-                <a:solidFill>
-                  <a:srgbClr val="FFFFFF"/>
-                </a:solidFill>
-                <a:latin typeface="맑은 고딕"/>
-              </a:rPr>
-              <a:t>•  커밋된 것만 보인다</a:t>
-            </a:r>
-          </a:p>
-          <a:p>
-            <a:pPr algn="l">
-              <a:spcAft>
-                <a:spcPts val="800"/>
-              </a:spcAft>
-            </a:pPr>
-            <a:r>
-              <a:rPr sz="1600" b="0">
-                <a:solidFill>
-                  <a:srgbClr val="FFFFFF"/>
-                </a:solidFill>
-                <a:latin typeface="맑은 고딕"/>
-              </a:rPr>
-              <a:t>•  측정의 함정</a:t>
+                <a:spcPts val="1000"/>
+              </a:spcAft>
+            </a:pPr>
+            <a:r>
+              <a:rPr sz="1700" b="0">
+                <a:solidFill>
+                  <a:srgbClr val="222222"/>
+                </a:solidFill>
+                <a:latin typeface="맑은 고딕"/>
+              </a:rPr>
+              <a:t>•  지금 상태: V$DATABASE.OPEN_MODE</a:t>
+            </a:r>
+          </a:p>
+          <a:p>
+            <a:pPr algn="l">
+              <a:spcAft>
+                <a:spcPts val="1000"/>
+              </a:spcAft>
+            </a:pPr>
+            <a:r>
+              <a:rPr sz="1700" b="0">
+                <a:solidFill>
+                  <a:srgbClr val="222222"/>
+                </a:solidFill>
+                <a:latin typeface="맑은 고딕"/>
+              </a:rPr>
+              <a:t>•  READ ONLY WITH APPLY면 옵션 사용 중</a:t>
+            </a:r>
+          </a:p>
+          <a:p>
+            <a:pPr algn="l">
+              <a:spcAft>
+                <a:spcPts val="1000"/>
+              </a:spcAft>
+            </a:pPr>
+            <a:r>
+              <a:rPr sz="1700" b="0">
+                <a:solidFill>
+                  <a:srgbClr val="222222"/>
+                </a:solidFill>
+                <a:latin typeface="맑은 고딕"/>
+              </a:rPr>
+              <a:t>•  기록: CDB_FEATURE_USAGE_STATISTICS</a:t>
+            </a:r>
+          </a:p>
+          <a:p>
+            <a:pPr algn="l">
+              <a:spcAft>
+                <a:spcPts val="1000"/>
+              </a:spcAft>
+            </a:pPr>
+            <a:r>
+              <a:rPr sz="1700" b="0">
+                <a:solidFill>
+                  <a:srgbClr val="222222"/>
+                </a:solidFill>
+                <a:latin typeface="맑은 고딕"/>
+              </a:rPr>
+              <a:t>•  CDB에서 DBA_ 뷰는 현재 컨테이너만 보여 줌</a:t>
+            </a:r>
+          </a:p>
+          <a:p>
+            <a:pPr algn="l">
+              <a:spcAft>
+                <a:spcPts val="1000"/>
+              </a:spcAft>
+            </a:pPr>
+            <a:r>
+              <a:rPr sz="1700" b="0">
+                <a:solidFill>
+                  <a:srgbClr val="222222"/>
+                </a:solidFill>
+                <a:latin typeface="맑은 고딕"/>
+              </a:rPr>
+              <a:t>•  통계는 늦게 갱신되므로 0이 미사용 증거는 아님</a:t>
             </a:r>
           </a:p>
         </p:txBody>
@@ -14161,7 +18240,7 @@
         <p:spPr>
           <a:xfrm>
             <a:off x="0" y="0"/>
-            <a:ext cx="12191695" cy="1005840"/>
+            <a:ext cx="12191695" cy="6858000"/>
           </a:xfrm>
           <a:prstGeom prst="rect">
             <a:avLst/>
@@ -14204,8 +18283,8 @@
         </p:nvSpPr>
         <p:spPr>
           <a:xfrm>
-            <a:off x="548640" y="91440"/>
-            <a:ext cx="10972800" cy="777240"/>
+            <a:off x="822960" y="2011680"/>
+            <a:ext cx="10515600" cy="1097280"/>
           </a:xfrm>
           <a:prstGeom prst="rect">
             <a:avLst/>
@@ -14224,13 +18303,13 @@
               </a:spcAft>
             </a:pPr>
             <a:r>
-              <a:rPr sz="2600" b="1">
+              <a:rPr sz="4000" b="1">
                 <a:solidFill>
                   <a:srgbClr val="FFFFFF"/>
                 </a:solidFill>
                 <a:latin typeface="맑은 고딕"/>
               </a:rPr>
-              <a:t>미커밋 데이터는 보이지 않는다</a:t>
+              <a:t>9.3</a:t>
             </a:r>
           </a:p>
         </p:txBody>
@@ -14243,8 +18322,8 @@
         </p:nvSpPr>
         <p:spPr>
           <a:xfrm>
-            <a:off x="640080" y="1078992"/>
-            <a:ext cx="10881360" cy="457200"/>
+            <a:off x="822960" y="3017520"/>
+            <a:ext cx="10515600" cy="914400"/>
           </a:xfrm>
           <a:prstGeom prst="rect">
             <a:avLst/>
@@ -14263,27 +18342,71 @@
               </a:spcAft>
             </a:pPr>
             <a:r>
-              <a:rPr sz="1500" b="0">
-                <a:solidFill>
-                  <a:srgbClr val="5A6672"/>
-                </a:solidFill>
-                <a:latin typeface="맑은 고딕"/>
-              </a:rPr>
-              <a:t>올바른 측정</a:t>
-            </a:r>
-          </a:p>
-        </p:txBody>
-      </p:sp>
-      <p:sp>
-        <p:nvSpPr>
-          <p:cNvPr id="5" name="TextBox 4"/>
+              <a:rPr sz="2800" b="1">
+                <a:solidFill>
+                  <a:srgbClr val="FFFFFF"/>
+                </a:solidFill>
+                <a:latin typeface="맑은 고딕"/>
+              </a:rPr>
+              <a:t>Real-Time Query의 동작</a:t>
+            </a:r>
+          </a:p>
+        </p:txBody>
+      </p:sp>
+      <p:sp>
+        <p:nvSpPr>
+          <p:cNvPr id="5" name="Rectangle 4"/>
+          <p:cNvSpPr/>
+          <p:nvPr/>
+        </p:nvSpPr>
+        <p:spPr>
+          <a:xfrm>
+            <a:off x="822960" y="4114800"/>
+            <a:ext cx="5486400" cy="54864"/>
+          </a:xfrm>
+          <a:prstGeom prst="rect">
+            <a:avLst/>
+          </a:prstGeom>
+          <a:solidFill>
+            <a:srgbClr val="FFFFFF"/>
+          </a:solidFill>
+          <a:ln>
+            <a:noFill/>
+          </a:ln>
+          <a:effectLst/>
+        </p:spPr>
+        <p:style>
+          <a:lnRef idx="1">
+            <a:schemeClr val="accent1"/>
+          </a:lnRef>
+          <a:fillRef idx="3">
+            <a:schemeClr val="accent1"/>
+          </a:fillRef>
+          <a:effectRef idx="2">
+            <a:schemeClr val="accent1"/>
+          </a:effectRef>
+          <a:fontRef idx="minor">
+            <a:schemeClr val="lt1"/>
+          </a:fontRef>
+        </p:style>
+        <p:txBody>
+          <a:bodyPr rtlCol="0" anchor="ctr"/>
+          <a:lstStyle/>
+          <a:p>
+            <a:pPr algn="ctr"/>
+          </a:p>
+        </p:txBody>
+      </p:sp>
+      <p:sp>
+        <p:nvSpPr>
+          <p:cNvPr id="6" name="TextBox 5"/>
           <p:cNvSpPr txBox="1"/>
           <p:nvPr/>
         </p:nvSpPr>
         <p:spPr>
           <a:xfrm>
-            <a:off x="640080" y="1737360"/>
-            <a:ext cx="10881360" cy="4754880"/>
+            <a:off x="822960" y="4297680"/>
+            <a:ext cx="10058400" cy="2011680"/>
           </a:xfrm>
           <a:prstGeom prst="rect">
             <a:avLst/>
@@ -14298,65 +18421,49 @@
           <a:p>
             <a:pPr algn="l">
               <a:spcAft>
-                <a:spcPts val="1000"/>
-              </a:spcAft>
-            </a:pPr>
-            <a:r>
-              <a:rPr sz="1700" b="0">
-                <a:solidFill>
-                  <a:srgbClr val="222222"/>
-                </a:solidFill>
-                <a:latin typeface="맑은 고딕"/>
-              </a:rPr>
-              <a:t>•  Primary 가 40초간 커밋하지 않는 상태를 유지</a:t>
-            </a:r>
-          </a:p>
-          <a:p>
-            <a:pPr algn="l">
-              <a:spcAft>
-                <a:spcPts val="1000"/>
-              </a:spcAft>
-            </a:pPr>
-            <a:r>
-              <a:rPr sz="1700" b="0">
-                <a:solidFill>
-                  <a:srgbClr val="222222"/>
-                </a:solidFill>
-                <a:latin typeface="맑은 고딕"/>
-              </a:rPr>
-              <a:t>•  그 사이 Standby 조회 → **커밋된 1건만** 보인다</a:t>
-            </a:r>
-          </a:p>
-          <a:p>
-            <a:pPr algn="l">
-              <a:spcAft>
-                <a:spcPts val="1000"/>
-              </a:spcAft>
-            </a:pPr>
-            <a:r>
-              <a:rPr sz="1700" b="0">
-                <a:solidFill>
-                  <a:srgbClr val="222222"/>
-                </a:solidFill>
-                <a:latin typeface="맑은 고딕"/>
-              </a:rPr>
-              <a:t>•  롤백 후에도 결과가 같다</a:t>
-            </a:r>
-          </a:p>
-          <a:p>
-            <a:pPr algn="l">
-              <a:spcAft>
-                <a:spcPts val="1000"/>
-              </a:spcAft>
-            </a:pPr>
-            <a:r>
-              <a:rPr sz="1700" b="0">
-                <a:solidFill>
-                  <a:srgbClr val="222222"/>
-                </a:solidFill>
-                <a:latin typeface="맑은 고딕"/>
-              </a:rPr>
-              <a:t>•  리두와 함께 **UNDO 도 적용**되어 일관성이 유지된다</a:t>
+                <a:spcPts val="800"/>
+              </a:spcAft>
+            </a:pPr>
+            <a:r>
+              <a:rPr sz="1600" b="0">
+                <a:solidFill>
+                  <a:srgbClr val="FFFFFF"/>
+                </a:solidFill>
+                <a:latin typeface="맑은 고딕"/>
+              </a:rPr>
+              <a:t>•  실시간 적용과 실시간 조회의 차이</a:t>
+            </a:r>
+          </a:p>
+          <a:p>
+            <a:pPr algn="l">
+              <a:spcAft>
+                <a:spcPts val="800"/>
+              </a:spcAft>
+            </a:pPr>
+            <a:r>
+              <a:rPr sz="1600" b="0">
+                <a:solidFill>
+                  <a:srgbClr val="FFFFFF"/>
+                </a:solidFill>
+                <a:latin typeface="맑은 고딕"/>
+              </a:rPr>
+              <a:t>•  켜고 끄는 절차, 열린 모드 판별</a:t>
+            </a:r>
+          </a:p>
+          <a:p>
+            <a:pPr algn="l">
+              <a:spcAft>
+                <a:spcPts val="800"/>
+              </a:spcAft>
+            </a:pPr>
+            <a:r>
+              <a:rPr sz="1600" b="0">
+                <a:solidFill>
+                  <a:srgbClr val="FFFFFF"/>
+                </a:solidFill>
+                <a:latin typeface="맑은 고딕"/>
+              </a:rPr>
+              <a:t>•  쿼리 SCN과 읽기 일관성</a:t>
             </a:r>
           </a:p>
         </p:txBody>
